--- a/docs/plots/carbo/jx_carbo_linsubhr_egfrdisc_throm3.pptx
+++ b/docs/plots/carbo/jx_carbo_linsubhr_egfrdisc_throm3.pptx
@@ -3003,455 +3003,452 @@
           <p:spPr>
             <a:xfrm>
               <a:off x="1172049" y="2073503"/>
-              <a:ext cx="7090630" cy="3433309"/>
+              <a:ext cx="7090630" cy="3443304"/>
             </a:xfrm>
             <a:custGeom>
               <a:avLst/>
               <a:pathLst>
-                <a:path w="7090630" h="3433309">
+                <a:path w="7090630" h="3443304">
                   <a:moveTo>
-                    <a:pt x="3777466" y="0"/>
+                    <a:pt x="3859290" y="0"/>
                   </a:moveTo>
                   <a:lnTo>
-                    <a:pt x="3795993" y="84295"/>
-                  </a:lnTo>
-                  <a:lnTo>
-                    <a:pt x="3867616" y="381649"/>
-                  </a:lnTo>
-                  <a:lnTo>
-                    <a:pt x="3939238" y="652994"/>
-                  </a:lnTo>
-                  <a:lnTo>
-                    <a:pt x="4010861" y="900603"/>
-                  </a:lnTo>
-                  <a:lnTo>
-                    <a:pt x="4082483" y="1126554"/>
-                  </a:lnTo>
-                  <a:lnTo>
-                    <a:pt x="4154106" y="1332741"/>
-                  </a:lnTo>
-                  <a:lnTo>
-                    <a:pt x="4225729" y="1520892"/>
-                  </a:lnTo>
-                  <a:lnTo>
-                    <a:pt x="4297351" y="1692586"/>
-                  </a:lnTo>
-                  <a:lnTo>
-                    <a:pt x="4368974" y="1849261"/>
-                  </a:lnTo>
-                  <a:lnTo>
-                    <a:pt x="4440596" y="1992231"/>
-                  </a:lnTo>
-                  <a:lnTo>
-                    <a:pt x="4512219" y="2122696"/>
-                  </a:lnTo>
-                  <a:lnTo>
-                    <a:pt x="4583841" y="2241749"/>
-                  </a:lnTo>
-                  <a:lnTo>
-                    <a:pt x="4655464" y="2350388"/>
-                  </a:lnTo>
-                  <a:lnTo>
-                    <a:pt x="4727086" y="2449524"/>
-                  </a:lnTo>
-                  <a:lnTo>
-                    <a:pt x="4798709" y="2539989"/>
-                  </a:lnTo>
-                  <a:lnTo>
-                    <a:pt x="4870331" y="2622541"/>
-                  </a:lnTo>
-                  <a:lnTo>
-                    <a:pt x="4941954" y="2653360"/>
-                  </a:lnTo>
-                  <a:lnTo>
-                    <a:pt x="5013576" y="2651794"/>
-                  </a:lnTo>
-                  <a:lnTo>
-                    <a:pt x="5085199" y="2650225"/>
-                  </a:lnTo>
-                  <a:lnTo>
-                    <a:pt x="5156821" y="2648652"/>
-                  </a:lnTo>
-                  <a:lnTo>
-                    <a:pt x="5228444" y="2647077"/>
-                  </a:lnTo>
-                  <a:lnTo>
-                    <a:pt x="5300066" y="2645499"/>
-                  </a:lnTo>
-                  <a:lnTo>
-                    <a:pt x="5371689" y="2643918"/>
-                  </a:lnTo>
-                  <a:lnTo>
-                    <a:pt x="5443311" y="2642333"/>
-                  </a:lnTo>
-                  <a:lnTo>
-                    <a:pt x="5514934" y="2640746"/>
-                  </a:lnTo>
-                  <a:lnTo>
-                    <a:pt x="5586557" y="2639156"/>
-                  </a:lnTo>
-                  <a:lnTo>
-                    <a:pt x="5658179" y="2637563"/>
-                  </a:lnTo>
-                  <a:lnTo>
-                    <a:pt x="5729802" y="2635967"/>
-                  </a:lnTo>
-                  <a:lnTo>
-                    <a:pt x="5801424" y="2634367"/>
-                  </a:lnTo>
-                  <a:lnTo>
-                    <a:pt x="5873047" y="2632765"/>
-                  </a:lnTo>
-                  <a:lnTo>
-                    <a:pt x="5944669" y="2631160"/>
-                  </a:lnTo>
-                  <a:lnTo>
-                    <a:pt x="6016292" y="2629552"/>
-                  </a:lnTo>
-                  <a:lnTo>
-                    <a:pt x="6087914" y="2627940"/>
-                  </a:lnTo>
-                  <a:lnTo>
-                    <a:pt x="6159537" y="2626326"/>
-                  </a:lnTo>
-                  <a:lnTo>
-                    <a:pt x="6231159" y="2624709"/>
-                  </a:lnTo>
-                  <a:lnTo>
-                    <a:pt x="6302782" y="2623088"/>
-                  </a:lnTo>
-                  <a:lnTo>
-                    <a:pt x="6374404" y="2621465"/>
-                  </a:lnTo>
-                  <a:lnTo>
-                    <a:pt x="6446027" y="2619838"/>
-                  </a:lnTo>
-                  <a:lnTo>
-                    <a:pt x="6517649" y="2618208"/>
-                  </a:lnTo>
-                  <a:lnTo>
-                    <a:pt x="6589272" y="2616576"/>
-                  </a:lnTo>
-                  <a:lnTo>
-                    <a:pt x="6660894" y="2614940"/>
-                  </a:lnTo>
-                  <a:lnTo>
-                    <a:pt x="6732517" y="2613301"/>
-                  </a:lnTo>
-                  <a:lnTo>
-                    <a:pt x="6804139" y="2611659"/>
-                  </a:lnTo>
-                  <a:lnTo>
-                    <a:pt x="6875762" y="2610014"/>
-                  </a:lnTo>
-                  <a:lnTo>
-                    <a:pt x="6947385" y="2608366"/>
-                  </a:lnTo>
-                  <a:lnTo>
-                    <a:pt x="7019007" y="2606714"/>
-                  </a:lnTo>
-                  <a:lnTo>
-                    <a:pt x="7090630" y="2605060"/>
-                  </a:lnTo>
-                  <a:lnTo>
-                    <a:pt x="7090630" y="3433309"/>
-                  </a:lnTo>
-                  <a:lnTo>
-                    <a:pt x="7019007" y="3428475"/>
-                  </a:lnTo>
-                  <a:lnTo>
-                    <a:pt x="6947385" y="3423177"/>
-                  </a:lnTo>
-                  <a:lnTo>
-                    <a:pt x="6875762" y="3417371"/>
-                  </a:lnTo>
-                  <a:lnTo>
-                    <a:pt x="6804139" y="3411008"/>
-                  </a:lnTo>
-                  <a:lnTo>
-                    <a:pt x="6732517" y="3404036"/>
-                  </a:lnTo>
-                  <a:lnTo>
-                    <a:pt x="6660894" y="3396395"/>
-                  </a:lnTo>
-                  <a:lnTo>
-                    <a:pt x="6589272" y="3388022"/>
-                  </a:lnTo>
-                  <a:lnTo>
-                    <a:pt x="6517649" y="3378846"/>
-                  </a:lnTo>
-                  <a:lnTo>
-                    <a:pt x="6446027" y="3368791"/>
-                  </a:lnTo>
-                  <a:lnTo>
-                    <a:pt x="6374404" y="3357772"/>
-                  </a:lnTo>
-                  <a:lnTo>
-                    <a:pt x="6302782" y="3345696"/>
-                  </a:lnTo>
-                  <a:lnTo>
-                    <a:pt x="6231159" y="3332463"/>
-                  </a:lnTo>
-                  <a:lnTo>
-                    <a:pt x="6159537" y="3317962"/>
-                  </a:lnTo>
-                  <a:lnTo>
-                    <a:pt x="6087914" y="3302070"/>
-                  </a:lnTo>
-                  <a:lnTo>
-                    <a:pt x="6016292" y="3284656"/>
-                  </a:lnTo>
-                  <a:lnTo>
-                    <a:pt x="5944669" y="3265572"/>
-                  </a:lnTo>
-                  <a:lnTo>
-                    <a:pt x="5873047" y="3244658"/>
-                  </a:lnTo>
-                  <a:lnTo>
-                    <a:pt x="5801424" y="3221740"/>
-                  </a:lnTo>
-                  <a:lnTo>
-                    <a:pt x="5729802" y="3196625"/>
-                  </a:lnTo>
-                  <a:lnTo>
-                    <a:pt x="5658179" y="3169103"/>
-                  </a:lnTo>
-                  <a:lnTo>
-                    <a:pt x="5586557" y="3138943"/>
-                  </a:lnTo>
-                  <a:lnTo>
-                    <a:pt x="5514934" y="3105891"/>
-                  </a:lnTo>
-                  <a:lnTo>
-                    <a:pt x="5443311" y="3069671"/>
-                  </a:lnTo>
-                  <a:lnTo>
-                    <a:pt x="5371689" y="3029980"/>
-                  </a:lnTo>
-                  <a:lnTo>
-                    <a:pt x="5300066" y="2986484"/>
-                  </a:lnTo>
-                  <a:lnTo>
-                    <a:pt x="5228444" y="2938818"/>
-                  </a:lnTo>
-                  <a:lnTo>
-                    <a:pt x="5156821" y="2886583"/>
-                  </a:lnTo>
-                  <a:lnTo>
-                    <a:pt x="5085199" y="2829342"/>
-                  </a:lnTo>
-                  <a:lnTo>
-                    <a:pt x="5013576" y="2766613"/>
-                  </a:lnTo>
-                  <a:lnTo>
-                    <a:pt x="4941954" y="2697872"/>
-                  </a:lnTo>
-                  <a:lnTo>
-                    <a:pt x="4870331" y="2654924"/>
-                  </a:lnTo>
-                  <a:lnTo>
-                    <a:pt x="4798709" y="2656484"/>
-                  </a:lnTo>
-                  <a:lnTo>
-                    <a:pt x="4727086" y="2658042"/>
-                  </a:lnTo>
-                  <a:lnTo>
-                    <a:pt x="4655464" y="2659597"/>
-                  </a:lnTo>
-                  <a:lnTo>
-                    <a:pt x="4583841" y="2661148"/>
-                  </a:lnTo>
-                  <a:lnTo>
-                    <a:pt x="4512219" y="2662697"/>
-                  </a:lnTo>
-                  <a:lnTo>
-                    <a:pt x="4440596" y="2664243"/>
-                  </a:lnTo>
-                  <a:lnTo>
-                    <a:pt x="4368974" y="2665786"/>
-                  </a:lnTo>
-                  <a:lnTo>
-                    <a:pt x="4297351" y="2667326"/>
-                  </a:lnTo>
-                  <a:lnTo>
-                    <a:pt x="4225729" y="2668863"/>
-                  </a:lnTo>
-                  <a:lnTo>
-                    <a:pt x="4154106" y="2670398"/>
-                  </a:lnTo>
-                  <a:lnTo>
-                    <a:pt x="4082483" y="2671929"/>
-                  </a:lnTo>
-                  <a:lnTo>
-                    <a:pt x="4010861" y="2673457"/>
-                  </a:lnTo>
-                  <a:lnTo>
-                    <a:pt x="3939238" y="2674983"/>
-                  </a:lnTo>
-                  <a:lnTo>
-                    <a:pt x="3867616" y="2676506"/>
-                  </a:lnTo>
-                  <a:lnTo>
-                    <a:pt x="3795993" y="2678026"/>
-                  </a:lnTo>
-                  <a:lnTo>
-                    <a:pt x="3724371" y="2679543"/>
-                  </a:lnTo>
-                  <a:lnTo>
-                    <a:pt x="3652748" y="2681057"/>
-                  </a:lnTo>
-                  <a:lnTo>
-                    <a:pt x="3581126" y="2682568"/>
-                  </a:lnTo>
-                  <a:lnTo>
-                    <a:pt x="3509503" y="2684077"/>
-                  </a:lnTo>
-                  <a:lnTo>
-                    <a:pt x="3437881" y="2685582"/>
-                  </a:lnTo>
-                  <a:lnTo>
-                    <a:pt x="3366258" y="2687085"/>
-                  </a:lnTo>
-                  <a:lnTo>
-                    <a:pt x="3294636" y="2688585"/>
-                  </a:lnTo>
-                  <a:lnTo>
-                    <a:pt x="3223013" y="2690082"/>
-                  </a:lnTo>
-                  <a:lnTo>
-                    <a:pt x="3151391" y="2691576"/>
-                  </a:lnTo>
-                  <a:lnTo>
-                    <a:pt x="3079768" y="2693068"/>
-                  </a:lnTo>
-                  <a:lnTo>
-                    <a:pt x="3008146" y="2694557"/>
-                  </a:lnTo>
-                  <a:lnTo>
-                    <a:pt x="2936523" y="2696042"/>
-                  </a:lnTo>
-                  <a:lnTo>
-                    <a:pt x="2864901" y="2697526"/>
-                  </a:lnTo>
-                  <a:lnTo>
-                    <a:pt x="2793278" y="2699006"/>
-                  </a:lnTo>
-                  <a:lnTo>
-                    <a:pt x="2721655" y="2700483"/>
-                  </a:lnTo>
-                  <a:lnTo>
-                    <a:pt x="2650033" y="2701958"/>
-                  </a:lnTo>
-                  <a:lnTo>
-                    <a:pt x="2578410" y="2703430"/>
-                  </a:lnTo>
-                  <a:lnTo>
-                    <a:pt x="2506788" y="2704899"/>
-                  </a:lnTo>
-                  <a:lnTo>
-                    <a:pt x="2435165" y="2706366"/>
-                  </a:lnTo>
-                  <a:lnTo>
-                    <a:pt x="2363543" y="2707829"/>
-                  </a:lnTo>
-                  <a:lnTo>
-                    <a:pt x="2291920" y="2709290"/>
-                  </a:lnTo>
-                  <a:lnTo>
-                    <a:pt x="2220298" y="2710748"/>
-                  </a:lnTo>
-                  <a:lnTo>
-                    <a:pt x="2148675" y="2712204"/>
-                  </a:lnTo>
-                  <a:lnTo>
-                    <a:pt x="2077053" y="2713656"/>
-                  </a:lnTo>
-                  <a:lnTo>
-                    <a:pt x="2005430" y="2715106"/>
-                  </a:lnTo>
-                  <a:lnTo>
-                    <a:pt x="1933808" y="2716554"/>
-                  </a:lnTo>
-                  <a:lnTo>
-                    <a:pt x="1862185" y="2717998"/>
-                  </a:lnTo>
-                  <a:lnTo>
-                    <a:pt x="1790563" y="2719440"/>
-                  </a:lnTo>
-                  <a:lnTo>
-                    <a:pt x="1718940" y="2720879"/>
-                  </a:lnTo>
-                  <a:lnTo>
-                    <a:pt x="1647318" y="2722315"/>
-                  </a:lnTo>
-                  <a:lnTo>
-                    <a:pt x="1575695" y="2723749"/>
-                  </a:lnTo>
-                  <a:lnTo>
-                    <a:pt x="1504073" y="2725180"/>
-                  </a:lnTo>
-                  <a:lnTo>
-                    <a:pt x="1432450" y="2726608"/>
-                  </a:lnTo>
-                  <a:lnTo>
-                    <a:pt x="1360827" y="2728034"/>
-                  </a:lnTo>
-                  <a:lnTo>
-                    <a:pt x="1289205" y="2729456"/>
-                  </a:lnTo>
-                  <a:lnTo>
-                    <a:pt x="1217582" y="2730877"/>
-                  </a:lnTo>
-                  <a:lnTo>
-                    <a:pt x="1145960" y="2732294"/>
-                  </a:lnTo>
-                  <a:lnTo>
-                    <a:pt x="1074337" y="2733709"/>
-                  </a:lnTo>
-                  <a:lnTo>
-                    <a:pt x="1002715" y="2735121"/>
-                  </a:lnTo>
-                  <a:lnTo>
-                    <a:pt x="931092" y="2736531"/>
-                  </a:lnTo>
-                  <a:lnTo>
-                    <a:pt x="859470" y="2737938"/>
-                  </a:lnTo>
-                  <a:lnTo>
-                    <a:pt x="787847" y="2739342"/>
-                  </a:lnTo>
-                  <a:lnTo>
-                    <a:pt x="716225" y="2740743"/>
-                  </a:lnTo>
-                  <a:lnTo>
-                    <a:pt x="644602" y="2742142"/>
-                  </a:lnTo>
-                  <a:lnTo>
-                    <a:pt x="572980" y="2743539"/>
-                  </a:lnTo>
-                  <a:lnTo>
-                    <a:pt x="501357" y="2744932"/>
-                  </a:lnTo>
-                  <a:lnTo>
-                    <a:pt x="429735" y="2746323"/>
-                  </a:lnTo>
-                  <a:lnTo>
-                    <a:pt x="358112" y="2747712"/>
-                  </a:lnTo>
-                  <a:lnTo>
-                    <a:pt x="286490" y="2749097"/>
-                  </a:lnTo>
-                  <a:lnTo>
-                    <a:pt x="214867" y="2750481"/>
-                  </a:lnTo>
-                  <a:lnTo>
-                    <a:pt x="143245" y="2751861"/>
-                  </a:lnTo>
-                  <a:lnTo>
-                    <a:pt x="71622" y="2753239"/>
-                  </a:lnTo>
-                  <a:lnTo>
-                    <a:pt x="0" y="2754615"/>
+                    <a:pt x="3867616" y="41534"/>
+                  </a:lnTo>
+                  <a:lnTo>
+                    <a:pt x="3939238" y="365225"/>
+                  </a:lnTo>
+                  <a:lnTo>
+                    <a:pt x="4010861" y="658477"/>
+                  </a:lnTo>
+                  <a:lnTo>
+                    <a:pt x="4082483" y="924153"/>
+                  </a:lnTo>
+                  <a:lnTo>
+                    <a:pt x="4154106" y="1164846"/>
+                  </a:lnTo>
+                  <a:lnTo>
+                    <a:pt x="4225729" y="1382905"/>
+                  </a:lnTo>
+                  <a:lnTo>
+                    <a:pt x="4297351" y="1580459"/>
+                  </a:lnTo>
+                  <a:lnTo>
+                    <a:pt x="4368974" y="1759436"/>
+                  </a:lnTo>
+                  <a:lnTo>
+                    <a:pt x="4440596" y="1921583"/>
+                  </a:lnTo>
+                  <a:lnTo>
+                    <a:pt x="4512219" y="2068482"/>
+                  </a:lnTo>
+                  <a:lnTo>
+                    <a:pt x="4583841" y="2201567"/>
+                  </a:lnTo>
+                  <a:lnTo>
+                    <a:pt x="4655464" y="2322138"/>
+                  </a:lnTo>
+                  <a:lnTo>
+                    <a:pt x="4727086" y="2431370"/>
+                  </a:lnTo>
+                  <a:lnTo>
+                    <a:pt x="4798709" y="2530331"/>
+                  </a:lnTo>
+                  <a:lnTo>
+                    <a:pt x="4870331" y="2619986"/>
+                  </a:lnTo>
+                  <a:lnTo>
+                    <a:pt x="4941954" y="2658921"/>
+                  </a:lnTo>
+                  <a:lnTo>
+                    <a:pt x="5013576" y="2666727"/>
+                  </a:lnTo>
+                  <a:lnTo>
+                    <a:pt x="5085199" y="2674460"/>
+                  </a:lnTo>
+                  <a:lnTo>
+                    <a:pt x="5156821" y="2682119"/>
+                  </a:lnTo>
+                  <a:lnTo>
+                    <a:pt x="5228444" y="2689705"/>
+                  </a:lnTo>
+                  <a:lnTo>
+                    <a:pt x="5300066" y="2697220"/>
+                  </a:lnTo>
+                  <a:lnTo>
+                    <a:pt x="5371689" y="2704663"/>
+                  </a:lnTo>
+                  <a:lnTo>
+                    <a:pt x="5443311" y="2712037"/>
+                  </a:lnTo>
+                  <a:lnTo>
+                    <a:pt x="5514934" y="2719340"/>
+                  </a:lnTo>
+                  <a:lnTo>
+                    <a:pt x="5586557" y="2726574"/>
+                  </a:lnTo>
+                  <a:lnTo>
+                    <a:pt x="5658179" y="2733740"/>
+                  </a:lnTo>
+                  <a:lnTo>
+                    <a:pt x="5729802" y="2740838"/>
+                  </a:lnTo>
+                  <a:lnTo>
+                    <a:pt x="5801424" y="2747869"/>
+                  </a:lnTo>
+                  <a:lnTo>
+                    <a:pt x="5873047" y="2754833"/>
+                  </a:lnTo>
+                  <a:lnTo>
+                    <a:pt x="5944669" y="2761731"/>
+                  </a:lnTo>
+                  <a:lnTo>
+                    <a:pt x="6016292" y="2768564"/>
+                  </a:lnTo>
+                  <a:lnTo>
+                    <a:pt x="6087914" y="2775333"/>
+                  </a:lnTo>
+                  <a:lnTo>
+                    <a:pt x="6159537" y="2782037"/>
+                  </a:lnTo>
+                  <a:lnTo>
+                    <a:pt x="6231159" y="2788678"/>
+                  </a:lnTo>
+                  <a:lnTo>
+                    <a:pt x="6302782" y="2795256"/>
+                  </a:lnTo>
+                  <a:lnTo>
+                    <a:pt x="6374404" y="2801772"/>
+                  </a:lnTo>
+                  <a:lnTo>
+                    <a:pt x="6446027" y="2808226"/>
+                  </a:lnTo>
+                  <a:lnTo>
+                    <a:pt x="6517649" y="2814619"/>
+                  </a:lnTo>
+                  <a:lnTo>
+                    <a:pt x="6589272" y="2820952"/>
+                  </a:lnTo>
+                  <a:lnTo>
+                    <a:pt x="6660894" y="2827224"/>
+                  </a:lnTo>
+                  <a:lnTo>
+                    <a:pt x="6732517" y="2833438"/>
+                  </a:lnTo>
+                  <a:lnTo>
+                    <a:pt x="6804139" y="2839592"/>
+                  </a:lnTo>
+                  <a:lnTo>
+                    <a:pt x="6875762" y="2845688"/>
+                  </a:lnTo>
+                  <a:lnTo>
+                    <a:pt x="6947385" y="2851727"/>
+                  </a:lnTo>
+                  <a:lnTo>
+                    <a:pt x="7019007" y="2857708"/>
+                  </a:lnTo>
+                  <a:lnTo>
+                    <a:pt x="7090630" y="2863633"/>
+                  </a:lnTo>
+                  <a:lnTo>
+                    <a:pt x="7090630" y="3443304"/>
+                  </a:lnTo>
+                  <a:lnTo>
+                    <a:pt x="7019007" y="3439106"/>
+                  </a:lnTo>
+                  <a:lnTo>
+                    <a:pt x="6947385" y="3434473"/>
+                  </a:lnTo>
+                  <a:lnTo>
+                    <a:pt x="6875762" y="3429358"/>
+                  </a:lnTo>
+                  <a:lnTo>
+                    <a:pt x="6804139" y="3423713"/>
+                  </a:lnTo>
+                  <a:lnTo>
+                    <a:pt x="6732517" y="3417482"/>
+                  </a:lnTo>
+                  <a:lnTo>
+                    <a:pt x="6660894" y="3410604"/>
+                  </a:lnTo>
+                  <a:lnTo>
+                    <a:pt x="6589272" y="3403012"/>
+                  </a:lnTo>
+                  <a:lnTo>
+                    <a:pt x="6517649" y="3394632"/>
+                  </a:lnTo>
+                  <a:lnTo>
+                    <a:pt x="6446027" y="3385382"/>
+                  </a:lnTo>
+                  <a:lnTo>
+                    <a:pt x="6374404" y="3375172"/>
+                  </a:lnTo>
+                  <a:lnTo>
+                    <a:pt x="6302782" y="3363903"/>
+                  </a:lnTo>
+                  <a:lnTo>
+                    <a:pt x="6231159" y="3351463"/>
+                  </a:lnTo>
+                  <a:lnTo>
+                    <a:pt x="6159537" y="3337733"/>
+                  </a:lnTo>
+                  <a:lnTo>
+                    <a:pt x="6087914" y="3322577"/>
+                  </a:lnTo>
+                  <a:lnTo>
+                    <a:pt x="6016292" y="3305848"/>
+                  </a:lnTo>
+                  <a:lnTo>
+                    <a:pt x="5944669" y="3287383"/>
+                  </a:lnTo>
+                  <a:lnTo>
+                    <a:pt x="5873047" y="3267002"/>
+                  </a:lnTo>
+                  <a:lnTo>
+                    <a:pt x="5801424" y="3244504"/>
+                  </a:lnTo>
+                  <a:lnTo>
+                    <a:pt x="5729802" y="3219672"/>
+                  </a:lnTo>
+                  <a:lnTo>
+                    <a:pt x="5658179" y="3192262"/>
+                  </a:lnTo>
+                  <a:lnTo>
+                    <a:pt x="5586557" y="3162007"/>
+                  </a:lnTo>
+                  <a:lnTo>
+                    <a:pt x="5514934" y="3128612"/>
+                  </a:lnTo>
+                  <a:lnTo>
+                    <a:pt x="5443311" y="3091750"/>
+                  </a:lnTo>
+                  <a:lnTo>
+                    <a:pt x="5371689" y="3051062"/>
+                  </a:lnTo>
+                  <a:lnTo>
+                    <a:pt x="5300066" y="3006151"/>
+                  </a:lnTo>
+                  <a:lnTo>
+                    <a:pt x="5228444" y="2956579"/>
+                  </a:lnTo>
+                  <a:lnTo>
+                    <a:pt x="5156821" y="2901861"/>
+                  </a:lnTo>
+                  <a:lnTo>
+                    <a:pt x="5085199" y="2841463"/>
+                  </a:lnTo>
+                  <a:lnTo>
+                    <a:pt x="5013576" y="2774797"/>
+                  </a:lnTo>
+                  <a:lnTo>
+                    <a:pt x="4941954" y="2701210"/>
+                  </a:lnTo>
+                  <a:lnTo>
+                    <a:pt x="4870331" y="2651041"/>
+                  </a:lnTo>
+                  <a:lnTo>
+                    <a:pt x="4798709" y="2643085"/>
+                  </a:lnTo>
+                  <a:lnTo>
+                    <a:pt x="4727086" y="2635053"/>
+                  </a:lnTo>
+                  <a:lnTo>
+                    <a:pt x="4655464" y="2626944"/>
+                  </a:lnTo>
+                  <a:lnTo>
+                    <a:pt x="4583841" y="2618758"/>
+                  </a:lnTo>
+                  <a:lnTo>
+                    <a:pt x="4512219" y="2610494"/>
+                  </a:lnTo>
+                  <a:lnTo>
+                    <a:pt x="4440596" y="2602150"/>
+                  </a:lnTo>
+                  <a:lnTo>
+                    <a:pt x="4368974" y="2593727"/>
+                  </a:lnTo>
+                  <a:lnTo>
+                    <a:pt x="4297351" y="2585224"/>
+                  </a:lnTo>
+                  <a:lnTo>
+                    <a:pt x="4225729" y="2576639"/>
+                  </a:lnTo>
+                  <a:lnTo>
+                    <a:pt x="4154106" y="2567972"/>
+                  </a:lnTo>
+                  <a:lnTo>
+                    <a:pt x="4082483" y="2559222"/>
+                  </a:lnTo>
+                  <a:lnTo>
+                    <a:pt x="4010861" y="2550389"/>
+                  </a:lnTo>
+                  <a:lnTo>
+                    <a:pt x="3939238" y="2541472"/>
+                  </a:lnTo>
+                  <a:lnTo>
+                    <a:pt x="3867616" y="2532469"/>
+                  </a:lnTo>
+                  <a:lnTo>
+                    <a:pt x="3795993" y="2523380"/>
+                  </a:lnTo>
+                  <a:lnTo>
+                    <a:pt x="3724371" y="2514204"/>
+                  </a:lnTo>
+                  <a:lnTo>
+                    <a:pt x="3652748" y="2504941"/>
+                  </a:lnTo>
+                  <a:lnTo>
+                    <a:pt x="3581126" y="2495589"/>
+                  </a:lnTo>
+                  <a:lnTo>
+                    <a:pt x="3509503" y="2486148"/>
+                  </a:lnTo>
+                  <a:lnTo>
+                    <a:pt x="3437881" y="2476617"/>
+                  </a:lnTo>
+                  <a:lnTo>
+                    <a:pt x="3366258" y="2466994"/>
+                  </a:lnTo>
+                  <a:lnTo>
+                    <a:pt x="3294636" y="2457280"/>
+                  </a:lnTo>
+                  <a:lnTo>
+                    <a:pt x="3223013" y="2447473"/>
+                  </a:lnTo>
+                  <a:lnTo>
+                    <a:pt x="3151391" y="2437572"/>
+                  </a:lnTo>
+                  <a:lnTo>
+                    <a:pt x="3079768" y="2427576"/>
+                  </a:lnTo>
+                  <a:lnTo>
+                    <a:pt x="3008146" y="2417486"/>
+                  </a:lnTo>
+                  <a:lnTo>
+                    <a:pt x="2936523" y="2407298"/>
+                  </a:lnTo>
+                  <a:lnTo>
+                    <a:pt x="2864901" y="2397013"/>
+                  </a:lnTo>
+                  <a:lnTo>
+                    <a:pt x="2793278" y="2386630"/>
+                  </a:lnTo>
+                  <a:lnTo>
+                    <a:pt x="2721655" y="2376148"/>
+                  </a:lnTo>
+                  <a:lnTo>
+                    <a:pt x="2650033" y="2365566"/>
+                  </a:lnTo>
+                  <a:lnTo>
+                    <a:pt x="2578410" y="2354882"/>
+                  </a:lnTo>
+                  <a:lnTo>
+                    <a:pt x="2506788" y="2344097"/>
+                  </a:lnTo>
+                  <a:lnTo>
+                    <a:pt x="2435165" y="2333208"/>
+                  </a:lnTo>
+                  <a:lnTo>
+                    <a:pt x="2363543" y="2322216"/>
+                  </a:lnTo>
+                  <a:lnTo>
+                    <a:pt x="2291920" y="2311118"/>
+                  </a:lnTo>
+                  <a:lnTo>
+                    <a:pt x="2220298" y="2299914"/>
+                  </a:lnTo>
+                  <a:lnTo>
+                    <a:pt x="2148675" y="2288604"/>
+                  </a:lnTo>
+                  <a:lnTo>
+                    <a:pt x="2077053" y="2277185"/>
+                  </a:lnTo>
+                  <a:lnTo>
+                    <a:pt x="2005430" y="2265657"/>
+                  </a:lnTo>
+                  <a:lnTo>
+                    <a:pt x="1933808" y="2254019"/>
+                  </a:lnTo>
+                  <a:lnTo>
+                    <a:pt x="1862185" y="2242270"/>
+                  </a:lnTo>
+                  <a:lnTo>
+                    <a:pt x="1790563" y="2230408"/>
+                  </a:lnTo>
+                  <a:lnTo>
+                    <a:pt x="1718940" y="2218434"/>
+                  </a:lnTo>
+                  <a:lnTo>
+                    <a:pt x="1647318" y="2206344"/>
+                  </a:lnTo>
+                  <a:lnTo>
+                    <a:pt x="1575695" y="2194140"/>
+                  </a:lnTo>
+                  <a:lnTo>
+                    <a:pt x="1504073" y="2181818"/>
+                  </a:lnTo>
+                  <a:lnTo>
+                    <a:pt x="1432450" y="2169379"/>
+                  </a:lnTo>
+                  <a:lnTo>
+                    <a:pt x="1360827" y="2156822"/>
+                  </a:lnTo>
+                  <a:lnTo>
+                    <a:pt x="1289205" y="2144144"/>
+                  </a:lnTo>
+                  <a:lnTo>
+                    <a:pt x="1217582" y="2131345"/>
+                  </a:lnTo>
+                  <a:lnTo>
+                    <a:pt x="1145960" y="2118423"/>
+                  </a:lnTo>
+                  <a:lnTo>
+                    <a:pt x="1074337" y="2105379"/>
+                  </a:lnTo>
+                  <a:lnTo>
+                    <a:pt x="1002715" y="2092209"/>
+                  </a:lnTo>
+                  <a:lnTo>
+                    <a:pt x="931092" y="2078914"/>
+                  </a:lnTo>
+                  <a:lnTo>
+                    <a:pt x="859470" y="2065492"/>
+                  </a:lnTo>
+                  <a:lnTo>
+                    <a:pt x="787847" y="2051942"/>
+                  </a:lnTo>
+                  <a:lnTo>
+                    <a:pt x="716225" y="2038262"/>
+                  </a:lnTo>
+                  <a:lnTo>
+                    <a:pt x="644602" y="2024451"/>
+                  </a:lnTo>
+                  <a:lnTo>
+                    <a:pt x="572980" y="2010508"/>
+                  </a:lnTo>
+                  <a:lnTo>
+                    <a:pt x="501357" y="1996433"/>
+                  </a:lnTo>
+                  <a:lnTo>
+                    <a:pt x="429735" y="1982222"/>
+                  </a:lnTo>
+                  <a:lnTo>
+                    <a:pt x="358112" y="1967876"/>
+                  </a:lnTo>
+                  <a:lnTo>
+                    <a:pt x="286490" y="1953393"/>
+                  </a:lnTo>
+                  <a:lnTo>
+                    <a:pt x="214867" y="1938772"/>
+                  </a:lnTo>
+                  <a:lnTo>
+                    <a:pt x="143245" y="1924011"/>
+                  </a:lnTo>
+                  <a:lnTo>
+                    <a:pt x="71622" y="1909108"/>
+                  </a:lnTo>
+                  <a:lnTo>
+                    <a:pt x="0" y="1894064"/>
                   </a:lnTo>
                   <a:lnTo>
                     <a:pt x="0" y="0"/>
@@ -3480,156 +3477,153 @@
           </p:nvSpPr>
           <p:spPr>
             <a:xfrm>
-              <a:off x="4949515" y="2073503"/>
-              <a:ext cx="3313164" cy="2653360"/>
+              <a:off x="5031339" y="2073503"/>
+              <a:ext cx="3231339" cy="2863633"/>
             </a:xfrm>
             <a:custGeom>
               <a:avLst/>
               <a:pathLst>
-                <a:path w="3313164" h="2653360">
+                <a:path w="3231339" h="2863633">
                   <a:moveTo>
                     <a:pt x="0" y="0"/>
                   </a:moveTo>
                   <a:lnTo>
-                    <a:pt x="18527" y="84295"/>
-                  </a:lnTo>
-                  <a:lnTo>
-                    <a:pt x="90150" y="381649"/>
-                  </a:lnTo>
-                  <a:lnTo>
-                    <a:pt x="161772" y="652994"/>
-                  </a:lnTo>
-                  <a:lnTo>
-                    <a:pt x="233395" y="900603"/>
-                  </a:lnTo>
-                  <a:lnTo>
-                    <a:pt x="305017" y="1126554"/>
-                  </a:lnTo>
-                  <a:lnTo>
-                    <a:pt x="376640" y="1332741"/>
-                  </a:lnTo>
-                  <a:lnTo>
-                    <a:pt x="448263" y="1520892"/>
-                  </a:lnTo>
-                  <a:lnTo>
-                    <a:pt x="519885" y="1692586"/>
-                  </a:lnTo>
-                  <a:lnTo>
-                    <a:pt x="591508" y="1849261"/>
-                  </a:lnTo>
-                  <a:lnTo>
-                    <a:pt x="663130" y="1992231"/>
-                  </a:lnTo>
-                  <a:lnTo>
-                    <a:pt x="734753" y="2122696"/>
-                  </a:lnTo>
-                  <a:lnTo>
-                    <a:pt x="806375" y="2241749"/>
-                  </a:lnTo>
-                  <a:lnTo>
-                    <a:pt x="877998" y="2350388"/>
-                  </a:lnTo>
-                  <a:lnTo>
-                    <a:pt x="949620" y="2449524"/>
-                  </a:lnTo>
-                  <a:lnTo>
-                    <a:pt x="1021243" y="2539989"/>
-                  </a:lnTo>
-                  <a:lnTo>
-                    <a:pt x="1092865" y="2622541"/>
-                  </a:lnTo>
-                  <a:lnTo>
-                    <a:pt x="1164488" y="2653360"/>
-                  </a:lnTo>
-                  <a:lnTo>
-                    <a:pt x="1236110" y="2651794"/>
-                  </a:lnTo>
-                  <a:lnTo>
-                    <a:pt x="1307733" y="2650225"/>
-                  </a:lnTo>
-                  <a:lnTo>
-                    <a:pt x="1379355" y="2648652"/>
-                  </a:lnTo>
-                  <a:lnTo>
-                    <a:pt x="1450978" y="2647077"/>
-                  </a:lnTo>
-                  <a:lnTo>
-                    <a:pt x="1522600" y="2645499"/>
-                  </a:lnTo>
-                  <a:lnTo>
-                    <a:pt x="1594223" y="2643918"/>
-                  </a:lnTo>
-                  <a:lnTo>
-                    <a:pt x="1665845" y="2642333"/>
-                  </a:lnTo>
-                  <a:lnTo>
-                    <a:pt x="1737468" y="2640746"/>
-                  </a:lnTo>
-                  <a:lnTo>
-                    <a:pt x="1809091" y="2639156"/>
-                  </a:lnTo>
-                  <a:lnTo>
-                    <a:pt x="1880713" y="2637563"/>
-                  </a:lnTo>
-                  <a:lnTo>
-                    <a:pt x="1952336" y="2635967"/>
-                  </a:lnTo>
-                  <a:lnTo>
-                    <a:pt x="2023958" y="2634367"/>
-                  </a:lnTo>
-                  <a:lnTo>
-                    <a:pt x="2095581" y="2632765"/>
-                  </a:lnTo>
-                  <a:lnTo>
-                    <a:pt x="2167203" y="2631160"/>
-                  </a:lnTo>
-                  <a:lnTo>
-                    <a:pt x="2238826" y="2629552"/>
-                  </a:lnTo>
-                  <a:lnTo>
-                    <a:pt x="2310448" y="2627940"/>
-                  </a:lnTo>
-                  <a:lnTo>
-                    <a:pt x="2382071" y="2626326"/>
-                  </a:lnTo>
-                  <a:lnTo>
-                    <a:pt x="2453693" y="2624709"/>
-                  </a:lnTo>
-                  <a:lnTo>
-                    <a:pt x="2525316" y="2623088"/>
-                  </a:lnTo>
-                  <a:lnTo>
-                    <a:pt x="2596938" y="2621465"/>
-                  </a:lnTo>
-                  <a:lnTo>
-                    <a:pt x="2668561" y="2619838"/>
-                  </a:lnTo>
-                  <a:lnTo>
-                    <a:pt x="2740183" y="2618208"/>
-                  </a:lnTo>
-                  <a:lnTo>
-                    <a:pt x="2811806" y="2616576"/>
-                  </a:lnTo>
-                  <a:lnTo>
-                    <a:pt x="2883428" y="2614940"/>
-                  </a:lnTo>
-                  <a:lnTo>
-                    <a:pt x="2955051" y="2613301"/>
-                  </a:lnTo>
-                  <a:lnTo>
-                    <a:pt x="3026673" y="2611659"/>
-                  </a:lnTo>
-                  <a:lnTo>
-                    <a:pt x="3098296" y="2610014"/>
-                  </a:lnTo>
-                  <a:lnTo>
-                    <a:pt x="3169919" y="2608366"/>
-                  </a:lnTo>
-                  <a:lnTo>
-                    <a:pt x="3241541" y="2606714"/>
-                  </a:lnTo>
-                  <a:lnTo>
-                    <a:pt x="3313164" y="2605060"/>
+                    <a:pt x="8326" y="41534"/>
+                  </a:lnTo>
+                  <a:lnTo>
+                    <a:pt x="79948" y="365225"/>
+                  </a:lnTo>
+                  <a:lnTo>
+                    <a:pt x="151571" y="658477"/>
+                  </a:lnTo>
+                  <a:lnTo>
+                    <a:pt x="223193" y="924153"/>
+                  </a:lnTo>
+                  <a:lnTo>
+                    <a:pt x="294816" y="1164846"/>
+                  </a:lnTo>
+                  <a:lnTo>
+                    <a:pt x="366438" y="1382905"/>
+                  </a:lnTo>
+                  <a:lnTo>
+                    <a:pt x="438061" y="1580459"/>
+                  </a:lnTo>
+                  <a:lnTo>
+                    <a:pt x="509683" y="1759436"/>
+                  </a:lnTo>
+                  <a:lnTo>
+                    <a:pt x="581306" y="1921583"/>
+                  </a:lnTo>
+                  <a:lnTo>
+                    <a:pt x="652928" y="2068482"/>
+                  </a:lnTo>
+                  <a:lnTo>
+                    <a:pt x="724551" y="2201567"/>
+                  </a:lnTo>
+                  <a:lnTo>
+                    <a:pt x="796173" y="2322138"/>
+                  </a:lnTo>
+                  <a:lnTo>
+                    <a:pt x="867796" y="2431370"/>
+                  </a:lnTo>
+                  <a:lnTo>
+                    <a:pt x="939418" y="2530331"/>
+                  </a:lnTo>
+                  <a:lnTo>
+                    <a:pt x="1011041" y="2619986"/>
+                  </a:lnTo>
+                  <a:lnTo>
+                    <a:pt x="1082664" y="2658921"/>
+                  </a:lnTo>
+                  <a:lnTo>
+                    <a:pt x="1154286" y="2666727"/>
+                  </a:lnTo>
+                  <a:lnTo>
+                    <a:pt x="1225909" y="2674460"/>
+                  </a:lnTo>
+                  <a:lnTo>
+                    <a:pt x="1297531" y="2682119"/>
+                  </a:lnTo>
+                  <a:lnTo>
+                    <a:pt x="1369154" y="2689705"/>
+                  </a:lnTo>
+                  <a:lnTo>
+                    <a:pt x="1440776" y="2697220"/>
+                  </a:lnTo>
+                  <a:lnTo>
+                    <a:pt x="1512399" y="2704663"/>
+                  </a:lnTo>
+                  <a:lnTo>
+                    <a:pt x="1584021" y="2712037"/>
+                  </a:lnTo>
+                  <a:lnTo>
+                    <a:pt x="1655644" y="2719340"/>
+                  </a:lnTo>
+                  <a:lnTo>
+                    <a:pt x="1727266" y="2726574"/>
+                  </a:lnTo>
+                  <a:lnTo>
+                    <a:pt x="1798889" y="2733740"/>
+                  </a:lnTo>
+                  <a:lnTo>
+                    <a:pt x="1870511" y="2740838"/>
+                  </a:lnTo>
+                  <a:lnTo>
+                    <a:pt x="1942134" y="2747869"/>
+                  </a:lnTo>
+                  <a:lnTo>
+                    <a:pt x="2013756" y="2754833"/>
+                  </a:lnTo>
+                  <a:lnTo>
+                    <a:pt x="2085379" y="2761731"/>
+                  </a:lnTo>
+                  <a:lnTo>
+                    <a:pt x="2157001" y="2768564"/>
+                  </a:lnTo>
+                  <a:lnTo>
+                    <a:pt x="2228624" y="2775333"/>
+                  </a:lnTo>
+                  <a:lnTo>
+                    <a:pt x="2300246" y="2782037"/>
+                  </a:lnTo>
+                  <a:lnTo>
+                    <a:pt x="2371869" y="2788678"/>
+                  </a:lnTo>
+                  <a:lnTo>
+                    <a:pt x="2443492" y="2795256"/>
+                  </a:lnTo>
+                  <a:lnTo>
+                    <a:pt x="2515114" y="2801772"/>
+                  </a:lnTo>
+                  <a:lnTo>
+                    <a:pt x="2586737" y="2808226"/>
+                  </a:lnTo>
+                  <a:lnTo>
+                    <a:pt x="2658359" y="2814619"/>
+                  </a:lnTo>
+                  <a:lnTo>
+                    <a:pt x="2729982" y="2820952"/>
+                  </a:lnTo>
+                  <a:lnTo>
+                    <a:pt x="2801604" y="2827224"/>
+                  </a:lnTo>
+                  <a:lnTo>
+                    <a:pt x="2873227" y="2833438"/>
+                  </a:lnTo>
+                  <a:lnTo>
+                    <a:pt x="2944849" y="2839592"/>
+                  </a:lnTo>
+                  <a:lnTo>
+                    <a:pt x="3016472" y="2845688"/>
+                  </a:lnTo>
+                  <a:lnTo>
+                    <a:pt x="3088094" y="2851727"/>
+                  </a:lnTo>
+                  <a:lnTo>
+                    <a:pt x="3159717" y="2857708"/>
+                  </a:lnTo>
+                  <a:lnTo>
+                    <a:pt x="3231339" y="2863633"/>
                   </a:lnTo>
                 </a:path>
               </a:pathLst>
@@ -3649,312 +3643,312 @@
           </p:nvSpPr>
           <p:spPr>
             <a:xfrm>
-              <a:off x="1172049" y="4728427"/>
-              <a:ext cx="7090630" cy="778385"/>
+              <a:off x="1172049" y="3967567"/>
+              <a:ext cx="7090630" cy="1549240"/>
             </a:xfrm>
             <a:custGeom>
               <a:avLst/>
               <a:pathLst>
-                <a:path w="7090630" h="778385">
+                <a:path w="7090630" h="1549240">
                   <a:moveTo>
-                    <a:pt x="7090630" y="778385"/>
+                    <a:pt x="7090630" y="1549240"/>
                   </a:moveTo>
                   <a:lnTo>
-                    <a:pt x="7019007" y="773550"/>
-                  </a:lnTo>
-                  <a:lnTo>
-                    <a:pt x="6947385" y="768252"/>
-                  </a:lnTo>
-                  <a:lnTo>
-                    <a:pt x="6875762" y="762446"/>
-                  </a:lnTo>
-                  <a:lnTo>
-                    <a:pt x="6804139" y="756084"/>
-                  </a:lnTo>
-                  <a:lnTo>
-                    <a:pt x="6732517" y="749111"/>
-                  </a:lnTo>
-                  <a:lnTo>
-                    <a:pt x="6660894" y="741471"/>
-                  </a:lnTo>
-                  <a:lnTo>
-                    <a:pt x="6589272" y="733097"/>
-                  </a:lnTo>
-                  <a:lnTo>
-                    <a:pt x="6517649" y="723922"/>
-                  </a:lnTo>
-                  <a:lnTo>
-                    <a:pt x="6446027" y="713866"/>
-                  </a:lnTo>
-                  <a:lnTo>
-                    <a:pt x="6374404" y="702847"/>
-                  </a:lnTo>
-                  <a:lnTo>
-                    <a:pt x="6302782" y="690772"/>
-                  </a:lnTo>
-                  <a:lnTo>
-                    <a:pt x="6231159" y="677539"/>
-                  </a:lnTo>
-                  <a:lnTo>
-                    <a:pt x="6159537" y="663037"/>
-                  </a:lnTo>
-                  <a:lnTo>
-                    <a:pt x="6087914" y="647146"/>
-                  </a:lnTo>
-                  <a:lnTo>
-                    <a:pt x="6016292" y="629731"/>
-                  </a:lnTo>
-                  <a:lnTo>
-                    <a:pt x="5944669" y="610647"/>
-                  </a:lnTo>
-                  <a:lnTo>
-                    <a:pt x="5873047" y="589734"/>
-                  </a:lnTo>
-                  <a:lnTo>
-                    <a:pt x="5801424" y="566816"/>
-                  </a:lnTo>
-                  <a:lnTo>
-                    <a:pt x="5729802" y="541701"/>
-                  </a:lnTo>
-                  <a:lnTo>
-                    <a:pt x="5658179" y="514179"/>
-                  </a:lnTo>
-                  <a:lnTo>
-                    <a:pt x="5586557" y="484018"/>
-                  </a:lnTo>
-                  <a:lnTo>
-                    <a:pt x="5514934" y="450967"/>
-                  </a:lnTo>
-                  <a:lnTo>
-                    <a:pt x="5443311" y="414747"/>
-                  </a:lnTo>
-                  <a:lnTo>
-                    <a:pt x="5371689" y="375055"/>
-                  </a:lnTo>
-                  <a:lnTo>
-                    <a:pt x="5300066" y="331559"/>
-                  </a:lnTo>
-                  <a:lnTo>
-                    <a:pt x="5228444" y="283894"/>
-                  </a:lnTo>
-                  <a:lnTo>
-                    <a:pt x="5156821" y="231659"/>
-                  </a:lnTo>
-                  <a:lnTo>
-                    <a:pt x="5085199" y="174417"/>
-                  </a:lnTo>
-                  <a:lnTo>
-                    <a:pt x="5013576" y="111689"/>
-                  </a:lnTo>
-                  <a:lnTo>
-                    <a:pt x="4941954" y="42947"/>
-                  </a:lnTo>
-                  <a:lnTo>
-                    <a:pt x="4870331" y="0"/>
-                  </a:lnTo>
-                  <a:lnTo>
-                    <a:pt x="4798709" y="1560"/>
-                  </a:lnTo>
-                  <a:lnTo>
-                    <a:pt x="4727086" y="3118"/>
-                  </a:lnTo>
-                  <a:lnTo>
-                    <a:pt x="4655464" y="4672"/>
-                  </a:lnTo>
-                  <a:lnTo>
-                    <a:pt x="4583841" y="6224"/>
-                  </a:lnTo>
-                  <a:lnTo>
-                    <a:pt x="4512219" y="7773"/>
-                  </a:lnTo>
-                  <a:lnTo>
-                    <a:pt x="4440596" y="9319"/>
-                  </a:lnTo>
-                  <a:lnTo>
-                    <a:pt x="4368974" y="10862"/>
-                  </a:lnTo>
-                  <a:lnTo>
-                    <a:pt x="4297351" y="12402"/>
-                  </a:lnTo>
-                  <a:lnTo>
-                    <a:pt x="4225729" y="13939"/>
-                  </a:lnTo>
-                  <a:lnTo>
-                    <a:pt x="4154106" y="15473"/>
-                  </a:lnTo>
-                  <a:lnTo>
-                    <a:pt x="4082483" y="17004"/>
-                  </a:lnTo>
-                  <a:lnTo>
-                    <a:pt x="4010861" y="18533"/>
-                  </a:lnTo>
-                  <a:lnTo>
-                    <a:pt x="3939238" y="20059"/>
-                  </a:lnTo>
-                  <a:lnTo>
-                    <a:pt x="3867616" y="21581"/>
-                  </a:lnTo>
-                  <a:lnTo>
-                    <a:pt x="3795993" y="23101"/>
-                  </a:lnTo>
-                  <a:lnTo>
-                    <a:pt x="3724371" y="24618"/>
-                  </a:lnTo>
-                  <a:lnTo>
-                    <a:pt x="3652748" y="26132"/>
-                  </a:lnTo>
-                  <a:lnTo>
-                    <a:pt x="3581126" y="27644"/>
-                  </a:lnTo>
-                  <a:lnTo>
-                    <a:pt x="3509503" y="29152"/>
-                  </a:lnTo>
-                  <a:lnTo>
-                    <a:pt x="3437881" y="30658"/>
-                  </a:lnTo>
-                  <a:lnTo>
-                    <a:pt x="3366258" y="32161"/>
-                  </a:lnTo>
-                  <a:lnTo>
-                    <a:pt x="3294636" y="33661"/>
-                  </a:lnTo>
-                  <a:lnTo>
-                    <a:pt x="3223013" y="35158"/>
-                  </a:lnTo>
-                  <a:lnTo>
-                    <a:pt x="3151391" y="36652"/>
-                  </a:lnTo>
-                  <a:lnTo>
-                    <a:pt x="3079768" y="38143"/>
-                  </a:lnTo>
-                  <a:lnTo>
-                    <a:pt x="3008146" y="39632"/>
-                  </a:lnTo>
-                  <a:lnTo>
-                    <a:pt x="2936523" y="41118"/>
-                  </a:lnTo>
-                  <a:lnTo>
-                    <a:pt x="2864901" y="42601"/>
-                  </a:lnTo>
-                  <a:lnTo>
-                    <a:pt x="2793278" y="44081"/>
-                  </a:lnTo>
-                  <a:lnTo>
-                    <a:pt x="2721655" y="45559"/>
-                  </a:lnTo>
-                  <a:lnTo>
-                    <a:pt x="2650033" y="47034"/>
-                  </a:lnTo>
-                  <a:lnTo>
-                    <a:pt x="2578410" y="48506"/>
-                  </a:lnTo>
-                  <a:lnTo>
-                    <a:pt x="2506788" y="49975"/>
-                  </a:lnTo>
-                  <a:lnTo>
-                    <a:pt x="2435165" y="51441"/>
-                  </a:lnTo>
-                  <a:lnTo>
-                    <a:pt x="2363543" y="52905"/>
-                  </a:lnTo>
-                  <a:lnTo>
-                    <a:pt x="2291920" y="54366"/>
-                  </a:lnTo>
-                  <a:lnTo>
-                    <a:pt x="2220298" y="55824"/>
-                  </a:lnTo>
-                  <a:lnTo>
-                    <a:pt x="2148675" y="57279"/>
-                  </a:lnTo>
-                  <a:lnTo>
-                    <a:pt x="2077053" y="58732"/>
-                  </a:lnTo>
-                  <a:lnTo>
-                    <a:pt x="2005430" y="60182"/>
-                  </a:lnTo>
-                  <a:lnTo>
-                    <a:pt x="1933808" y="61629"/>
-                  </a:lnTo>
-                  <a:lnTo>
-                    <a:pt x="1862185" y="63074"/>
-                  </a:lnTo>
-                  <a:lnTo>
-                    <a:pt x="1790563" y="64515"/>
-                  </a:lnTo>
-                  <a:lnTo>
-                    <a:pt x="1718940" y="65954"/>
-                  </a:lnTo>
-                  <a:lnTo>
-                    <a:pt x="1647318" y="67391"/>
-                  </a:lnTo>
-                  <a:lnTo>
-                    <a:pt x="1575695" y="68824"/>
-                  </a:lnTo>
-                  <a:lnTo>
-                    <a:pt x="1504073" y="70255"/>
-                  </a:lnTo>
-                  <a:lnTo>
-                    <a:pt x="1432450" y="71684"/>
-                  </a:lnTo>
-                  <a:lnTo>
-                    <a:pt x="1360827" y="73109"/>
-                  </a:lnTo>
-                  <a:lnTo>
-                    <a:pt x="1289205" y="74532"/>
-                  </a:lnTo>
-                  <a:lnTo>
-                    <a:pt x="1217582" y="75952"/>
-                  </a:lnTo>
-                  <a:lnTo>
-                    <a:pt x="1145960" y="77370"/>
-                  </a:lnTo>
-                  <a:lnTo>
-                    <a:pt x="1074337" y="78785"/>
-                  </a:lnTo>
-                  <a:lnTo>
-                    <a:pt x="1002715" y="80197"/>
-                  </a:lnTo>
-                  <a:lnTo>
-                    <a:pt x="931092" y="81606"/>
-                  </a:lnTo>
-                  <a:lnTo>
-                    <a:pt x="859470" y="83013"/>
-                  </a:lnTo>
-                  <a:lnTo>
-                    <a:pt x="787847" y="84417"/>
-                  </a:lnTo>
-                  <a:lnTo>
-                    <a:pt x="716225" y="85819"/>
-                  </a:lnTo>
-                  <a:lnTo>
-                    <a:pt x="644602" y="87218"/>
-                  </a:lnTo>
-                  <a:lnTo>
-                    <a:pt x="572980" y="88614"/>
-                  </a:lnTo>
-                  <a:lnTo>
-                    <a:pt x="501357" y="90008"/>
-                  </a:lnTo>
-                  <a:lnTo>
-                    <a:pt x="429735" y="91399"/>
-                  </a:lnTo>
-                  <a:lnTo>
-                    <a:pt x="358112" y="92787"/>
-                  </a:lnTo>
-                  <a:lnTo>
-                    <a:pt x="286490" y="94173"/>
-                  </a:lnTo>
-                  <a:lnTo>
-                    <a:pt x="214867" y="95556"/>
-                  </a:lnTo>
-                  <a:lnTo>
-                    <a:pt x="143245" y="96937"/>
-                  </a:lnTo>
-                  <a:lnTo>
-                    <a:pt x="71622" y="98315"/>
-                  </a:lnTo>
-                  <a:lnTo>
-                    <a:pt x="0" y="99690"/>
+                    <a:pt x="7019007" y="1545042"/>
+                  </a:lnTo>
+                  <a:lnTo>
+                    <a:pt x="6947385" y="1540408"/>
+                  </a:lnTo>
+                  <a:lnTo>
+                    <a:pt x="6875762" y="1535294"/>
+                  </a:lnTo>
+                  <a:lnTo>
+                    <a:pt x="6804139" y="1529649"/>
+                  </a:lnTo>
+                  <a:lnTo>
+                    <a:pt x="6732517" y="1523417"/>
+                  </a:lnTo>
+                  <a:lnTo>
+                    <a:pt x="6660894" y="1516539"/>
+                  </a:lnTo>
+                  <a:lnTo>
+                    <a:pt x="6589272" y="1508947"/>
+                  </a:lnTo>
+                  <a:lnTo>
+                    <a:pt x="6517649" y="1500567"/>
+                  </a:lnTo>
+                  <a:lnTo>
+                    <a:pt x="6446027" y="1491318"/>
+                  </a:lnTo>
+                  <a:lnTo>
+                    <a:pt x="6374404" y="1481108"/>
+                  </a:lnTo>
+                  <a:lnTo>
+                    <a:pt x="6302782" y="1469838"/>
+                  </a:lnTo>
+                  <a:lnTo>
+                    <a:pt x="6231159" y="1457399"/>
+                  </a:lnTo>
+                  <a:lnTo>
+                    <a:pt x="6159537" y="1443668"/>
+                  </a:lnTo>
+                  <a:lnTo>
+                    <a:pt x="6087914" y="1428513"/>
+                  </a:lnTo>
+                  <a:lnTo>
+                    <a:pt x="6016292" y="1411784"/>
+                  </a:lnTo>
+                  <a:lnTo>
+                    <a:pt x="5944669" y="1393319"/>
+                  </a:lnTo>
+                  <a:lnTo>
+                    <a:pt x="5873047" y="1372937"/>
+                  </a:lnTo>
+                  <a:lnTo>
+                    <a:pt x="5801424" y="1350440"/>
+                  </a:lnTo>
+                  <a:lnTo>
+                    <a:pt x="5729802" y="1325608"/>
+                  </a:lnTo>
+                  <a:lnTo>
+                    <a:pt x="5658179" y="1298198"/>
+                  </a:lnTo>
+                  <a:lnTo>
+                    <a:pt x="5586557" y="1267943"/>
+                  </a:lnTo>
+                  <a:lnTo>
+                    <a:pt x="5514934" y="1234547"/>
+                  </a:lnTo>
+                  <a:lnTo>
+                    <a:pt x="5443311" y="1197686"/>
+                  </a:lnTo>
+                  <a:lnTo>
+                    <a:pt x="5371689" y="1156998"/>
+                  </a:lnTo>
+                  <a:lnTo>
+                    <a:pt x="5300066" y="1112087"/>
+                  </a:lnTo>
+                  <a:lnTo>
+                    <a:pt x="5228444" y="1062514"/>
+                  </a:lnTo>
+                  <a:lnTo>
+                    <a:pt x="5156821" y="1007796"/>
+                  </a:lnTo>
+                  <a:lnTo>
+                    <a:pt x="5085199" y="947399"/>
+                  </a:lnTo>
+                  <a:lnTo>
+                    <a:pt x="5013576" y="880732"/>
+                  </a:lnTo>
+                  <a:lnTo>
+                    <a:pt x="4941954" y="807146"/>
+                  </a:lnTo>
+                  <a:lnTo>
+                    <a:pt x="4870331" y="756976"/>
+                  </a:lnTo>
+                  <a:lnTo>
+                    <a:pt x="4798709" y="749020"/>
+                  </a:lnTo>
+                  <a:lnTo>
+                    <a:pt x="4727086" y="740988"/>
+                  </a:lnTo>
+                  <a:lnTo>
+                    <a:pt x="4655464" y="732880"/>
+                  </a:lnTo>
+                  <a:lnTo>
+                    <a:pt x="4583841" y="724694"/>
+                  </a:lnTo>
+                  <a:lnTo>
+                    <a:pt x="4512219" y="716429"/>
+                  </a:lnTo>
+                  <a:lnTo>
+                    <a:pt x="4440596" y="708086"/>
+                  </a:lnTo>
+                  <a:lnTo>
+                    <a:pt x="4368974" y="699663"/>
+                  </a:lnTo>
+                  <a:lnTo>
+                    <a:pt x="4297351" y="691159"/>
+                  </a:lnTo>
+                  <a:lnTo>
+                    <a:pt x="4225729" y="682574"/>
+                  </a:lnTo>
+                  <a:lnTo>
+                    <a:pt x="4154106" y="673908"/>
+                  </a:lnTo>
+                  <a:lnTo>
+                    <a:pt x="4082483" y="665158"/>
+                  </a:lnTo>
+                  <a:lnTo>
+                    <a:pt x="4010861" y="656325"/>
+                  </a:lnTo>
+                  <a:lnTo>
+                    <a:pt x="3939238" y="647407"/>
+                  </a:lnTo>
+                  <a:lnTo>
+                    <a:pt x="3867616" y="638405"/>
+                  </a:lnTo>
+                  <a:lnTo>
+                    <a:pt x="3795993" y="629316"/>
+                  </a:lnTo>
+                  <a:lnTo>
+                    <a:pt x="3724371" y="620140"/>
+                  </a:lnTo>
+                  <a:lnTo>
+                    <a:pt x="3652748" y="610877"/>
+                  </a:lnTo>
+                  <a:lnTo>
+                    <a:pt x="3581126" y="601525"/>
+                  </a:lnTo>
+                  <a:lnTo>
+                    <a:pt x="3509503" y="592084"/>
+                  </a:lnTo>
+                  <a:lnTo>
+                    <a:pt x="3437881" y="582552"/>
+                  </a:lnTo>
+                  <a:lnTo>
+                    <a:pt x="3366258" y="572930"/>
+                  </a:lnTo>
+                  <a:lnTo>
+                    <a:pt x="3294636" y="563216"/>
+                  </a:lnTo>
+                  <a:lnTo>
+                    <a:pt x="3223013" y="553408"/>
+                  </a:lnTo>
+                  <a:lnTo>
+                    <a:pt x="3151391" y="543508"/>
+                  </a:lnTo>
+                  <a:lnTo>
+                    <a:pt x="3079768" y="533512"/>
+                  </a:lnTo>
+                  <a:lnTo>
+                    <a:pt x="3008146" y="523421"/>
+                  </a:lnTo>
+                  <a:lnTo>
+                    <a:pt x="2936523" y="513234"/>
+                  </a:lnTo>
+                  <a:lnTo>
+                    <a:pt x="2864901" y="502949"/>
+                  </a:lnTo>
+                  <a:lnTo>
+                    <a:pt x="2793278" y="492566"/>
+                  </a:lnTo>
+                  <a:lnTo>
+                    <a:pt x="2721655" y="482084"/>
+                  </a:lnTo>
+                  <a:lnTo>
+                    <a:pt x="2650033" y="471502"/>
+                  </a:lnTo>
+                  <a:lnTo>
+                    <a:pt x="2578410" y="460818"/>
+                  </a:lnTo>
+                  <a:lnTo>
+                    <a:pt x="2506788" y="450033"/>
+                  </a:lnTo>
+                  <a:lnTo>
+                    <a:pt x="2435165" y="439144"/>
+                  </a:lnTo>
+                  <a:lnTo>
+                    <a:pt x="2363543" y="428151"/>
+                  </a:lnTo>
+                  <a:lnTo>
+                    <a:pt x="2291920" y="417054"/>
+                  </a:lnTo>
+                  <a:lnTo>
+                    <a:pt x="2220298" y="405850"/>
+                  </a:lnTo>
+                  <a:lnTo>
+                    <a:pt x="2148675" y="394539"/>
+                  </a:lnTo>
+                  <a:lnTo>
+                    <a:pt x="2077053" y="383121"/>
+                  </a:lnTo>
+                  <a:lnTo>
+                    <a:pt x="2005430" y="371593"/>
+                  </a:lnTo>
+                  <a:lnTo>
+                    <a:pt x="1933808" y="359955"/>
+                  </a:lnTo>
+                  <a:lnTo>
+                    <a:pt x="1862185" y="348206"/>
+                  </a:lnTo>
+                  <a:lnTo>
+                    <a:pt x="1790563" y="336344"/>
+                  </a:lnTo>
+                  <a:lnTo>
+                    <a:pt x="1718940" y="324369"/>
+                  </a:lnTo>
+                  <a:lnTo>
+                    <a:pt x="1647318" y="312280"/>
+                  </a:lnTo>
+                  <a:lnTo>
+                    <a:pt x="1575695" y="300075"/>
+                  </a:lnTo>
+                  <a:lnTo>
+                    <a:pt x="1504073" y="287754"/>
+                  </a:lnTo>
+                  <a:lnTo>
+                    <a:pt x="1432450" y="275315"/>
+                  </a:lnTo>
+                  <a:lnTo>
+                    <a:pt x="1360827" y="262757"/>
+                  </a:lnTo>
+                  <a:lnTo>
+                    <a:pt x="1289205" y="250079"/>
+                  </a:lnTo>
+                  <a:lnTo>
+                    <a:pt x="1217582" y="237280"/>
+                  </a:lnTo>
+                  <a:lnTo>
+                    <a:pt x="1145960" y="224359"/>
+                  </a:lnTo>
+                  <a:lnTo>
+                    <a:pt x="1074337" y="211314"/>
+                  </a:lnTo>
+                  <a:lnTo>
+                    <a:pt x="1002715" y="198145"/>
+                  </a:lnTo>
+                  <a:lnTo>
+                    <a:pt x="931092" y="184850"/>
+                  </a:lnTo>
+                  <a:lnTo>
+                    <a:pt x="859470" y="171428"/>
+                  </a:lnTo>
+                  <a:lnTo>
+                    <a:pt x="787847" y="157877"/>
+                  </a:lnTo>
+                  <a:lnTo>
+                    <a:pt x="716225" y="144197"/>
+                  </a:lnTo>
+                  <a:lnTo>
+                    <a:pt x="644602" y="130387"/>
+                  </a:lnTo>
+                  <a:lnTo>
+                    <a:pt x="572980" y="116444"/>
+                  </a:lnTo>
+                  <a:lnTo>
+                    <a:pt x="501357" y="102368"/>
+                  </a:lnTo>
+                  <a:lnTo>
+                    <a:pt x="429735" y="88158"/>
+                  </a:lnTo>
+                  <a:lnTo>
+                    <a:pt x="358112" y="73812"/>
+                  </a:lnTo>
+                  <a:lnTo>
+                    <a:pt x="286490" y="59329"/>
+                  </a:lnTo>
+                  <a:lnTo>
+                    <a:pt x="214867" y="44707"/>
+                  </a:lnTo>
+                  <a:lnTo>
+                    <a:pt x="143245" y="29946"/>
+                  </a:lnTo>
+                  <a:lnTo>
+                    <a:pt x="71622" y="15044"/>
+                  </a:lnTo>
+                  <a:lnTo>
+                    <a:pt x="0" y="0"/>
                   </a:lnTo>
                 </a:path>
               </a:pathLst>
@@ -3974,204 +3968,189 @@
           </p:nvSpPr>
           <p:spPr>
             <a:xfrm>
-              <a:off x="3779164" y="2073503"/>
-              <a:ext cx="4483514" cy="3273227"/>
+              <a:off x="4173171" y="2073503"/>
+              <a:ext cx="4089508" cy="3325383"/>
             </a:xfrm>
             <a:custGeom>
               <a:avLst/>
               <a:pathLst>
-                <a:path w="4483514" h="3273227">
+                <a:path w="4089508" h="3325383">
                   <a:moveTo>
                     <a:pt x="0" y="0"/>
                   </a:moveTo>
                   <a:lnTo>
-                    <a:pt x="42917" y="93145"/>
-                  </a:lnTo>
-                  <a:lnTo>
-                    <a:pt x="114540" y="241774"/>
-                  </a:lnTo>
-                  <a:lnTo>
-                    <a:pt x="186162" y="383889"/>
-                  </a:lnTo>
-                  <a:lnTo>
-                    <a:pt x="257785" y="519773"/>
-                  </a:lnTo>
-                  <a:lnTo>
-                    <a:pt x="329407" y="649701"/>
-                  </a:lnTo>
-                  <a:lnTo>
-                    <a:pt x="401030" y="773934"/>
-                  </a:lnTo>
-                  <a:lnTo>
-                    <a:pt x="472652" y="892721"/>
-                  </a:lnTo>
-                  <a:lnTo>
-                    <a:pt x="544275" y="1006300"/>
-                  </a:lnTo>
-                  <a:lnTo>
-                    <a:pt x="615898" y="1114901"/>
-                  </a:lnTo>
-                  <a:lnTo>
-                    <a:pt x="687520" y="1218741"/>
-                  </a:lnTo>
-                  <a:lnTo>
-                    <a:pt x="759143" y="1318029"/>
-                  </a:lnTo>
-                  <a:lnTo>
-                    <a:pt x="830765" y="1412965"/>
-                  </a:lnTo>
-                  <a:lnTo>
-                    <a:pt x="902388" y="1503739"/>
-                  </a:lnTo>
-                  <a:lnTo>
-                    <a:pt x="974010" y="1590535"/>
-                  </a:lnTo>
-                  <a:lnTo>
-                    <a:pt x="1045633" y="1673525"/>
-                  </a:lnTo>
-                  <a:lnTo>
-                    <a:pt x="1117255" y="1752877"/>
-                  </a:lnTo>
-                  <a:lnTo>
-                    <a:pt x="1188878" y="1828751"/>
-                  </a:lnTo>
-                  <a:lnTo>
-                    <a:pt x="1260500" y="1901299"/>
-                  </a:lnTo>
-                  <a:lnTo>
-                    <a:pt x="1332123" y="1970667"/>
-                  </a:lnTo>
-                  <a:lnTo>
-                    <a:pt x="1403745" y="2036994"/>
-                  </a:lnTo>
-                  <a:lnTo>
-                    <a:pt x="1475368" y="2100414"/>
-                  </a:lnTo>
-                  <a:lnTo>
-                    <a:pt x="1546990" y="2161053"/>
-                  </a:lnTo>
-                  <a:lnTo>
-                    <a:pt x="1618613" y="2219034"/>
-                  </a:lnTo>
-                  <a:lnTo>
-                    <a:pt x="1690235" y="2274474"/>
-                  </a:lnTo>
-                  <a:lnTo>
-                    <a:pt x="1761858" y="2327483"/>
-                  </a:lnTo>
-                  <a:lnTo>
-                    <a:pt x="1833480" y="2378169"/>
-                  </a:lnTo>
-                  <a:lnTo>
-                    <a:pt x="1905103" y="2426633"/>
-                  </a:lnTo>
-                  <a:lnTo>
-                    <a:pt x="1976726" y="2472972"/>
-                  </a:lnTo>
-                  <a:lnTo>
-                    <a:pt x="2048348" y="2517280"/>
-                  </a:lnTo>
-                  <a:lnTo>
-                    <a:pt x="2119971" y="2559646"/>
-                  </a:lnTo>
-                  <a:lnTo>
-                    <a:pt x="2191593" y="2600155"/>
-                  </a:lnTo>
-                  <a:lnTo>
-                    <a:pt x="2263216" y="2638888"/>
-                  </a:lnTo>
-                  <a:lnTo>
-                    <a:pt x="2334838" y="2675923"/>
-                  </a:lnTo>
-                  <a:lnTo>
-                    <a:pt x="2406461" y="2711334"/>
-                  </a:lnTo>
-                  <a:lnTo>
-                    <a:pt x="2478083" y="2745193"/>
-                  </a:lnTo>
-                  <a:lnTo>
-                    <a:pt x="2549706" y="2777568"/>
-                  </a:lnTo>
-                  <a:lnTo>
-                    <a:pt x="2621328" y="2808524"/>
-                  </a:lnTo>
-                  <a:lnTo>
-                    <a:pt x="2692951" y="2838123"/>
-                  </a:lnTo>
-                  <a:lnTo>
-                    <a:pt x="2764573" y="2866425"/>
-                  </a:lnTo>
-                  <a:lnTo>
-                    <a:pt x="2836196" y="2893485"/>
-                  </a:lnTo>
-                  <a:lnTo>
-                    <a:pt x="2907818" y="2919360"/>
-                  </a:lnTo>
-                  <a:lnTo>
-                    <a:pt x="2979441" y="2944100"/>
-                  </a:lnTo>
-                  <a:lnTo>
-                    <a:pt x="3051063" y="2967756"/>
-                  </a:lnTo>
-                  <a:lnTo>
-                    <a:pt x="3122686" y="2990375"/>
-                  </a:lnTo>
-                  <a:lnTo>
-                    <a:pt x="3194308" y="3012002"/>
-                  </a:lnTo>
-                  <a:lnTo>
-                    <a:pt x="3265931" y="3032681"/>
-                  </a:lnTo>
-                  <a:lnTo>
-                    <a:pt x="3337554" y="3052454"/>
-                  </a:lnTo>
-                  <a:lnTo>
-                    <a:pt x="3409176" y="3071360"/>
-                  </a:lnTo>
-                  <a:lnTo>
-                    <a:pt x="3480799" y="3089437"/>
-                  </a:lnTo>
-                  <a:lnTo>
-                    <a:pt x="3552421" y="3106722"/>
-                  </a:lnTo>
-                  <a:lnTo>
-                    <a:pt x="3624044" y="3123249"/>
-                  </a:lnTo>
-                  <a:lnTo>
-                    <a:pt x="3695666" y="3139052"/>
-                  </a:lnTo>
-                  <a:lnTo>
-                    <a:pt x="3767289" y="3154162"/>
-                  </a:lnTo>
-                  <a:lnTo>
-                    <a:pt x="3838911" y="3168610"/>
-                  </a:lnTo>
-                  <a:lnTo>
-                    <a:pt x="3910534" y="3182424"/>
-                  </a:lnTo>
-                  <a:lnTo>
-                    <a:pt x="3982156" y="3195633"/>
-                  </a:lnTo>
-                  <a:lnTo>
-                    <a:pt x="4053779" y="3208262"/>
-                  </a:lnTo>
-                  <a:lnTo>
-                    <a:pt x="4125401" y="3220338"/>
-                  </a:lnTo>
-                  <a:lnTo>
-                    <a:pt x="4197024" y="3231885"/>
-                  </a:lnTo>
-                  <a:lnTo>
-                    <a:pt x="4268646" y="3242926"/>
-                  </a:lnTo>
-                  <a:lnTo>
-                    <a:pt x="4340269" y="3253482"/>
-                  </a:lnTo>
-                  <a:lnTo>
-                    <a:pt x="4411891" y="3263576"/>
-                  </a:lnTo>
-                  <a:lnTo>
-                    <a:pt x="4483514" y="3273227"/>
+                    <a:pt x="7024" y="18901"/>
+                  </a:lnTo>
+                  <a:lnTo>
+                    <a:pt x="78646" y="201474"/>
+                  </a:lnTo>
+                  <a:lnTo>
+                    <a:pt x="150269" y="374427"/>
+                  </a:lnTo>
+                  <a:lnTo>
+                    <a:pt x="221891" y="538267"/>
+                  </a:lnTo>
+                  <a:lnTo>
+                    <a:pt x="293514" y="693473"/>
+                  </a:lnTo>
+                  <a:lnTo>
+                    <a:pt x="365136" y="840501"/>
+                  </a:lnTo>
+                  <a:lnTo>
+                    <a:pt x="436759" y="979782"/>
+                  </a:lnTo>
+                  <a:lnTo>
+                    <a:pt x="508381" y="1111724"/>
+                  </a:lnTo>
+                  <a:lnTo>
+                    <a:pt x="580004" y="1236713"/>
+                  </a:lnTo>
+                  <a:lnTo>
+                    <a:pt x="651626" y="1355116"/>
+                  </a:lnTo>
+                  <a:lnTo>
+                    <a:pt x="723249" y="1467280"/>
+                  </a:lnTo>
+                  <a:lnTo>
+                    <a:pt x="794871" y="1573534"/>
+                  </a:lnTo>
+                  <a:lnTo>
+                    <a:pt x="866494" y="1674189"/>
+                  </a:lnTo>
+                  <a:lnTo>
+                    <a:pt x="938117" y="1769540"/>
+                  </a:lnTo>
+                  <a:lnTo>
+                    <a:pt x="1009739" y="1859867"/>
+                  </a:lnTo>
+                  <a:lnTo>
+                    <a:pt x="1081362" y="1945434"/>
+                  </a:lnTo>
+                  <a:lnTo>
+                    <a:pt x="1152984" y="2026492"/>
+                  </a:lnTo>
+                  <a:lnTo>
+                    <a:pt x="1224607" y="2103280"/>
+                  </a:lnTo>
+                  <a:lnTo>
+                    <a:pt x="1296229" y="2176021"/>
+                  </a:lnTo>
+                  <a:lnTo>
+                    <a:pt x="1367852" y="2244929"/>
+                  </a:lnTo>
+                  <a:lnTo>
+                    <a:pt x="1439474" y="2310206"/>
+                  </a:lnTo>
+                  <a:lnTo>
+                    <a:pt x="1511097" y="2372043"/>
+                  </a:lnTo>
+                  <a:lnTo>
+                    <a:pt x="1582719" y="2430622"/>
+                  </a:lnTo>
+                  <a:lnTo>
+                    <a:pt x="1654342" y="2486115"/>
+                  </a:lnTo>
+                  <a:lnTo>
+                    <a:pt x="1725964" y="2538683"/>
+                  </a:lnTo>
+                  <a:lnTo>
+                    <a:pt x="1797587" y="2588481"/>
+                  </a:lnTo>
+                  <a:lnTo>
+                    <a:pt x="1869209" y="2635656"/>
+                  </a:lnTo>
+                  <a:lnTo>
+                    <a:pt x="1940832" y="2680344"/>
+                  </a:lnTo>
+                  <a:lnTo>
+                    <a:pt x="2012454" y="2722678"/>
+                  </a:lnTo>
+                  <a:lnTo>
+                    <a:pt x="2084077" y="2762781"/>
+                  </a:lnTo>
+                  <a:lnTo>
+                    <a:pt x="2155699" y="2800771"/>
+                  </a:lnTo>
+                  <a:lnTo>
+                    <a:pt x="2227322" y="2836759"/>
+                  </a:lnTo>
+                  <a:lnTo>
+                    <a:pt x="2298945" y="2870851"/>
+                  </a:lnTo>
+                  <a:lnTo>
+                    <a:pt x="2370567" y="2903146"/>
+                  </a:lnTo>
+                  <a:lnTo>
+                    <a:pt x="2442190" y="2933740"/>
+                  </a:lnTo>
+                  <a:lnTo>
+                    <a:pt x="2513812" y="2962721"/>
+                  </a:lnTo>
+                  <a:lnTo>
+                    <a:pt x="2585435" y="2990176"/>
+                  </a:lnTo>
+                  <a:lnTo>
+                    <a:pt x="2657057" y="3016183"/>
+                  </a:lnTo>
+                  <a:lnTo>
+                    <a:pt x="2728680" y="3040821"/>
+                  </a:lnTo>
+                  <a:lnTo>
+                    <a:pt x="2800302" y="3064160"/>
+                  </a:lnTo>
+                  <a:lnTo>
+                    <a:pt x="2871925" y="3086269"/>
+                  </a:lnTo>
+                  <a:lnTo>
+                    <a:pt x="2943547" y="3107213"/>
+                  </a:lnTo>
+                  <a:lnTo>
+                    <a:pt x="3015170" y="3127054"/>
+                  </a:lnTo>
+                  <a:lnTo>
+                    <a:pt x="3086792" y="3145849"/>
+                  </a:lnTo>
+                  <a:lnTo>
+                    <a:pt x="3158415" y="3163654"/>
+                  </a:lnTo>
+                  <a:lnTo>
+                    <a:pt x="3230037" y="3180521"/>
+                  </a:lnTo>
+                  <a:lnTo>
+                    <a:pt x="3301660" y="3196499"/>
+                  </a:lnTo>
+                  <a:lnTo>
+                    <a:pt x="3373282" y="3211635"/>
+                  </a:lnTo>
+                  <a:lnTo>
+                    <a:pt x="3444905" y="3225973"/>
+                  </a:lnTo>
+                  <a:lnTo>
+                    <a:pt x="3516527" y="3239556"/>
+                  </a:lnTo>
+                  <a:lnTo>
+                    <a:pt x="3588150" y="3252423"/>
+                  </a:lnTo>
+                  <a:lnTo>
+                    <a:pt x="3659773" y="3264612"/>
+                  </a:lnTo>
+                  <a:lnTo>
+                    <a:pt x="3731395" y="3276159"/>
+                  </a:lnTo>
+                  <a:lnTo>
+                    <a:pt x="3803018" y="3287097"/>
+                  </a:lnTo>
+                  <a:lnTo>
+                    <a:pt x="3874640" y="3297460"/>
+                  </a:lnTo>
+                  <a:lnTo>
+                    <a:pt x="3946263" y="3307276"/>
+                  </a:lnTo>
+                  <a:lnTo>
+                    <a:pt x="4017885" y="3316574"/>
+                  </a:lnTo>
+                  <a:lnTo>
+                    <a:pt x="4089508" y="3325383"/>
                   </a:lnTo>
                 </a:path>
               </a:pathLst>
@@ -4911,7 +4890,7 @@
                   <a:latin typeface="Helvetica"/>
                   <a:cs typeface="Helvetica"/>
                 </a:rPr>
-                <a:t>subHR per 1 mL/min: 0.94 (0.89-1.00)  |  per IQR (Δ = 18.2): 0.35 (0.12-1.05)  |  IQR: [-11.5, 6.7]</a:t>
+                <a:t>subHR per 1 mL/min: 0.93 (0.88-0.99)  |  per IQR (Δ = 18.2): 0.28 (0.10-0.80)  |  IQR: [-11.5, 6.7]</a:t>
               </a:r>
             </a:p>
           </p:txBody>

--- a/docs/plots/carbo/jx_carbo_linsubhr_egfrdisc_throm3.pptx
+++ b/docs/plots/carbo/jx_carbo_linsubhr_egfrdisc_throm3.pptx
@@ -3003,452 +3003,458 @@
           <p:spPr>
             <a:xfrm>
               <a:off x="1172049" y="2073503"/>
-              <a:ext cx="7090630" cy="3443304"/>
+              <a:ext cx="7090630" cy="3420629"/>
             </a:xfrm>
             <a:custGeom>
               <a:avLst/>
               <a:pathLst>
-                <a:path w="7090630" h="3443304">
+                <a:path w="7090630" h="3420629">
                   <a:moveTo>
-                    <a:pt x="3859290" y="0"/>
+                    <a:pt x="3679761" y="0"/>
                   </a:moveTo>
                   <a:lnTo>
-                    <a:pt x="3867616" y="41534"/>
-                  </a:lnTo>
-                  <a:lnTo>
-                    <a:pt x="3939238" y="365225"/>
-                  </a:lnTo>
-                  <a:lnTo>
-                    <a:pt x="4010861" y="658477"/>
-                  </a:lnTo>
-                  <a:lnTo>
-                    <a:pt x="4082483" y="924153"/>
-                  </a:lnTo>
-                  <a:lnTo>
-                    <a:pt x="4154106" y="1164846"/>
-                  </a:lnTo>
-                  <a:lnTo>
-                    <a:pt x="4225729" y="1382905"/>
-                  </a:lnTo>
-                  <a:lnTo>
-                    <a:pt x="4297351" y="1580459"/>
-                  </a:lnTo>
-                  <a:lnTo>
-                    <a:pt x="4368974" y="1759436"/>
-                  </a:lnTo>
-                  <a:lnTo>
-                    <a:pt x="4440596" y="1921583"/>
-                  </a:lnTo>
-                  <a:lnTo>
-                    <a:pt x="4512219" y="2068482"/>
-                  </a:lnTo>
-                  <a:lnTo>
-                    <a:pt x="4583841" y="2201567"/>
-                  </a:lnTo>
-                  <a:lnTo>
-                    <a:pt x="4655464" y="2322138"/>
-                  </a:lnTo>
-                  <a:lnTo>
-                    <a:pt x="4727086" y="2431370"/>
-                  </a:lnTo>
-                  <a:lnTo>
-                    <a:pt x="4798709" y="2530331"/>
-                  </a:lnTo>
-                  <a:lnTo>
-                    <a:pt x="4870331" y="2619986"/>
-                  </a:lnTo>
-                  <a:lnTo>
-                    <a:pt x="4941954" y="2658921"/>
-                  </a:lnTo>
-                  <a:lnTo>
-                    <a:pt x="5013576" y="2666727"/>
-                  </a:lnTo>
-                  <a:lnTo>
-                    <a:pt x="5085199" y="2674460"/>
-                  </a:lnTo>
-                  <a:lnTo>
-                    <a:pt x="5156821" y="2682119"/>
-                  </a:lnTo>
-                  <a:lnTo>
-                    <a:pt x="5228444" y="2689705"/>
-                  </a:lnTo>
-                  <a:lnTo>
-                    <a:pt x="5300066" y="2697220"/>
-                  </a:lnTo>
-                  <a:lnTo>
-                    <a:pt x="5371689" y="2704663"/>
-                  </a:lnTo>
-                  <a:lnTo>
-                    <a:pt x="5443311" y="2712037"/>
-                  </a:lnTo>
-                  <a:lnTo>
-                    <a:pt x="5514934" y="2719340"/>
-                  </a:lnTo>
-                  <a:lnTo>
-                    <a:pt x="5586557" y="2726574"/>
-                  </a:lnTo>
-                  <a:lnTo>
-                    <a:pt x="5658179" y="2733740"/>
-                  </a:lnTo>
-                  <a:lnTo>
-                    <a:pt x="5729802" y="2740838"/>
-                  </a:lnTo>
-                  <a:lnTo>
-                    <a:pt x="5801424" y="2747869"/>
-                  </a:lnTo>
-                  <a:lnTo>
-                    <a:pt x="5873047" y="2754833"/>
-                  </a:lnTo>
-                  <a:lnTo>
-                    <a:pt x="5944669" y="2761731"/>
-                  </a:lnTo>
-                  <a:lnTo>
-                    <a:pt x="6016292" y="2768564"/>
-                  </a:lnTo>
-                  <a:lnTo>
-                    <a:pt x="6087914" y="2775333"/>
-                  </a:lnTo>
-                  <a:lnTo>
-                    <a:pt x="6159537" y="2782037"/>
-                  </a:lnTo>
-                  <a:lnTo>
-                    <a:pt x="6231159" y="2788678"/>
-                  </a:lnTo>
-                  <a:lnTo>
-                    <a:pt x="6302782" y="2795256"/>
-                  </a:lnTo>
-                  <a:lnTo>
-                    <a:pt x="6374404" y="2801772"/>
-                  </a:lnTo>
-                  <a:lnTo>
-                    <a:pt x="6446027" y="2808226"/>
-                  </a:lnTo>
-                  <a:lnTo>
-                    <a:pt x="6517649" y="2814619"/>
-                  </a:lnTo>
-                  <a:lnTo>
-                    <a:pt x="6589272" y="2820952"/>
-                  </a:lnTo>
-                  <a:lnTo>
-                    <a:pt x="6660894" y="2827224"/>
-                  </a:lnTo>
-                  <a:lnTo>
-                    <a:pt x="6732517" y="2833438"/>
-                  </a:lnTo>
-                  <a:lnTo>
-                    <a:pt x="6804139" y="2839592"/>
-                  </a:lnTo>
-                  <a:lnTo>
-                    <a:pt x="6875762" y="2845688"/>
-                  </a:lnTo>
-                  <a:lnTo>
-                    <a:pt x="6947385" y="2851727"/>
-                  </a:lnTo>
-                  <a:lnTo>
-                    <a:pt x="7019007" y="2857708"/>
-                  </a:lnTo>
-                  <a:lnTo>
-                    <a:pt x="7090630" y="2863633"/>
-                  </a:lnTo>
-                  <a:lnTo>
-                    <a:pt x="7090630" y="3443304"/>
-                  </a:lnTo>
-                  <a:lnTo>
-                    <a:pt x="7019007" y="3439106"/>
-                  </a:lnTo>
-                  <a:lnTo>
-                    <a:pt x="6947385" y="3434473"/>
-                  </a:lnTo>
-                  <a:lnTo>
-                    <a:pt x="6875762" y="3429358"/>
-                  </a:lnTo>
-                  <a:lnTo>
-                    <a:pt x="6804139" y="3423713"/>
-                  </a:lnTo>
-                  <a:lnTo>
-                    <a:pt x="6732517" y="3417482"/>
-                  </a:lnTo>
-                  <a:lnTo>
-                    <a:pt x="6660894" y="3410604"/>
-                  </a:lnTo>
-                  <a:lnTo>
-                    <a:pt x="6589272" y="3403012"/>
-                  </a:lnTo>
-                  <a:lnTo>
-                    <a:pt x="6517649" y="3394632"/>
-                  </a:lnTo>
-                  <a:lnTo>
-                    <a:pt x="6446027" y="3385382"/>
-                  </a:lnTo>
-                  <a:lnTo>
-                    <a:pt x="6374404" y="3375172"/>
-                  </a:lnTo>
-                  <a:lnTo>
-                    <a:pt x="6302782" y="3363903"/>
-                  </a:lnTo>
-                  <a:lnTo>
-                    <a:pt x="6231159" y="3351463"/>
-                  </a:lnTo>
-                  <a:lnTo>
-                    <a:pt x="6159537" y="3337733"/>
-                  </a:lnTo>
-                  <a:lnTo>
-                    <a:pt x="6087914" y="3322577"/>
-                  </a:lnTo>
-                  <a:lnTo>
-                    <a:pt x="6016292" y="3305848"/>
-                  </a:lnTo>
-                  <a:lnTo>
-                    <a:pt x="5944669" y="3287383"/>
-                  </a:lnTo>
-                  <a:lnTo>
-                    <a:pt x="5873047" y="3267002"/>
-                  </a:lnTo>
-                  <a:lnTo>
-                    <a:pt x="5801424" y="3244504"/>
-                  </a:lnTo>
-                  <a:lnTo>
-                    <a:pt x="5729802" y="3219672"/>
-                  </a:lnTo>
-                  <a:lnTo>
-                    <a:pt x="5658179" y="3192262"/>
-                  </a:lnTo>
-                  <a:lnTo>
-                    <a:pt x="5586557" y="3162007"/>
-                  </a:lnTo>
-                  <a:lnTo>
-                    <a:pt x="5514934" y="3128612"/>
-                  </a:lnTo>
-                  <a:lnTo>
-                    <a:pt x="5443311" y="3091750"/>
-                  </a:lnTo>
-                  <a:lnTo>
-                    <a:pt x="5371689" y="3051062"/>
-                  </a:lnTo>
-                  <a:lnTo>
-                    <a:pt x="5300066" y="3006151"/>
-                  </a:lnTo>
-                  <a:lnTo>
-                    <a:pt x="5228444" y="2956579"/>
-                  </a:lnTo>
-                  <a:lnTo>
-                    <a:pt x="5156821" y="2901861"/>
-                  </a:lnTo>
-                  <a:lnTo>
-                    <a:pt x="5085199" y="2841463"/>
-                  </a:lnTo>
-                  <a:lnTo>
-                    <a:pt x="5013576" y="2774797"/>
-                  </a:lnTo>
-                  <a:lnTo>
-                    <a:pt x="4941954" y="2701210"/>
-                  </a:lnTo>
-                  <a:lnTo>
-                    <a:pt x="4870331" y="2651041"/>
-                  </a:lnTo>
-                  <a:lnTo>
-                    <a:pt x="4798709" y="2643085"/>
-                  </a:lnTo>
-                  <a:lnTo>
-                    <a:pt x="4727086" y="2635053"/>
-                  </a:lnTo>
-                  <a:lnTo>
-                    <a:pt x="4655464" y="2626944"/>
-                  </a:lnTo>
-                  <a:lnTo>
-                    <a:pt x="4583841" y="2618758"/>
-                  </a:lnTo>
-                  <a:lnTo>
-                    <a:pt x="4512219" y="2610494"/>
-                  </a:lnTo>
-                  <a:lnTo>
-                    <a:pt x="4440596" y="2602150"/>
-                  </a:lnTo>
-                  <a:lnTo>
-                    <a:pt x="4368974" y="2593727"/>
-                  </a:lnTo>
-                  <a:lnTo>
-                    <a:pt x="4297351" y="2585224"/>
-                  </a:lnTo>
-                  <a:lnTo>
-                    <a:pt x="4225729" y="2576639"/>
-                  </a:lnTo>
-                  <a:lnTo>
-                    <a:pt x="4154106" y="2567972"/>
-                  </a:lnTo>
-                  <a:lnTo>
-                    <a:pt x="4082483" y="2559222"/>
-                  </a:lnTo>
-                  <a:lnTo>
-                    <a:pt x="4010861" y="2550389"/>
-                  </a:lnTo>
-                  <a:lnTo>
-                    <a:pt x="3939238" y="2541472"/>
-                  </a:lnTo>
-                  <a:lnTo>
-                    <a:pt x="3867616" y="2532469"/>
-                  </a:lnTo>
-                  <a:lnTo>
-                    <a:pt x="3795993" y="2523380"/>
-                  </a:lnTo>
-                  <a:lnTo>
-                    <a:pt x="3724371" y="2514204"/>
-                  </a:lnTo>
-                  <a:lnTo>
-                    <a:pt x="3652748" y="2504941"/>
-                  </a:lnTo>
-                  <a:lnTo>
-                    <a:pt x="3581126" y="2495589"/>
-                  </a:lnTo>
-                  <a:lnTo>
-                    <a:pt x="3509503" y="2486148"/>
-                  </a:lnTo>
-                  <a:lnTo>
-                    <a:pt x="3437881" y="2476617"/>
-                  </a:lnTo>
-                  <a:lnTo>
-                    <a:pt x="3366258" y="2466994"/>
-                  </a:lnTo>
-                  <a:lnTo>
-                    <a:pt x="3294636" y="2457280"/>
-                  </a:lnTo>
-                  <a:lnTo>
-                    <a:pt x="3223013" y="2447473"/>
-                  </a:lnTo>
-                  <a:lnTo>
-                    <a:pt x="3151391" y="2437572"/>
-                  </a:lnTo>
-                  <a:lnTo>
-                    <a:pt x="3079768" y="2427576"/>
-                  </a:lnTo>
-                  <a:lnTo>
-                    <a:pt x="3008146" y="2417486"/>
-                  </a:lnTo>
-                  <a:lnTo>
-                    <a:pt x="2936523" y="2407298"/>
-                  </a:lnTo>
-                  <a:lnTo>
-                    <a:pt x="2864901" y="2397013"/>
-                  </a:lnTo>
-                  <a:lnTo>
-                    <a:pt x="2793278" y="2386630"/>
-                  </a:lnTo>
-                  <a:lnTo>
-                    <a:pt x="2721655" y="2376148"/>
-                  </a:lnTo>
-                  <a:lnTo>
-                    <a:pt x="2650033" y="2365566"/>
-                  </a:lnTo>
-                  <a:lnTo>
-                    <a:pt x="2578410" y="2354882"/>
-                  </a:lnTo>
-                  <a:lnTo>
-                    <a:pt x="2506788" y="2344097"/>
-                  </a:lnTo>
-                  <a:lnTo>
-                    <a:pt x="2435165" y="2333208"/>
-                  </a:lnTo>
-                  <a:lnTo>
-                    <a:pt x="2363543" y="2322216"/>
-                  </a:lnTo>
-                  <a:lnTo>
-                    <a:pt x="2291920" y="2311118"/>
-                  </a:lnTo>
-                  <a:lnTo>
-                    <a:pt x="2220298" y="2299914"/>
-                  </a:lnTo>
-                  <a:lnTo>
-                    <a:pt x="2148675" y="2288604"/>
-                  </a:lnTo>
-                  <a:lnTo>
-                    <a:pt x="2077053" y="2277185"/>
-                  </a:lnTo>
-                  <a:lnTo>
-                    <a:pt x="2005430" y="2265657"/>
-                  </a:lnTo>
-                  <a:lnTo>
-                    <a:pt x="1933808" y="2254019"/>
-                  </a:lnTo>
-                  <a:lnTo>
-                    <a:pt x="1862185" y="2242270"/>
-                  </a:lnTo>
-                  <a:lnTo>
-                    <a:pt x="1790563" y="2230408"/>
-                  </a:lnTo>
-                  <a:lnTo>
-                    <a:pt x="1718940" y="2218434"/>
-                  </a:lnTo>
-                  <a:lnTo>
-                    <a:pt x="1647318" y="2206344"/>
-                  </a:lnTo>
-                  <a:lnTo>
-                    <a:pt x="1575695" y="2194140"/>
-                  </a:lnTo>
-                  <a:lnTo>
-                    <a:pt x="1504073" y="2181818"/>
-                  </a:lnTo>
-                  <a:lnTo>
-                    <a:pt x="1432450" y="2169379"/>
-                  </a:lnTo>
-                  <a:lnTo>
-                    <a:pt x="1360827" y="2156822"/>
-                  </a:lnTo>
-                  <a:lnTo>
-                    <a:pt x="1289205" y="2144144"/>
-                  </a:lnTo>
-                  <a:lnTo>
-                    <a:pt x="1217582" y="2131345"/>
-                  </a:lnTo>
-                  <a:lnTo>
-                    <a:pt x="1145960" y="2118423"/>
-                  </a:lnTo>
-                  <a:lnTo>
-                    <a:pt x="1074337" y="2105379"/>
-                  </a:lnTo>
-                  <a:lnTo>
-                    <a:pt x="1002715" y="2092209"/>
-                  </a:lnTo>
-                  <a:lnTo>
-                    <a:pt x="931092" y="2078914"/>
-                  </a:lnTo>
-                  <a:lnTo>
-                    <a:pt x="859470" y="2065492"/>
-                  </a:lnTo>
-                  <a:lnTo>
-                    <a:pt x="787847" y="2051942"/>
-                  </a:lnTo>
-                  <a:lnTo>
-                    <a:pt x="716225" y="2038262"/>
-                  </a:lnTo>
-                  <a:lnTo>
-                    <a:pt x="644602" y="2024451"/>
-                  </a:lnTo>
-                  <a:lnTo>
-                    <a:pt x="572980" y="2010508"/>
-                  </a:lnTo>
-                  <a:lnTo>
-                    <a:pt x="501357" y="1996433"/>
-                  </a:lnTo>
-                  <a:lnTo>
-                    <a:pt x="429735" y="1982222"/>
-                  </a:lnTo>
-                  <a:lnTo>
-                    <a:pt x="358112" y="1967876"/>
-                  </a:lnTo>
-                  <a:lnTo>
-                    <a:pt x="286490" y="1953393"/>
-                  </a:lnTo>
-                  <a:lnTo>
-                    <a:pt x="214867" y="1938772"/>
-                  </a:lnTo>
-                  <a:lnTo>
-                    <a:pt x="143245" y="1924011"/>
-                  </a:lnTo>
-                  <a:lnTo>
-                    <a:pt x="71622" y="1909108"/>
-                  </a:lnTo>
-                  <a:lnTo>
-                    <a:pt x="0" y="1894064"/>
+                    <a:pt x="3724371" y="180734"/>
+                  </a:lnTo>
+                  <a:lnTo>
+                    <a:pt x="3795993" y="447473"/>
+                  </a:lnTo>
+                  <a:lnTo>
+                    <a:pt x="3867616" y="692671"/>
+                  </a:lnTo>
+                  <a:lnTo>
+                    <a:pt x="3939238" y="918068"/>
+                  </a:lnTo>
+                  <a:lnTo>
+                    <a:pt x="4010861" y="1125263"/>
+                  </a:lnTo>
+                  <a:lnTo>
+                    <a:pt x="4082483" y="1315726"/>
+                  </a:lnTo>
+                  <a:lnTo>
+                    <a:pt x="4154106" y="1490807"/>
+                  </a:lnTo>
+                  <a:lnTo>
+                    <a:pt x="4225729" y="1651749"/>
+                  </a:lnTo>
+                  <a:lnTo>
+                    <a:pt x="4297351" y="1799695"/>
+                  </a:lnTo>
+                  <a:lnTo>
+                    <a:pt x="4368974" y="1935693"/>
+                  </a:lnTo>
+                  <a:lnTo>
+                    <a:pt x="4440596" y="2060708"/>
+                  </a:lnTo>
+                  <a:lnTo>
+                    <a:pt x="4512219" y="2175627"/>
+                  </a:lnTo>
+                  <a:lnTo>
+                    <a:pt x="4583841" y="2281266"/>
+                  </a:lnTo>
+                  <a:lnTo>
+                    <a:pt x="4655464" y="2378374"/>
+                  </a:lnTo>
+                  <a:lnTo>
+                    <a:pt x="4727086" y="2467640"/>
+                  </a:lnTo>
+                  <a:lnTo>
+                    <a:pt x="4798709" y="2549697"/>
+                  </a:lnTo>
+                  <a:lnTo>
+                    <a:pt x="4870331" y="2625127"/>
+                  </a:lnTo>
+                  <a:lnTo>
+                    <a:pt x="4941954" y="2653831"/>
+                  </a:lnTo>
+                  <a:lnTo>
+                    <a:pt x="5013576" y="2653063"/>
+                  </a:lnTo>
+                  <a:lnTo>
+                    <a:pt x="5085199" y="2652295"/>
+                  </a:lnTo>
+                  <a:lnTo>
+                    <a:pt x="5156821" y="2651526"/>
+                  </a:lnTo>
+                  <a:lnTo>
+                    <a:pt x="5228444" y="2650756"/>
+                  </a:lnTo>
+                  <a:lnTo>
+                    <a:pt x="5300066" y="2649986"/>
+                  </a:lnTo>
+                  <a:lnTo>
+                    <a:pt x="5371689" y="2649215"/>
+                  </a:lnTo>
+                  <a:lnTo>
+                    <a:pt x="5443311" y="2648443"/>
+                  </a:lnTo>
+                  <a:lnTo>
+                    <a:pt x="5514934" y="2647671"/>
+                  </a:lnTo>
+                  <a:lnTo>
+                    <a:pt x="5586557" y="2646897"/>
+                  </a:lnTo>
+                  <a:lnTo>
+                    <a:pt x="5658179" y="2646123"/>
+                  </a:lnTo>
+                  <a:lnTo>
+                    <a:pt x="5729802" y="2645349"/>
+                  </a:lnTo>
+                  <a:lnTo>
+                    <a:pt x="5801424" y="2644573"/>
+                  </a:lnTo>
+                  <a:lnTo>
+                    <a:pt x="5873047" y="2643797"/>
+                  </a:lnTo>
+                  <a:lnTo>
+                    <a:pt x="5944669" y="2643020"/>
+                  </a:lnTo>
+                  <a:lnTo>
+                    <a:pt x="6016292" y="2642243"/>
+                  </a:lnTo>
+                  <a:lnTo>
+                    <a:pt x="6087914" y="2641465"/>
+                  </a:lnTo>
+                  <a:lnTo>
+                    <a:pt x="6159537" y="2640686"/>
+                  </a:lnTo>
+                  <a:lnTo>
+                    <a:pt x="6231159" y="2639906"/>
+                  </a:lnTo>
+                  <a:lnTo>
+                    <a:pt x="6302782" y="2639126"/>
+                  </a:lnTo>
+                  <a:lnTo>
+                    <a:pt x="6374404" y="2638345"/>
+                  </a:lnTo>
+                  <a:lnTo>
+                    <a:pt x="6446027" y="2637563"/>
+                  </a:lnTo>
+                  <a:lnTo>
+                    <a:pt x="6517649" y="2636780"/>
+                  </a:lnTo>
+                  <a:lnTo>
+                    <a:pt x="6589272" y="2635997"/>
+                  </a:lnTo>
+                  <a:lnTo>
+                    <a:pt x="6660894" y="2635213"/>
+                  </a:lnTo>
+                  <a:lnTo>
+                    <a:pt x="6732517" y="2634428"/>
+                  </a:lnTo>
+                  <a:lnTo>
+                    <a:pt x="6804139" y="2633643"/>
+                  </a:lnTo>
+                  <a:lnTo>
+                    <a:pt x="6875762" y="2632857"/>
+                  </a:lnTo>
+                  <a:lnTo>
+                    <a:pt x="6947385" y="2632070"/>
+                  </a:lnTo>
+                  <a:lnTo>
+                    <a:pt x="7019007" y="2631282"/>
+                  </a:lnTo>
+                  <a:lnTo>
+                    <a:pt x="7090630" y="2630494"/>
+                  </a:lnTo>
+                  <a:lnTo>
+                    <a:pt x="7090630" y="3420629"/>
+                  </a:lnTo>
+                  <a:lnTo>
+                    <a:pt x="7019007" y="3415084"/>
+                  </a:lnTo>
+                  <a:lnTo>
+                    <a:pt x="6947385" y="3409052"/>
+                  </a:lnTo>
+                  <a:lnTo>
+                    <a:pt x="6875762" y="3402490"/>
+                  </a:lnTo>
+                  <a:lnTo>
+                    <a:pt x="6804139" y="3395351"/>
+                  </a:lnTo>
+                  <a:lnTo>
+                    <a:pt x="6732517" y="3387586"/>
+                  </a:lnTo>
+                  <a:lnTo>
+                    <a:pt x="6660894" y="3379138"/>
+                  </a:lnTo>
+                  <a:lnTo>
+                    <a:pt x="6589272" y="3369948"/>
+                  </a:lnTo>
+                  <a:lnTo>
+                    <a:pt x="6517649" y="3359951"/>
+                  </a:lnTo>
+                  <a:lnTo>
+                    <a:pt x="6446027" y="3349075"/>
+                  </a:lnTo>
+                  <a:lnTo>
+                    <a:pt x="6374404" y="3337244"/>
+                  </a:lnTo>
+                  <a:lnTo>
+                    <a:pt x="6302782" y="3324374"/>
+                  </a:lnTo>
+                  <a:lnTo>
+                    <a:pt x="6231159" y="3310373"/>
+                  </a:lnTo>
+                  <a:lnTo>
+                    <a:pt x="6159537" y="3295142"/>
+                  </a:lnTo>
+                  <a:lnTo>
+                    <a:pt x="6087914" y="3278573"/>
+                  </a:lnTo>
+                  <a:lnTo>
+                    <a:pt x="6016292" y="3260548"/>
+                  </a:lnTo>
+                  <a:lnTo>
+                    <a:pt x="5944669" y="3240940"/>
+                  </a:lnTo>
+                  <a:lnTo>
+                    <a:pt x="5873047" y="3219609"/>
+                  </a:lnTo>
+                  <a:lnTo>
+                    <a:pt x="5801424" y="3196405"/>
+                  </a:lnTo>
+                  <a:lnTo>
+                    <a:pt x="5729802" y="3171161"/>
+                  </a:lnTo>
+                  <a:lnTo>
+                    <a:pt x="5658179" y="3143701"/>
+                  </a:lnTo>
+                  <a:lnTo>
+                    <a:pt x="5586557" y="3113827"/>
+                  </a:lnTo>
+                  <a:lnTo>
+                    <a:pt x="5514934" y="3081329"/>
+                  </a:lnTo>
+                  <a:lnTo>
+                    <a:pt x="5443311" y="3045977"/>
+                  </a:lnTo>
+                  <a:lnTo>
+                    <a:pt x="5371689" y="3007518"/>
+                  </a:lnTo>
+                  <a:lnTo>
+                    <a:pt x="5300066" y="2965681"/>
+                  </a:lnTo>
+                  <a:lnTo>
+                    <a:pt x="5228444" y="2920169"/>
+                  </a:lnTo>
+                  <a:lnTo>
+                    <a:pt x="5156821" y="2870658"/>
+                  </a:lnTo>
+                  <a:lnTo>
+                    <a:pt x="5085199" y="2816798"/>
+                  </a:lnTo>
+                  <a:lnTo>
+                    <a:pt x="5013576" y="2758206"/>
+                  </a:lnTo>
+                  <a:lnTo>
+                    <a:pt x="4941954" y="2694466"/>
+                  </a:lnTo>
+                  <a:lnTo>
+                    <a:pt x="4870331" y="2654597"/>
+                  </a:lnTo>
+                  <a:lnTo>
+                    <a:pt x="4798709" y="2655363"/>
+                  </a:lnTo>
+                  <a:lnTo>
+                    <a:pt x="4727086" y="2656129"/>
+                  </a:lnTo>
+                  <a:lnTo>
+                    <a:pt x="4655464" y="2656894"/>
+                  </a:lnTo>
+                  <a:lnTo>
+                    <a:pt x="4583841" y="2657658"/>
+                  </a:lnTo>
+                  <a:lnTo>
+                    <a:pt x="4512219" y="2658421"/>
+                  </a:lnTo>
+                  <a:lnTo>
+                    <a:pt x="4440596" y="2659183"/>
+                  </a:lnTo>
+                  <a:lnTo>
+                    <a:pt x="4368974" y="2659945"/>
+                  </a:lnTo>
+                  <a:lnTo>
+                    <a:pt x="4297351" y="2660706"/>
+                  </a:lnTo>
+                  <a:lnTo>
+                    <a:pt x="4225729" y="2661467"/>
+                  </a:lnTo>
+                  <a:lnTo>
+                    <a:pt x="4154106" y="2662227"/>
+                  </a:lnTo>
+                  <a:lnTo>
+                    <a:pt x="4082483" y="2662986"/>
+                  </a:lnTo>
+                  <a:lnTo>
+                    <a:pt x="4010861" y="2663744"/>
+                  </a:lnTo>
+                  <a:lnTo>
+                    <a:pt x="3939238" y="2664502"/>
+                  </a:lnTo>
+                  <a:lnTo>
+                    <a:pt x="3867616" y="2665259"/>
+                  </a:lnTo>
+                  <a:lnTo>
+                    <a:pt x="3795993" y="2666015"/>
+                  </a:lnTo>
+                  <a:lnTo>
+                    <a:pt x="3724371" y="2666770"/>
+                  </a:lnTo>
+                  <a:lnTo>
+                    <a:pt x="3652748" y="2667525"/>
+                  </a:lnTo>
+                  <a:lnTo>
+                    <a:pt x="3581126" y="2668279"/>
+                  </a:lnTo>
+                  <a:lnTo>
+                    <a:pt x="3509503" y="2669033"/>
+                  </a:lnTo>
+                  <a:lnTo>
+                    <a:pt x="3437881" y="2669786"/>
+                  </a:lnTo>
+                  <a:lnTo>
+                    <a:pt x="3366258" y="2670538"/>
+                  </a:lnTo>
+                  <a:lnTo>
+                    <a:pt x="3294636" y="2671289"/>
+                  </a:lnTo>
+                  <a:lnTo>
+                    <a:pt x="3223013" y="2672040"/>
+                  </a:lnTo>
+                  <a:lnTo>
+                    <a:pt x="3151391" y="2672790"/>
+                  </a:lnTo>
+                  <a:lnTo>
+                    <a:pt x="3079768" y="2673539"/>
+                  </a:lnTo>
+                  <a:lnTo>
+                    <a:pt x="3008146" y="2674288"/>
+                  </a:lnTo>
+                  <a:lnTo>
+                    <a:pt x="2936523" y="2675036"/>
+                  </a:lnTo>
+                  <a:lnTo>
+                    <a:pt x="2864901" y="2675783"/>
+                  </a:lnTo>
+                  <a:lnTo>
+                    <a:pt x="2793278" y="2676529"/>
+                  </a:lnTo>
+                  <a:lnTo>
+                    <a:pt x="2721655" y="2677275"/>
+                  </a:lnTo>
+                  <a:lnTo>
+                    <a:pt x="2650033" y="2678020"/>
+                  </a:lnTo>
+                  <a:lnTo>
+                    <a:pt x="2578410" y="2678765"/>
+                  </a:lnTo>
+                  <a:lnTo>
+                    <a:pt x="2506788" y="2679508"/>
+                  </a:lnTo>
+                  <a:lnTo>
+                    <a:pt x="2435165" y="2680252"/>
+                  </a:lnTo>
+                  <a:lnTo>
+                    <a:pt x="2363543" y="2680994"/>
+                  </a:lnTo>
+                  <a:lnTo>
+                    <a:pt x="2291920" y="2681736"/>
+                  </a:lnTo>
+                  <a:lnTo>
+                    <a:pt x="2220298" y="2682477"/>
+                  </a:lnTo>
+                  <a:lnTo>
+                    <a:pt x="2148675" y="2683217"/>
+                  </a:lnTo>
+                  <a:lnTo>
+                    <a:pt x="2077053" y="2683957"/>
+                  </a:lnTo>
+                  <a:lnTo>
+                    <a:pt x="2005430" y="2684696"/>
+                  </a:lnTo>
+                  <a:lnTo>
+                    <a:pt x="1933808" y="2685434"/>
+                  </a:lnTo>
+                  <a:lnTo>
+                    <a:pt x="1862185" y="2686172"/>
+                  </a:lnTo>
+                  <a:lnTo>
+                    <a:pt x="1790563" y="2686908"/>
+                  </a:lnTo>
+                  <a:lnTo>
+                    <a:pt x="1718940" y="2687645"/>
+                  </a:lnTo>
+                  <a:lnTo>
+                    <a:pt x="1647318" y="2688380"/>
+                  </a:lnTo>
+                  <a:lnTo>
+                    <a:pt x="1575695" y="2689115"/>
+                  </a:lnTo>
+                  <a:lnTo>
+                    <a:pt x="1504073" y="2689849"/>
+                  </a:lnTo>
+                  <a:lnTo>
+                    <a:pt x="1432450" y="2690583"/>
+                  </a:lnTo>
+                  <a:lnTo>
+                    <a:pt x="1360827" y="2691316"/>
+                  </a:lnTo>
+                  <a:lnTo>
+                    <a:pt x="1289205" y="2692048"/>
+                  </a:lnTo>
+                  <a:lnTo>
+                    <a:pt x="1217582" y="2692779"/>
+                  </a:lnTo>
+                  <a:lnTo>
+                    <a:pt x="1145960" y="2693510"/>
+                  </a:lnTo>
+                  <a:lnTo>
+                    <a:pt x="1074337" y="2694240"/>
+                  </a:lnTo>
+                  <a:lnTo>
+                    <a:pt x="1002715" y="2694970"/>
+                  </a:lnTo>
+                  <a:lnTo>
+                    <a:pt x="931092" y="2695699"/>
+                  </a:lnTo>
+                  <a:lnTo>
+                    <a:pt x="859470" y="2696427"/>
+                  </a:lnTo>
+                  <a:lnTo>
+                    <a:pt x="787847" y="2697154"/>
+                  </a:lnTo>
+                  <a:lnTo>
+                    <a:pt x="716225" y="2697881"/>
+                  </a:lnTo>
+                  <a:lnTo>
+                    <a:pt x="644602" y="2698607"/>
+                  </a:lnTo>
+                  <a:lnTo>
+                    <a:pt x="572980" y="2699333"/>
+                  </a:lnTo>
+                  <a:lnTo>
+                    <a:pt x="501357" y="2700057"/>
+                  </a:lnTo>
+                  <a:lnTo>
+                    <a:pt x="429735" y="2700781"/>
+                  </a:lnTo>
+                  <a:lnTo>
+                    <a:pt x="358112" y="2701505"/>
+                  </a:lnTo>
+                  <a:lnTo>
+                    <a:pt x="286490" y="2702228"/>
+                  </a:lnTo>
+                  <a:lnTo>
+                    <a:pt x="214867" y="2702950"/>
+                  </a:lnTo>
+                  <a:lnTo>
+                    <a:pt x="143245" y="2703671"/>
+                  </a:lnTo>
+                  <a:lnTo>
+                    <a:pt x="71622" y="2704392"/>
+                  </a:lnTo>
+                  <a:lnTo>
+                    <a:pt x="0" y="2705112"/>
                   </a:lnTo>
                   <a:lnTo>
                     <a:pt x="0" y="0"/>
@@ -3477,153 +3483,159 @@
           </p:nvSpPr>
           <p:spPr>
             <a:xfrm>
-              <a:off x="5031339" y="2073503"/>
-              <a:ext cx="3231339" cy="2863633"/>
+              <a:off x="4851810" y="2073503"/>
+              <a:ext cx="3410868" cy="2653831"/>
             </a:xfrm>
             <a:custGeom>
               <a:avLst/>
               <a:pathLst>
-                <a:path w="3231339" h="2863633">
+                <a:path w="3410868" h="2653831">
                   <a:moveTo>
                     <a:pt x="0" y="0"/>
                   </a:moveTo>
                   <a:lnTo>
-                    <a:pt x="8326" y="41534"/>
-                  </a:lnTo>
-                  <a:lnTo>
-                    <a:pt x="79948" y="365225"/>
-                  </a:lnTo>
-                  <a:lnTo>
-                    <a:pt x="151571" y="658477"/>
-                  </a:lnTo>
-                  <a:lnTo>
-                    <a:pt x="223193" y="924153"/>
-                  </a:lnTo>
-                  <a:lnTo>
-                    <a:pt x="294816" y="1164846"/>
-                  </a:lnTo>
-                  <a:lnTo>
-                    <a:pt x="366438" y="1382905"/>
-                  </a:lnTo>
-                  <a:lnTo>
-                    <a:pt x="438061" y="1580459"/>
-                  </a:lnTo>
-                  <a:lnTo>
-                    <a:pt x="509683" y="1759436"/>
-                  </a:lnTo>
-                  <a:lnTo>
-                    <a:pt x="581306" y="1921583"/>
-                  </a:lnTo>
-                  <a:lnTo>
-                    <a:pt x="652928" y="2068482"/>
-                  </a:lnTo>
-                  <a:lnTo>
-                    <a:pt x="724551" y="2201567"/>
-                  </a:lnTo>
-                  <a:lnTo>
-                    <a:pt x="796173" y="2322138"/>
-                  </a:lnTo>
-                  <a:lnTo>
-                    <a:pt x="867796" y="2431370"/>
-                  </a:lnTo>
-                  <a:lnTo>
-                    <a:pt x="939418" y="2530331"/>
-                  </a:lnTo>
-                  <a:lnTo>
-                    <a:pt x="1011041" y="2619986"/>
-                  </a:lnTo>
-                  <a:lnTo>
-                    <a:pt x="1082664" y="2658921"/>
-                  </a:lnTo>
-                  <a:lnTo>
-                    <a:pt x="1154286" y="2666727"/>
-                  </a:lnTo>
-                  <a:lnTo>
-                    <a:pt x="1225909" y="2674460"/>
-                  </a:lnTo>
-                  <a:lnTo>
-                    <a:pt x="1297531" y="2682119"/>
-                  </a:lnTo>
-                  <a:lnTo>
-                    <a:pt x="1369154" y="2689705"/>
-                  </a:lnTo>
-                  <a:lnTo>
-                    <a:pt x="1440776" y="2697220"/>
-                  </a:lnTo>
-                  <a:lnTo>
-                    <a:pt x="1512399" y="2704663"/>
-                  </a:lnTo>
-                  <a:lnTo>
-                    <a:pt x="1584021" y="2712037"/>
-                  </a:lnTo>
-                  <a:lnTo>
-                    <a:pt x="1655644" y="2719340"/>
-                  </a:lnTo>
-                  <a:lnTo>
-                    <a:pt x="1727266" y="2726574"/>
-                  </a:lnTo>
-                  <a:lnTo>
-                    <a:pt x="1798889" y="2733740"/>
-                  </a:lnTo>
-                  <a:lnTo>
-                    <a:pt x="1870511" y="2740838"/>
-                  </a:lnTo>
-                  <a:lnTo>
-                    <a:pt x="1942134" y="2747869"/>
-                  </a:lnTo>
-                  <a:lnTo>
-                    <a:pt x="2013756" y="2754833"/>
-                  </a:lnTo>
-                  <a:lnTo>
-                    <a:pt x="2085379" y="2761731"/>
-                  </a:lnTo>
-                  <a:lnTo>
-                    <a:pt x="2157001" y="2768564"/>
-                  </a:lnTo>
-                  <a:lnTo>
-                    <a:pt x="2228624" y="2775333"/>
-                  </a:lnTo>
-                  <a:lnTo>
-                    <a:pt x="2300246" y="2782037"/>
-                  </a:lnTo>
-                  <a:lnTo>
-                    <a:pt x="2371869" y="2788678"/>
-                  </a:lnTo>
-                  <a:lnTo>
-                    <a:pt x="2443492" y="2795256"/>
-                  </a:lnTo>
-                  <a:lnTo>
-                    <a:pt x="2515114" y="2801772"/>
-                  </a:lnTo>
-                  <a:lnTo>
-                    <a:pt x="2586737" y="2808226"/>
-                  </a:lnTo>
-                  <a:lnTo>
-                    <a:pt x="2658359" y="2814619"/>
-                  </a:lnTo>
-                  <a:lnTo>
-                    <a:pt x="2729982" y="2820952"/>
-                  </a:lnTo>
-                  <a:lnTo>
-                    <a:pt x="2801604" y="2827224"/>
-                  </a:lnTo>
-                  <a:lnTo>
-                    <a:pt x="2873227" y="2833438"/>
-                  </a:lnTo>
-                  <a:lnTo>
-                    <a:pt x="2944849" y="2839592"/>
-                  </a:lnTo>
-                  <a:lnTo>
-                    <a:pt x="3016472" y="2845688"/>
-                  </a:lnTo>
-                  <a:lnTo>
-                    <a:pt x="3088094" y="2851727"/>
-                  </a:lnTo>
-                  <a:lnTo>
-                    <a:pt x="3159717" y="2857708"/>
-                  </a:lnTo>
-                  <a:lnTo>
-                    <a:pt x="3231339" y="2863633"/>
+                    <a:pt x="44610" y="180734"/>
+                  </a:lnTo>
+                  <a:lnTo>
+                    <a:pt x="116232" y="447473"/>
+                  </a:lnTo>
+                  <a:lnTo>
+                    <a:pt x="187855" y="692671"/>
+                  </a:lnTo>
+                  <a:lnTo>
+                    <a:pt x="259477" y="918068"/>
+                  </a:lnTo>
+                  <a:lnTo>
+                    <a:pt x="331100" y="1125263"/>
+                  </a:lnTo>
+                  <a:lnTo>
+                    <a:pt x="402722" y="1315726"/>
+                  </a:lnTo>
+                  <a:lnTo>
+                    <a:pt x="474345" y="1490807"/>
+                  </a:lnTo>
+                  <a:lnTo>
+                    <a:pt x="545967" y="1651749"/>
+                  </a:lnTo>
+                  <a:lnTo>
+                    <a:pt x="617590" y="1799695"/>
+                  </a:lnTo>
+                  <a:lnTo>
+                    <a:pt x="689212" y="1935693"/>
+                  </a:lnTo>
+                  <a:lnTo>
+                    <a:pt x="760835" y="2060708"/>
+                  </a:lnTo>
+                  <a:lnTo>
+                    <a:pt x="832457" y="2175627"/>
+                  </a:lnTo>
+                  <a:lnTo>
+                    <a:pt x="904080" y="2281266"/>
+                  </a:lnTo>
+                  <a:lnTo>
+                    <a:pt x="975702" y="2378374"/>
+                  </a:lnTo>
+                  <a:lnTo>
+                    <a:pt x="1047325" y="2467640"/>
+                  </a:lnTo>
+                  <a:lnTo>
+                    <a:pt x="1118947" y="2549697"/>
+                  </a:lnTo>
+                  <a:lnTo>
+                    <a:pt x="1190570" y="2625127"/>
+                  </a:lnTo>
+                  <a:lnTo>
+                    <a:pt x="1262193" y="2653831"/>
+                  </a:lnTo>
+                  <a:lnTo>
+                    <a:pt x="1333815" y="2653063"/>
+                  </a:lnTo>
+                  <a:lnTo>
+                    <a:pt x="1405438" y="2652295"/>
+                  </a:lnTo>
+                  <a:lnTo>
+                    <a:pt x="1477060" y="2651526"/>
+                  </a:lnTo>
+                  <a:lnTo>
+                    <a:pt x="1548683" y="2650756"/>
+                  </a:lnTo>
+                  <a:lnTo>
+                    <a:pt x="1620305" y="2649986"/>
+                  </a:lnTo>
+                  <a:lnTo>
+                    <a:pt x="1691928" y="2649215"/>
+                  </a:lnTo>
+                  <a:lnTo>
+                    <a:pt x="1763550" y="2648443"/>
+                  </a:lnTo>
+                  <a:lnTo>
+                    <a:pt x="1835173" y="2647671"/>
+                  </a:lnTo>
+                  <a:lnTo>
+                    <a:pt x="1906795" y="2646897"/>
+                  </a:lnTo>
+                  <a:lnTo>
+                    <a:pt x="1978418" y="2646123"/>
+                  </a:lnTo>
+                  <a:lnTo>
+                    <a:pt x="2050040" y="2645349"/>
+                  </a:lnTo>
+                  <a:lnTo>
+                    <a:pt x="2121663" y="2644573"/>
+                  </a:lnTo>
+                  <a:lnTo>
+                    <a:pt x="2193285" y="2643797"/>
+                  </a:lnTo>
+                  <a:lnTo>
+                    <a:pt x="2264908" y="2643020"/>
+                  </a:lnTo>
+                  <a:lnTo>
+                    <a:pt x="2336530" y="2642243"/>
+                  </a:lnTo>
+                  <a:lnTo>
+                    <a:pt x="2408153" y="2641465"/>
+                  </a:lnTo>
+                  <a:lnTo>
+                    <a:pt x="2479775" y="2640686"/>
+                  </a:lnTo>
+                  <a:lnTo>
+                    <a:pt x="2551398" y="2639906"/>
+                  </a:lnTo>
+                  <a:lnTo>
+                    <a:pt x="2623021" y="2639126"/>
+                  </a:lnTo>
+                  <a:lnTo>
+                    <a:pt x="2694643" y="2638345"/>
+                  </a:lnTo>
+                  <a:lnTo>
+                    <a:pt x="2766266" y="2637563"/>
+                  </a:lnTo>
+                  <a:lnTo>
+                    <a:pt x="2837888" y="2636780"/>
+                  </a:lnTo>
+                  <a:lnTo>
+                    <a:pt x="2909511" y="2635997"/>
+                  </a:lnTo>
+                  <a:lnTo>
+                    <a:pt x="2981133" y="2635213"/>
+                  </a:lnTo>
+                  <a:lnTo>
+                    <a:pt x="3052756" y="2634428"/>
+                  </a:lnTo>
+                  <a:lnTo>
+                    <a:pt x="3124378" y="2633643"/>
+                  </a:lnTo>
+                  <a:lnTo>
+                    <a:pt x="3196001" y="2632857"/>
+                  </a:lnTo>
+                  <a:lnTo>
+                    <a:pt x="3267623" y="2632070"/>
+                  </a:lnTo>
+                  <a:lnTo>
+                    <a:pt x="3339246" y="2631282"/>
+                  </a:lnTo>
+                  <a:lnTo>
+                    <a:pt x="3410868" y="2630494"/>
                   </a:lnTo>
                 </a:path>
               </a:pathLst>
@@ -3643,312 +3655,312 @@
           </p:nvSpPr>
           <p:spPr>
             <a:xfrm>
-              <a:off x="1172049" y="3967567"/>
-              <a:ext cx="7090630" cy="1549240"/>
+              <a:off x="1172049" y="4728100"/>
+              <a:ext cx="7090630" cy="766031"/>
             </a:xfrm>
             <a:custGeom>
               <a:avLst/>
               <a:pathLst>
-                <a:path w="7090630" h="1549240">
+                <a:path w="7090630" h="766031">
                   <a:moveTo>
-                    <a:pt x="7090630" y="1549240"/>
+                    <a:pt x="7090630" y="766031"/>
                   </a:moveTo>
                   <a:lnTo>
-                    <a:pt x="7019007" y="1545042"/>
-                  </a:lnTo>
-                  <a:lnTo>
-                    <a:pt x="6947385" y="1540408"/>
-                  </a:lnTo>
-                  <a:lnTo>
-                    <a:pt x="6875762" y="1535294"/>
-                  </a:lnTo>
-                  <a:lnTo>
-                    <a:pt x="6804139" y="1529649"/>
-                  </a:lnTo>
-                  <a:lnTo>
-                    <a:pt x="6732517" y="1523417"/>
-                  </a:lnTo>
-                  <a:lnTo>
-                    <a:pt x="6660894" y="1516539"/>
-                  </a:lnTo>
-                  <a:lnTo>
-                    <a:pt x="6589272" y="1508947"/>
-                  </a:lnTo>
-                  <a:lnTo>
-                    <a:pt x="6517649" y="1500567"/>
-                  </a:lnTo>
-                  <a:lnTo>
-                    <a:pt x="6446027" y="1491318"/>
-                  </a:lnTo>
-                  <a:lnTo>
-                    <a:pt x="6374404" y="1481108"/>
-                  </a:lnTo>
-                  <a:lnTo>
-                    <a:pt x="6302782" y="1469838"/>
-                  </a:lnTo>
-                  <a:lnTo>
-                    <a:pt x="6231159" y="1457399"/>
-                  </a:lnTo>
-                  <a:lnTo>
-                    <a:pt x="6159537" y="1443668"/>
-                  </a:lnTo>
-                  <a:lnTo>
-                    <a:pt x="6087914" y="1428513"/>
-                  </a:lnTo>
-                  <a:lnTo>
-                    <a:pt x="6016292" y="1411784"/>
-                  </a:lnTo>
-                  <a:lnTo>
-                    <a:pt x="5944669" y="1393319"/>
-                  </a:lnTo>
-                  <a:lnTo>
-                    <a:pt x="5873047" y="1372937"/>
-                  </a:lnTo>
-                  <a:lnTo>
-                    <a:pt x="5801424" y="1350440"/>
-                  </a:lnTo>
-                  <a:lnTo>
-                    <a:pt x="5729802" y="1325608"/>
-                  </a:lnTo>
-                  <a:lnTo>
-                    <a:pt x="5658179" y="1298198"/>
-                  </a:lnTo>
-                  <a:lnTo>
-                    <a:pt x="5586557" y="1267943"/>
-                  </a:lnTo>
-                  <a:lnTo>
-                    <a:pt x="5514934" y="1234547"/>
-                  </a:lnTo>
-                  <a:lnTo>
-                    <a:pt x="5443311" y="1197686"/>
-                  </a:lnTo>
-                  <a:lnTo>
-                    <a:pt x="5371689" y="1156998"/>
-                  </a:lnTo>
-                  <a:lnTo>
-                    <a:pt x="5300066" y="1112087"/>
-                  </a:lnTo>
-                  <a:lnTo>
-                    <a:pt x="5228444" y="1062514"/>
-                  </a:lnTo>
-                  <a:lnTo>
-                    <a:pt x="5156821" y="1007796"/>
-                  </a:lnTo>
-                  <a:lnTo>
-                    <a:pt x="5085199" y="947399"/>
-                  </a:lnTo>
-                  <a:lnTo>
-                    <a:pt x="5013576" y="880732"/>
-                  </a:lnTo>
-                  <a:lnTo>
-                    <a:pt x="4941954" y="807146"/>
-                  </a:lnTo>
-                  <a:lnTo>
-                    <a:pt x="4870331" y="756976"/>
-                  </a:lnTo>
-                  <a:lnTo>
-                    <a:pt x="4798709" y="749020"/>
-                  </a:lnTo>
-                  <a:lnTo>
-                    <a:pt x="4727086" y="740988"/>
-                  </a:lnTo>
-                  <a:lnTo>
-                    <a:pt x="4655464" y="732880"/>
-                  </a:lnTo>
-                  <a:lnTo>
-                    <a:pt x="4583841" y="724694"/>
-                  </a:lnTo>
-                  <a:lnTo>
-                    <a:pt x="4512219" y="716429"/>
-                  </a:lnTo>
-                  <a:lnTo>
-                    <a:pt x="4440596" y="708086"/>
-                  </a:lnTo>
-                  <a:lnTo>
-                    <a:pt x="4368974" y="699663"/>
-                  </a:lnTo>
-                  <a:lnTo>
-                    <a:pt x="4297351" y="691159"/>
-                  </a:lnTo>
-                  <a:lnTo>
-                    <a:pt x="4225729" y="682574"/>
-                  </a:lnTo>
-                  <a:lnTo>
-                    <a:pt x="4154106" y="673908"/>
-                  </a:lnTo>
-                  <a:lnTo>
-                    <a:pt x="4082483" y="665158"/>
-                  </a:lnTo>
-                  <a:lnTo>
-                    <a:pt x="4010861" y="656325"/>
-                  </a:lnTo>
-                  <a:lnTo>
-                    <a:pt x="3939238" y="647407"/>
-                  </a:lnTo>
-                  <a:lnTo>
-                    <a:pt x="3867616" y="638405"/>
-                  </a:lnTo>
-                  <a:lnTo>
-                    <a:pt x="3795993" y="629316"/>
-                  </a:lnTo>
-                  <a:lnTo>
-                    <a:pt x="3724371" y="620140"/>
-                  </a:lnTo>
-                  <a:lnTo>
-                    <a:pt x="3652748" y="610877"/>
-                  </a:lnTo>
-                  <a:lnTo>
-                    <a:pt x="3581126" y="601525"/>
-                  </a:lnTo>
-                  <a:lnTo>
-                    <a:pt x="3509503" y="592084"/>
-                  </a:lnTo>
-                  <a:lnTo>
-                    <a:pt x="3437881" y="582552"/>
-                  </a:lnTo>
-                  <a:lnTo>
-                    <a:pt x="3366258" y="572930"/>
-                  </a:lnTo>
-                  <a:lnTo>
-                    <a:pt x="3294636" y="563216"/>
-                  </a:lnTo>
-                  <a:lnTo>
-                    <a:pt x="3223013" y="553408"/>
-                  </a:lnTo>
-                  <a:lnTo>
-                    <a:pt x="3151391" y="543508"/>
-                  </a:lnTo>
-                  <a:lnTo>
-                    <a:pt x="3079768" y="533512"/>
-                  </a:lnTo>
-                  <a:lnTo>
-                    <a:pt x="3008146" y="523421"/>
-                  </a:lnTo>
-                  <a:lnTo>
-                    <a:pt x="2936523" y="513234"/>
-                  </a:lnTo>
-                  <a:lnTo>
-                    <a:pt x="2864901" y="502949"/>
-                  </a:lnTo>
-                  <a:lnTo>
-                    <a:pt x="2793278" y="492566"/>
-                  </a:lnTo>
-                  <a:lnTo>
-                    <a:pt x="2721655" y="482084"/>
-                  </a:lnTo>
-                  <a:lnTo>
-                    <a:pt x="2650033" y="471502"/>
-                  </a:lnTo>
-                  <a:lnTo>
-                    <a:pt x="2578410" y="460818"/>
-                  </a:lnTo>
-                  <a:lnTo>
-                    <a:pt x="2506788" y="450033"/>
-                  </a:lnTo>
-                  <a:lnTo>
-                    <a:pt x="2435165" y="439144"/>
-                  </a:lnTo>
-                  <a:lnTo>
-                    <a:pt x="2363543" y="428151"/>
-                  </a:lnTo>
-                  <a:lnTo>
-                    <a:pt x="2291920" y="417054"/>
-                  </a:lnTo>
-                  <a:lnTo>
-                    <a:pt x="2220298" y="405850"/>
-                  </a:lnTo>
-                  <a:lnTo>
-                    <a:pt x="2148675" y="394539"/>
-                  </a:lnTo>
-                  <a:lnTo>
-                    <a:pt x="2077053" y="383121"/>
-                  </a:lnTo>
-                  <a:lnTo>
-                    <a:pt x="2005430" y="371593"/>
-                  </a:lnTo>
-                  <a:lnTo>
-                    <a:pt x="1933808" y="359955"/>
-                  </a:lnTo>
-                  <a:lnTo>
-                    <a:pt x="1862185" y="348206"/>
-                  </a:lnTo>
-                  <a:lnTo>
-                    <a:pt x="1790563" y="336344"/>
-                  </a:lnTo>
-                  <a:lnTo>
-                    <a:pt x="1718940" y="324369"/>
-                  </a:lnTo>
-                  <a:lnTo>
-                    <a:pt x="1647318" y="312280"/>
-                  </a:lnTo>
-                  <a:lnTo>
-                    <a:pt x="1575695" y="300075"/>
-                  </a:lnTo>
-                  <a:lnTo>
-                    <a:pt x="1504073" y="287754"/>
-                  </a:lnTo>
-                  <a:lnTo>
-                    <a:pt x="1432450" y="275315"/>
-                  </a:lnTo>
-                  <a:lnTo>
-                    <a:pt x="1360827" y="262757"/>
-                  </a:lnTo>
-                  <a:lnTo>
-                    <a:pt x="1289205" y="250079"/>
-                  </a:lnTo>
-                  <a:lnTo>
-                    <a:pt x="1217582" y="237280"/>
-                  </a:lnTo>
-                  <a:lnTo>
-                    <a:pt x="1145960" y="224359"/>
-                  </a:lnTo>
-                  <a:lnTo>
-                    <a:pt x="1074337" y="211314"/>
-                  </a:lnTo>
-                  <a:lnTo>
-                    <a:pt x="1002715" y="198145"/>
-                  </a:lnTo>
-                  <a:lnTo>
-                    <a:pt x="931092" y="184850"/>
-                  </a:lnTo>
-                  <a:lnTo>
-                    <a:pt x="859470" y="171428"/>
-                  </a:lnTo>
-                  <a:lnTo>
-                    <a:pt x="787847" y="157877"/>
-                  </a:lnTo>
-                  <a:lnTo>
-                    <a:pt x="716225" y="144197"/>
-                  </a:lnTo>
-                  <a:lnTo>
-                    <a:pt x="644602" y="130387"/>
-                  </a:lnTo>
-                  <a:lnTo>
-                    <a:pt x="572980" y="116444"/>
-                  </a:lnTo>
-                  <a:lnTo>
-                    <a:pt x="501357" y="102368"/>
-                  </a:lnTo>
-                  <a:lnTo>
-                    <a:pt x="429735" y="88158"/>
-                  </a:lnTo>
-                  <a:lnTo>
-                    <a:pt x="358112" y="73812"/>
-                  </a:lnTo>
-                  <a:lnTo>
-                    <a:pt x="286490" y="59329"/>
-                  </a:lnTo>
-                  <a:lnTo>
-                    <a:pt x="214867" y="44707"/>
-                  </a:lnTo>
-                  <a:lnTo>
-                    <a:pt x="143245" y="29946"/>
-                  </a:lnTo>
-                  <a:lnTo>
-                    <a:pt x="71622" y="15044"/>
-                  </a:lnTo>
-                  <a:lnTo>
-                    <a:pt x="0" y="0"/>
+                    <a:pt x="7019007" y="760486"/>
+                  </a:lnTo>
+                  <a:lnTo>
+                    <a:pt x="6947385" y="754454"/>
+                  </a:lnTo>
+                  <a:lnTo>
+                    <a:pt x="6875762" y="747892"/>
+                  </a:lnTo>
+                  <a:lnTo>
+                    <a:pt x="6804139" y="740754"/>
+                  </a:lnTo>
+                  <a:lnTo>
+                    <a:pt x="6732517" y="732988"/>
+                  </a:lnTo>
+                  <a:lnTo>
+                    <a:pt x="6660894" y="724540"/>
+                  </a:lnTo>
+                  <a:lnTo>
+                    <a:pt x="6589272" y="715350"/>
+                  </a:lnTo>
+                  <a:lnTo>
+                    <a:pt x="6517649" y="705353"/>
+                  </a:lnTo>
+                  <a:lnTo>
+                    <a:pt x="6446027" y="694477"/>
+                  </a:lnTo>
+                  <a:lnTo>
+                    <a:pt x="6374404" y="682646"/>
+                  </a:lnTo>
+                  <a:lnTo>
+                    <a:pt x="6302782" y="669776"/>
+                  </a:lnTo>
+                  <a:lnTo>
+                    <a:pt x="6231159" y="655775"/>
+                  </a:lnTo>
+                  <a:lnTo>
+                    <a:pt x="6159537" y="640544"/>
+                  </a:lnTo>
+                  <a:lnTo>
+                    <a:pt x="6087914" y="623975"/>
+                  </a:lnTo>
+                  <a:lnTo>
+                    <a:pt x="6016292" y="605950"/>
+                  </a:lnTo>
+                  <a:lnTo>
+                    <a:pt x="5944669" y="586342"/>
+                  </a:lnTo>
+                  <a:lnTo>
+                    <a:pt x="5873047" y="565011"/>
+                  </a:lnTo>
+                  <a:lnTo>
+                    <a:pt x="5801424" y="541807"/>
+                  </a:lnTo>
+                  <a:lnTo>
+                    <a:pt x="5729802" y="516564"/>
+                  </a:lnTo>
+                  <a:lnTo>
+                    <a:pt x="5658179" y="489103"/>
+                  </a:lnTo>
+                  <a:lnTo>
+                    <a:pt x="5586557" y="459229"/>
+                  </a:lnTo>
+                  <a:lnTo>
+                    <a:pt x="5514934" y="426732"/>
+                  </a:lnTo>
+                  <a:lnTo>
+                    <a:pt x="5443311" y="391379"/>
+                  </a:lnTo>
+                  <a:lnTo>
+                    <a:pt x="5371689" y="352921"/>
+                  </a:lnTo>
+                  <a:lnTo>
+                    <a:pt x="5300066" y="311083"/>
+                  </a:lnTo>
+                  <a:lnTo>
+                    <a:pt x="5228444" y="265571"/>
+                  </a:lnTo>
+                  <a:lnTo>
+                    <a:pt x="5156821" y="216060"/>
+                  </a:lnTo>
+                  <a:lnTo>
+                    <a:pt x="5085199" y="162200"/>
+                  </a:lnTo>
+                  <a:lnTo>
+                    <a:pt x="5013576" y="103608"/>
+                  </a:lnTo>
+                  <a:lnTo>
+                    <a:pt x="4941954" y="39868"/>
+                  </a:lnTo>
+                  <a:lnTo>
+                    <a:pt x="4870331" y="0"/>
+                  </a:lnTo>
+                  <a:lnTo>
+                    <a:pt x="4798709" y="766"/>
+                  </a:lnTo>
+                  <a:lnTo>
+                    <a:pt x="4727086" y="1531"/>
+                  </a:lnTo>
+                  <a:lnTo>
+                    <a:pt x="4655464" y="2296"/>
+                  </a:lnTo>
+                  <a:lnTo>
+                    <a:pt x="4583841" y="3060"/>
+                  </a:lnTo>
+                  <a:lnTo>
+                    <a:pt x="4512219" y="3823"/>
+                  </a:lnTo>
+                  <a:lnTo>
+                    <a:pt x="4440596" y="4585"/>
+                  </a:lnTo>
+                  <a:lnTo>
+                    <a:pt x="4368974" y="5347"/>
+                  </a:lnTo>
+                  <a:lnTo>
+                    <a:pt x="4297351" y="6109"/>
+                  </a:lnTo>
+                  <a:lnTo>
+                    <a:pt x="4225729" y="6869"/>
+                  </a:lnTo>
+                  <a:lnTo>
+                    <a:pt x="4154106" y="7629"/>
+                  </a:lnTo>
+                  <a:lnTo>
+                    <a:pt x="4082483" y="8388"/>
+                  </a:lnTo>
+                  <a:lnTo>
+                    <a:pt x="4010861" y="9146"/>
+                  </a:lnTo>
+                  <a:lnTo>
+                    <a:pt x="3939238" y="9904"/>
+                  </a:lnTo>
+                  <a:lnTo>
+                    <a:pt x="3867616" y="10661"/>
+                  </a:lnTo>
+                  <a:lnTo>
+                    <a:pt x="3795993" y="11417"/>
+                  </a:lnTo>
+                  <a:lnTo>
+                    <a:pt x="3724371" y="12173"/>
+                  </a:lnTo>
+                  <a:lnTo>
+                    <a:pt x="3652748" y="12927"/>
+                  </a:lnTo>
+                  <a:lnTo>
+                    <a:pt x="3581126" y="13682"/>
+                  </a:lnTo>
+                  <a:lnTo>
+                    <a:pt x="3509503" y="14435"/>
+                  </a:lnTo>
+                  <a:lnTo>
+                    <a:pt x="3437881" y="15188"/>
+                  </a:lnTo>
+                  <a:lnTo>
+                    <a:pt x="3366258" y="15940"/>
+                  </a:lnTo>
+                  <a:lnTo>
+                    <a:pt x="3294636" y="16691"/>
+                  </a:lnTo>
+                  <a:lnTo>
+                    <a:pt x="3223013" y="17442"/>
+                  </a:lnTo>
+                  <a:lnTo>
+                    <a:pt x="3151391" y="18192"/>
+                  </a:lnTo>
+                  <a:lnTo>
+                    <a:pt x="3079768" y="18941"/>
+                  </a:lnTo>
+                  <a:lnTo>
+                    <a:pt x="3008146" y="19690"/>
+                  </a:lnTo>
+                  <a:lnTo>
+                    <a:pt x="2936523" y="20438"/>
+                  </a:lnTo>
+                  <a:lnTo>
+                    <a:pt x="2864901" y="21185"/>
+                  </a:lnTo>
+                  <a:lnTo>
+                    <a:pt x="2793278" y="21931"/>
+                  </a:lnTo>
+                  <a:lnTo>
+                    <a:pt x="2721655" y="22677"/>
+                  </a:lnTo>
+                  <a:lnTo>
+                    <a:pt x="2650033" y="23422"/>
+                  </a:lnTo>
+                  <a:lnTo>
+                    <a:pt x="2578410" y="24167"/>
+                  </a:lnTo>
+                  <a:lnTo>
+                    <a:pt x="2506788" y="24911"/>
+                  </a:lnTo>
+                  <a:lnTo>
+                    <a:pt x="2435165" y="25654"/>
+                  </a:lnTo>
+                  <a:lnTo>
+                    <a:pt x="2363543" y="26396"/>
+                  </a:lnTo>
+                  <a:lnTo>
+                    <a:pt x="2291920" y="27138"/>
+                  </a:lnTo>
+                  <a:lnTo>
+                    <a:pt x="2220298" y="27879"/>
+                  </a:lnTo>
+                  <a:lnTo>
+                    <a:pt x="2148675" y="28619"/>
+                  </a:lnTo>
+                  <a:lnTo>
+                    <a:pt x="2077053" y="29359"/>
+                  </a:lnTo>
+                  <a:lnTo>
+                    <a:pt x="2005430" y="30098"/>
+                  </a:lnTo>
+                  <a:lnTo>
+                    <a:pt x="1933808" y="30836"/>
+                  </a:lnTo>
+                  <a:lnTo>
+                    <a:pt x="1862185" y="31574"/>
+                  </a:lnTo>
+                  <a:lnTo>
+                    <a:pt x="1790563" y="32311"/>
+                  </a:lnTo>
+                  <a:lnTo>
+                    <a:pt x="1718940" y="33047"/>
+                  </a:lnTo>
+                  <a:lnTo>
+                    <a:pt x="1647318" y="33782"/>
+                  </a:lnTo>
+                  <a:lnTo>
+                    <a:pt x="1575695" y="34517"/>
+                  </a:lnTo>
+                  <a:lnTo>
+                    <a:pt x="1504073" y="35252"/>
+                  </a:lnTo>
+                  <a:lnTo>
+                    <a:pt x="1432450" y="35985"/>
+                  </a:lnTo>
+                  <a:lnTo>
+                    <a:pt x="1360827" y="36718"/>
+                  </a:lnTo>
+                  <a:lnTo>
+                    <a:pt x="1289205" y="37450"/>
+                  </a:lnTo>
+                  <a:lnTo>
+                    <a:pt x="1217582" y="38182"/>
+                  </a:lnTo>
+                  <a:lnTo>
+                    <a:pt x="1145960" y="38912"/>
+                  </a:lnTo>
+                  <a:lnTo>
+                    <a:pt x="1074337" y="39643"/>
+                  </a:lnTo>
+                  <a:lnTo>
+                    <a:pt x="1002715" y="40372"/>
+                  </a:lnTo>
+                  <a:lnTo>
+                    <a:pt x="931092" y="41101"/>
+                  </a:lnTo>
+                  <a:lnTo>
+                    <a:pt x="859470" y="41829"/>
+                  </a:lnTo>
+                  <a:lnTo>
+                    <a:pt x="787847" y="42556"/>
+                  </a:lnTo>
+                  <a:lnTo>
+                    <a:pt x="716225" y="43283"/>
+                  </a:lnTo>
+                  <a:lnTo>
+                    <a:pt x="644602" y="44009"/>
+                  </a:lnTo>
+                  <a:lnTo>
+                    <a:pt x="572980" y="44735"/>
+                  </a:lnTo>
+                  <a:lnTo>
+                    <a:pt x="501357" y="45459"/>
+                  </a:lnTo>
+                  <a:lnTo>
+                    <a:pt x="429735" y="46184"/>
+                  </a:lnTo>
+                  <a:lnTo>
+                    <a:pt x="358112" y="46907"/>
+                  </a:lnTo>
+                  <a:lnTo>
+                    <a:pt x="286490" y="47630"/>
+                  </a:lnTo>
+                  <a:lnTo>
+                    <a:pt x="214867" y="48352"/>
+                  </a:lnTo>
+                  <a:lnTo>
+                    <a:pt x="143245" y="49073"/>
+                  </a:lnTo>
+                  <a:lnTo>
+                    <a:pt x="71622" y="49794"/>
+                  </a:lnTo>
+                  <a:lnTo>
+                    <a:pt x="0" y="50514"/>
                   </a:lnTo>
                 </a:path>
               </a:pathLst>
@@ -3968,189 +3980,213 @@
           </p:nvSpPr>
           <p:spPr>
             <a:xfrm>
-              <a:off x="4173171" y="2073503"/>
-              <a:ext cx="4089508" cy="3325383"/>
+              <a:off x="3603426" y="2073503"/>
+              <a:ext cx="4659252" cy="3251679"/>
             </a:xfrm>
             <a:custGeom>
               <a:avLst/>
               <a:pathLst>
-                <a:path w="4089508" h="3325383">
+                <a:path w="4659252" h="3251679">
                   <a:moveTo>
                     <a:pt x="0" y="0"/>
                   </a:moveTo>
                   <a:lnTo>
-                    <a:pt x="7024" y="18901"/>
-                  </a:lnTo>
-                  <a:lnTo>
-                    <a:pt x="78646" y="201474"/>
-                  </a:lnTo>
-                  <a:lnTo>
-                    <a:pt x="150269" y="374427"/>
-                  </a:lnTo>
-                  <a:lnTo>
-                    <a:pt x="221891" y="538267"/>
-                  </a:lnTo>
-                  <a:lnTo>
-                    <a:pt x="293514" y="693473"/>
-                  </a:lnTo>
-                  <a:lnTo>
-                    <a:pt x="365136" y="840501"/>
-                  </a:lnTo>
-                  <a:lnTo>
-                    <a:pt x="436759" y="979782"/>
-                  </a:lnTo>
-                  <a:lnTo>
-                    <a:pt x="508381" y="1111724"/>
-                  </a:lnTo>
-                  <a:lnTo>
-                    <a:pt x="580004" y="1236713"/>
-                  </a:lnTo>
-                  <a:lnTo>
-                    <a:pt x="651626" y="1355116"/>
-                  </a:lnTo>
-                  <a:lnTo>
-                    <a:pt x="723249" y="1467280"/>
-                  </a:lnTo>
-                  <a:lnTo>
-                    <a:pt x="794871" y="1573534"/>
-                  </a:lnTo>
-                  <a:lnTo>
-                    <a:pt x="866494" y="1674189"/>
-                  </a:lnTo>
-                  <a:lnTo>
-                    <a:pt x="938117" y="1769540"/>
-                  </a:lnTo>
-                  <a:lnTo>
-                    <a:pt x="1009739" y="1859867"/>
-                  </a:lnTo>
-                  <a:lnTo>
-                    <a:pt x="1081362" y="1945434"/>
-                  </a:lnTo>
-                  <a:lnTo>
-                    <a:pt x="1152984" y="2026492"/>
-                  </a:lnTo>
-                  <a:lnTo>
-                    <a:pt x="1224607" y="2103280"/>
-                  </a:lnTo>
-                  <a:lnTo>
-                    <a:pt x="1296229" y="2176021"/>
-                  </a:lnTo>
-                  <a:lnTo>
-                    <a:pt x="1367852" y="2244929"/>
-                  </a:lnTo>
-                  <a:lnTo>
-                    <a:pt x="1439474" y="2310206"/>
-                  </a:lnTo>
-                  <a:lnTo>
-                    <a:pt x="1511097" y="2372043"/>
-                  </a:lnTo>
-                  <a:lnTo>
-                    <a:pt x="1582719" y="2430622"/>
-                  </a:lnTo>
-                  <a:lnTo>
-                    <a:pt x="1654342" y="2486115"/>
-                  </a:lnTo>
-                  <a:lnTo>
-                    <a:pt x="1725964" y="2538683"/>
-                  </a:lnTo>
-                  <a:lnTo>
-                    <a:pt x="1797587" y="2588481"/>
-                  </a:lnTo>
-                  <a:lnTo>
-                    <a:pt x="1869209" y="2635656"/>
-                  </a:lnTo>
-                  <a:lnTo>
-                    <a:pt x="1940832" y="2680344"/>
-                  </a:lnTo>
-                  <a:lnTo>
-                    <a:pt x="2012454" y="2722678"/>
-                  </a:lnTo>
-                  <a:lnTo>
-                    <a:pt x="2084077" y="2762781"/>
-                  </a:lnTo>
-                  <a:lnTo>
-                    <a:pt x="2155699" y="2800771"/>
-                  </a:lnTo>
-                  <a:lnTo>
-                    <a:pt x="2227322" y="2836759"/>
-                  </a:lnTo>
-                  <a:lnTo>
-                    <a:pt x="2298945" y="2870851"/>
-                  </a:lnTo>
-                  <a:lnTo>
-                    <a:pt x="2370567" y="2903146"/>
-                  </a:lnTo>
-                  <a:lnTo>
-                    <a:pt x="2442190" y="2933740"/>
-                  </a:lnTo>
-                  <a:lnTo>
-                    <a:pt x="2513812" y="2962721"/>
-                  </a:lnTo>
-                  <a:lnTo>
-                    <a:pt x="2585435" y="2990176"/>
-                  </a:lnTo>
-                  <a:lnTo>
-                    <a:pt x="2657057" y="3016183"/>
-                  </a:lnTo>
-                  <a:lnTo>
-                    <a:pt x="2728680" y="3040821"/>
-                  </a:lnTo>
-                  <a:lnTo>
-                    <a:pt x="2800302" y="3064160"/>
-                  </a:lnTo>
-                  <a:lnTo>
-                    <a:pt x="2871925" y="3086269"/>
-                  </a:lnTo>
-                  <a:lnTo>
-                    <a:pt x="2943547" y="3107213"/>
-                  </a:lnTo>
-                  <a:lnTo>
-                    <a:pt x="3015170" y="3127054"/>
-                  </a:lnTo>
-                  <a:lnTo>
-                    <a:pt x="3086792" y="3145849"/>
-                  </a:lnTo>
-                  <a:lnTo>
-                    <a:pt x="3158415" y="3163654"/>
-                  </a:lnTo>
-                  <a:lnTo>
-                    <a:pt x="3230037" y="3180521"/>
-                  </a:lnTo>
-                  <a:lnTo>
-                    <a:pt x="3301660" y="3196499"/>
-                  </a:lnTo>
-                  <a:lnTo>
-                    <a:pt x="3373282" y="3211635"/>
-                  </a:lnTo>
-                  <a:lnTo>
-                    <a:pt x="3444905" y="3225973"/>
-                  </a:lnTo>
-                  <a:lnTo>
-                    <a:pt x="3516527" y="3239556"/>
-                  </a:lnTo>
-                  <a:lnTo>
-                    <a:pt x="3588150" y="3252423"/>
-                  </a:lnTo>
-                  <a:lnTo>
-                    <a:pt x="3659773" y="3264612"/>
-                  </a:lnTo>
-                  <a:lnTo>
-                    <a:pt x="3731395" y="3276159"/>
-                  </a:lnTo>
-                  <a:lnTo>
-                    <a:pt x="3803018" y="3287097"/>
-                  </a:lnTo>
-                  <a:lnTo>
-                    <a:pt x="3874640" y="3297460"/>
-                  </a:lnTo>
-                  <a:lnTo>
-                    <a:pt x="3946263" y="3307276"/>
-                  </a:lnTo>
-                  <a:lnTo>
-                    <a:pt x="4017885" y="3316574"/>
-                  </a:lnTo>
-                  <a:lnTo>
-                    <a:pt x="4089508" y="3325383"/>
+                    <a:pt x="3788" y="7817"/>
+                  </a:lnTo>
+                  <a:lnTo>
+                    <a:pt x="75411" y="149582"/>
+                  </a:lnTo>
+                  <a:lnTo>
+                    <a:pt x="147033" y="285565"/>
+                  </a:lnTo>
+                  <a:lnTo>
+                    <a:pt x="218656" y="416003"/>
+                  </a:lnTo>
+                  <a:lnTo>
+                    <a:pt x="290278" y="541120"/>
+                  </a:lnTo>
+                  <a:lnTo>
+                    <a:pt x="361901" y="661134"/>
+                  </a:lnTo>
+                  <a:lnTo>
+                    <a:pt x="433523" y="776254"/>
+                  </a:lnTo>
+                  <a:lnTo>
+                    <a:pt x="505146" y="886679"/>
+                  </a:lnTo>
+                  <a:lnTo>
+                    <a:pt x="576768" y="992600"/>
+                  </a:lnTo>
+                  <a:lnTo>
+                    <a:pt x="648391" y="1094201"/>
+                  </a:lnTo>
+                  <a:lnTo>
+                    <a:pt x="720013" y="1191658"/>
+                  </a:lnTo>
+                  <a:lnTo>
+                    <a:pt x="791636" y="1285140"/>
+                  </a:lnTo>
+                  <a:lnTo>
+                    <a:pt x="863258" y="1374810"/>
+                  </a:lnTo>
+                  <a:lnTo>
+                    <a:pt x="934881" y="1460822"/>
+                  </a:lnTo>
+                  <a:lnTo>
+                    <a:pt x="1006503" y="1543327"/>
+                  </a:lnTo>
+                  <a:lnTo>
+                    <a:pt x="1078126" y="1622467"/>
+                  </a:lnTo>
+                  <a:lnTo>
+                    <a:pt x="1149748" y="1698379"/>
+                  </a:lnTo>
+                  <a:lnTo>
+                    <a:pt x="1221371" y="1771195"/>
+                  </a:lnTo>
+                  <a:lnTo>
+                    <a:pt x="1292993" y="1841041"/>
+                  </a:lnTo>
+                  <a:lnTo>
+                    <a:pt x="1364616" y="1908038"/>
+                  </a:lnTo>
+                  <a:lnTo>
+                    <a:pt x="1436239" y="1972303"/>
+                  </a:lnTo>
+                  <a:lnTo>
+                    <a:pt x="1507861" y="2033947"/>
+                  </a:lnTo>
+                  <a:lnTo>
+                    <a:pt x="1579484" y="2093077"/>
+                  </a:lnTo>
+                  <a:lnTo>
+                    <a:pt x="1651106" y="2149795"/>
+                  </a:lnTo>
+                  <a:lnTo>
+                    <a:pt x="1722729" y="2204200"/>
+                  </a:lnTo>
+                  <a:lnTo>
+                    <a:pt x="1794351" y="2256386"/>
+                  </a:lnTo>
+                  <a:lnTo>
+                    <a:pt x="1865974" y="2306444"/>
+                  </a:lnTo>
+                  <a:lnTo>
+                    <a:pt x="1937596" y="2354460"/>
+                  </a:lnTo>
+                  <a:lnTo>
+                    <a:pt x="2009219" y="2400517"/>
+                  </a:lnTo>
+                  <a:lnTo>
+                    <a:pt x="2080841" y="2444697"/>
+                  </a:lnTo>
+                  <a:lnTo>
+                    <a:pt x="2152464" y="2487074"/>
+                  </a:lnTo>
+                  <a:lnTo>
+                    <a:pt x="2224086" y="2527723"/>
+                  </a:lnTo>
+                  <a:lnTo>
+                    <a:pt x="2295709" y="2566714"/>
+                  </a:lnTo>
+                  <a:lnTo>
+                    <a:pt x="2367331" y="2604115"/>
+                  </a:lnTo>
+                  <a:lnTo>
+                    <a:pt x="2438954" y="2639991"/>
+                  </a:lnTo>
+                  <a:lnTo>
+                    <a:pt x="2510576" y="2674403"/>
+                  </a:lnTo>
+                  <a:lnTo>
+                    <a:pt x="2582199" y="2707412"/>
+                  </a:lnTo>
+                  <a:lnTo>
+                    <a:pt x="2653821" y="2739075"/>
+                  </a:lnTo>
+                  <a:lnTo>
+                    <a:pt x="2725444" y="2769446"/>
+                  </a:lnTo>
+                  <a:lnTo>
+                    <a:pt x="2797067" y="2798579"/>
+                  </a:lnTo>
+                  <a:lnTo>
+                    <a:pt x="2868689" y="2826523"/>
+                  </a:lnTo>
+                  <a:lnTo>
+                    <a:pt x="2940312" y="2853328"/>
+                  </a:lnTo>
+                  <a:lnTo>
+                    <a:pt x="3011934" y="2879040"/>
+                  </a:lnTo>
+                  <a:lnTo>
+                    <a:pt x="3083557" y="2903702"/>
+                  </a:lnTo>
+                  <a:lnTo>
+                    <a:pt x="3155179" y="2927359"/>
+                  </a:lnTo>
+                  <a:lnTo>
+                    <a:pt x="3226802" y="2950051"/>
+                  </a:lnTo>
+                  <a:lnTo>
+                    <a:pt x="3298424" y="2971818"/>
+                  </a:lnTo>
+                  <a:lnTo>
+                    <a:pt x="3370047" y="2992697"/>
+                  </a:lnTo>
+                  <a:lnTo>
+                    <a:pt x="3441669" y="3012724"/>
+                  </a:lnTo>
+                  <a:lnTo>
+                    <a:pt x="3513292" y="3031935"/>
+                  </a:lnTo>
+                  <a:lnTo>
+                    <a:pt x="3584914" y="3050362"/>
+                  </a:lnTo>
+                  <a:lnTo>
+                    <a:pt x="3656537" y="3068037"/>
+                  </a:lnTo>
+                  <a:lnTo>
+                    <a:pt x="3728159" y="3084992"/>
+                  </a:lnTo>
+                  <a:lnTo>
+                    <a:pt x="3799782" y="3101255"/>
+                  </a:lnTo>
+                  <a:lnTo>
+                    <a:pt x="3871404" y="3116855"/>
+                  </a:lnTo>
+                  <a:lnTo>
+                    <a:pt x="3943027" y="3131819"/>
+                  </a:lnTo>
+                  <a:lnTo>
+                    <a:pt x="4014649" y="3146172"/>
+                  </a:lnTo>
+                  <a:lnTo>
+                    <a:pt x="4086272" y="3159940"/>
+                  </a:lnTo>
+                  <a:lnTo>
+                    <a:pt x="4157895" y="3173146"/>
+                  </a:lnTo>
+                  <a:lnTo>
+                    <a:pt x="4229517" y="3185814"/>
+                  </a:lnTo>
+                  <a:lnTo>
+                    <a:pt x="4301140" y="3197965"/>
+                  </a:lnTo>
+                  <a:lnTo>
+                    <a:pt x="4372762" y="3209621"/>
+                  </a:lnTo>
+                  <a:lnTo>
+                    <a:pt x="4444385" y="3220801"/>
+                  </a:lnTo>
+                  <a:lnTo>
+                    <a:pt x="4516007" y="3231525"/>
+                  </a:lnTo>
+                  <a:lnTo>
+                    <a:pt x="4587630" y="3241812"/>
+                  </a:lnTo>
+                  <a:lnTo>
+                    <a:pt x="4659252" y="3251679"/>
                   </a:lnTo>
                 </a:path>
               </a:pathLst>
@@ -4890,7 +4926,7 @@
                   <a:latin typeface="Helvetica"/>
                   <a:cs typeface="Helvetica"/>
                 </a:rPr>
-                <a:t>subHR per 1 mL/min: 0.93 (0.88-0.99)  |  per IQR (Δ = 18.2): 0.28 (0.10-0.80)  |  IQR: [-11.5, 6.7]</a:t>
+                <a:t>subHR per 1 mL/min: 0.95 (0.90-1.00)  |  per IQR (Δ = 18.2): 0.38 (0.14-1.02)  |  IQR: [-11.5, 6.7]</a:t>
               </a:r>
             </a:p>
           </p:txBody>

--- a/docs/plots/carbo/jx_carbo_linsubhr_egfrdisc_throm3.pptx
+++ b/docs/plots/carbo/jx_carbo_linsubhr_egfrdisc_throm3.pptx
@@ -3003,458 +3003,452 @@
           <p:spPr>
             <a:xfrm>
               <a:off x="1172049" y="2073503"/>
-              <a:ext cx="7090630" cy="3420629"/>
+              <a:ext cx="7090630" cy="3443304"/>
             </a:xfrm>
             <a:custGeom>
               <a:avLst/>
               <a:pathLst>
-                <a:path w="7090630" h="3420629">
+                <a:path w="7090630" h="3443304">
                   <a:moveTo>
-                    <a:pt x="3679761" y="0"/>
+                    <a:pt x="3859290" y="0"/>
                   </a:moveTo>
                   <a:lnTo>
-                    <a:pt x="3724371" y="180734"/>
-                  </a:lnTo>
-                  <a:lnTo>
-                    <a:pt x="3795993" y="447473"/>
-                  </a:lnTo>
-                  <a:lnTo>
-                    <a:pt x="3867616" y="692671"/>
-                  </a:lnTo>
-                  <a:lnTo>
-                    <a:pt x="3939238" y="918068"/>
-                  </a:lnTo>
-                  <a:lnTo>
-                    <a:pt x="4010861" y="1125263"/>
-                  </a:lnTo>
-                  <a:lnTo>
-                    <a:pt x="4082483" y="1315726"/>
-                  </a:lnTo>
-                  <a:lnTo>
-                    <a:pt x="4154106" y="1490807"/>
-                  </a:lnTo>
-                  <a:lnTo>
-                    <a:pt x="4225729" y="1651749"/>
-                  </a:lnTo>
-                  <a:lnTo>
-                    <a:pt x="4297351" y="1799695"/>
-                  </a:lnTo>
-                  <a:lnTo>
-                    <a:pt x="4368974" y="1935693"/>
-                  </a:lnTo>
-                  <a:lnTo>
-                    <a:pt x="4440596" y="2060708"/>
-                  </a:lnTo>
-                  <a:lnTo>
-                    <a:pt x="4512219" y="2175627"/>
-                  </a:lnTo>
-                  <a:lnTo>
-                    <a:pt x="4583841" y="2281266"/>
-                  </a:lnTo>
-                  <a:lnTo>
-                    <a:pt x="4655464" y="2378374"/>
-                  </a:lnTo>
-                  <a:lnTo>
-                    <a:pt x="4727086" y="2467640"/>
-                  </a:lnTo>
-                  <a:lnTo>
-                    <a:pt x="4798709" y="2549697"/>
-                  </a:lnTo>
-                  <a:lnTo>
-                    <a:pt x="4870331" y="2625127"/>
-                  </a:lnTo>
-                  <a:lnTo>
-                    <a:pt x="4941954" y="2653831"/>
-                  </a:lnTo>
-                  <a:lnTo>
-                    <a:pt x="5013576" y="2653063"/>
-                  </a:lnTo>
-                  <a:lnTo>
-                    <a:pt x="5085199" y="2652295"/>
-                  </a:lnTo>
-                  <a:lnTo>
-                    <a:pt x="5156821" y="2651526"/>
-                  </a:lnTo>
-                  <a:lnTo>
-                    <a:pt x="5228444" y="2650756"/>
-                  </a:lnTo>
-                  <a:lnTo>
-                    <a:pt x="5300066" y="2649986"/>
-                  </a:lnTo>
-                  <a:lnTo>
-                    <a:pt x="5371689" y="2649215"/>
-                  </a:lnTo>
-                  <a:lnTo>
-                    <a:pt x="5443311" y="2648443"/>
-                  </a:lnTo>
-                  <a:lnTo>
-                    <a:pt x="5514934" y="2647671"/>
-                  </a:lnTo>
-                  <a:lnTo>
-                    <a:pt x="5586557" y="2646897"/>
-                  </a:lnTo>
-                  <a:lnTo>
-                    <a:pt x="5658179" y="2646123"/>
-                  </a:lnTo>
-                  <a:lnTo>
-                    <a:pt x="5729802" y="2645349"/>
-                  </a:lnTo>
-                  <a:lnTo>
-                    <a:pt x="5801424" y="2644573"/>
-                  </a:lnTo>
-                  <a:lnTo>
-                    <a:pt x="5873047" y="2643797"/>
-                  </a:lnTo>
-                  <a:lnTo>
-                    <a:pt x="5944669" y="2643020"/>
-                  </a:lnTo>
-                  <a:lnTo>
-                    <a:pt x="6016292" y="2642243"/>
-                  </a:lnTo>
-                  <a:lnTo>
-                    <a:pt x="6087914" y="2641465"/>
-                  </a:lnTo>
-                  <a:lnTo>
-                    <a:pt x="6159537" y="2640686"/>
-                  </a:lnTo>
-                  <a:lnTo>
-                    <a:pt x="6231159" y="2639906"/>
-                  </a:lnTo>
-                  <a:lnTo>
-                    <a:pt x="6302782" y="2639126"/>
-                  </a:lnTo>
-                  <a:lnTo>
-                    <a:pt x="6374404" y="2638345"/>
-                  </a:lnTo>
-                  <a:lnTo>
-                    <a:pt x="6446027" y="2637563"/>
-                  </a:lnTo>
-                  <a:lnTo>
-                    <a:pt x="6517649" y="2636780"/>
-                  </a:lnTo>
-                  <a:lnTo>
-                    <a:pt x="6589272" y="2635997"/>
-                  </a:lnTo>
-                  <a:lnTo>
-                    <a:pt x="6660894" y="2635213"/>
-                  </a:lnTo>
-                  <a:lnTo>
-                    <a:pt x="6732517" y="2634428"/>
-                  </a:lnTo>
-                  <a:lnTo>
-                    <a:pt x="6804139" y="2633643"/>
-                  </a:lnTo>
-                  <a:lnTo>
-                    <a:pt x="6875762" y="2632857"/>
-                  </a:lnTo>
-                  <a:lnTo>
-                    <a:pt x="6947385" y="2632070"/>
-                  </a:lnTo>
-                  <a:lnTo>
-                    <a:pt x="7019007" y="2631282"/>
-                  </a:lnTo>
-                  <a:lnTo>
-                    <a:pt x="7090630" y="2630494"/>
-                  </a:lnTo>
-                  <a:lnTo>
-                    <a:pt x="7090630" y="3420629"/>
-                  </a:lnTo>
-                  <a:lnTo>
-                    <a:pt x="7019007" y="3415084"/>
-                  </a:lnTo>
-                  <a:lnTo>
-                    <a:pt x="6947385" y="3409052"/>
-                  </a:lnTo>
-                  <a:lnTo>
-                    <a:pt x="6875762" y="3402490"/>
-                  </a:lnTo>
-                  <a:lnTo>
-                    <a:pt x="6804139" y="3395351"/>
-                  </a:lnTo>
-                  <a:lnTo>
-                    <a:pt x="6732517" y="3387586"/>
-                  </a:lnTo>
-                  <a:lnTo>
-                    <a:pt x="6660894" y="3379138"/>
-                  </a:lnTo>
-                  <a:lnTo>
-                    <a:pt x="6589272" y="3369948"/>
-                  </a:lnTo>
-                  <a:lnTo>
-                    <a:pt x="6517649" y="3359951"/>
-                  </a:lnTo>
-                  <a:lnTo>
-                    <a:pt x="6446027" y="3349075"/>
-                  </a:lnTo>
-                  <a:lnTo>
-                    <a:pt x="6374404" y="3337244"/>
-                  </a:lnTo>
-                  <a:lnTo>
-                    <a:pt x="6302782" y="3324374"/>
-                  </a:lnTo>
-                  <a:lnTo>
-                    <a:pt x="6231159" y="3310373"/>
-                  </a:lnTo>
-                  <a:lnTo>
-                    <a:pt x="6159537" y="3295142"/>
-                  </a:lnTo>
-                  <a:lnTo>
-                    <a:pt x="6087914" y="3278573"/>
-                  </a:lnTo>
-                  <a:lnTo>
-                    <a:pt x="6016292" y="3260548"/>
-                  </a:lnTo>
-                  <a:lnTo>
-                    <a:pt x="5944669" y="3240940"/>
-                  </a:lnTo>
-                  <a:lnTo>
-                    <a:pt x="5873047" y="3219609"/>
-                  </a:lnTo>
-                  <a:lnTo>
-                    <a:pt x="5801424" y="3196405"/>
-                  </a:lnTo>
-                  <a:lnTo>
-                    <a:pt x="5729802" y="3171161"/>
-                  </a:lnTo>
-                  <a:lnTo>
-                    <a:pt x="5658179" y="3143701"/>
-                  </a:lnTo>
-                  <a:lnTo>
-                    <a:pt x="5586557" y="3113827"/>
-                  </a:lnTo>
-                  <a:lnTo>
-                    <a:pt x="5514934" y="3081329"/>
-                  </a:lnTo>
-                  <a:lnTo>
-                    <a:pt x="5443311" y="3045977"/>
-                  </a:lnTo>
-                  <a:lnTo>
-                    <a:pt x="5371689" y="3007518"/>
-                  </a:lnTo>
-                  <a:lnTo>
-                    <a:pt x="5300066" y="2965681"/>
-                  </a:lnTo>
-                  <a:lnTo>
-                    <a:pt x="5228444" y="2920169"/>
-                  </a:lnTo>
-                  <a:lnTo>
-                    <a:pt x="5156821" y="2870658"/>
-                  </a:lnTo>
-                  <a:lnTo>
-                    <a:pt x="5085199" y="2816798"/>
-                  </a:lnTo>
-                  <a:lnTo>
-                    <a:pt x="5013576" y="2758206"/>
-                  </a:lnTo>
-                  <a:lnTo>
-                    <a:pt x="4941954" y="2694466"/>
-                  </a:lnTo>
-                  <a:lnTo>
-                    <a:pt x="4870331" y="2654597"/>
-                  </a:lnTo>
-                  <a:lnTo>
-                    <a:pt x="4798709" y="2655363"/>
-                  </a:lnTo>
-                  <a:lnTo>
-                    <a:pt x="4727086" y="2656129"/>
-                  </a:lnTo>
-                  <a:lnTo>
-                    <a:pt x="4655464" y="2656894"/>
-                  </a:lnTo>
-                  <a:lnTo>
-                    <a:pt x="4583841" y="2657658"/>
-                  </a:lnTo>
-                  <a:lnTo>
-                    <a:pt x="4512219" y="2658421"/>
-                  </a:lnTo>
-                  <a:lnTo>
-                    <a:pt x="4440596" y="2659183"/>
-                  </a:lnTo>
-                  <a:lnTo>
-                    <a:pt x="4368974" y="2659945"/>
-                  </a:lnTo>
-                  <a:lnTo>
-                    <a:pt x="4297351" y="2660706"/>
-                  </a:lnTo>
-                  <a:lnTo>
-                    <a:pt x="4225729" y="2661467"/>
-                  </a:lnTo>
-                  <a:lnTo>
-                    <a:pt x="4154106" y="2662227"/>
-                  </a:lnTo>
-                  <a:lnTo>
-                    <a:pt x="4082483" y="2662986"/>
-                  </a:lnTo>
-                  <a:lnTo>
-                    <a:pt x="4010861" y="2663744"/>
-                  </a:lnTo>
-                  <a:lnTo>
-                    <a:pt x="3939238" y="2664502"/>
-                  </a:lnTo>
-                  <a:lnTo>
-                    <a:pt x="3867616" y="2665259"/>
-                  </a:lnTo>
-                  <a:lnTo>
-                    <a:pt x="3795993" y="2666015"/>
-                  </a:lnTo>
-                  <a:lnTo>
-                    <a:pt x="3724371" y="2666770"/>
-                  </a:lnTo>
-                  <a:lnTo>
-                    <a:pt x="3652748" y="2667525"/>
-                  </a:lnTo>
-                  <a:lnTo>
-                    <a:pt x="3581126" y="2668279"/>
-                  </a:lnTo>
-                  <a:lnTo>
-                    <a:pt x="3509503" y="2669033"/>
-                  </a:lnTo>
-                  <a:lnTo>
-                    <a:pt x="3437881" y="2669786"/>
-                  </a:lnTo>
-                  <a:lnTo>
-                    <a:pt x="3366258" y="2670538"/>
-                  </a:lnTo>
-                  <a:lnTo>
-                    <a:pt x="3294636" y="2671289"/>
-                  </a:lnTo>
-                  <a:lnTo>
-                    <a:pt x="3223013" y="2672040"/>
-                  </a:lnTo>
-                  <a:lnTo>
-                    <a:pt x="3151391" y="2672790"/>
-                  </a:lnTo>
-                  <a:lnTo>
-                    <a:pt x="3079768" y="2673539"/>
-                  </a:lnTo>
-                  <a:lnTo>
-                    <a:pt x="3008146" y="2674288"/>
-                  </a:lnTo>
-                  <a:lnTo>
-                    <a:pt x="2936523" y="2675036"/>
-                  </a:lnTo>
-                  <a:lnTo>
-                    <a:pt x="2864901" y="2675783"/>
-                  </a:lnTo>
-                  <a:lnTo>
-                    <a:pt x="2793278" y="2676529"/>
-                  </a:lnTo>
-                  <a:lnTo>
-                    <a:pt x="2721655" y="2677275"/>
-                  </a:lnTo>
-                  <a:lnTo>
-                    <a:pt x="2650033" y="2678020"/>
-                  </a:lnTo>
-                  <a:lnTo>
-                    <a:pt x="2578410" y="2678765"/>
-                  </a:lnTo>
-                  <a:lnTo>
-                    <a:pt x="2506788" y="2679508"/>
-                  </a:lnTo>
-                  <a:lnTo>
-                    <a:pt x="2435165" y="2680252"/>
-                  </a:lnTo>
-                  <a:lnTo>
-                    <a:pt x="2363543" y="2680994"/>
-                  </a:lnTo>
-                  <a:lnTo>
-                    <a:pt x="2291920" y="2681736"/>
-                  </a:lnTo>
-                  <a:lnTo>
-                    <a:pt x="2220298" y="2682477"/>
-                  </a:lnTo>
-                  <a:lnTo>
-                    <a:pt x="2148675" y="2683217"/>
-                  </a:lnTo>
-                  <a:lnTo>
-                    <a:pt x="2077053" y="2683957"/>
-                  </a:lnTo>
-                  <a:lnTo>
-                    <a:pt x="2005430" y="2684696"/>
-                  </a:lnTo>
-                  <a:lnTo>
-                    <a:pt x="1933808" y="2685434"/>
-                  </a:lnTo>
-                  <a:lnTo>
-                    <a:pt x="1862185" y="2686172"/>
-                  </a:lnTo>
-                  <a:lnTo>
-                    <a:pt x="1790563" y="2686908"/>
-                  </a:lnTo>
-                  <a:lnTo>
-                    <a:pt x="1718940" y="2687645"/>
-                  </a:lnTo>
-                  <a:lnTo>
-                    <a:pt x="1647318" y="2688380"/>
-                  </a:lnTo>
-                  <a:lnTo>
-                    <a:pt x="1575695" y="2689115"/>
-                  </a:lnTo>
-                  <a:lnTo>
-                    <a:pt x="1504073" y="2689849"/>
-                  </a:lnTo>
-                  <a:lnTo>
-                    <a:pt x="1432450" y="2690583"/>
-                  </a:lnTo>
-                  <a:lnTo>
-                    <a:pt x="1360827" y="2691316"/>
-                  </a:lnTo>
-                  <a:lnTo>
-                    <a:pt x="1289205" y="2692048"/>
-                  </a:lnTo>
-                  <a:lnTo>
-                    <a:pt x="1217582" y="2692779"/>
-                  </a:lnTo>
-                  <a:lnTo>
-                    <a:pt x="1145960" y="2693510"/>
-                  </a:lnTo>
-                  <a:lnTo>
-                    <a:pt x="1074337" y="2694240"/>
-                  </a:lnTo>
-                  <a:lnTo>
-                    <a:pt x="1002715" y="2694970"/>
-                  </a:lnTo>
-                  <a:lnTo>
-                    <a:pt x="931092" y="2695699"/>
-                  </a:lnTo>
-                  <a:lnTo>
-                    <a:pt x="859470" y="2696427"/>
-                  </a:lnTo>
-                  <a:lnTo>
-                    <a:pt x="787847" y="2697154"/>
-                  </a:lnTo>
-                  <a:lnTo>
-                    <a:pt x="716225" y="2697881"/>
-                  </a:lnTo>
-                  <a:lnTo>
-                    <a:pt x="644602" y="2698607"/>
-                  </a:lnTo>
-                  <a:lnTo>
-                    <a:pt x="572980" y="2699333"/>
-                  </a:lnTo>
-                  <a:lnTo>
-                    <a:pt x="501357" y="2700057"/>
-                  </a:lnTo>
-                  <a:lnTo>
-                    <a:pt x="429735" y="2700781"/>
-                  </a:lnTo>
-                  <a:lnTo>
-                    <a:pt x="358112" y="2701505"/>
-                  </a:lnTo>
-                  <a:lnTo>
-                    <a:pt x="286490" y="2702228"/>
-                  </a:lnTo>
-                  <a:lnTo>
-                    <a:pt x="214867" y="2702950"/>
-                  </a:lnTo>
-                  <a:lnTo>
-                    <a:pt x="143245" y="2703671"/>
-                  </a:lnTo>
-                  <a:lnTo>
-                    <a:pt x="71622" y="2704392"/>
-                  </a:lnTo>
-                  <a:lnTo>
-                    <a:pt x="0" y="2705112"/>
+                    <a:pt x="3867616" y="41534"/>
+                  </a:lnTo>
+                  <a:lnTo>
+                    <a:pt x="3939238" y="365225"/>
+                  </a:lnTo>
+                  <a:lnTo>
+                    <a:pt x="4010861" y="658477"/>
+                  </a:lnTo>
+                  <a:lnTo>
+                    <a:pt x="4082483" y="924153"/>
+                  </a:lnTo>
+                  <a:lnTo>
+                    <a:pt x="4154106" y="1164846"/>
+                  </a:lnTo>
+                  <a:lnTo>
+                    <a:pt x="4225729" y="1382905"/>
+                  </a:lnTo>
+                  <a:lnTo>
+                    <a:pt x="4297351" y="1580459"/>
+                  </a:lnTo>
+                  <a:lnTo>
+                    <a:pt x="4368974" y="1759436"/>
+                  </a:lnTo>
+                  <a:lnTo>
+                    <a:pt x="4440596" y="1921583"/>
+                  </a:lnTo>
+                  <a:lnTo>
+                    <a:pt x="4512219" y="2068482"/>
+                  </a:lnTo>
+                  <a:lnTo>
+                    <a:pt x="4583841" y="2201567"/>
+                  </a:lnTo>
+                  <a:lnTo>
+                    <a:pt x="4655464" y="2322138"/>
+                  </a:lnTo>
+                  <a:lnTo>
+                    <a:pt x="4727086" y="2431370"/>
+                  </a:lnTo>
+                  <a:lnTo>
+                    <a:pt x="4798709" y="2530331"/>
+                  </a:lnTo>
+                  <a:lnTo>
+                    <a:pt x="4870331" y="2619986"/>
+                  </a:lnTo>
+                  <a:lnTo>
+                    <a:pt x="4941954" y="2658921"/>
+                  </a:lnTo>
+                  <a:lnTo>
+                    <a:pt x="5013576" y="2666727"/>
+                  </a:lnTo>
+                  <a:lnTo>
+                    <a:pt x="5085199" y="2674460"/>
+                  </a:lnTo>
+                  <a:lnTo>
+                    <a:pt x="5156821" y="2682119"/>
+                  </a:lnTo>
+                  <a:lnTo>
+                    <a:pt x="5228444" y="2689705"/>
+                  </a:lnTo>
+                  <a:lnTo>
+                    <a:pt x="5300066" y="2697220"/>
+                  </a:lnTo>
+                  <a:lnTo>
+                    <a:pt x="5371689" y="2704663"/>
+                  </a:lnTo>
+                  <a:lnTo>
+                    <a:pt x="5443311" y="2712037"/>
+                  </a:lnTo>
+                  <a:lnTo>
+                    <a:pt x="5514934" y="2719340"/>
+                  </a:lnTo>
+                  <a:lnTo>
+                    <a:pt x="5586557" y="2726574"/>
+                  </a:lnTo>
+                  <a:lnTo>
+                    <a:pt x="5658179" y="2733740"/>
+                  </a:lnTo>
+                  <a:lnTo>
+                    <a:pt x="5729802" y="2740838"/>
+                  </a:lnTo>
+                  <a:lnTo>
+                    <a:pt x="5801424" y="2747869"/>
+                  </a:lnTo>
+                  <a:lnTo>
+                    <a:pt x="5873047" y="2754833"/>
+                  </a:lnTo>
+                  <a:lnTo>
+                    <a:pt x="5944669" y="2761731"/>
+                  </a:lnTo>
+                  <a:lnTo>
+                    <a:pt x="6016292" y="2768564"/>
+                  </a:lnTo>
+                  <a:lnTo>
+                    <a:pt x="6087914" y="2775333"/>
+                  </a:lnTo>
+                  <a:lnTo>
+                    <a:pt x="6159537" y="2782037"/>
+                  </a:lnTo>
+                  <a:lnTo>
+                    <a:pt x="6231159" y="2788678"/>
+                  </a:lnTo>
+                  <a:lnTo>
+                    <a:pt x="6302782" y="2795256"/>
+                  </a:lnTo>
+                  <a:lnTo>
+                    <a:pt x="6374404" y="2801772"/>
+                  </a:lnTo>
+                  <a:lnTo>
+                    <a:pt x="6446027" y="2808226"/>
+                  </a:lnTo>
+                  <a:lnTo>
+                    <a:pt x="6517649" y="2814619"/>
+                  </a:lnTo>
+                  <a:lnTo>
+                    <a:pt x="6589272" y="2820952"/>
+                  </a:lnTo>
+                  <a:lnTo>
+                    <a:pt x="6660894" y="2827224"/>
+                  </a:lnTo>
+                  <a:lnTo>
+                    <a:pt x="6732517" y="2833438"/>
+                  </a:lnTo>
+                  <a:lnTo>
+                    <a:pt x="6804139" y="2839592"/>
+                  </a:lnTo>
+                  <a:lnTo>
+                    <a:pt x="6875762" y="2845688"/>
+                  </a:lnTo>
+                  <a:lnTo>
+                    <a:pt x="6947385" y="2851727"/>
+                  </a:lnTo>
+                  <a:lnTo>
+                    <a:pt x="7019007" y="2857708"/>
+                  </a:lnTo>
+                  <a:lnTo>
+                    <a:pt x="7090630" y="2863633"/>
+                  </a:lnTo>
+                  <a:lnTo>
+                    <a:pt x="7090630" y="3443304"/>
+                  </a:lnTo>
+                  <a:lnTo>
+                    <a:pt x="7019007" y="3439106"/>
+                  </a:lnTo>
+                  <a:lnTo>
+                    <a:pt x="6947385" y="3434473"/>
+                  </a:lnTo>
+                  <a:lnTo>
+                    <a:pt x="6875762" y="3429358"/>
+                  </a:lnTo>
+                  <a:lnTo>
+                    <a:pt x="6804139" y="3423713"/>
+                  </a:lnTo>
+                  <a:lnTo>
+                    <a:pt x="6732517" y="3417482"/>
+                  </a:lnTo>
+                  <a:lnTo>
+                    <a:pt x="6660894" y="3410604"/>
+                  </a:lnTo>
+                  <a:lnTo>
+                    <a:pt x="6589272" y="3403012"/>
+                  </a:lnTo>
+                  <a:lnTo>
+                    <a:pt x="6517649" y="3394632"/>
+                  </a:lnTo>
+                  <a:lnTo>
+                    <a:pt x="6446027" y="3385382"/>
+                  </a:lnTo>
+                  <a:lnTo>
+                    <a:pt x="6374404" y="3375172"/>
+                  </a:lnTo>
+                  <a:lnTo>
+                    <a:pt x="6302782" y="3363903"/>
+                  </a:lnTo>
+                  <a:lnTo>
+                    <a:pt x="6231159" y="3351463"/>
+                  </a:lnTo>
+                  <a:lnTo>
+                    <a:pt x="6159537" y="3337733"/>
+                  </a:lnTo>
+                  <a:lnTo>
+                    <a:pt x="6087914" y="3322577"/>
+                  </a:lnTo>
+                  <a:lnTo>
+                    <a:pt x="6016292" y="3305848"/>
+                  </a:lnTo>
+                  <a:lnTo>
+                    <a:pt x="5944669" y="3287383"/>
+                  </a:lnTo>
+                  <a:lnTo>
+                    <a:pt x="5873047" y="3267002"/>
+                  </a:lnTo>
+                  <a:lnTo>
+                    <a:pt x="5801424" y="3244504"/>
+                  </a:lnTo>
+                  <a:lnTo>
+                    <a:pt x="5729802" y="3219672"/>
+                  </a:lnTo>
+                  <a:lnTo>
+                    <a:pt x="5658179" y="3192262"/>
+                  </a:lnTo>
+                  <a:lnTo>
+                    <a:pt x="5586557" y="3162007"/>
+                  </a:lnTo>
+                  <a:lnTo>
+                    <a:pt x="5514934" y="3128612"/>
+                  </a:lnTo>
+                  <a:lnTo>
+                    <a:pt x="5443311" y="3091750"/>
+                  </a:lnTo>
+                  <a:lnTo>
+                    <a:pt x="5371689" y="3051062"/>
+                  </a:lnTo>
+                  <a:lnTo>
+                    <a:pt x="5300066" y="3006151"/>
+                  </a:lnTo>
+                  <a:lnTo>
+                    <a:pt x="5228444" y="2956579"/>
+                  </a:lnTo>
+                  <a:lnTo>
+                    <a:pt x="5156821" y="2901861"/>
+                  </a:lnTo>
+                  <a:lnTo>
+                    <a:pt x="5085199" y="2841463"/>
+                  </a:lnTo>
+                  <a:lnTo>
+                    <a:pt x="5013576" y="2774797"/>
+                  </a:lnTo>
+                  <a:lnTo>
+                    <a:pt x="4941954" y="2701210"/>
+                  </a:lnTo>
+                  <a:lnTo>
+                    <a:pt x="4870331" y="2651041"/>
+                  </a:lnTo>
+                  <a:lnTo>
+                    <a:pt x="4798709" y="2643085"/>
+                  </a:lnTo>
+                  <a:lnTo>
+                    <a:pt x="4727086" y="2635053"/>
+                  </a:lnTo>
+                  <a:lnTo>
+                    <a:pt x="4655464" y="2626944"/>
+                  </a:lnTo>
+                  <a:lnTo>
+                    <a:pt x="4583841" y="2618758"/>
+                  </a:lnTo>
+                  <a:lnTo>
+                    <a:pt x="4512219" y="2610494"/>
+                  </a:lnTo>
+                  <a:lnTo>
+                    <a:pt x="4440596" y="2602150"/>
+                  </a:lnTo>
+                  <a:lnTo>
+                    <a:pt x="4368974" y="2593727"/>
+                  </a:lnTo>
+                  <a:lnTo>
+                    <a:pt x="4297351" y="2585224"/>
+                  </a:lnTo>
+                  <a:lnTo>
+                    <a:pt x="4225729" y="2576639"/>
+                  </a:lnTo>
+                  <a:lnTo>
+                    <a:pt x="4154106" y="2567972"/>
+                  </a:lnTo>
+                  <a:lnTo>
+                    <a:pt x="4082483" y="2559222"/>
+                  </a:lnTo>
+                  <a:lnTo>
+                    <a:pt x="4010861" y="2550389"/>
+                  </a:lnTo>
+                  <a:lnTo>
+                    <a:pt x="3939238" y="2541472"/>
+                  </a:lnTo>
+                  <a:lnTo>
+                    <a:pt x="3867616" y="2532469"/>
+                  </a:lnTo>
+                  <a:lnTo>
+                    <a:pt x="3795993" y="2523380"/>
+                  </a:lnTo>
+                  <a:lnTo>
+                    <a:pt x="3724371" y="2514204"/>
+                  </a:lnTo>
+                  <a:lnTo>
+                    <a:pt x="3652748" y="2504941"/>
+                  </a:lnTo>
+                  <a:lnTo>
+                    <a:pt x="3581126" y="2495589"/>
+                  </a:lnTo>
+                  <a:lnTo>
+                    <a:pt x="3509503" y="2486148"/>
+                  </a:lnTo>
+                  <a:lnTo>
+                    <a:pt x="3437881" y="2476617"/>
+                  </a:lnTo>
+                  <a:lnTo>
+                    <a:pt x="3366258" y="2466994"/>
+                  </a:lnTo>
+                  <a:lnTo>
+                    <a:pt x="3294636" y="2457280"/>
+                  </a:lnTo>
+                  <a:lnTo>
+                    <a:pt x="3223013" y="2447473"/>
+                  </a:lnTo>
+                  <a:lnTo>
+                    <a:pt x="3151391" y="2437572"/>
+                  </a:lnTo>
+                  <a:lnTo>
+                    <a:pt x="3079768" y="2427576"/>
+                  </a:lnTo>
+                  <a:lnTo>
+                    <a:pt x="3008146" y="2417486"/>
+                  </a:lnTo>
+                  <a:lnTo>
+                    <a:pt x="2936523" y="2407298"/>
+                  </a:lnTo>
+                  <a:lnTo>
+                    <a:pt x="2864901" y="2397013"/>
+                  </a:lnTo>
+                  <a:lnTo>
+                    <a:pt x="2793278" y="2386630"/>
+                  </a:lnTo>
+                  <a:lnTo>
+                    <a:pt x="2721655" y="2376148"/>
+                  </a:lnTo>
+                  <a:lnTo>
+                    <a:pt x="2650033" y="2365566"/>
+                  </a:lnTo>
+                  <a:lnTo>
+                    <a:pt x="2578410" y="2354882"/>
+                  </a:lnTo>
+                  <a:lnTo>
+                    <a:pt x="2506788" y="2344097"/>
+                  </a:lnTo>
+                  <a:lnTo>
+                    <a:pt x="2435165" y="2333208"/>
+                  </a:lnTo>
+                  <a:lnTo>
+                    <a:pt x="2363543" y="2322216"/>
+                  </a:lnTo>
+                  <a:lnTo>
+                    <a:pt x="2291920" y="2311118"/>
+                  </a:lnTo>
+                  <a:lnTo>
+                    <a:pt x="2220298" y="2299914"/>
+                  </a:lnTo>
+                  <a:lnTo>
+                    <a:pt x="2148675" y="2288604"/>
+                  </a:lnTo>
+                  <a:lnTo>
+                    <a:pt x="2077053" y="2277185"/>
+                  </a:lnTo>
+                  <a:lnTo>
+                    <a:pt x="2005430" y="2265657"/>
+                  </a:lnTo>
+                  <a:lnTo>
+                    <a:pt x="1933808" y="2254019"/>
+                  </a:lnTo>
+                  <a:lnTo>
+                    <a:pt x="1862185" y="2242270"/>
+                  </a:lnTo>
+                  <a:lnTo>
+                    <a:pt x="1790563" y="2230408"/>
+                  </a:lnTo>
+                  <a:lnTo>
+                    <a:pt x="1718940" y="2218434"/>
+                  </a:lnTo>
+                  <a:lnTo>
+                    <a:pt x="1647318" y="2206344"/>
+                  </a:lnTo>
+                  <a:lnTo>
+                    <a:pt x="1575695" y="2194140"/>
+                  </a:lnTo>
+                  <a:lnTo>
+                    <a:pt x="1504073" y="2181818"/>
+                  </a:lnTo>
+                  <a:lnTo>
+                    <a:pt x="1432450" y="2169379"/>
+                  </a:lnTo>
+                  <a:lnTo>
+                    <a:pt x="1360827" y="2156822"/>
+                  </a:lnTo>
+                  <a:lnTo>
+                    <a:pt x="1289205" y="2144144"/>
+                  </a:lnTo>
+                  <a:lnTo>
+                    <a:pt x="1217582" y="2131345"/>
+                  </a:lnTo>
+                  <a:lnTo>
+                    <a:pt x="1145960" y="2118423"/>
+                  </a:lnTo>
+                  <a:lnTo>
+                    <a:pt x="1074337" y="2105379"/>
+                  </a:lnTo>
+                  <a:lnTo>
+                    <a:pt x="1002715" y="2092209"/>
+                  </a:lnTo>
+                  <a:lnTo>
+                    <a:pt x="931092" y="2078914"/>
+                  </a:lnTo>
+                  <a:lnTo>
+                    <a:pt x="859470" y="2065492"/>
+                  </a:lnTo>
+                  <a:lnTo>
+                    <a:pt x="787847" y="2051942"/>
+                  </a:lnTo>
+                  <a:lnTo>
+                    <a:pt x="716225" y="2038262"/>
+                  </a:lnTo>
+                  <a:lnTo>
+                    <a:pt x="644602" y="2024451"/>
+                  </a:lnTo>
+                  <a:lnTo>
+                    <a:pt x="572980" y="2010508"/>
+                  </a:lnTo>
+                  <a:lnTo>
+                    <a:pt x="501357" y="1996433"/>
+                  </a:lnTo>
+                  <a:lnTo>
+                    <a:pt x="429735" y="1982222"/>
+                  </a:lnTo>
+                  <a:lnTo>
+                    <a:pt x="358112" y="1967876"/>
+                  </a:lnTo>
+                  <a:lnTo>
+                    <a:pt x="286490" y="1953393"/>
+                  </a:lnTo>
+                  <a:lnTo>
+                    <a:pt x="214867" y="1938772"/>
+                  </a:lnTo>
+                  <a:lnTo>
+                    <a:pt x="143245" y="1924011"/>
+                  </a:lnTo>
+                  <a:lnTo>
+                    <a:pt x="71622" y="1909108"/>
+                  </a:lnTo>
+                  <a:lnTo>
+                    <a:pt x="0" y="1894064"/>
                   </a:lnTo>
                   <a:lnTo>
                     <a:pt x="0" y="0"/>
@@ -3483,159 +3477,153 @@
           </p:nvSpPr>
           <p:spPr>
             <a:xfrm>
-              <a:off x="4851810" y="2073503"/>
-              <a:ext cx="3410868" cy="2653831"/>
+              <a:off x="5031339" y="2073503"/>
+              <a:ext cx="3231339" cy="2863633"/>
             </a:xfrm>
             <a:custGeom>
               <a:avLst/>
               <a:pathLst>
-                <a:path w="3410868" h="2653831">
+                <a:path w="3231339" h="2863633">
                   <a:moveTo>
                     <a:pt x="0" y="0"/>
                   </a:moveTo>
                   <a:lnTo>
-                    <a:pt x="44610" y="180734"/>
-                  </a:lnTo>
-                  <a:lnTo>
-                    <a:pt x="116232" y="447473"/>
-                  </a:lnTo>
-                  <a:lnTo>
-                    <a:pt x="187855" y="692671"/>
-                  </a:lnTo>
-                  <a:lnTo>
-                    <a:pt x="259477" y="918068"/>
-                  </a:lnTo>
-                  <a:lnTo>
-                    <a:pt x="331100" y="1125263"/>
-                  </a:lnTo>
-                  <a:lnTo>
-                    <a:pt x="402722" y="1315726"/>
-                  </a:lnTo>
-                  <a:lnTo>
-                    <a:pt x="474345" y="1490807"/>
-                  </a:lnTo>
-                  <a:lnTo>
-                    <a:pt x="545967" y="1651749"/>
-                  </a:lnTo>
-                  <a:lnTo>
-                    <a:pt x="617590" y="1799695"/>
-                  </a:lnTo>
-                  <a:lnTo>
-                    <a:pt x="689212" y="1935693"/>
-                  </a:lnTo>
-                  <a:lnTo>
-                    <a:pt x="760835" y="2060708"/>
-                  </a:lnTo>
-                  <a:lnTo>
-                    <a:pt x="832457" y="2175627"/>
-                  </a:lnTo>
-                  <a:lnTo>
-                    <a:pt x="904080" y="2281266"/>
-                  </a:lnTo>
-                  <a:lnTo>
-                    <a:pt x="975702" y="2378374"/>
-                  </a:lnTo>
-                  <a:lnTo>
-                    <a:pt x="1047325" y="2467640"/>
-                  </a:lnTo>
-                  <a:lnTo>
-                    <a:pt x="1118947" y="2549697"/>
-                  </a:lnTo>
-                  <a:lnTo>
-                    <a:pt x="1190570" y="2625127"/>
-                  </a:lnTo>
-                  <a:lnTo>
-                    <a:pt x="1262193" y="2653831"/>
-                  </a:lnTo>
-                  <a:lnTo>
-                    <a:pt x="1333815" y="2653063"/>
-                  </a:lnTo>
-                  <a:lnTo>
-                    <a:pt x="1405438" y="2652295"/>
-                  </a:lnTo>
-                  <a:lnTo>
-                    <a:pt x="1477060" y="2651526"/>
-                  </a:lnTo>
-                  <a:lnTo>
-                    <a:pt x="1548683" y="2650756"/>
-                  </a:lnTo>
-                  <a:lnTo>
-                    <a:pt x="1620305" y="2649986"/>
-                  </a:lnTo>
-                  <a:lnTo>
-                    <a:pt x="1691928" y="2649215"/>
-                  </a:lnTo>
-                  <a:lnTo>
-                    <a:pt x="1763550" y="2648443"/>
-                  </a:lnTo>
-                  <a:lnTo>
-                    <a:pt x="1835173" y="2647671"/>
-                  </a:lnTo>
-                  <a:lnTo>
-                    <a:pt x="1906795" y="2646897"/>
-                  </a:lnTo>
-                  <a:lnTo>
-                    <a:pt x="1978418" y="2646123"/>
-                  </a:lnTo>
-                  <a:lnTo>
-                    <a:pt x="2050040" y="2645349"/>
-                  </a:lnTo>
-                  <a:lnTo>
-                    <a:pt x="2121663" y="2644573"/>
-                  </a:lnTo>
-                  <a:lnTo>
-                    <a:pt x="2193285" y="2643797"/>
-                  </a:lnTo>
-                  <a:lnTo>
-                    <a:pt x="2264908" y="2643020"/>
-                  </a:lnTo>
-                  <a:lnTo>
-                    <a:pt x="2336530" y="2642243"/>
-                  </a:lnTo>
-                  <a:lnTo>
-                    <a:pt x="2408153" y="2641465"/>
-                  </a:lnTo>
-                  <a:lnTo>
-                    <a:pt x="2479775" y="2640686"/>
-                  </a:lnTo>
-                  <a:lnTo>
-                    <a:pt x="2551398" y="2639906"/>
-                  </a:lnTo>
-                  <a:lnTo>
-                    <a:pt x="2623021" y="2639126"/>
-                  </a:lnTo>
-                  <a:lnTo>
-                    <a:pt x="2694643" y="2638345"/>
-                  </a:lnTo>
-                  <a:lnTo>
-                    <a:pt x="2766266" y="2637563"/>
-                  </a:lnTo>
-                  <a:lnTo>
-                    <a:pt x="2837888" y="2636780"/>
-                  </a:lnTo>
-                  <a:lnTo>
-                    <a:pt x="2909511" y="2635997"/>
-                  </a:lnTo>
-                  <a:lnTo>
-                    <a:pt x="2981133" y="2635213"/>
-                  </a:lnTo>
-                  <a:lnTo>
-                    <a:pt x="3052756" y="2634428"/>
-                  </a:lnTo>
-                  <a:lnTo>
-                    <a:pt x="3124378" y="2633643"/>
-                  </a:lnTo>
-                  <a:lnTo>
-                    <a:pt x="3196001" y="2632857"/>
-                  </a:lnTo>
-                  <a:lnTo>
-                    <a:pt x="3267623" y="2632070"/>
-                  </a:lnTo>
-                  <a:lnTo>
-                    <a:pt x="3339246" y="2631282"/>
-                  </a:lnTo>
-                  <a:lnTo>
-                    <a:pt x="3410868" y="2630494"/>
+                    <a:pt x="8326" y="41534"/>
+                  </a:lnTo>
+                  <a:lnTo>
+                    <a:pt x="79948" y="365225"/>
+                  </a:lnTo>
+                  <a:lnTo>
+                    <a:pt x="151571" y="658477"/>
+                  </a:lnTo>
+                  <a:lnTo>
+                    <a:pt x="223193" y="924153"/>
+                  </a:lnTo>
+                  <a:lnTo>
+                    <a:pt x="294816" y="1164846"/>
+                  </a:lnTo>
+                  <a:lnTo>
+                    <a:pt x="366438" y="1382905"/>
+                  </a:lnTo>
+                  <a:lnTo>
+                    <a:pt x="438061" y="1580459"/>
+                  </a:lnTo>
+                  <a:lnTo>
+                    <a:pt x="509683" y="1759436"/>
+                  </a:lnTo>
+                  <a:lnTo>
+                    <a:pt x="581306" y="1921583"/>
+                  </a:lnTo>
+                  <a:lnTo>
+                    <a:pt x="652928" y="2068482"/>
+                  </a:lnTo>
+                  <a:lnTo>
+                    <a:pt x="724551" y="2201567"/>
+                  </a:lnTo>
+                  <a:lnTo>
+                    <a:pt x="796173" y="2322138"/>
+                  </a:lnTo>
+                  <a:lnTo>
+                    <a:pt x="867796" y="2431370"/>
+                  </a:lnTo>
+                  <a:lnTo>
+                    <a:pt x="939418" y="2530331"/>
+                  </a:lnTo>
+                  <a:lnTo>
+                    <a:pt x="1011041" y="2619986"/>
+                  </a:lnTo>
+                  <a:lnTo>
+                    <a:pt x="1082664" y="2658921"/>
+                  </a:lnTo>
+                  <a:lnTo>
+                    <a:pt x="1154286" y="2666727"/>
+                  </a:lnTo>
+                  <a:lnTo>
+                    <a:pt x="1225909" y="2674460"/>
+                  </a:lnTo>
+                  <a:lnTo>
+                    <a:pt x="1297531" y="2682119"/>
+                  </a:lnTo>
+                  <a:lnTo>
+                    <a:pt x="1369154" y="2689705"/>
+                  </a:lnTo>
+                  <a:lnTo>
+                    <a:pt x="1440776" y="2697220"/>
+                  </a:lnTo>
+                  <a:lnTo>
+                    <a:pt x="1512399" y="2704663"/>
+                  </a:lnTo>
+                  <a:lnTo>
+                    <a:pt x="1584021" y="2712037"/>
+                  </a:lnTo>
+                  <a:lnTo>
+                    <a:pt x="1655644" y="2719340"/>
+                  </a:lnTo>
+                  <a:lnTo>
+                    <a:pt x="1727266" y="2726574"/>
+                  </a:lnTo>
+                  <a:lnTo>
+                    <a:pt x="1798889" y="2733740"/>
+                  </a:lnTo>
+                  <a:lnTo>
+                    <a:pt x="1870511" y="2740838"/>
+                  </a:lnTo>
+                  <a:lnTo>
+                    <a:pt x="1942134" y="2747869"/>
+                  </a:lnTo>
+                  <a:lnTo>
+                    <a:pt x="2013756" y="2754833"/>
+                  </a:lnTo>
+                  <a:lnTo>
+                    <a:pt x="2085379" y="2761731"/>
+                  </a:lnTo>
+                  <a:lnTo>
+                    <a:pt x="2157001" y="2768564"/>
+                  </a:lnTo>
+                  <a:lnTo>
+                    <a:pt x="2228624" y="2775333"/>
+                  </a:lnTo>
+                  <a:lnTo>
+                    <a:pt x="2300246" y="2782037"/>
+                  </a:lnTo>
+                  <a:lnTo>
+                    <a:pt x="2371869" y="2788678"/>
+                  </a:lnTo>
+                  <a:lnTo>
+                    <a:pt x="2443492" y="2795256"/>
+                  </a:lnTo>
+                  <a:lnTo>
+                    <a:pt x="2515114" y="2801772"/>
+                  </a:lnTo>
+                  <a:lnTo>
+                    <a:pt x="2586737" y="2808226"/>
+                  </a:lnTo>
+                  <a:lnTo>
+                    <a:pt x="2658359" y="2814619"/>
+                  </a:lnTo>
+                  <a:lnTo>
+                    <a:pt x="2729982" y="2820952"/>
+                  </a:lnTo>
+                  <a:lnTo>
+                    <a:pt x="2801604" y="2827224"/>
+                  </a:lnTo>
+                  <a:lnTo>
+                    <a:pt x="2873227" y="2833438"/>
+                  </a:lnTo>
+                  <a:lnTo>
+                    <a:pt x="2944849" y="2839592"/>
+                  </a:lnTo>
+                  <a:lnTo>
+                    <a:pt x="3016472" y="2845688"/>
+                  </a:lnTo>
+                  <a:lnTo>
+                    <a:pt x="3088094" y="2851727"/>
+                  </a:lnTo>
+                  <a:lnTo>
+                    <a:pt x="3159717" y="2857708"/>
+                  </a:lnTo>
+                  <a:lnTo>
+                    <a:pt x="3231339" y="2863633"/>
                   </a:lnTo>
                 </a:path>
               </a:pathLst>
@@ -3655,312 +3643,312 @@
           </p:nvSpPr>
           <p:spPr>
             <a:xfrm>
-              <a:off x="1172049" y="4728100"/>
-              <a:ext cx="7090630" cy="766031"/>
+              <a:off x="1172049" y="3967567"/>
+              <a:ext cx="7090630" cy="1549240"/>
             </a:xfrm>
             <a:custGeom>
               <a:avLst/>
               <a:pathLst>
-                <a:path w="7090630" h="766031">
+                <a:path w="7090630" h="1549240">
                   <a:moveTo>
-                    <a:pt x="7090630" y="766031"/>
+                    <a:pt x="7090630" y="1549240"/>
                   </a:moveTo>
                   <a:lnTo>
-                    <a:pt x="7019007" y="760486"/>
-                  </a:lnTo>
-                  <a:lnTo>
-                    <a:pt x="6947385" y="754454"/>
-                  </a:lnTo>
-                  <a:lnTo>
-                    <a:pt x="6875762" y="747892"/>
-                  </a:lnTo>
-                  <a:lnTo>
-                    <a:pt x="6804139" y="740754"/>
-                  </a:lnTo>
-                  <a:lnTo>
-                    <a:pt x="6732517" y="732988"/>
-                  </a:lnTo>
-                  <a:lnTo>
-                    <a:pt x="6660894" y="724540"/>
-                  </a:lnTo>
-                  <a:lnTo>
-                    <a:pt x="6589272" y="715350"/>
-                  </a:lnTo>
-                  <a:lnTo>
-                    <a:pt x="6517649" y="705353"/>
-                  </a:lnTo>
-                  <a:lnTo>
-                    <a:pt x="6446027" y="694477"/>
-                  </a:lnTo>
-                  <a:lnTo>
-                    <a:pt x="6374404" y="682646"/>
-                  </a:lnTo>
-                  <a:lnTo>
-                    <a:pt x="6302782" y="669776"/>
-                  </a:lnTo>
-                  <a:lnTo>
-                    <a:pt x="6231159" y="655775"/>
-                  </a:lnTo>
-                  <a:lnTo>
-                    <a:pt x="6159537" y="640544"/>
-                  </a:lnTo>
-                  <a:lnTo>
-                    <a:pt x="6087914" y="623975"/>
-                  </a:lnTo>
-                  <a:lnTo>
-                    <a:pt x="6016292" y="605950"/>
-                  </a:lnTo>
-                  <a:lnTo>
-                    <a:pt x="5944669" y="586342"/>
-                  </a:lnTo>
-                  <a:lnTo>
-                    <a:pt x="5873047" y="565011"/>
-                  </a:lnTo>
-                  <a:lnTo>
-                    <a:pt x="5801424" y="541807"/>
-                  </a:lnTo>
-                  <a:lnTo>
-                    <a:pt x="5729802" y="516564"/>
-                  </a:lnTo>
-                  <a:lnTo>
-                    <a:pt x="5658179" y="489103"/>
-                  </a:lnTo>
-                  <a:lnTo>
-                    <a:pt x="5586557" y="459229"/>
-                  </a:lnTo>
-                  <a:lnTo>
-                    <a:pt x="5514934" y="426732"/>
-                  </a:lnTo>
-                  <a:lnTo>
-                    <a:pt x="5443311" y="391379"/>
-                  </a:lnTo>
-                  <a:lnTo>
-                    <a:pt x="5371689" y="352921"/>
-                  </a:lnTo>
-                  <a:lnTo>
-                    <a:pt x="5300066" y="311083"/>
-                  </a:lnTo>
-                  <a:lnTo>
-                    <a:pt x="5228444" y="265571"/>
-                  </a:lnTo>
-                  <a:lnTo>
-                    <a:pt x="5156821" y="216060"/>
-                  </a:lnTo>
-                  <a:lnTo>
-                    <a:pt x="5085199" y="162200"/>
-                  </a:lnTo>
-                  <a:lnTo>
-                    <a:pt x="5013576" y="103608"/>
-                  </a:lnTo>
-                  <a:lnTo>
-                    <a:pt x="4941954" y="39868"/>
-                  </a:lnTo>
-                  <a:lnTo>
-                    <a:pt x="4870331" y="0"/>
-                  </a:lnTo>
-                  <a:lnTo>
-                    <a:pt x="4798709" y="766"/>
-                  </a:lnTo>
-                  <a:lnTo>
-                    <a:pt x="4727086" y="1531"/>
-                  </a:lnTo>
-                  <a:lnTo>
-                    <a:pt x="4655464" y="2296"/>
-                  </a:lnTo>
-                  <a:lnTo>
-                    <a:pt x="4583841" y="3060"/>
-                  </a:lnTo>
-                  <a:lnTo>
-                    <a:pt x="4512219" y="3823"/>
-                  </a:lnTo>
-                  <a:lnTo>
-                    <a:pt x="4440596" y="4585"/>
-                  </a:lnTo>
-                  <a:lnTo>
-                    <a:pt x="4368974" y="5347"/>
-                  </a:lnTo>
-                  <a:lnTo>
-                    <a:pt x="4297351" y="6109"/>
-                  </a:lnTo>
-                  <a:lnTo>
-                    <a:pt x="4225729" y="6869"/>
-                  </a:lnTo>
-                  <a:lnTo>
-                    <a:pt x="4154106" y="7629"/>
-                  </a:lnTo>
-                  <a:lnTo>
-                    <a:pt x="4082483" y="8388"/>
-                  </a:lnTo>
-                  <a:lnTo>
-                    <a:pt x="4010861" y="9146"/>
-                  </a:lnTo>
-                  <a:lnTo>
-                    <a:pt x="3939238" y="9904"/>
-                  </a:lnTo>
-                  <a:lnTo>
-                    <a:pt x="3867616" y="10661"/>
-                  </a:lnTo>
-                  <a:lnTo>
-                    <a:pt x="3795993" y="11417"/>
-                  </a:lnTo>
-                  <a:lnTo>
-                    <a:pt x="3724371" y="12173"/>
-                  </a:lnTo>
-                  <a:lnTo>
-                    <a:pt x="3652748" y="12927"/>
-                  </a:lnTo>
-                  <a:lnTo>
-                    <a:pt x="3581126" y="13682"/>
-                  </a:lnTo>
-                  <a:lnTo>
-                    <a:pt x="3509503" y="14435"/>
-                  </a:lnTo>
-                  <a:lnTo>
-                    <a:pt x="3437881" y="15188"/>
-                  </a:lnTo>
-                  <a:lnTo>
-                    <a:pt x="3366258" y="15940"/>
-                  </a:lnTo>
-                  <a:lnTo>
-                    <a:pt x="3294636" y="16691"/>
-                  </a:lnTo>
-                  <a:lnTo>
-                    <a:pt x="3223013" y="17442"/>
-                  </a:lnTo>
-                  <a:lnTo>
-                    <a:pt x="3151391" y="18192"/>
-                  </a:lnTo>
-                  <a:lnTo>
-                    <a:pt x="3079768" y="18941"/>
-                  </a:lnTo>
-                  <a:lnTo>
-                    <a:pt x="3008146" y="19690"/>
-                  </a:lnTo>
-                  <a:lnTo>
-                    <a:pt x="2936523" y="20438"/>
-                  </a:lnTo>
-                  <a:lnTo>
-                    <a:pt x="2864901" y="21185"/>
-                  </a:lnTo>
-                  <a:lnTo>
-                    <a:pt x="2793278" y="21931"/>
-                  </a:lnTo>
-                  <a:lnTo>
-                    <a:pt x="2721655" y="22677"/>
-                  </a:lnTo>
-                  <a:lnTo>
-                    <a:pt x="2650033" y="23422"/>
-                  </a:lnTo>
-                  <a:lnTo>
-                    <a:pt x="2578410" y="24167"/>
-                  </a:lnTo>
-                  <a:lnTo>
-                    <a:pt x="2506788" y="24911"/>
-                  </a:lnTo>
-                  <a:lnTo>
-                    <a:pt x="2435165" y="25654"/>
-                  </a:lnTo>
-                  <a:lnTo>
-                    <a:pt x="2363543" y="26396"/>
-                  </a:lnTo>
-                  <a:lnTo>
-                    <a:pt x="2291920" y="27138"/>
-                  </a:lnTo>
-                  <a:lnTo>
-                    <a:pt x="2220298" y="27879"/>
-                  </a:lnTo>
-                  <a:lnTo>
-                    <a:pt x="2148675" y="28619"/>
-                  </a:lnTo>
-                  <a:lnTo>
-                    <a:pt x="2077053" y="29359"/>
-                  </a:lnTo>
-                  <a:lnTo>
-                    <a:pt x="2005430" y="30098"/>
-                  </a:lnTo>
-                  <a:lnTo>
-                    <a:pt x="1933808" y="30836"/>
-                  </a:lnTo>
-                  <a:lnTo>
-                    <a:pt x="1862185" y="31574"/>
-                  </a:lnTo>
-                  <a:lnTo>
-                    <a:pt x="1790563" y="32311"/>
-                  </a:lnTo>
-                  <a:lnTo>
-                    <a:pt x="1718940" y="33047"/>
-                  </a:lnTo>
-                  <a:lnTo>
-                    <a:pt x="1647318" y="33782"/>
-                  </a:lnTo>
-                  <a:lnTo>
-                    <a:pt x="1575695" y="34517"/>
-                  </a:lnTo>
-                  <a:lnTo>
-                    <a:pt x="1504073" y="35252"/>
-                  </a:lnTo>
-                  <a:lnTo>
-                    <a:pt x="1432450" y="35985"/>
-                  </a:lnTo>
-                  <a:lnTo>
-                    <a:pt x="1360827" y="36718"/>
-                  </a:lnTo>
-                  <a:lnTo>
-                    <a:pt x="1289205" y="37450"/>
-                  </a:lnTo>
-                  <a:lnTo>
-                    <a:pt x="1217582" y="38182"/>
-                  </a:lnTo>
-                  <a:lnTo>
-                    <a:pt x="1145960" y="38912"/>
-                  </a:lnTo>
-                  <a:lnTo>
-                    <a:pt x="1074337" y="39643"/>
-                  </a:lnTo>
-                  <a:lnTo>
-                    <a:pt x="1002715" y="40372"/>
-                  </a:lnTo>
-                  <a:lnTo>
-                    <a:pt x="931092" y="41101"/>
-                  </a:lnTo>
-                  <a:lnTo>
-                    <a:pt x="859470" y="41829"/>
-                  </a:lnTo>
-                  <a:lnTo>
-                    <a:pt x="787847" y="42556"/>
-                  </a:lnTo>
-                  <a:lnTo>
-                    <a:pt x="716225" y="43283"/>
-                  </a:lnTo>
-                  <a:lnTo>
-                    <a:pt x="644602" y="44009"/>
-                  </a:lnTo>
-                  <a:lnTo>
-                    <a:pt x="572980" y="44735"/>
-                  </a:lnTo>
-                  <a:lnTo>
-                    <a:pt x="501357" y="45459"/>
-                  </a:lnTo>
-                  <a:lnTo>
-                    <a:pt x="429735" y="46184"/>
-                  </a:lnTo>
-                  <a:lnTo>
-                    <a:pt x="358112" y="46907"/>
-                  </a:lnTo>
-                  <a:lnTo>
-                    <a:pt x="286490" y="47630"/>
-                  </a:lnTo>
-                  <a:lnTo>
-                    <a:pt x="214867" y="48352"/>
-                  </a:lnTo>
-                  <a:lnTo>
-                    <a:pt x="143245" y="49073"/>
-                  </a:lnTo>
-                  <a:lnTo>
-                    <a:pt x="71622" y="49794"/>
-                  </a:lnTo>
-                  <a:lnTo>
-                    <a:pt x="0" y="50514"/>
+                    <a:pt x="7019007" y="1545042"/>
+                  </a:lnTo>
+                  <a:lnTo>
+                    <a:pt x="6947385" y="1540408"/>
+                  </a:lnTo>
+                  <a:lnTo>
+                    <a:pt x="6875762" y="1535294"/>
+                  </a:lnTo>
+                  <a:lnTo>
+                    <a:pt x="6804139" y="1529649"/>
+                  </a:lnTo>
+                  <a:lnTo>
+                    <a:pt x="6732517" y="1523417"/>
+                  </a:lnTo>
+                  <a:lnTo>
+                    <a:pt x="6660894" y="1516539"/>
+                  </a:lnTo>
+                  <a:lnTo>
+                    <a:pt x="6589272" y="1508947"/>
+                  </a:lnTo>
+                  <a:lnTo>
+                    <a:pt x="6517649" y="1500567"/>
+                  </a:lnTo>
+                  <a:lnTo>
+                    <a:pt x="6446027" y="1491318"/>
+                  </a:lnTo>
+                  <a:lnTo>
+                    <a:pt x="6374404" y="1481108"/>
+                  </a:lnTo>
+                  <a:lnTo>
+                    <a:pt x="6302782" y="1469838"/>
+                  </a:lnTo>
+                  <a:lnTo>
+                    <a:pt x="6231159" y="1457399"/>
+                  </a:lnTo>
+                  <a:lnTo>
+                    <a:pt x="6159537" y="1443668"/>
+                  </a:lnTo>
+                  <a:lnTo>
+                    <a:pt x="6087914" y="1428513"/>
+                  </a:lnTo>
+                  <a:lnTo>
+                    <a:pt x="6016292" y="1411784"/>
+                  </a:lnTo>
+                  <a:lnTo>
+                    <a:pt x="5944669" y="1393319"/>
+                  </a:lnTo>
+                  <a:lnTo>
+                    <a:pt x="5873047" y="1372937"/>
+                  </a:lnTo>
+                  <a:lnTo>
+                    <a:pt x="5801424" y="1350440"/>
+                  </a:lnTo>
+                  <a:lnTo>
+                    <a:pt x="5729802" y="1325608"/>
+                  </a:lnTo>
+                  <a:lnTo>
+                    <a:pt x="5658179" y="1298198"/>
+                  </a:lnTo>
+                  <a:lnTo>
+                    <a:pt x="5586557" y="1267943"/>
+                  </a:lnTo>
+                  <a:lnTo>
+                    <a:pt x="5514934" y="1234547"/>
+                  </a:lnTo>
+                  <a:lnTo>
+                    <a:pt x="5443311" y="1197686"/>
+                  </a:lnTo>
+                  <a:lnTo>
+                    <a:pt x="5371689" y="1156998"/>
+                  </a:lnTo>
+                  <a:lnTo>
+                    <a:pt x="5300066" y="1112087"/>
+                  </a:lnTo>
+                  <a:lnTo>
+                    <a:pt x="5228444" y="1062514"/>
+                  </a:lnTo>
+                  <a:lnTo>
+                    <a:pt x="5156821" y="1007796"/>
+                  </a:lnTo>
+                  <a:lnTo>
+                    <a:pt x="5085199" y="947399"/>
+                  </a:lnTo>
+                  <a:lnTo>
+                    <a:pt x="5013576" y="880732"/>
+                  </a:lnTo>
+                  <a:lnTo>
+                    <a:pt x="4941954" y="807146"/>
+                  </a:lnTo>
+                  <a:lnTo>
+                    <a:pt x="4870331" y="756976"/>
+                  </a:lnTo>
+                  <a:lnTo>
+                    <a:pt x="4798709" y="749020"/>
+                  </a:lnTo>
+                  <a:lnTo>
+                    <a:pt x="4727086" y="740988"/>
+                  </a:lnTo>
+                  <a:lnTo>
+                    <a:pt x="4655464" y="732880"/>
+                  </a:lnTo>
+                  <a:lnTo>
+                    <a:pt x="4583841" y="724694"/>
+                  </a:lnTo>
+                  <a:lnTo>
+                    <a:pt x="4512219" y="716429"/>
+                  </a:lnTo>
+                  <a:lnTo>
+                    <a:pt x="4440596" y="708086"/>
+                  </a:lnTo>
+                  <a:lnTo>
+                    <a:pt x="4368974" y="699663"/>
+                  </a:lnTo>
+                  <a:lnTo>
+                    <a:pt x="4297351" y="691159"/>
+                  </a:lnTo>
+                  <a:lnTo>
+                    <a:pt x="4225729" y="682574"/>
+                  </a:lnTo>
+                  <a:lnTo>
+                    <a:pt x="4154106" y="673908"/>
+                  </a:lnTo>
+                  <a:lnTo>
+                    <a:pt x="4082483" y="665158"/>
+                  </a:lnTo>
+                  <a:lnTo>
+                    <a:pt x="4010861" y="656325"/>
+                  </a:lnTo>
+                  <a:lnTo>
+                    <a:pt x="3939238" y="647407"/>
+                  </a:lnTo>
+                  <a:lnTo>
+                    <a:pt x="3867616" y="638405"/>
+                  </a:lnTo>
+                  <a:lnTo>
+                    <a:pt x="3795993" y="629316"/>
+                  </a:lnTo>
+                  <a:lnTo>
+                    <a:pt x="3724371" y="620140"/>
+                  </a:lnTo>
+                  <a:lnTo>
+                    <a:pt x="3652748" y="610877"/>
+                  </a:lnTo>
+                  <a:lnTo>
+                    <a:pt x="3581126" y="601525"/>
+                  </a:lnTo>
+                  <a:lnTo>
+                    <a:pt x="3509503" y="592084"/>
+                  </a:lnTo>
+                  <a:lnTo>
+                    <a:pt x="3437881" y="582552"/>
+                  </a:lnTo>
+                  <a:lnTo>
+                    <a:pt x="3366258" y="572930"/>
+                  </a:lnTo>
+                  <a:lnTo>
+                    <a:pt x="3294636" y="563216"/>
+                  </a:lnTo>
+                  <a:lnTo>
+                    <a:pt x="3223013" y="553408"/>
+                  </a:lnTo>
+                  <a:lnTo>
+                    <a:pt x="3151391" y="543508"/>
+                  </a:lnTo>
+                  <a:lnTo>
+                    <a:pt x="3079768" y="533512"/>
+                  </a:lnTo>
+                  <a:lnTo>
+                    <a:pt x="3008146" y="523421"/>
+                  </a:lnTo>
+                  <a:lnTo>
+                    <a:pt x="2936523" y="513234"/>
+                  </a:lnTo>
+                  <a:lnTo>
+                    <a:pt x="2864901" y="502949"/>
+                  </a:lnTo>
+                  <a:lnTo>
+                    <a:pt x="2793278" y="492566"/>
+                  </a:lnTo>
+                  <a:lnTo>
+                    <a:pt x="2721655" y="482084"/>
+                  </a:lnTo>
+                  <a:lnTo>
+                    <a:pt x="2650033" y="471502"/>
+                  </a:lnTo>
+                  <a:lnTo>
+                    <a:pt x="2578410" y="460818"/>
+                  </a:lnTo>
+                  <a:lnTo>
+                    <a:pt x="2506788" y="450033"/>
+                  </a:lnTo>
+                  <a:lnTo>
+                    <a:pt x="2435165" y="439144"/>
+                  </a:lnTo>
+                  <a:lnTo>
+                    <a:pt x="2363543" y="428151"/>
+                  </a:lnTo>
+                  <a:lnTo>
+                    <a:pt x="2291920" y="417054"/>
+                  </a:lnTo>
+                  <a:lnTo>
+                    <a:pt x="2220298" y="405850"/>
+                  </a:lnTo>
+                  <a:lnTo>
+                    <a:pt x="2148675" y="394539"/>
+                  </a:lnTo>
+                  <a:lnTo>
+                    <a:pt x="2077053" y="383121"/>
+                  </a:lnTo>
+                  <a:lnTo>
+                    <a:pt x="2005430" y="371593"/>
+                  </a:lnTo>
+                  <a:lnTo>
+                    <a:pt x="1933808" y="359955"/>
+                  </a:lnTo>
+                  <a:lnTo>
+                    <a:pt x="1862185" y="348206"/>
+                  </a:lnTo>
+                  <a:lnTo>
+                    <a:pt x="1790563" y="336344"/>
+                  </a:lnTo>
+                  <a:lnTo>
+                    <a:pt x="1718940" y="324369"/>
+                  </a:lnTo>
+                  <a:lnTo>
+                    <a:pt x="1647318" y="312280"/>
+                  </a:lnTo>
+                  <a:lnTo>
+                    <a:pt x="1575695" y="300075"/>
+                  </a:lnTo>
+                  <a:lnTo>
+                    <a:pt x="1504073" y="287754"/>
+                  </a:lnTo>
+                  <a:lnTo>
+                    <a:pt x="1432450" y="275315"/>
+                  </a:lnTo>
+                  <a:lnTo>
+                    <a:pt x="1360827" y="262757"/>
+                  </a:lnTo>
+                  <a:lnTo>
+                    <a:pt x="1289205" y="250079"/>
+                  </a:lnTo>
+                  <a:lnTo>
+                    <a:pt x="1217582" y="237280"/>
+                  </a:lnTo>
+                  <a:lnTo>
+                    <a:pt x="1145960" y="224359"/>
+                  </a:lnTo>
+                  <a:lnTo>
+                    <a:pt x="1074337" y="211314"/>
+                  </a:lnTo>
+                  <a:lnTo>
+                    <a:pt x="1002715" y="198145"/>
+                  </a:lnTo>
+                  <a:lnTo>
+                    <a:pt x="931092" y="184850"/>
+                  </a:lnTo>
+                  <a:lnTo>
+                    <a:pt x="859470" y="171428"/>
+                  </a:lnTo>
+                  <a:lnTo>
+                    <a:pt x="787847" y="157877"/>
+                  </a:lnTo>
+                  <a:lnTo>
+                    <a:pt x="716225" y="144197"/>
+                  </a:lnTo>
+                  <a:lnTo>
+                    <a:pt x="644602" y="130387"/>
+                  </a:lnTo>
+                  <a:lnTo>
+                    <a:pt x="572980" y="116444"/>
+                  </a:lnTo>
+                  <a:lnTo>
+                    <a:pt x="501357" y="102368"/>
+                  </a:lnTo>
+                  <a:lnTo>
+                    <a:pt x="429735" y="88158"/>
+                  </a:lnTo>
+                  <a:lnTo>
+                    <a:pt x="358112" y="73812"/>
+                  </a:lnTo>
+                  <a:lnTo>
+                    <a:pt x="286490" y="59329"/>
+                  </a:lnTo>
+                  <a:lnTo>
+                    <a:pt x="214867" y="44707"/>
+                  </a:lnTo>
+                  <a:lnTo>
+                    <a:pt x="143245" y="29946"/>
+                  </a:lnTo>
+                  <a:lnTo>
+                    <a:pt x="71622" y="15044"/>
+                  </a:lnTo>
+                  <a:lnTo>
+                    <a:pt x="0" y="0"/>
                   </a:lnTo>
                 </a:path>
               </a:pathLst>
@@ -3980,213 +3968,189 @@
           </p:nvSpPr>
           <p:spPr>
             <a:xfrm>
-              <a:off x="3603426" y="2073503"/>
-              <a:ext cx="4659252" cy="3251679"/>
+              <a:off x="4173171" y="2073503"/>
+              <a:ext cx="4089508" cy="3325383"/>
             </a:xfrm>
             <a:custGeom>
               <a:avLst/>
               <a:pathLst>
-                <a:path w="4659252" h="3251679">
+                <a:path w="4089508" h="3325383">
                   <a:moveTo>
                     <a:pt x="0" y="0"/>
                   </a:moveTo>
                   <a:lnTo>
-                    <a:pt x="3788" y="7817"/>
-                  </a:lnTo>
-                  <a:lnTo>
-                    <a:pt x="75411" y="149582"/>
-                  </a:lnTo>
-                  <a:lnTo>
-                    <a:pt x="147033" y="285565"/>
-                  </a:lnTo>
-                  <a:lnTo>
-                    <a:pt x="218656" y="416003"/>
-                  </a:lnTo>
-                  <a:lnTo>
-                    <a:pt x="290278" y="541120"/>
-                  </a:lnTo>
-                  <a:lnTo>
-                    <a:pt x="361901" y="661134"/>
-                  </a:lnTo>
-                  <a:lnTo>
-                    <a:pt x="433523" y="776254"/>
-                  </a:lnTo>
-                  <a:lnTo>
-                    <a:pt x="505146" y="886679"/>
-                  </a:lnTo>
-                  <a:lnTo>
-                    <a:pt x="576768" y="992600"/>
-                  </a:lnTo>
-                  <a:lnTo>
-                    <a:pt x="648391" y="1094201"/>
-                  </a:lnTo>
-                  <a:lnTo>
-                    <a:pt x="720013" y="1191658"/>
-                  </a:lnTo>
-                  <a:lnTo>
-                    <a:pt x="791636" y="1285140"/>
-                  </a:lnTo>
-                  <a:lnTo>
-                    <a:pt x="863258" y="1374810"/>
-                  </a:lnTo>
-                  <a:lnTo>
-                    <a:pt x="934881" y="1460822"/>
-                  </a:lnTo>
-                  <a:lnTo>
-                    <a:pt x="1006503" y="1543327"/>
-                  </a:lnTo>
-                  <a:lnTo>
-                    <a:pt x="1078126" y="1622467"/>
-                  </a:lnTo>
-                  <a:lnTo>
-                    <a:pt x="1149748" y="1698379"/>
-                  </a:lnTo>
-                  <a:lnTo>
-                    <a:pt x="1221371" y="1771195"/>
-                  </a:lnTo>
-                  <a:lnTo>
-                    <a:pt x="1292993" y="1841041"/>
-                  </a:lnTo>
-                  <a:lnTo>
-                    <a:pt x="1364616" y="1908038"/>
-                  </a:lnTo>
-                  <a:lnTo>
-                    <a:pt x="1436239" y="1972303"/>
-                  </a:lnTo>
-                  <a:lnTo>
-                    <a:pt x="1507861" y="2033947"/>
-                  </a:lnTo>
-                  <a:lnTo>
-                    <a:pt x="1579484" y="2093077"/>
-                  </a:lnTo>
-                  <a:lnTo>
-                    <a:pt x="1651106" y="2149795"/>
-                  </a:lnTo>
-                  <a:lnTo>
-                    <a:pt x="1722729" y="2204200"/>
-                  </a:lnTo>
-                  <a:lnTo>
-                    <a:pt x="1794351" y="2256386"/>
-                  </a:lnTo>
-                  <a:lnTo>
-                    <a:pt x="1865974" y="2306444"/>
-                  </a:lnTo>
-                  <a:lnTo>
-                    <a:pt x="1937596" y="2354460"/>
-                  </a:lnTo>
-                  <a:lnTo>
-                    <a:pt x="2009219" y="2400517"/>
-                  </a:lnTo>
-                  <a:lnTo>
-                    <a:pt x="2080841" y="2444697"/>
-                  </a:lnTo>
-                  <a:lnTo>
-                    <a:pt x="2152464" y="2487074"/>
-                  </a:lnTo>
-                  <a:lnTo>
-                    <a:pt x="2224086" y="2527723"/>
-                  </a:lnTo>
-                  <a:lnTo>
-                    <a:pt x="2295709" y="2566714"/>
-                  </a:lnTo>
-                  <a:lnTo>
-                    <a:pt x="2367331" y="2604115"/>
-                  </a:lnTo>
-                  <a:lnTo>
-                    <a:pt x="2438954" y="2639991"/>
-                  </a:lnTo>
-                  <a:lnTo>
-                    <a:pt x="2510576" y="2674403"/>
-                  </a:lnTo>
-                  <a:lnTo>
-                    <a:pt x="2582199" y="2707412"/>
-                  </a:lnTo>
-                  <a:lnTo>
-                    <a:pt x="2653821" y="2739075"/>
-                  </a:lnTo>
-                  <a:lnTo>
-                    <a:pt x="2725444" y="2769446"/>
-                  </a:lnTo>
-                  <a:lnTo>
-                    <a:pt x="2797067" y="2798579"/>
-                  </a:lnTo>
-                  <a:lnTo>
-                    <a:pt x="2868689" y="2826523"/>
-                  </a:lnTo>
-                  <a:lnTo>
-                    <a:pt x="2940312" y="2853328"/>
-                  </a:lnTo>
-                  <a:lnTo>
-                    <a:pt x="3011934" y="2879040"/>
-                  </a:lnTo>
-                  <a:lnTo>
-                    <a:pt x="3083557" y="2903702"/>
-                  </a:lnTo>
-                  <a:lnTo>
-                    <a:pt x="3155179" y="2927359"/>
-                  </a:lnTo>
-                  <a:lnTo>
-                    <a:pt x="3226802" y="2950051"/>
-                  </a:lnTo>
-                  <a:lnTo>
-                    <a:pt x="3298424" y="2971818"/>
-                  </a:lnTo>
-                  <a:lnTo>
-                    <a:pt x="3370047" y="2992697"/>
-                  </a:lnTo>
-                  <a:lnTo>
-                    <a:pt x="3441669" y="3012724"/>
-                  </a:lnTo>
-                  <a:lnTo>
-                    <a:pt x="3513292" y="3031935"/>
-                  </a:lnTo>
-                  <a:lnTo>
-                    <a:pt x="3584914" y="3050362"/>
-                  </a:lnTo>
-                  <a:lnTo>
-                    <a:pt x="3656537" y="3068037"/>
-                  </a:lnTo>
-                  <a:lnTo>
-                    <a:pt x="3728159" y="3084992"/>
-                  </a:lnTo>
-                  <a:lnTo>
-                    <a:pt x="3799782" y="3101255"/>
-                  </a:lnTo>
-                  <a:lnTo>
-                    <a:pt x="3871404" y="3116855"/>
-                  </a:lnTo>
-                  <a:lnTo>
-                    <a:pt x="3943027" y="3131819"/>
-                  </a:lnTo>
-                  <a:lnTo>
-                    <a:pt x="4014649" y="3146172"/>
-                  </a:lnTo>
-                  <a:lnTo>
-                    <a:pt x="4086272" y="3159940"/>
-                  </a:lnTo>
-                  <a:lnTo>
-                    <a:pt x="4157895" y="3173146"/>
-                  </a:lnTo>
-                  <a:lnTo>
-                    <a:pt x="4229517" y="3185814"/>
-                  </a:lnTo>
-                  <a:lnTo>
-                    <a:pt x="4301140" y="3197965"/>
-                  </a:lnTo>
-                  <a:lnTo>
-                    <a:pt x="4372762" y="3209621"/>
-                  </a:lnTo>
-                  <a:lnTo>
-                    <a:pt x="4444385" y="3220801"/>
-                  </a:lnTo>
-                  <a:lnTo>
-                    <a:pt x="4516007" y="3231525"/>
-                  </a:lnTo>
-                  <a:lnTo>
-                    <a:pt x="4587630" y="3241812"/>
-                  </a:lnTo>
-                  <a:lnTo>
-                    <a:pt x="4659252" y="3251679"/>
+                    <a:pt x="7024" y="18901"/>
+                  </a:lnTo>
+                  <a:lnTo>
+                    <a:pt x="78646" y="201474"/>
+                  </a:lnTo>
+                  <a:lnTo>
+                    <a:pt x="150269" y="374427"/>
+                  </a:lnTo>
+                  <a:lnTo>
+                    <a:pt x="221891" y="538267"/>
+                  </a:lnTo>
+                  <a:lnTo>
+                    <a:pt x="293514" y="693473"/>
+                  </a:lnTo>
+                  <a:lnTo>
+                    <a:pt x="365136" y="840501"/>
+                  </a:lnTo>
+                  <a:lnTo>
+                    <a:pt x="436759" y="979782"/>
+                  </a:lnTo>
+                  <a:lnTo>
+                    <a:pt x="508381" y="1111724"/>
+                  </a:lnTo>
+                  <a:lnTo>
+                    <a:pt x="580004" y="1236713"/>
+                  </a:lnTo>
+                  <a:lnTo>
+                    <a:pt x="651626" y="1355116"/>
+                  </a:lnTo>
+                  <a:lnTo>
+                    <a:pt x="723249" y="1467280"/>
+                  </a:lnTo>
+                  <a:lnTo>
+                    <a:pt x="794871" y="1573534"/>
+                  </a:lnTo>
+                  <a:lnTo>
+                    <a:pt x="866494" y="1674189"/>
+                  </a:lnTo>
+                  <a:lnTo>
+                    <a:pt x="938117" y="1769540"/>
+                  </a:lnTo>
+                  <a:lnTo>
+                    <a:pt x="1009739" y="1859867"/>
+                  </a:lnTo>
+                  <a:lnTo>
+                    <a:pt x="1081362" y="1945434"/>
+                  </a:lnTo>
+                  <a:lnTo>
+                    <a:pt x="1152984" y="2026492"/>
+                  </a:lnTo>
+                  <a:lnTo>
+                    <a:pt x="1224607" y="2103280"/>
+                  </a:lnTo>
+                  <a:lnTo>
+                    <a:pt x="1296229" y="2176021"/>
+                  </a:lnTo>
+                  <a:lnTo>
+                    <a:pt x="1367852" y="2244929"/>
+                  </a:lnTo>
+                  <a:lnTo>
+                    <a:pt x="1439474" y="2310206"/>
+                  </a:lnTo>
+                  <a:lnTo>
+                    <a:pt x="1511097" y="2372043"/>
+                  </a:lnTo>
+                  <a:lnTo>
+                    <a:pt x="1582719" y="2430622"/>
+                  </a:lnTo>
+                  <a:lnTo>
+                    <a:pt x="1654342" y="2486115"/>
+                  </a:lnTo>
+                  <a:lnTo>
+                    <a:pt x="1725964" y="2538683"/>
+                  </a:lnTo>
+                  <a:lnTo>
+                    <a:pt x="1797587" y="2588481"/>
+                  </a:lnTo>
+                  <a:lnTo>
+                    <a:pt x="1869209" y="2635656"/>
+                  </a:lnTo>
+                  <a:lnTo>
+                    <a:pt x="1940832" y="2680344"/>
+                  </a:lnTo>
+                  <a:lnTo>
+                    <a:pt x="2012454" y="2722678"/>
+                  </a:lnTo>
+                  <a:lnTo>
+                    <a:pt x="2084077" y="2762781"/>
+                  </a:lnTo>
+                  <a:lnTo>
+                    <a:pt x="2155699" y="2800771"/>
+                  </a:lnTo>
+                  <a:lnTo>
+                    <a:pt x="2227322" y="2836759"/>
+                  </a:lnTo>
+                  <a:lnTo>
+                    <a:pt x="2298945" y="2870851"/>
+                  </a:lnTo>
+                  <a:lnTo>
+                    <a:pt x="2370567" y="2903146"/>
+                  </a:lnTo>
+                  <a:lnTo>
+                    <a:pt x="2442190" y="2933740"/>
+                  </a:lnTo>
+                  <a:lnTo>
+                    <a:pt x="2513812" y="2962721"/>
+                  </a:lnTo>
+                  <a:lnTo>
+                    <a:pt x="2585435" y="2990176"/>
+                  </a:lnTo>
+                  <a:lnTo>
+                    <a:pt x="2657057" y="3016183"/>
+                  </a:lnTo>
+                  <a:lnTo>
+                    <a:pt x="2728680" y="3040821"/>
+                  </a:lnTo>
+                  <a:lnTo>
+                    <a:pt x="2800302" y="3064160"/>
+                  </a:lnTo>
+                  <a:lnTo>
+                    <a:pt x="2871925" y="3086269"/>
+                  </a:lnTo>
+                  <a:lnTo>
+                    <a:pt x="2943547" y="3107213"/>
+                  </a:lnTo>
+                  <a:lnTo>
+                    <a:pt x="3015170" y="3127054"/>
+                  </a:lnTo>
+                  <a:lnTo>
+                    <a:pt x="3086792" y="3145849"/>
+                  </a:lnTo>
+                  <a:lnTo>
+                    <a:pt x="3158415" y="3163654"/>
+                  </a:lnTo>
+                  <a:lnTo>
+                    <a:pt x="3230037" y="3180521"/>
+                  </a:lnTo>
+                  <a:lnTo>
+                    <a:pt x="3301660" y="3196499"/>
+                  </a:lnTo>
+                  <a:lnTo>
+                    <a:pt x="3373282" y="3211635"/>
+                  </a:lnTo>
+                  <a:lnTo>
+                    <a:pt x="3444905" y="3225973"/>
+                  </a:lnTo>
+                  <a:lnTo>
+                    <a:pt x="3516527" y="3239556"/>
+                  </a:lnTo>
+                  <a:lnTo>
+                    <a:pt x="3588150" y="3252423"/>
+                  </a:lnTo>
+                  <a:lnTo>
+                    <a:pt x="3659773" y="3264612"/>
+                  </a:lnTo>
+                  <a:lnTo>
+                    <a:pt x="3731395" y="3276159"/>
+                  </a:lnTo>
+                  <a:lnTo>
+                    <a:pt x="3803018" y="3287097"/>
+                  </a:lnTo>
+                  <a:lnTo>
+                    <a:pt x="3874640" y="3297460"/>
+                  </a:lnTo>
+                  <a:lnTo>
+                    <a:pt x="3946263" y="3307276"/>
+                  </a:lnTo>
+                  <a:lnTo>
+                    <a:pt x="4017885" y="3316574"/>
+                  </a:lnTo>
+                  <a:lnTo>
+                    <a:pt x="4089508" y="3325383"/>
                   </a:lnTo>
                 </a:path>
               </a:pathLst>
@@ -4926,7 +4890,7 @@
                   <a:latin typeface="Helvetica"/>
                   <a:cs typeface="Helvetica"/>
                 </a:rPr>
-                <a:t>subHR per 1 mL/min: 0.95 (0.90-1.00)  |  per IQR (Δ = 18.2): 0.38 (0.14-1.02)  |  IQR: [-11.5, 6.7]</a:t>
+                <a:t>subHR per 1 mL/min: 0.93 (0.88-0.99)  |  per IQR (Δ = 18.2): 0.28 (0.10-0.80)  |  IQR: [-11.5, 6.7]</a:t>
               </a:r>
             </a:p>
           </p:txBody>

--- a/docs/plots/carbo/jx_carbo_linsubhr_egfrdisc_throm3.pptx
+++ b/docs/plots/carbo/jx_carbo_linsubhr_egfrdisc_throm3.pptx
@@ -3064,40 +3064,40 @@
                     <a:pt x="5013576" y="2666727"/>
                   </a:lnTo>
                   <a:lnTo>
-                    <a:pt x="5085199" y="2674460"/>
-                  </a:lnTo>
-                  <a:lnTo>
-                    <a:pt x="5156821" y="2682119"/>
+                    <a:pt x="5085199" y="2674459"/>
+                  </a:lnTo>
+                  <a:lnTo>
+                    <a:pt x="5156821" y="2682118"/>
                   </a:lnTo>
                   <a:lnTo>
                     <a:pt x="5228444" y="2689705"/>
                   </a:lnTo>
                   <a:lnTo>
-                    <a:pt x="5300066" y="2697220"/>
+                    <a:pt x="5300066" y="2697219"/>
                   </a:lnTo>
                   <a:lnTo>
                     <a:pt x="5371689" y="2704663"/>
                   </a:lnTo>
                   <a:lnTo>
-                    <a:pt x="5443311" y="2712037"/>
-                  </a:lnTo>
-                  <a:lnTo>
-                    <a:pt x="5514934" y="2719340"/>
+                    <a:pt x="5443311" y="2712036"/>
+                  </a:lnTo>
+                  <a:lnTo>
+                    <a:pt x="5514934" y="2719339"/>
                   </a:lnTo>
                   <a:lnTo>
                     <a:pt x="5586557" y="2726574"/>
                   </a:lnTo>
                   <a:lnTo>
-                    <a:pt x="5658179" y="2733740"/>
-                  </a:lnTo>
-                  <a:lnTo>
-                    <a:pt x="5729802" y="2740838"/>
-                  </a:lnTo>
-                  <a:lnTo>
-                    <a:pt x="5801424" y="2747869"/>
-                  </a:lnTo>
-                  <a:lnTo>
-                    <a:pt x="5873047" y="2754833"/>
+                    <a:pt x="5658179" y="2733739"/>
+                  </a:lnTo>
+                  <a:lnTo>
+                    <a:pt x="5729802" y="2740837"/>
+                  </a:lnTo>
+                  <a:lnTo>
+                    <a:pt x="5801424" y="2747868"/>
+                  </a:lnTo>
+                  <a:lnTo>
+                    <a:pt x="5873047" y="2754832"/>
                   </a:lnTo>
                   <a:lnTo>
                     <a:pt x="5944669" y="2761731"/>
@@ -3106,49 +3106,49 @@
                     <a:pt x="6016292" y="2768564"/>
                   </a:lnTo>
                   <a:lnTo>
-                    <a:pt x="6087914" y="2775333"/>
-                  </a:lnTo>
-                  <a:lnTo>
-                    <a:pt x="6159537" y="2782037"/>
-                  </a:lnTo>
-                  <a:lnTo>
-                    <a:pt x="6231159" y="2788678"/>
-                  </a:lnTo>
-                  <a:lnTo>
-                    <a:pt x="6302782" y="2795256"/>
-                  </a:lnTo>
-                  <a:lnTo>
-                    <a:pt x="6374404" y="2801772"/>
-                  </a:lnTo>
-                  <a:lnTo>
-                    <a:pt x="6446027" y="2808226"/>
-                  </a:lnTo>
-                  <a:lnTo>
-                    <a:pt x="6517649" y="2814619"/>
-                  </a:lnTo>
-                  <a:lnTo>
-                    <a:pt x="6589272" y="2820952"/>
-                  </a:lnTo>
-                  <a:lnTo>
-                    <a:pt x="6660894" y="2827224"/>
-                  </a:lnTo>
-                  <a:lnTo>
-                    <a:pt x="6732517" y="2833438"/>
-                  </a:lnTo>
-                  <a:lnTo>
-                    <a:pt x="6804139" y="2839592"/>
-                  </a:lnTo>
-                  <a:lnTo>
-                    <a:pt x="6875762" y="2845688"/>
-                  </a:lnTo>
-                  <a:lnTo>
-                    <a:pt x="6947385" y="2851727"/>
-                  </a:lnTo>
-                  <a:lnTo>
-                    <a:pt x="7019007" y="2857708"/>
-                  </a:lnTo>
-                  <a:lnTo>
-                    <a:pt x="7090630" y="2863633"/>
+                    <a:pt x="6087914" y="2775332"/>
+                  </a:lnTo>
+                  <a:lnTo>
+                    <a:pt x="6159537" y="2782036"/>
+                  </a:lnTo>
+                  <a:lnTo>
+                    <a:pt x="6231159" y="2788677"/>
+                  </a:lnTo>
+                  <a:lnTo>
+                    <a:pt x="6302782" y="2795255"/>
+                  </a:lnTo>
+                  <a:lnTo>
+                    <a:pt x="6374404" y="2801771"/>
+                  </a:lnTo>
+                  <a:lnTo>
+                    <a:pt x="6446027" y="2808225"/>
+                  </a:lnTo>
+                  <a:lnTo>
+                    <a:pt x="6517649" y="2814618"/>
+                  </a:lnTo>
+                  <a:lnTo>
+                    <a:pt x="6589272" y="2820951"/>
+                  </a:lnTo>
+                  <a:lnTo>
+                    <a:pt x="6660894" y="2827223"/>
+                  </a:lnTo>
+                  <a:lnTo>
+                    <a:pt x="6732517" y="2833437"/>
+                  </a:lnTo>
+                  <a:lnTo>
+                    <a:pt x="6804139" y="2839591"/>
+                  </a:lnTo>
+                  <a:lnTo>
+                    <a:pt x="6875762" y="2845687"/>
+                  </a:lnTo>
+                  <a:lnTo>
+                    <a:pt x="6947385" y="2851726"/>
+                  </a:lnTo>
+                  <a:lnTo>
+                    <a:pt x="7019007" y="2857707"/>
+                  </a:lnTo>
+                  <a:lnTo>
+                    <a:pt x="7090630" y="2863632"/>
                   </a:lnTo>
                   <a:lnTo>
                     <a:pt x="7090630" y="3443304"/>
@@ -3262,10 +3262,10 @@
                     <a:pt x="4512219" y="2610494"/>
                   </a:lnTo>
                   <a:lnTo>
-                    <a:pt x="4440596" y="2602150"/>
-                  </a:lnTo>
-                  <a:lnTo>
-                    <a:pt x="4368974" y="2593727"/>
+                    <a:pt x="4440596" y="2602151"/>
+                  </a:lnTo>
+                  <a:lnTo>
+                    <a:pt x="4368974" y="2593728"/>
                   </a:lnTo>
                   <a:lnTo>
                     <a:pt x="4297351" y="2585224"/>
@@ -3274,181 +3274,181 @@
                     <a:pt x="4225729" y="2576639"/>
                   </a:lnTo>
                   <a:lnTo>
-                    <a:pt x="4154106" y="2567972"/>
-                  </a:lnTo>
-                  <a:lnTo>
-                    <a:pt x="4082483" y="2559222"/>
-                  </a:lnTo>
-                  <a:lnTo>
-                    <a:pt x="4010861" y="2550389"/>
+                    <a:pt x="4154106" y="2567973"/>
+                  </a:lnTo>
+                  <a:lnTo>
+                    <a:pt x="4082483" y="2559223"/>
+                  </a:lnTo>
+                  <a:lnTo>
+                    <a:pt x="4010861" y="2550390"/>
                   </a:lnTo>
                   <a:lnTo>
                     <a:pt x="3939238" y="2541472"/>
                   </a:lnTo>
                   <a:lnTo>
-                    <a:pt x="3867616" y="2532469"/>
-                  </a:lnTo>
-                  <a:lnTo>
-                    <a:pt x="3795993" y="2523380"/>
-                  </a:lnTo>
-                  <a:lnTo>
-                    <a:pt x="3724371" y="2514204"/>
-                  </a:lnTo>
-                  <a:lnTo>
-                    <a:pt x="3652748" y="2504941"/>
-                  </a:lnTo>
-                  <a:lnTo>
-                    <a:pt x="3581126" y="2495589"/>
-                  </a:lnTo>
-                  <a:lnTo>
-                    <a:pt x="3509503" y="2486148"/>
-                  </a:lnTo>
-                  <a:lnTo>
-                    <a:pt x="3437881" y="2476617"/>
-                  </a:lnTo>
-                  <a:lnTo>
-                    <a:pt x="3366258" y="2466994"/>
-                  </a:lnTo>
-                  <a:lnTo>
-                    <a:pt x="3294636" y="2457280"/>
-                  </a:lnTo>
-                  <a:lnTo>
-                    <a:pt x="3223013" y="2447473"/>
-                  </a:lnTo>
-                  <a:lnTo>
-                    <a:pt x="3151391" y="2437572"/>
-                  </a:lnTo>
-                  <a:lnTo>
-                    <a:pt x="3079768" y="2427576"/>
-                  </a:lnTo>
-                  <a:lnTo>
-                    <a:pt x="3008146" y="2417486"/>
-                  </a:lnTo>
-                  <a:lnTo>
-                    <a:pt x="2936523" y="2407298"/>
-                  </a:lnTo>
-                  <a:lnTo>
-                    <a:pt x="2864901" y="2397013"/>
-                  </a:lnTo>
-                  <a:lnTo>
-                    <a:pt x="2793278" y="2386630"/>
-                  </a:lnTo>
-                  <a:lnTo>
-                    <a:pt x="2721655" y="2376148"/>
-                  </a:lnTo>
-                  <a:lnTo>
-                    <a:pt x="2650033" y="2365566"/>
-                  </a:lnTo>
-                  <a:lnTo>
-                    <a:pt x="2578410" y="2354882"/>
-                  </a:lnTo>
-                  <a:lnTo>
-                    <a:pt x="2506788" y="2344097"/>
-                  </a:lnTo>
-                  <a:lnTo>
-                    <a:pt x="2435165" y="2333208"/>
-                  </a:lnTo>
-                  <a:lnTo>
-                    <a:pt x="2363543" y="2322216"/>
-                  </a:lnTo>
-                  <a:lnTo>
-                    <a:pt x="2291920" y="2311118"/>
-                  </a:lnTo>
-                  <a:lnTo>
-                    <a:pt x="2220298" y="2299914"/>
-                  </a:lnTo>
-                  <a:lnTo>
-                    <a:pt x="2148675" y="2288604"/>
-                  </a:lnTo>
-                  <a:lnTo>
-                    <a:pt x="2077053" y="2277185"/>
-                  </a:lnTo>
-                  <a:lnTo>
-                    <a:pt x="2005430" y="2265657"/>
-                  </a:lnTo>
-                  <a:lnTo>
-                    <a:pt x="1933808" y="2254019"/>
-                  </a:lnTo>
-                  <a:lnTo>
-                    <a:pt x="1862185" y="2242270"/>
-                  </a:lnTo>
-                  <a:lnTo>
-                    <a:pt x="1790563" y="2230408"/>
-                  </a:lnTo>
-                  <a:lnTo>
-                    <a:pt x="1718940" y="2218434"/>
-                  </a:lnTo>
-                  <a:lnTo>
-                    <a:pt x="1647318" y="2206344"/>
-                  </a:lnTo>
-                  <a:lnTo>
-                    <a:pt x="1575695" y="2194140"/>
-                  </a:lnTo>
-                  <a:lnTo>
-                    <a:pt x="1504073" y="2181818"/>
-                  </a:lnTo>
-                  <a:lnTo>
-                    <a:pt x="1432450" y="2169379"/>
-                  </a:lnTo>
-                  <a:lnTo>
-                    <a:pt x="1360827" y="2156822"/>
-                  </a:lnTo>
-                  <a:lnTo>
-                    <a:pt x="1289205" y="2144144"/>
-                  </a:lnTo>
-                  <a:lnTo>
-                    <a:pt x="1217582" y="2131345"/>
-                  </a:lnTo>
-                  <a:lnTo>
-                    <a:pt x="1145960" y="2118423"/>
-                  </a:lnTo>
-                  <a:lnTo>
-                    <a:pt x="1074337" y="2105379"/>
-                  </a:lnTo>
-                  <a:lnTo>
-                    <a:pt x="1002715" y="2092209"/>
-                  </a:lnTo>
-                  <a:lnTo>
-                    <a:pt x="931092" y="2078914"/>
-                  </a:lnTo>
-                  <a:lnTo>
-                    <a:pt x="859470" y="2065492"/>
-                  </a:lnTo>
-                  <a:lnTo>
-                    <a:pt x="787847" y="2051942"/>
-                  </a:lnTo>
-                  <a:lnTo>
-                    <a:pt x="716225" y="2038262"/>
-                  </a:lnTo>
-                  <a:lnTo>
-                    <a:pt x="644602" y="2024451"/>
-                  </a:lnTo>
-                  <a:lnTo>
-                    <a:pt x="572980" y="2010508"/>
-                  </a:lnTo>
-                  <a:lnTo>
-                    <a:pt x="501357" y="1996433"/>
-                  </a:lnTo>
-                  <a:lnTo>
-                    <a:pt x="429735" y="1982222"/>
-                  </a:lnTo>
-                  <a:lnTo>
-                    <a:pt x="358112" y="1967876"/>
-                  </a:lnTo>
-                  <a:lnTo>
-                    <a:pt x="286490" y="1953393"/>
-                  </a:lnTo>
-                  <a:lnTo>
-                    <a:pt x="214867" y="1938772"/>
-                  </a:lnTo>
-                  <a:lnTo>
-                    <a:pt x="143245" y="1924011"/>
-                  </a:lnTo>
-                  <a:lnTo>
-                    <a:pt x="71622" y="1909108"/>
-                  </a:lnTo>
-                  <a:lnTo>
-                    <a:pt x="0" y="1894064"/>
+                    <a:pt x="3867616" y="2532470"/>
+                  </a:lnTo>
+                  <a:lnTo>
+                    <a:pt x="3795993" y="2523381"/>
+                  </a:lnTo>
+                  <a:lnTo>
+                    <a:pt x="3724371" y="2514205"/>
+                  </a:lnTo>
+                  <a:lnTo>
+                    <a:pt x="3652748" y="2504942"/>
+                  </a:lnTo>
+                  <a:lnTo>
+                    <a:pt x="3581126" y="2495590"/>
+                  </a:lnTo>
+                  <a:lnTo>
+                    <a:pt x="3509503" y="2486149"/>
+                  </a:lnTo>
+                  <a:lnTo>
+                    <a:pt x="3437881" y="2476618"/>
+                  </a:lnTo>
+                  <a:lnTo>
+                    <a:pt x="3366258" y="2466996"/>
+                  </a:lnTo>
+                  <a:lnTo>
+                    <a:pt x="3294636" y="2457281"/>
+                  </a:lnTo>
+                  <a:lnTo>
+                    <a:pt x="3223013" y="2447474"/>
+                  </a:lnTo>
+                  <a:lnTo>
+                    <a:pt x="3151391" y="2437574"/>
+                  </a:lnTo>
+                  <a:lnTo>
+                    <a:pt x="3079768" y="2427578"/>
+                  </a:lnTo>
+                  <a:lnTo>
+                    <a:pt x="3008146" y="2417487"/>
+                  </a:lnTo>
+                  <a:lnTo>
+                    <a:pt x="2936523" y="2407300"/>
+                  </a:lnTo>
+                  <a:lnTo>
+                    <a:pt x="2864901" y="2397015"/>
+                  </a:lnTo>
+                  <a:lnTo>
+                    <a:pt x="2793278" y="2386632"/>
+                  </a:lnTo>
+                  <a:lnTo>
+                    <a:pt x="2721655" y="2376150"/>
+                  </a:lnTo>
+                  <a:lnTo>
+                    <a:pt x="2650033" y="2365568"/>
+                  </a:lnTo>
+                  <a:lnTo>
+                    <a:pt x="2578410" y="2354885"/>
+                  </a:lnTo>
+                  <a:lnTo>
+                    <a:pt x="2506788" y="2344099"/>
+                  </a:lnTo>
+                  <a:lnTo>
+                    <a:pt x="2435165" y="2333211"/>
+                  </a:lnTo>
+                  <a:lnTo>
+                    <a:pt x="2363543" y="2322218"/>
+                  </a:lnTo>
+                  <a:lnTo>
+                    <a:pt x="2291920" y="2311121"/>
+                  </a:lnTo>
+                  <a:lnTo>
+                    <a:pt x="2220298" y="2299917"/>
+                  </a:lnTo>
+                  <a:lnTo>
+                    <a:pt x="2148675" y="2288607"/>
+                  </a:lnTo>
+                  <a:lnTo>
+                    <a:pt x="2077053" y="2277188"/>
+                  </a:lnTo>
+                  <a:lnTo>
+                    <a:pt x="2005430" y="2265660"/>
+                  </a:lnTo>
+                  <a:lnTo>
+                    <a:pt x="1933808" y="2254022"/>
+                  </a:lnTo>
+                  <a:lnTo>
+                    <a:pt x="1862185" y="2242273"/>
+                  </a:lnTo>
+                  <a:lnTo>
+                    <a:pt x="1790563" y="2230412"/>
+                  </a:lnTo>
+                  <a:lnTo>
+                    <a:pt x="1718940" y="2218437"/>
+                  </a:lnTo>
+                  <a:lnTo>
+                    <a:pt x="1647318" y="2206348"/>
+                  </a:lnTo>
+                  <a:lnTo>
+                    <a:pt x="1575695" y="2194143"/>
+                  </a:lnTo>
+                  <a:lnTo>
+                    <a:pt x="1504073" y="2181822"/>
+                  </a:lnTo>
+                  <a:lnTo>
+                    <a:pt x="1432450" y="2169383"/>
+                  </a:lnTo>
+                  <a:lnTo>
+                    <a:pt x="1360827" y="2156826"/>
+                  </a:lnTo>
+                  <a:lnTo>
+                    <a:pt x="1289205" y="2144148"/>
+                  </a:lnTo>
+                  <a:lnTo>
+                    <a:pt x="1217582" y="2131349"/>
+                  </a:lnTo>
+                  <a:lnTo>
+                    <a:pt x="1145960" y="2118428"/>
+                  </a:lnTo>
+                  <a:lnTo>
+                    <a:pt x="1074337" y="2105383"/>
+                  </a:lnTo>
+                  <a:lnTo>
+                    <a:pt x="1002715" y="2092214"/>
+                  </a:lnTo>
+                  <a:lnTo>
+                    <a:pt x="931092" y="2078919"/>
+                  </a:lnTo>
+                  <a:lnTo>
+                    <a:pt x="859470" y="2065497"/>
+                  </a:lnTo>
+                  <a:lnTo>
+                    <a:pt x="787847" y="2051947"/>
+                  </a:lnTo>
+                  <a:lnTo>
+                    <a:pt x="716225" y="2038267"/>
+                  </a:lnTo>
+                  <a:lnTo>
+                    <a:pt x="644602" y="2024456"/>
+                  </a:lnTo>
+                  <a:lnTo>
+                    <a:pt x="572980" y="2010514"/>
+                  </a:lnTo>
+                  <a:lnTo>
+                    <a:pt x="501357" y="1996438"/>
+                  </a:lnTo>
+                  <a:lnTo>
+                    <a:pt x="429735" y="1982228"/>
+                  </a:lnTo>
+                  <a:lnTo>
+                    <a:pt x="358112" y="1967882"/>
+                  </a:lnTo>
+                  <a:lnTo>
+                    <a:pt x="286490" y="1953399"/>
+                  </a:lnTo>
+                  <a:lnTo>
+                    <a:pt x="214867" y="1938778"/>
+                  </a:lnTo>
+                  <a:lnTo>
+                    <a:pt x="143245" y="1924017"/>
+                  </a:lnTo>
+                  <a:lnTo>
+                    <a:pt x="71622" y="1909115"/>
+                  </a:lnTo>
+                  <a:lnTo>
+                    <a:pt x="0" y="1894070"/>
                   </a:lnTo>
                   <a:lnTo>
                     <a:pt x="0" y="0"/>
@@ -3478,12 +3478,12 @@
           <p:spPr>
             <a:xfrm>
               <a:off x="5031339" y="2073503"/>
-              <a:ext cx="3231339" cy="2863633"/>
+              <a:ext cx="3231339" cy="2863632"/>
             </a:xfrm>
             <a:custGeom>
               <a:avLst/>
               <a:pathLst>
-                <a:path w="3231339" h="2863633">
+                <a:path w="3231339" h="2863632">
                   <a:moveTo>
                     <a:pt x="0" y="0"/>
                   </a:moveTo>
@@ -3539,40 +3539,40 @@
                     <a:pt x="1154286" y="2666727"/>
                   </a:lnTo>
                   <a:lnTo>
-                    <a:pt x="1225909" y="2674460"/>
-                  </a:lnTo>
-                  <a:lnTo>
-                    <a:pt x="1297531" y="2682119"/>
+                    <a:pt x="1225909" y="2674459"/>
+                  </a:lnTo>
+                  <a:lnTo>
+                    <a:pt x="1297531" y="2682118"/>
                   </a:lnTo>
                   <a:lnTo>
                     <a:pt x="1369154" y="2689705"/>
                   </a:lnTo>
                   <a:lnTo>
-                    <a:pt x="1440776" y="2697220"/>
+                    <a:pt x="1440776" y="2697219"/>
                   </a:lnTo>
                   <a:lnTo>
                     <a:pt x="1512399" y="2704663"/>
                   </a:lnTo>
                   <a:lnTo>
-                    <a:pt x="1584021" y="2712037"/>
-                  </a:lnTo>
-                  <a:lnTo>
-                    <a:pt x="1655644" y="2719340"/>
+                    <a:pt x="1584021" y="2712036"/>
+                  </a:lnTo>
+                  <a:lnTo>
+                    <a:pt x="1655644" y="2719339"/>
                   </a:lnTo>
                   <a:lnTo>
                     <a:pt x="1727266" y="2726574"/>
                   </a:lnTo>
                   <a:lnTo>
-                    <a:pt x="1798889" y="2733740"/>
-                  </a:lnTo>
-                  <a:lnTo>
-                    <a:pt x="1870511" y="2740838"/>
-                  </a:lnTo>
-                  <a:lnTo>
-                    <a:pt x="1942134" y="2747869"/>
-                  </a:lnTo>
-                  <a:lnTo>
-                    <a:pt x="2013756" y="2754833"/>
+                    <a:pt x="1798889" y="2733739"/>
+                  </a:lnTo>
+                  <a:lnTo>
+                    <a:pt x="1870511" y="2740837"/>
+                  </a:lnTo>
+                  <a:lnTo>
+                    <a:pt x="1942134" y="2747868"/>
+                  </a:lnTo>
+                  <a:lnTo>
+                    <a:pt x="2013756" y="2754832"/>
                   </a:lnTo>
                   <a:lnTo>
                     <a:pt x="2085379" y="2761731"/>
@@ -3581,49 +3581,49 @@
                     <a:pt x="2157001" y="2768564"/>
                   </a:lnTo>
                   <a:lnTo>
-                    <a:pt x="2228624" y="2775333"/>
-                  </a:lnTo>
-                  <a:lnTo>
-                    <a:pt x="2300246" y="2782037"/>
-                  </a:lnTo>
-                  <a:lnTo>
-                    <a:pt x="2371869" y="2788678"/>
-                  </a:lnTo>
-                  <a:lnTo>
-                    <a:pt x="2443492" y="2795256"/>
-                  </a:lnTo>
-                  <a:lnTo>
-                    <a:pt x="2515114" y="2801772"/>
-                  </a:lnTo>
-                  <a:lnTo>
-                    <a:pt x="2586737" y="2808226"/>
-                  </a:lnTo>
-                  <a:lnTo>
-                    <a:pt x="2658359" y="2814619"/>
-                  </a:lnTo>
-                  <a:lnTo>
-                    <a:pt x="2729982" y="2820952"/>
-                  </a:lnTo>
-                  <a:lnTo>
-                    <a:pt x="2801604" y="2827224"/>
-                  </a:lnTo>
-                  <a:lnTo>
-                    <a:pt x="2873227" y="2833438"/>
-                  </a:lnTo>
-                  <a:lnTo>
-                    <a:pt x="2944849" y="2839592"/>
-                  </a:lnTo>
-                  <a:lnTo>
-                    <a:pt x="3016472" y="2845688"/>
-                  </a:lnTo>
-                  <a:lnTo>
-                    <a:pt x="3088094" y="2851727"/>
-                  </a:lnTo>
-                  <a:lnTo>
-                    <a:pt x="3159717" y="2857708"/>
-                  </a:lnTo>
-                  <a:lnTo>
-                    <a:pt x="3231339" y="2863633"/>
+                    <a:pt x="2228624" y="2775332"/>
+                  </a:lnTo>
+                  <a:lnTo>
+                    <a:pt x="2300246" y="2782036"/>
+                  </a:lnTo>
+                  <a:lnTo>
+                    <a:pt x="2371869" y="2788677"/>
+                  </a:lnTo>
+                  <a:lnTo>
+                    <a:pt x="2443492" y="2795255"/>
+                  </a:lnTo>
+                  <a:lnTo>
+                    <a:pt x="2515114" y="2801771"/>
+                  </a:lnTo>
+                  <a:lnTo>
+                    <a:pt x="2586737" y="2808225"/>
+                  </a:lnTo>
+                  <a:lnTo>
+                    <a:pt x="2658359" y="2814618"/>
+                  </a:lnTo>
+                  <a:lnTo>
+                    <a:pt x="2729982" y="2820951"/>
+                  </a:lnTo>
+                  <a:lnTo>
+                    <a:pt x="2801604" y="2827223"/>
+                  </a:lnTo>
+                  <a:lnTo>
+                    <a:pt x="2873227" y="2833437"/>
+                  </a:lnTo>
+                  <a:lnTo>
+                    <a:pt x="2944849" y="2839591"/>
+                  </a:lnTo>
+                  <a:lnTo>
+                    <a:pt x="3016472" y="2845687"/>
+                  </a:lnTo>
+                  <a:lnTo>
+                    <a:pt x="3088094" y="2851726"/>
+                  </a:lnTo>
+                  <a:lnTo>
+                    <a:pt x="3159717" y="2857707"/>
+                  </a:lnTo>
+                  <a:lnTo>
+                    <a:pt x="3231339" y="2863632"/>
                   </a:lnTo>
                 </a:path>
               </a:pathLst>
@@ -3643,300 +3643,300 @@
           </p:nvSpPr>
           <p:spPr>
             <a:xfrm>
-              <a:off x="1172049" y="3967567"/>
-              <a:ext cx="7090630" cy="1549240"/>
+              <a:off x="1172049" y="3967573"/>
+              <a:ext cx="7090630" cy="1549233"/>
             </a:xfrm>
             <a:custGeom>
               <a:avLst/>
               <a:pathLst>
-                <a:path w="7090630" h="1549240">
+                <a:path w="7090630" h="1549233">
                   <a:moveTo>
-                    <a:pt x="7090630" y="1549240"/>
+                    <a:pt x="7090630" y="1549233"/>
                   </a:moveTo>
                   <a:lnTo>
-                    <a:pt x="7019007" y="1545042"/>
-                  </a:lnTo>
-                  <a:lnTo>
-                    <a:pt x="6947385" y="1540408"/>
-                  </a:lnTo>
-                  <a:lnTo>
-                    <a:pt x="6875762" y="1535294"/>
-                  </a:lnTo>
-                  <a:lnTo>
-                    <a:pt x="6804139" y="1529649"/>
-                  </a:lnTo>
-                  <a:lnTo>
-                    <a:pt x="6732517" y="1523417"/>
-                  </a:lnTo>
-                  <a:lnTo>
-                    <a:pt x="6660894" y="1516539"/>
-                  </a:lnTo>
-                  <a:lnTo>
-                    <a:pt x="6589272" y="1508947"/>
-                  </a:lnTo>
-                  <a:lnTo>
-                    <a:pt x="6517649" y="1500567"/>
-                  </a:lnTo>
-                  <a:lnTo>
-                    <a:pt x="6446027" y="1491318"/>
-                  </a:lnTo>
-                  <a:lnTo>
-                    <a:pt x="6374404" y="1481108"/>
-                  </a:lnTo>
-                  <a:lnTo>
-                    <a:pt x="6302782" y="1469838"/>
-                  </a:lnTo>
-                  <a:lnTo>
-                    <a:pt x="6231159" y="1457399"/>
-                  </a:lnTo>
-                  <a:lnTo>
-                    <a:pt x="6159537" y="1443668"/>
-                  </a:lnTo>
-                  <a:lnTo>
-                    <a:pt x="6087914" y="1428513"/>
-                  </a:lnTo>
-                  <a:lnTo>
-                    <a:pt x="6016292" y="1411784"/>
-                  </a:lnTo>
-                  <a:lnTo>
-                    <a:pt x="5944669" y="1393319"/>
-                  </a:lnTo>
-                  <a:lnTo>
-                    <a:pt x="5873047" y="1372937"/>
-                  </a:lnTo>
-                  <a:lnTo>
-                    <a:pt x="5801424" y="1350440"/>
-                  </a:lnTo>
-                  <a:lnTo>
-                    <a:pt x="5729802" y="1325608"/>
-                  </a:lnTo>
-                  <a:lnTo>
-                    <a:pt x="5658179" y="1298198"/>
-                  </a:lnTo>
-                  <a:lnTo>
-                    <a:pt x="5586557" y="1267943"/>
-                  </a:lnTo>
-                  <a:lnTo>
-                    <a:pt x="5514934" y="1234547"/>
-                  </a:lnTo>
-                  <a:lnTo>
-                    <a:pt x="5443311" y="1197686"/>
-                  </a:lnTo>
-                  <a:lnTo>
-                    <a:pt x="5371689" y="1156998"/>
-                  </a:lnTo>
-                  <a:lnTo>
-                    <a:pt x="5300066" y="1112087"/>
-                  </a:lnTo>
-                  <a:lnTo>
-                    <a:pt x="5228444" y="1062514"/>
-                  </a:lnTo>
-                  <a:lnTo>
-                    <a:pt x="5156821" y="1007796"/>
-                  </a:lnTo>
-                  <a:lnTo>
-                    <a:pt x="5085199" y="947399"/>
-                  </a:lnTo>
-                  <a:lnTo>
-                    <a:pt x="5013576" y="880732"/>
-                  </a:lnTo>
-                  <a:lnTo>
-                    <a:pt x="4941954" y="807146"/>
-                  </a:lnTo>
-                  <a:lnTo>
-                    <a:pt x="4870331" y="756976"/>
-                  </a:lnTo>
-                  <a:lnTo>
-                    <a:pt x="4798709" y="749020"/>
-                  </a:lnTo>
-                  <a:lnTo>
-                    <a:pt x="4727086" y="740988"/>
-                  </a:lnTo>
-                  <a:lnTo>
-                    <a:pt x="4655464" y="732880"/>
-                  </a:lnTo>
-                  <a:lnTo>
-                    <a:pt x="4583841" y="724694"/>
-                  </a:lnTo>
-                  <a:lnTo>
-                    <a:pt x="4512219" y="716429"/>
-                  </a:lnTo>
-                  <a:lnTo>
-                    <a:pt x="4440596" y="708086"/>
-                  </a:lnTo>
-                  <a:lnTo>
-                    <a:pt x="4368974" y="699663"/>
-                  </a:lnTo>
-                  <a:lnTo>
-                    <a:pt x="4297351" y="691159"/>
-                  </a:lnTo>
-                  <a:lnTo>
-                    <a:pt x="4225729" y="682574"/>
-                  </a:lnTo>
-                  <a:lnTo>
-                    <a:pt x="4154106" y="673908"/>
-                  </a:lnTo>
-                  <a:lnTo>
-                    <a:pt x="4082483" y="665158"/>
-                  </a:lnTo>
-                  <a:lnTo>
-                    <a:pt x="4010861" y="656325"/>
-                  </a:lnTo>
-                  <a:lnTo>
-                    <a:pt x="3939238" y="647407"/>
-                  </a:lnTo>
-                  <a:lnTo>
-                    <a:pt x="3867616" y="638405"/>
-                  </a:lnTo>
-                  <a:lnTo>
-                    <a:pt x="3795993" y="629316"/>
-                  </a:lnTo>
-                  <a:lnTo>
-                    <a:pt x="3724371" y="620140"/>
-                  </a:lnTo>
-                  <a:lnTo>
-                    <a:pt x="3652748" y="610877"/>
-                  </a:lnTo>
-                  <a:lnTo>
-                    <a:pt x="3581126" y="601525"/>
-                  </a:lnTo>
-                  <a:lnTo>
-                    <a:pt x="3509503" y="592084"/>
-                  </a:lnTo>
-                  <a:lnTo>
-                    <a:pt x="3437881" y="582552"/>
-                  </a:lnTo>
-                  <a:lnTo>
-                    <a:pt x="3366258" y="572930"/>
-                  </a:lnTo>
-                  <a:lnTo>
-                    <a:pt x="3294636" y="563216"/>
-                  </a:lnTo>
-                  <a:lnTo>
-                    <a:pt x="3223013" y="553408"/>
-                  </a:lnTo>
-                  <a:lnTo>
-                    <a:pt x="3151391" y="543508"/>
-                  </a:lnTo>
-                  <a:lnTo>
-                    <a:pt x="3079768" y="533512"/>
-                  </a:lnTo>
-                  <a:lnTo>
-                    <a:pt x="3008146" y="523421"/>
-                  </a:lnTo>
-                  <a:lnTo>
-                    <a:pt x="2936523" y="513234"/>
-                  </a:lnTo>
-                  <a:lnTo>
-                    <a:pt x="2864901" y="502949"/>
-                  </a:lnTo>
-                  <a:lnTo>
-                    <a:pt x="2793278" y="492566"/>
-                  </a:lnTo>
-                  <a:lnTo>
-                    <a:pt x="2721655" y="482084"/>
-                  </a:lnTo>
-                  <a:lnTo>
-                    <a:pt x="2650033" y="471502"/>
-                  </a:lnTo>
-                  <a:lnTo>
-                    <a:pt x="2578410" y="460818"/>
-                  </a:lnTo>
-                  <a:lnTo>
-                    <a:pt x="2506788" y="450033"/>
-                  </a:lnTo>
-                  <a:lnTo>
-                    <a:pt x="2435165" y="439144"/>
-                  </a:lnTo>
-                  <a:lnTo>
-                    <a:pt x="2363543" y="428151"/>
-                  </a:lnTo>
-                  <a:lnTo>
-                    <a:pt x="2291920" y="417054"/>
-                  </a:lnTo>
-                  <a:lnTo>
-                    <a:pt x="2220298" y="405850"/>
-                  </a:lnTo>
-                  <a:lnTo>
-                    <a:pt x="2148675" y="394539"/>
-                  </a:lnTo>
-                  <a:lnTo>
-                    <a:pt x="2077053" y="383121"/>
-                  </a:lnTo>
-                  <a:lnTo>
-                    <a:pt x="2005430" y="371593"/>
-                  </a:lnTo>
-                  <a:lnTo>
-                    <a:pt x="1933808" y="359955"/>
-                  </a:lnTo>
-                  <a:lnTo>
-                    <a:pt x="1862185" y="348206"/>
-                  </a:lnTo>
-                  <a:lnTo>
-                    <a:pt x="1790563" y="336344"/>
-                  </a:lnTo>
-                  <a:lnTo>
-                    <a:pt x="1718940" y="324369"/>
-                  </a:lnTo>
-                  <a:lnTo>
-                    <a:pt x="1647318" y="312280"/>
-                  </a:lnTo>
-                  <a:lnTo>
-                    <a:pt x="1575695" y="300075"/>
-                  </a:lnTo>
-                  <a:lnTo>
-                    <a:pt x="1504073" y="287754"/>
-                  </a:lnTo>
-                  <a:lnTo>
-                    <a:pt x="1432450" y="275315"/>
-                  </a:lnTo>
-                  <a:lnTo>
-                    <a:pt x="1360827" y="262757"/>
-                  </a:lnTo>
-                  <a:lnTo>
-                    <a:pt x="1289205" y="250079"/>
-                  </a:lnTo>
-                  <a:lnTo>
-                    <a:pt x="1217582" y="237280"/>
-                  </a:lnTo>
-                  <a:lnTo>
-                    <a:pt x="1145960" y="224359"/>
-                  </a:lnTo>
-                  <a:lnTo>
-                    <a:pt x="1074337" y="211314"/>
-                  </a:lnTo>
-                  <a:lnTo>
-                    <a:pt x="1002715" y="198145"/>
-                  </a:lnTo>
-                  <a:lnTo>
-                    <a:pt x="931092" y="184850"/>
-                  </a:lnTo>
-                  <a:lnTo>
-                    <a:pt x="859470" y="171428"/>
-                  </a:lnTo>
-                  <a:lnTo>
-                    <a:pt x="787847" y="157877"/>
-                  </a:lnTo>
-                  <a:lnTo>
-                    <a:pt x="716225" y="144197"/>
-                  </a:lnTo>
-                  <a:lnTo>
-                    <a:pt x="644602" y="130387"/>
-                  </a:lnTo>
-                  <a:lnTo>
-                    <a:pt x="572980" y="116444"/>
-                  </a:lnTo>
-                  <a:lnTo>
-                    <a:pt x="501357" y="102368"/>
-                  </a:lnTo>
-                  <a:lnTo>
-                    <a:pt x="429735" y="88158"/>
-                  </a:lnTo>
-                  <a:lnTo>
-                    <a:pt x="358112" y="73812"/>
-                  </a:lnTo>
-                  <a:lnTo>
-                    <a:pt x="286490" y="59329"/>
+                    <a:pt x="7019007" y="1545035"/>
+                  </a:lnTo>
+                  <a:lnTo>
+                    <a:pt x="6947385" y="1540402"/>
+                  </a:lnTo>
+                  <a:lnTo>
+                    <a:pt x="6875762" y="1535287"/>
+                  </a:lnTo>
+                  <a:lnTo>
+                    <a:pt x="6804139" y="1529642"/>
+                  </a:lnTo>
+                  <a:lnTo>
+                    <a:pt x="6732517" y="1523411"/>
+                  </a:lnTo>
+                  <a:lnTo>
+                    <a:pt x="6660894" y="1516533"/>
+                  </a:lnTo>
+                  <a:lnTo>
+                    <a:pt x="6589272" y="1508941"/>
+                  </a:lnTo>
+                  <a:lnTo>
+                    <a:pt x="6517649" y="1500561"/>
+                  </a:lnTo>
+                  <a:lnTo>
+                    <a:pt x="6446027" y="1491311"/>
+                  </a:lnTo>
+                  <a:lnTo>
+                    <a:pt x="6374404" y="1481101"/>
+                  </a:lnTo>
+                  <a:lnTo>
+                    <a:pt x="6302782" y="1469832"/>
+                  </a:lnTo>
+                  <a:lnTo>
+                    <a:pt x="6231159" y="1457392"/>
+                  </a:lnTo>
+                  <a:lnTo>
+                    <a:pt x="6159537" y="1443662"/>
+                  </a:lnTo>
+                  <a:lnTo>
+                    <a:pt x="6087914" y="1428506"/>
+                  </a:lnTo>
+                  <a:lnTo>
+                    <a:pt x="6016292" y="1411778"/>
+                  </a:lnTo>
+                  <a:lnTo>
+                    <a:pt x="5944669" y="1393312"/>
+                  </a:lnTo>
+                  <a:lnTo>
+                    <a:pt x="5873047" y="1372931"/>
+                  </a:lnTo>
+                  <a:lnTo>
+                    <a:pt x="5801424" y="1350433"/>
+                  </a:lnTo>
+                  <a:lnTo>
+                    <a:pt x="5729802" y="1325601"/>
+                  </a:lnTo>
+                  <a:lnTo>
+                    <a:pt x="5658179" y="1298191"/>
+                  </a:lnTo>
+                  <a:lnTo>
+                    <a:pt x="5586557" y="1267936"/>
+                  </a:lnTo>
+                  <a:lnTo>
+                    <a:pt x="5514934" y="1234541"/>
+                  </a:lnTo>
+                  <a:lnTo>
+                    <a:pt x="5443311" y="1197679"/>
+                  </a:lnTo>
+                  <a:lnTo>
+                    <a:pt x="5371689" y="1156991"/>
+                  </a:lnTo>
+                  <a:lnTo>
+                    <a:pt x="5300066" y="1112080"/>
+                  </a:lnTo>
+                  <a:lnTo>
+                    <a:pt x="5228444" y="1062508"/>
+                  </a:lnTo>
+                  <a:lnTo>
+                    <a:pt x="5156821" y="1007790"/>
+                  </a:lnTo>
+                  <a:lnTo>
+                    <a:pt x="5085199" y="947392"/>
+                  </a:lnTo>
+                  <a:lnTo>
+                    <a:pt x="5013576" y="880726"/>
+                  </a:lnTo>
+                  <a:lnTo>
+                    <a:pt x="4941954" y="807140"/>
+                  </a:lnTo>
+                  <a:lnTo>
+                    <a:pt x="4870331" y="756970"/>
+                  </a:lnTo>
+                  <a:lnTo>
+                    <a:pt x="4798709" y="749014"/>
+                  </a:lnTo>
+                  <a:lnTo>
+                    <a:pt x="4727086" y="740982"/>
+                  </a:lnTo>
+                  <a:lnTo>
+                    <a:pt x="4655464" y="732873"/>
+                  </a:lnTo>
+                  <a:lnTo>
+                    <a:pt x="4583841" y="724687"/>
+                  </a:lnTo>
+                  <a:lnTo>
+                    <a:pt x="4512219" y="716423"/>
+                  </a:lnTo>
+                  <a:lnTo>
+                    <a:pt x="4440596" y="708080"/>
+                  </a:lnTo>
+                  <a:lnTo>
+                    <a:pt x="4368974" y="699657"/>
+                  </a:lnTo>
+                  <a:lnTo>
+                    <a:pt x="4297351" y="691153"/>
+                  </a:lnTo>
+                  <a:lnTo>
+                    <a:pt x="4225729" y="682568"/>
+                  </a:lnTo>
+                  <a:lnTo>
+                    <a:pt x="4154106" y="673902"/>
+                  </a:lnTo>
+                  <a:lnTo>
+                    <a:pt x="4082483" y="665152"/>
+                  </a:lnTo>
+                  <a:lnTo>
+                    <a:pt x="4010861" y="656319"/>
+                  </a:lnTo>
+                  <a:lnTo>
+                    <a:pt x="3939238" y="647402"/>
+                  </a:lnTo>
+                  <a:lnTo>
+                    <a:pt x="3867616" y="638399"/>
+                  </a:lnTo>
+                  <a:lnTo>
+                    <a:pt x="3795993" y="629310"/>
+                  </a:lnTo>
+                  <a:lnTo>
+                    <a:pt x="3724371" y="620135"/>
+                  </a:lnTo>
+                  <a:lnTo>
+                    <a:pt x="3652748" y="610871"/>
+                  </a:lnTo>
+                  <a:lnTo>
+                    <a:pt x="3581126" y="601520"/>
+                  </a:lnTo>
+                  <a:lnTo>
+                    <a:pt x="3509503" y="592078"/>
+                  </a:lnTo>
+                  <a:lnTo>
+                    <a:pt x="3437881" y="582547"/>
+                  </a:lnTo>
+                  <a:lnTo>
+                    <a:pt x="3366258" y="572925"/>
+                  </a:lnTo>
+                  <a:lnTo>
+                    <a:pt x="3294636" y="563210"/>
+                  </a:lnTo>
+                  <a:lnTo>
+                    <a:pt x="3223013" y="553403"/>
+                  </a:lnTo>
+                  <a:lnTo>
+                    <a:pt x="3151391" y="543503"/>
+                  </a:lnTo>
+                  <a:lnTo>
+                    <a:pt x="3079768" y="533507"/>
+                  </a:lnTo>
+                  <a:lnTo>
+                    <a:pt x="3008146" y="523416"/>
+                  </a:lnTo>
+                  <a:lnTo>
+                    <a:pt x="2936523" y="513229"/>
+                  </a:lnTo>
+                  <a:lnTo>
+                    <a:pt x="2864901" y="502944"/>
+                  </a:lnTo>
+                  <a:lnTo>
+                    <a:pt x="2793278" y="492561"/>
+                  </a:lnTo>
+                  <a:lnTo>
+                    <a:pt x="2721655" y="482079"/>
+                  </a:lnTo>
+                  <a:lnTo>
+                    <a:pt x="2650033" y="471497"/>
+                  </a:lnTo>
+                  <a:lnTo>
+                    <a:pt x="2578410" y="460814"/>
+                  </a:lnTo>
+                  <a:lnTo>
+                    <a:pt x="2506788" y="450028"/>
+                  </a:lnTo>
+                  <a:lnTo>
+                    <a:pt x="2435165" y="439140"/>
+                  </a:lnTo>
+                  <a:lnTo>
+                    <a:pt x="2363543" y="428147"/>
+                  </a:lnTo>
+                  <a:lnTo>
+                    <a:pt x="2291920" y="417050"/>
+                  </a:lnTo>
+                  <a:lnTo>
+                    <a:pt x="2220298" y="405846"/>
+                  </a:lnTo>
+                  <a:lnTo>
+                    <a:pt x="2148675" y="394536"/>
+                  </a:lnTo>
+                  <a:lnTo>
+                    <a:pt x="2077053" y="383117"/>
+                  </a:lnTo>
+                  <a:lnTo>
+                    <a:pt x="2005430" y="371589"/>
+                  </a:lnTo>
+                  <a:lnTo>
+                    <a:pt x="1933808" y="359951"/>
+                  </a:lnTo>
+                  <a:lnTo>
+                    <a:pt x="1862185" y="348202"/>
+                  </a:lnTo>
+                  <a:lnTo>
+                    <a:pt x="1790563" y="336341"/>
+                  </a:lnTo>
+                  <a:lnTo>
+                    <a:pt x="1718940" y="324366"/>
+                  </a:lnTo>
+                  <a:lnTo>
+                    <a:pt x="1647318" y="312277"/>
+                  </a:lnTo>
+                  <a:lnTo>
+                    <a:pt x="1575695" y="300072"/>
+                  </a:lnTo>
+                  <a:lnTo>
+                    <a:pt x="1504073" y="287751"/>
+                  </a:lnTo>
+                  <a:lnTo>
+                    <a:pt x="1432450" y="275312"/>
+                  </a:lnTo>
+                  <a:lnTo>
+                    <a:pt x="1360827" y="262755"/>
+                  </a:lnTo>
+                  <a:lnTo>
+                    <a:pt x="1289205" y="250077"/>
+                  </a:lnTo>
+                  <a:lnTo>
+                    <a:pt x="1217582" y="237278"/>
+                  </a:lnTo>
+                  <a:lnTo>
+                    <a:pt x="1145960" y="224357"/>
+                  </a:lnTo>
+                  <a:lnTo>
+                    <a:pt x="1074337" y="211312"/>
+                  </a:lnTo>
+                  <a:lnTo>
+                    <a:pt x="1002715" y="198143"/>
+                  </a:lnTo>
+                  <a:lnTo>
+                    <a:pt x="931092" y="184848"/>
+                  </a:lnTo>
+                  <a:lnTo>
+                    <a:pt x="859470" y="171426"/>
+                  </a:lnTo>
+                  <a:lnTo>
+                    <a:pt x="787847" y="157876"/>
+                  </a:lnTo>
+                  <a:lnTo>
+                    <a:pt x="716225" y="144196"/>
+                  </a:lnTo>
+                  <a:lnTo>
+                    <a:pt x="644602" y="130385"/>
+                  </a:lnTo>
+                  <a:lnTo>
+                    <a:pt x="572980" y="116443"/>
+                  </a:lnTo>
+                  <a:lnTo>
+                    <a:pt x="501357" y="102367"/>
+                  </a:lnTo>
+                  <a:lnTo>
+                    <a:pt x="429735" y="88157"/>
+                  </a:lnTo>
+                  <a:lnTo>
+                    <a:pt x="358112" y="73811"/>
+                  </a:lnTo>
+                  <a:lnTo>
+                    <a:pt x="286490" y="59328"/>
                   </a:lnTo>
                   <a:lnTo>
                     <a:pt x="214867" y="44707"/>
@@ -3968,189 +3968,189 @@
           </p:nvSpPr>
           <p:spPr>
             <a:xfrm>
-              <a:off x="4173171" y="2073503"/>
-              <a:ext cx="4089508" cy="3325383"/>
+              <a:off x="4173170" y="2073503"/>
+              <a:ext cx="4089509" cy="3325383"/>
             </a:xfrm>
             <a:custGeom>
               <a:avLst/>
               <a:pathLst>
-                <a:path w="4089508" h="3325383">
+                <a:path w="4089509" h="3325383">
                   <a:moveTo>
                     <a:pt x="0" y="0"/>
                   </a:moveTo>
                   <a:lnTo>
-                    <a:pt x="7024" y="18901"/>
-                  </a:lnTo>
-                  <a:lnTo>
-                    <a:pt x="78646" y="201474"/>
-                  </a:lnTo>
-                  <a:lnTo>
-                    <a:pt x="150269" y="374427"/>
-                  </a:lnTo>
-                  <a:lnTo>
-                    <a:pt x="221891" y="538267"/>
-                  </a:lnTo>
-                  <a:lnTo>
-                    <a:pt x="293514" y="693473"/>
-                  </a:lnTo>
-                  <a:lnTo>
-                    <a:pt x="365136" y="840501"/>
-                  </a:lnTo>
-                  <a:lnTo>
-                    <a:pt x="436759" y="979782"/>
-                  </a:lnTo>
-                  <a:lnTo>
-                    <a:pt x="508381" y="1111724"/>
-                  </a:lnTo>
-                  <a:lnTo>
-                    <a:pt x="580004" y="1236713"/>
-                  </a:lnTo>
-                  <a:lnTo>
-                    <a:pt x="651626" y="1355116"/>
-                  </a:lnTo>
-                  <a:lnTo>
-                    <a:pt x="723249" y="1467280"/>
-                  </a:lnTo>
-                  <a:lnTo>
-                    <a:pt x="794871" y="1573534"/>
-                  </a:lnTo>
-                  <a:lnTo>
-                    <a:pt x="866494" y="1674189"/>
-                  </a:lnTo>
-                  <a:lnTo>
-                    <a:pt x="938117" y="1769540"/>
-                  </a:lnTo>
-                  <a:lnTo>
-                    <a:pt x="1009739" y="1859867"/>
-                  </a:lnTo>
-                  <a:lnTo>
-                    <a:pt x="1081362" y="1945434"/>
-                  </a:lnTo>
-                  <a:lnTo>
-                    <a:pt x="1152984" y="2026492"/>
-                  </a:lnTo>
-                  <a:lnTo>
-                    <a:pt x="1224607" y="2103280"/>
-                  </a:lnTo>
-                  <a:lnTo>
-                    <a:pt x="1296229" y="2176021"/>
-                  </a:lnTo>
-                  <a:lnTo>
-                    <a:pt x="1367852" y="2244929"/>
-                  </a:lnTo>
-                  <a:lnTo>
-                    <a:pt x="1439474" y="2310206"/>
-                  </a:lnTo>
-                  <a:lnTo>
-                    <a:pt x="1511097" y="2372043"/>
-                  </a:lnTo>
-                  <a:lnTo>
-                    <a:pt x="1582719" y="2430622"/>
-                  </a:lnTo>
-                  <a:lnTo>
-                    <a:pt x="1654342" y="2486115"/>
-                  </a:lnTo>
-                  <a:lnTo>
-                    <a:pt x="1725964" y="2538683"/>
-                  </a:lnTo>
-                  <a:lnTo>
-                    <a:pt x="1797587" y="2588481"/>
-                  </a:lnTo>
-                  <a:lnTo>
-                    <a:pt x="1869209" y="2635656"/>
-                  </a:lnTo>
-                  <a:lnTo>
-                    <a:pt x="1940832" y="2680344"/>
-                  </a:lnTo>
-                  <a:lnTo>
-                    <a:pt x="2012454" y="2722678"/>
-                  </a:lnTo>
-                  <a:lnTo>
-                    <a:pt x="2084077" y="2762781"/>
-                  </a:lnTo>
-                  <a:lnTo>
-                    <a:pt x="2155699" y="2800771"/>
-                  </a:lnTo>
-                  <a:lnTo>
-                    <a:pt x="2227322" y="2836759"/>
-                  </a:lnTo>
-                  <a:lnTo>
-                    <a:pt x="2298945" y="2870851"/>
-                  </a:lnTo>
-                  <a:lnTo>
-                    <a:pt x="2370567" y="2903146"/>
-                  </a:lnTo>
-                  <a:lnTo>
-                    <a:pt x="2442190" y="2933740"/>
-                  </a:lnTo>
-                  <a:lnTo>
-                    <a:pt x="2513812" y="2962721"/>
-                  </a:lnTo>
-                  <a:lnTo>
-                    <a:pt x="2585435" y="2990176"/>
-                  </a:lnTo>
-                  <a:lnTo>
-                    <a:pt x="2657057" y="3016183"/>
-                  </a:lnTo>
-                  <a:lnTo>
-                    <a:pt x="2728680" y="3040821"/>
-                  </a:lnTo>
-                  <a:lnTo>
-                    <a:pt x="2800302" y="3064160"/>
-                  </a:lnTo>
-                  <a:lnTo>
-                    <a:pt x="2871925" y="3086269"/>
-                  </a:lnTo>
-                  <a:lnTo>
-                    <a:pt x="2943547" y="3107213"/>
-                  </a:lnTo>
-                  <a:lnTo>
-                    <a:pt x="3015170" y="3127054"/>
-                  </a:lnTo>
-                  <a:lnTo>
-                    <a:pt x="3086792" y="3145849"/>
-                  </a:lnTo>
-                  <a:lnTo>
-                    <a:pt x="3158415" y="3163654"/>
-                  </a:lnTo>
-                  <a:lnTo>
-                    <a:pt x="3230037" y="3180521"/>
-                  </a:lnTo>
-                  <a:lnTo>
-                    <a:pt x="3301660" y="3196499"/>
-                  </a:lnTo>
-                  <a:lnTo>
-                    <a:pt x="3373282" y="3211635"/>
-                  </a:lnTo>
-                  <a:lnTo>
-                    <a:pt x="3444905" y="3225973"/>
-                  </a:lnTo>
-                  <a:lnTo>
-                    <a:pt x="3516527" y="3239556"/>
-                  </a:lnTo>
-                  <a:lnTo>
-                    <a:pt x="3588150" y="3252423"/>
-                  </a:lnTo>
-                  <a:lnTo>
-                    <a:pt x="3659773" y="3264612"/>
-                  </a:lnTo>
-                  <a:lnTo>
-                    <a:pt x="3731395" y="3276159"/>
-                  </a:lnTo>
-                  <a:lnTo>
-                    <a:pt x="3803018" y="3287097"/>
-                  </a:lnTo>
-                  <a:lnTo>
-                    <a:pt x="3874640" y="3297460"/>
-                  </a:lnTo>
-                  <a:lnTo>
-                    <a:pt x="3946263" y="3307276"/>
-                  </a:lnTo>
-                  <a:lnTo>
-                    <a:pt x="4017885" y="3316574"/>
-                  </a:lnTo>
-                  <a:lnTo>
-                    <a:pt x="4089508" y="3325383"/>
+                    <a:pt x="7025" y="18904"/>
+                  </a:lnTo>
+                  <a:lnTo>
+                    <a:pt x="78647" y="201477"/>
+                  </a:lnTo>
+                  <a:lnTo>
+                    <a:pt x="150270" y="374429"/>
+                  </a:lnTo>
+                  <a:lnTo>
+                    <a:pt x="221892" y="538269"/>
+                  </a:lnTo>
+                  <a:lnTo>
+                    <a:pt x="293515" y="693475"/>
+                  </a:lnTo>
+                  <a:lnTo>
+                    <a:pt x="365137" y="840503"/>
+                  </a:lnTo>
+                  <a:lnTo>
+                    <a:pt x="436760" y="979784"/>
+                  </a:lnTo>
+                  <a:lnTo>
+                    <a:pt x="508382" y="1111725"/>
+                  </a:lnTo>
+                  <a:lnTo>
+                    <a:pt x="580005" y="1236714"/>
+                  </a:lnTo>
+                  <a:lnTo>
+                    <a:pt x="651627" y="1355117"/>
+                  </a:lnTo>
+                  <a:lnTo>
+                    <a:pt x="723250" y="1467281"/>
+                  </a:lnTo>
+                  <a:lnTo>
+                    <a:pt x="794872" y="1573535"/>
+                  </a:lnTo>
+                  <a:lnTo>
+                    <a:pt x="866495" y="1674190"/>
+                  </a:lnTo>
+                  <a:lnTo>
+                    <a:pt x="938118" y="1769541"/>
+                  </a:lnTo>
+                  <a:lnTo>
+                    <a:pt x="1009740" y="1859867"/>
+                  </a:lnTo>
+                  <a:lnTo>
+                    <a:pt x="1081363" y="1945434"/>
+                  </a:lnTo>
+                  <a:lnTo>
+                    <a:pt x="1152985" y="2026493"/>
+                  </a:lnTo>
+                  <a:lnTo>
+                    <a:pt x="1224608" y="2103280"/>
+                  </a:lnTo>
+                  <a:lnTo>
+                    <a:pt x="1296230" y="2176021"/>
+                  </a:lnTo>
+                  <a:lnTo>
+                    <a:pt x="1367853" y="2244929"/>
+                  </a:lnTo>
+                  <a:lnTo>
+                    <a:pt x="1439475" y="2310206"/>
+                  </a:lnTo>
+                  <a:lnTo>
+                    <a:pt x="1511098" y="2372043"/>
+                  </a:lnTo>
+                  <a:lnTo>
+                    <a:pt x="1582720" y="2430622"/>
+                  </a:lnTo>
+                  <a:lnTo>
+                    <a:pt x="1654343" y="2486115"/>
+                  </a:lnTo>
+                  <a:lnTo>
+                    <a:pt x="1725965" y="2538683"/>
+                  </a:lnTo>
+                  <a:lnTo>
+                    <a:pt x="1797588" y="2588481"/>
+                  </a:lnTo>
+                  <a:lnTo>
+                    <a:pt x="1869210" y="2635656"/>
+                  </a:lnTo>
+                  <a:lnTo>
+                    <a:pt x="1940833" y="2680344"/>
+                  </a:lnTo>
+                  <a:lnTo>
+                    <a:pt x="2012455" y="2722678"/>
+                  </a:lnTo>
+                  <a:lnTo>
+                    <a:pt x="2084078" y="2762781"/>
+                  </a:lnTo>
+                  <a:lnTo>
+                    <a:pt x="2155700" y="2800771"/>
+                  </a:lnTo>
+                  <a:lnTo>
+                    <a:pt x="2227323" y="2836759"/>
+                  </a:lnTo>
+                  <a:lnTo>
+                    <a:pt x="2298946" y="2870851"/>
+                  </a:lnTo>
+                  <a:lnTo>
+                    <a:pt x="2370568" y="2903146"/>
+                  </a:lnTo>
+                  <a:lnTo>
+                    <a:pt x="2442191" y="2933739"/>
+                  </a:lnTo>
+                  <a:lnTo>
+                    <a:pt x="2513813" y="2962721"/>
+                  </a:lnTo>
+                  <a:lnTo>
+                    <a:pt x="2585436" y="2990175"/>
+                  </a:lnTo>
+                  <a:lnTo>
+                    <a:pt x="2657058" y="3016183"/>
+                  </a:lnTo>
+                  <a:lnTo>
+                    <a:pt x="2728681" y="3040821"/>
+                  </a:lnTo>
+                  <a:lnTo>
+                    <a:pt x="2800303" y="3064160"/>
+                  </a:lnTo>
+                  <a:lnTo>
+                    <a:pt x="2871926" y="3086269"/>
+                  </a:lnTo>
+                  <a:lnTo>
+                    <a:pt x="2943548" y="3107213"/>
+                  </a:lnTo>
+                  <a:lnTo>
+                    <a:pt x="3015171" y="3127054"/>
+                  </a:lnTo>
+                  <a:lnTo>
+                    <a:pt x="3086793" y="3145849"/>
+                  </a:lnTo>
+                  <a:lnTo>
+                    <a:pt x="3158416" y="3163654"/>
+                  </a:lnTo>
+                  <a:lnTo>
+                    <a:pt x="3230038" y="3180521"/>
+                  </a:lnTo>
+                  <a:lnTo>
+                    <a:pt x="3301661" y="3196499"/>
+                  </a:lnTo>
+                  <a:lnTo>
+                    <a:pt x="3373283" y="3211634"/>
+                  </a:lnTo>
+                  <a:lnTo>
+                    <a:pt x="3444906" y="3225973"/>
+                  </a:lnTo>
+                  <a:lnTo>
+                    <a:pt x="3516528" y="3239556"/>
+                  </a:lnTo>
+                  <a:lnTo>
+                    <a:pt x="3588151" y="3252423"/>
+                  </a:lnTo>
+                  <a:lnTo>
+                    <a:pt x="3659774" y="3264612"/>
+                  </a:lnTo>
+                  <a:lnTo>
+                    <a:pt x="3731396" y="3276159"/>
+                  </a:lnTo>
+                  <a:lnTo>
+                    <a:pt x="3803019" y="3287097"/>
+                  </a:lnTo>
+                  <a:lnTo>
+                    <a:pt x="3874641" y="3297459"/>
+                  </a:lnTo>
+                  <a:lnTo>
+                    <a:pt x="3946264" y="3307275"/>
+                  </a:lnTo>
+                  <a:lnTo>
+                    <a:pt x="4017886" y="3316574"/>
+                  </a:lnTo>
+                  <a:lnTo>
+                    <a:pt x="4089509" y="3325383"/>
                   </a:lnTo>
                 </a:path>
               </a:pathLst>

--- a/docs/plots/carbo/jx_carbo_linsubhr_egfrdisc_throm3.pptx
+++ b/docs/plots/carbo/jx_carbo_linsubhr_egfrdisc_throm3.pptx
@@ -4858,7 +4858,7 @@
           <p:spPr>
             <a:xfrm>
               <a:off x="817517" y="1896563"/>
-              <a:ext cx="4869911" cy="82021"/>
+              <a:ext cx="5413065" cy="82021"/>
             </a:xfrm>
             <a:prstGeom prst="rect">
               <a:avLst/>
@@ -4890,7 +4890,7 @@
                   <a:latin typeface="Helvetica"/>
                   <a:cs typeface="Helvetica"/>
                 </a:rPr>
-                <a:t>subHR per 1 mL/min: 0.93 (0.88-0.99)  |  per IQR (Δ = 18.2): 0.28 (0.10-0.80)  |  IQR: [-11.5, 6.7]</a:t>
+                <a:t>subHR per 1 mL/min: 0.93 (0.88-0.99), p = 0.017  |  per IQR (Δ = 18.2): 0.28 (0.10-0.80)  |  IQR: [-11.5, 6.7]</a:t>
               </a:r>
             </a:p>
           </p:txBody>

--- a/docs/plots/carbo/jx_carbo_linsubhr_egfrdisc_throm3.pptx
+++ b/docs/plots/carbo/jx_carbo_linsubhr_egfrdisc_throm3.pptx
@@ -2271,26 +2271,26 @@
           </p:nvSpPr>
           <p:spPr>
             <a:xfrm>
-              <a:off x="817517" y="5142518"/>
-              <a:ext cx="7799693" cy="0"/>
+              <a:off x="915645" y="5071743"/>
+              <a:ext cx="7682587" cy="0"/>
             </a:xfrm>
             <a:custGeom>
               <a:avLst/>
               <a:pathLst>
-                <a:path w="7799693" h="0">
+                <a:path w="7682587" h="0">
                   <a:moveTo>
                     <a:pt x="0" y="0"/>
                   </a:moveTo>
                   <a:lnTo>
-                    <a:pt x="7799693" y="0"/>
-                  </a:lnTo>
-                  <a:lnTo>
-                    <a:pt x="7799693" y="0"/>
+                    <a:pt x="7682587" y="0"/>
+                  </a:lnTo>
+                  <a:lnTo>
+                    <a:pt x="7682587" y="0"/>
                   </a:lnTo>
                 </a:path>
               </a:pathLst>
             </a:custGeom>
-            <a:ln w="6775" cap="flat">
+            <a:ln w="8623" cap="flat">
               <a:solidFill>
                 <a:srgbClr val="EBEBEB">
                   <a:alpha val="100000"/>
@@ -2314,26 +2314,26 @@
           </p:nvSpPr>
           <p:spPr>
             <a:xfrm>
-              <a:off x="817517" y="4313054"/>
-              <a:ext cx="7799693" cy="0"/>
+              <a:off x="915645" y="4298074"/>
+              <a:ext cx="7682587" cy="0"/>
             </a:xfrm>
             <a:custGeom>
               <a:avLst/>
               <a:pathLst>
-                <a:path w="7799693" h="0">
+                <a:path w="7682587" h="0">
                   <a:moveTo>
                     <a:pt x="0" y="0"/>
                   </a:moveTo>
                   <a:lnTo>
-                    <a:pt x="7799693" y="0"/>
-                  </a:lnTo>
-                  <a:lnTo>
-                    <a:pt x="7799693" y="0"/>
+                    <a:pt x="7682587" y="0"/>
+                  </a:lnTo>
+                  <a:lnTo>
+                    <a:pt x="7682587" y="0"/>
                   </a:lnTo>
                 </a:path>
               </a:pathLst>
             </a:custGeom>
-            <a:ln w="6775" cap="flat">
+            <a:ln w="8623" cap="flat">
               <a:solidFill>
                 <a:srgbClr val="EBEBEB">
                   <a:alpha val="100000"/>
@@ -2357,26 +2357,26 @@
           </p:nvSpPr>
           <p:spPr>
             <a:xfrm>
-              <a:off x="817517" y="3483591"/>
-              <a:ext cx="7799693" cy="0"/>
+              <a:off x="915645" y="3524405"/>
+              <a:ext cx="7682587" cy="0"/>
             </a:xfrm>
             <a:custGeom>
               <a:avLst/>
               <a:pathLst>
-                <a:path w="7799693" h="0">
+                <a:path w="7682587" h="0">
                   <a:moveTo>
                     <a:pt x="0" y="0"/>
                   </a:moveTo>
                   <a:lnTo>
-                    <a:pt x="7799693" y="0"/>
-                  </a:lnTo>
-                  <a:lnTo>
-                    <a:pt x="7799693" y="0"/>
+                    <a:pt x="7682587" y="0"/>
+                  </a:lnTo>
+                  <a:lnTo>
+                    <a:pt x="7682587" y="0"/>
                   </a:lnTo>
                 </a:path>
               </a:pathLst>
             </a:custGeom>
-            <a:ln w="6775" cap="flat">
+            <a:ln w="8623" cap="flat">
               <a:solidFill>
                 <a:srgbClr val="EBEBEB">
                   <a:alpha val="100000"/>
@@ -2400,26 +2400,26 @@
           </p:nvSpPr>
           <p:spPr>
             <a:xfrm>
-              <a:off x="817517" y="2654127"/>
-              <a:ext cx="7799693" cy="0"/>
+              <a:off x="915645" y="2750737"/>
+              <a:ext cx="7682587" cy="0"/>
             </a:xfrm>
             <a:custGeom>
               <a:avLst/>
               <a:pathLst>
-                <a:path w="7799693" h="0">
+                <a:path w="7682587" h="0">
                   <a:moveTo>
                     <a:pt x="0" y="0"/>
                   </a:moveTo>
                   <a:lnTo>
-                    <a:pt x="7799693" y="0"/>
-                  </a:lnTo>
-                  <a:lnTo>
-                    <a:pt x="7799693" y="0"/>
+                    <a:pt x="7682587" y="0"/>
+                  </a:lnTo>
+                  <a:lnTo>
+                    <a:pt x="7682587" y="0"/>
                   </a:lnTo>
                 </a:path>
               </a:pathLst>
             </a:custGeom>
-            <a:ln w="6775" cap="flat">
+            <a:ln w="8623" cap="flat">
               <a:solidFill>
                 <a:srgbClr val="EBEBEB">
                   <a:alpha val="100000"/>
@@ -2443,15 +2443,15 @@
           </p:nvSpPr>
           <p:spPr>
             <a:xfrm>
-              <a:off x="1487487" y="2073503"/>
-              <a:ext cx="0" cy="3649639"/>
+              <a:off x="1575555" y="2209169"/>
+              <a:ext cx="0" cy="3404141"/>
             </a:xfrm>
             <a:custGeom>
               <a:avLst/>
               <a:pathLst>
-                <a:path w="0" h="3649639">
+                <a:path w="0" h="3404141">
                   <a:moveTo>
-                    <a:pt x="0" y="3649639"/>
+                    <a:pt x="0" y="3404141"/>
                   </a:moveTo>
                   <a:lnTo>
                     <a:pt x="0" y="0"/>
@@ -2462,7 +2462,7 @@
                 </a:path>
               </a:pathLst>
             </a:custGeom>
-            <a:ln w="6775" cap="flat">
+            <a:ln w="8623" cap="flat">
               <a:solidFill>
                 <a:srgbClr val="EBEBEB">
                   <a:alpha val="100000"/>
@@ -2486,15 +2486,15 @@
           </p:nvSpPr>
           <p:spPr>
             <a:xfrm>
-              <a:off x="3337360" y="2073503"/>
-              <a:ext cx="0" cy="3649639"/>
+              <a:off x="3397654" y="2209169"/>
+              <a:ext cx="0" cy="3404141"/>
             </a:xfrm>
             <a:custGeom>
               <a:avLst/>
               <a:pathLst>
-                <a:path w="0" h="3649639">
+                <a:path w="0" h="3404141">
                   <a:moveTo>
-                    <a:pt x="0" y="3649639"/>
+                    <a:pt x="0" y="3404141"/>
                   </a:moveTo>
                   <a:lnTo>
                     <a:pt x="0" y="0"/>
@@ -2505,7 +2505,7 @@
                 </a:path>
               </a:pathLst>
             </a:custGeom>
-            <a:ln w="6775" cap="flat">
+            <a:ln w="8623" cap="flat">
               <a:solidFill>
                 <a:srgbClr val="EBEBEB">
                   <a:alpha val="100000"/>
@@ -2529,15 +2529,15 @@
           </p:nvSpPr>
           <p:spPr>
             <a:xfrm>
-              <a:off x="5187233" y="2073503"/>
-              <a:ext cx="0" cy="3649639"/>
+              <a:off x="5219752" y="2209169"/>
+              <a:ext cx="0" cy="3404141"/>
             </a:xfrm>
             <a:custGeom>
               <a:avLst/>
               <a:pathLst>
-                <a:path w="0" h="3649639">
+                <a:path w="0" h="3404141">
                   <a:moveTo>
-                    <a:pt x="0" y="3649639"/>
+                    <a:pt x="0" y="3404141"/>
                   </a:moveTo>
                   <a:lnTo>
                     <a:pt x="0" y="0"/>
@@ -2548,7 +2548,7 @@
                 </a:path>
               </a:pathLst>
             </a:custGeom>
-            <a:ln w="6775" cap="flat">
+            <a:ln w="8623" cap="flat">
               <a:solidFill>
                 <a:srgbClr val="EBEBEB">
                   <a:alpha val="100000"/>
@@ -2572,15 +2572,15 @@
           </p:nvSpPr>
           <p:spPr>
             <a:xfrm>
-              <a:off x="7037106" y="2073503"/>
-              <a:ext cx="0" cy="3649639"/>
+              <a:off x="7041851" y="2209169"/>
+              <a:ext cx="0" cy="3404141"/>
             </a:xfrm>
             <a:custGeom>
               <a:avLst/>
               <a:pathLst>
-                <a:path w="0" h="3649639">
+                <a:path w="0" h="3404141">
                   <a:moveTo>
-                    <a:pt x="0" y="3649639"/>
+                    <a:pt x="0" y="3404141"/>
                   </a:moveTo>
                   <a:lnTo>
                     <a:pt x="0" y="0"/>
@@ -2591,7 +2591,7 @@
                 </a:path>
               </a:pathLst>
             </a:custGeom>
-            <a:ln w="6775" cap="flat">
+            <a:ln w="8623" cap="flat">
               <a:solidFill>
                 <a:srgbClr val="EBEBEB">
                   <a:alpha val="100000"/>
@@ -2615,26 +2615,26 @@
           </p:nvSpPr>
           <p:spPr>
             <a:xfrm>
-              <a:off x="817517" y="5557249"/>
-              <a:ext cx="7799693" cy="0"/>
+              <a:off x="915645" y="5458577"/>
+              <a:ext cx="7682587" cy="0"/>
             </a:xfrm>
             <a:custGeom>
               <a:avLst/>
               <a:pathLst>
-                <a:path w="7799693" h="0">
+                <a:path w="7682587" h="0">
                   <a:moveTo>
                     <a:pt x="0" y="0"/>
                   </a:moveTo>
                   <a:lnTo>
-                    <a:pt x="7799693" y="0"/>
-                  </a:lnTo>
-                  <a:lnTo>
-                    <a:pt x="7799693" y="0"/>
+                    <a:pt x="7682587" y="0"/>
+                  </a:lnTo>
+                  <a:lnTo>
+                    <a:pt x="7682587" y="0"/>
                   </a:lnTo>
                 </a:path>
               </a:pathLst>
             </a:custGeom>
-            <a:ln w="13550" cap="flat">
+            <a:ln w="17246" cap="flat">
               <a:solidFill>
                 <a:srgbClr val="EBEBEB">
                   <a:alpha val="100000"/>
@@ -2658,26 +2658,26 @@
           </p:nvSpPr>
           <p:spPr>
             <a:xfrm>
-              <a:off x="817517" y="4727786"/>
-              <a:ext cx="7799693" cy="0"/>
+              <a:off x="915645" y="4684908"/>
+              <a:ext cx="7682587" cy="0"/>
             </a:xfrm>
             <a:custGeom>
               <a:avLst/>
               <a:pathLst>
-                <a:path w="7799693" h="0">
+                <a:path w="7682587" h="0">
                   <a:moveTo>
                     <a:pt x="0" y="0"/>
                   </a:moveTo>
                   <a:lnTo>
-                    <a:pt x="7799693" y="0"/>
-                  </a:lnTo>
-                  <a:lnTo>
-                    <a:pt x="7799693" y="0"/>
+                    <a:pt x="7682587" y="0"/>
+                  </a:lnTo>
+                  <a:lnTo>
+                    <a:pt x="7682587" y="0"/>
                   </a:lnTo>
                 </a:path>
               </a:pathLst>
             </a:custGeom>
-            <a:ln w="13550" cap="flat">
+            <a:ln w="17246" cap="flat">
               <a:solidFill>
                 <a:srgbClr val="EBEBEB">
                   <a:alpha val="100000"/>
@@ -2701,26 +2701,26 @@
           </p:nvSpPr>
           <p:spPr>
             <a:xfrm>
-              <a:off x="817517" y="3898322"/>
-              <a:ext cx="7799693" cy="0"/>
+              <a:off x="915645" y="3911240"/>
+              <a:ext cx="7682587" cy="0"/>
             </a:xfrm>
             <a:custGeom>
               <a:avLst/>
               <a:pathLst>
-                <a:path w="7799693" h="0">
+                <a:path w="7682587" h="0">
                   <a:moveTo>
                     <a:pt x="0" y="0"/>
                   </a:moveTo>
                   <a:lnTo>
-                    <a:pt x="7799693" y="0"/>
-                  </a:lnTo>
-                  <a:lnTo>
-                    <a:pt x="7799693" y="0"/>
+                    <a:pt x="7682587" y="0"/>
+                  </a:lnTo>
+                  <a:lnTo>
+                    <a:pt x="7682587" y="0"/>
                   </a:lnTo>
                 </a:path>
               </a:pathLst>
             </a:custGeom>
-            <a:ln w="13550" cap="flat">
+            <a:ln w="17246" cap="flat">
               <a:solidFill>
                 <a:srgbClr val="EBEBEB">
                   <a:alpha val="100000"/>
@@ -2744,26 +2744,26 @@
           </p:nvSpPr>
           <p:spPr>
             <a:xfrm>
-              <a:off x="817517" y="3068859"/>
-              <a:ext cx="7799693" cy="0"/>
+              <a:off x="915645" y="3137571"/>
+              <a:ext cx="7682587" cy="0"/>
             </a:xfrm>
             <a:custGeom>
               <a:avLst/>
               <a:pathLst>
-                <a:path w="7799693" h="0">
+                <a:path w="7682587" h="0">
                   <a:moveTo>
                     <a:pt x="0" y="0"/>
                   </a:moveTo>
                   <a:lnTo>
-                    <a:pt x="7799693" y="0"/>
-                  </a:lnTo>
-                  <a:lnTo>
-                    <a:pt x="7799693" y="0"/>
+                    <a:pt x="7682587" y="0"/>
+                  </a:lnTo>
+                  <a:lnTo>
+                    <a:pt x="7682587" y="0"/>
                   </a:lnTo>
                 </a:path>
               </a:pathLst>
             </a:custGeom>
-            <a:ln w="13550" cap="flat">
+            <a:ln w="17246" cap="flat">
               <a:solidFill>
                 <a:srgbClr val="EBEBEB">
                   <a:alpha val="100000"/>
@@ -2787,26 +2787,26 @@
           </p:nvSpPr>
           <p:spPr>
             <a:xfrm>
-              <a:off x="817517" y="2239395"/>
-              <a:ext cx="7799693" cy="0"/>
+              <a:off x="915645" y="2363903"/>
+              <a:ext cx="7682587" cy="0"/>
             </a:xfrm>
             <a:custGeom>
               <a:avLst/>
               <a:pathLst>
-                <a:path w="7799693" h="0">
+                <a:path w="7682587" h="0">
                   <a:moveTo>
                     <a:pt x="0" y="0"/>
                   </a:moveTo>
                   <a:lnTo>
-                    <a:pt x="7799693" y="0"/>
-                  </a:lnTo>
-                  <a:lnTo>
-                    <a:pt x="7799693" y="0"/>
+                    <a:pt x="7682587" y="0"/>
+                  </a:lnTo>
+                  <a:lnTo>
+                    <a:pt x="7682587" y="0"/>
                   </a:lnTo>
                 </a:path>
               </a:pathLst>
             </a:custGeom>
-            <a:ln w="13550" cap="flat">
+            <a:ln w="17246" cap="flat">
               <a:solidFill>
                 <a:srgbClr val="EBEBEB">
                   <a:alpha val="100000"/>
@@ -2830,15 +2830,15 @@
           </p:nvSpPr>
           <p:spPr>
             <a:xfrm>
-              <a:off x="2412424" y="2073503"/>
-              <a:ext cx="0" cy="3649639"/>
+              <a:off x="2486605" y="2209169"/>
+              <a:ext cx="0" cy="3404141"/>
             </a:xfrm>
             <a:custGeom>
               <a:avLst/>
               <a:pathLst>
-                <a:path w="0" h="3649639">
+                <a:path w="0" h="3404141">
                   <a:moveTo>
-                    <a:pt x="0" y="3649639"/>
+                    <a:pt x="0" y="3404141"/>
                   </a:moveTo>
                   <a:lnTo>
                     <a:pt x="0" y="0"/>
@@ -2849,7 +2849,7 @@
                 </a:path>
               </a:pathLst>
             </a:custGeom>
-            <a:ln w="13550" cap="flat">
+            <a:ln w="17246" cap="flat">
               <a:solidFill>
                 <a:srgbClr val="EBEBEB">
                   <a:alpha val="100000"/>
@@ -2873,15 +2873,15 @@
           </p:nvSpPr>
           <p:spPr>
             <a:xfrm>
-              <a:off x="4262297" y="2073503"/>
-              <a:ext cx="0" cy="3649639"/>
+              <a:off x="4308703" y="2209169"/>
+              <a:ext cx="0" cy="3404141"/>
             </a:xfrm>
             <a:custGeom>
               <a:avLst/>
               <a:pathLst>
-                <a:path w="0" h="3649639">
+                <a:path w="0" h="3404141">
                   <a:moveTo>
-                    <a:pt x="0" y="3649639"/>
+                    <a:pt x="0" y="3404141"/>
                   </a:moveTo>
                   <a:lnTo>
                     <a:pt x="0" y="0"/>
@@ -2892,7 +2892,7 @@
                 </a:path>
               </a:pathLst>
             </a:custGeom>
-            <a:ln w="13550" cap="flat">
+            <a:ln w="17246" cap="flat">
               <a:solidFill>
                 <a:srgbClr val="EBEBEB">
                   <a:alpha val="100000"/>
@@ -2916,15 +2916,15 @@
           </p:nvSpPr>
           <p:spPr>
             <a:xfrm>
-              <a:off x="6112169" y="2073503"/>
-              <a:ext cx="0" cy="3649639"/>
+              <a:off x="6130802" y="2209169"/>
+              <a:ext cx="0" cy="3404141"/>
             </a:xfrm>
             <a:custGeom>
               <a:avLst/>
               <a:pathLst>
-                <a:path w="0" h="3649639">
+                <a:path w="0" h="3404141">
                   <a:moveTo>
-                    <a:pt x="0" y="3649639"/>
+                    <a:pt x="0" y="3404141"/>
                   </a:moveTo>
                   <a:lnTo>
                     <a:pt x="0" y="0"/>
@@ -2935,7 +2935,7 @@
                 </a:path>
               </a:pathLst>
             </a:custGeom>
-            <a:ln w="13550" cap="flat">
+            <a:ln w="17246" cap="flat">
               <a:solidFill>
                 <a:srgbClr val="EBEBEB">
                   <a:alpha val="100000"/>
@@ -2959,15 +2959,15 @@
           </p:nvSpPr>
           <p:spPr>
             <a:xfrm>
-              <a:off x="7962042" y="2073503"/>
-              <a:ext cx="0" cy="3649639"/>
+              <a:off x="7952900" y="2209169"/>
+              <a:ext cx="0" cy="3404141"/>
             </a:xfrm>
             <a:custGeom>
               <a:avLst/>
               <a:pathLst>
-                <a:path w="0" h="3649639">
+                <a:path w="0" h="3404141">
                   <a:moveTo>
-                    <a:pt x="0" y="3649639"/>
+                    <a:pt x="0" y="3404141"/>
                   </a:moveTo>
                   <a:lnTo>
                     <a:pt x="0" y="0"/>
@@ -2978,7 +2978,7 @@
                 </a:path>
               </a:pathLst>
             </a:custGeom>
-            <a:ln w="13550" cap="flat">
+            <a:ln w="17246" cap="flat">
               <a:solidFill>
                 <a:srgbClr val="EBEBEB">
                   <a:alpha val="100000"/>
@@ -3002,453 +3002,453 @@
           </p:nvSpPr>
           <p:spPr>
             <a:xfrm>
-              <a:off x="1172049" y="2073503"/>
-              <a:ext cx="7090630" cy="3443304"/>
+              <a:off x="1264853" y="2209169"/>
+              <a:ext cx="6984170" cy="3211686"/>
             </a:xfrm>
             <a:custGeom>
               <a:avLst/>
               <a:pathLst>
-                <a:path w="7090630" h="3443304">
+                <a:path w="6984170" h="3211686">
                   <a:moveTo>
-                    <a:pt x="3859290" y="0"/>
+                    <a:pt x="3801346" y="0"/>
                   </a:moveTo>
                   <a:lnTo>
-                    <a:pt x="3867616" y="41534"/>
-                  </a:lnTo>
-                  <a:lnTo>
-                    <a:pt x="3939238" y="365225"/>
-                  </a:lnTo>
-                  <a:lnTo>
-                    <a:pt x="4010861" y="658477"/>
-                  </a:lnTo>
-                  <a:lnTo>
-                    <a:pt x="4082483" y="924153"/>
-                  </a:lnTo>
-                  <a:lnTo>
-                    <a:pt x="4154106" y="1164846"/>
-                  </a:lnTo>
-                  <a:lnTo>
-                    <a:pt x="4225729" y="1382905"/>
-                  </a:lnTo>
-                  <a:lnTo>
-                    <a:pt x="4297351" y="1580459"/>
-                  </a:lnTo>
-                  <a:lnTo>
-                    <a:pt x="4368974" y="1759436"/>
-                  </a:lnTo>
-                  <a:lnTo>
-                    <a:pt x="4440596" y="1921583"/>
-                  </a:lnTo>
-                  <a:lnTo>
-                    <a:pt x="4512219" y="2068482"/>
-                  </a:lnTo>
-                  <a:lnTo>
-                    <a:pt x="4583841" y="2201567"/>
-                  </a:lnTo>
-                  <a:lnTo>
-                    <a:pt x="4655464" y="2322138"/>
-                  </a:lnTo>
-                  <a:lnTo>
-                    <a:pt x="4727086" y="2431370"/>
-                  </a:lnTo>
-                  <a:lnTo>
-                    <a:pt x="4798709" y="2530331"/>
-                  </a:lnTo>
-                  <a:lnTo>
-                    <a:pt x="4870331" y="2619986"/>
-                  </a:lnTo>
-                  <a:lnTo>
-                    <a:pt x="4941954" y="2658921"/>
-                  </a:lnTo>
-                  <a:lnTo>
-                    <a:pt x="5013576" y="2666727"/>
-                  </a:lnTo>
-                  <a:lnTo>
-                    <a:pt x="5085199" y="2674459"/>
-                  </a:lnTo>
-                  <a:lnTo>
-                    <a:pt x="5156821" y="2682118"/>
-                  </a:lnTo>
-                  <a:lnTo>
-                    <a:pt x="5228444" y="2689705"/>
-                  </a:lnTo>
-                  <a:lnTo>
-                    <a:pt x="5300066" y="2697219"/>
-                  </a:lnTo>
-                  <a:lnTo>
-                    <a:pt x="5371689" y="2704663"/>
-                  </a:lnTo>
-                  <a:lnTo>
-                    <a:pt x="5443311" y="2712036"/>
-                  </a:lnTo>
-                  <a:lnTo>
-                    <a:pt x="5514934" y="2719339"/>
-                  </a:lnTo>
-                  <a:lnTo>
-                    <a:pt x="5586557" y="2726574"/>
-                  </a:lnTo>
-                  <a:lnTo>
-                    <a:pt x="5658179" y="2733739"/>
-                  </a:lnTo>
-                  <a:lnTo>
-                    <a:pt x="5729802" y="2740837"/>
-                  </a:lnTo>
-                  <a:lnTo>
-                    <a:pt x="5801424" y="2747868"/>
-                  </a:lnTo>
-                  <a:lnTo>
-                    <a:pt x="5873047" y="2754832"/>
-                  </a:lnTo>
-                  <a:lnTo>
-                    <a:pt x="5944669" y="2761731"/>
-                  </a:lnTo>
-                  <a:lnTo>
-                    <a:pt x="6016292" y="2768564"/>
-                  </a:lnTo>
-                  <a:lnTo>
-                    <a:pt x="6087914" y="2775332"/>
-                  </a:lnTo>
-                  <a:lnTo>
-                    <a:pt x="6159537" y="2782036"/>
-                  </a:lnTo>
-                  <a:lnTo>
-                    <a:pt x="6231159" y="2788677"/>
-                  </a:lnTo>
-                  <a:lnTo>
-                    <a:pt x="6302782" y="2795255"/>
-                  </a:lnTo>
-                  <a:lnTo>
-                    <a:pt x="6374404" y="2801771"/>
-                  </a:lnTo>
-                  <a:lnTo>
-                    <a:pt x="6446027" y="2808225"/>
-                  </a:lnTo>
-                  <a:lnTo>
-                    <a:pt x="6517649" y="2814618"/>
-                  </a:lnTo>
-                  <a:lnTo>
-                    <a:pt x="6589272" y="2820951"/>
-                  </a:lnTo>
-                  <a:lnTo>
-                    <a:pt x="6660894" y="2827223"/>
-                  </a:lnTo>
-                  <a:lnTo>
-                    <a:pt x="6732517" y="2833437"/>
-                  </a:lnTo>
-                  <a:lnTo>
-                    <a:pt x="6804139" y="2839591"/>
-                  </a:lnTo>
-                  <a:lnTo>
-                    <a:pt x="6875762" y="2845687"/>
-                  </a:lnTo>
-                  <a:lnTo>
-                    <a:pt x="6947385" y="2851726"/>
-                  </a:lnTo>
-                  <a:lnTo>
-                    <a:pt x="7019007" y="2857707"/>
-                  </a:lnTo>
-                  <a:lnTo>
-                    <a:pt x="7090630" y="2863632"/>
-                  </a:lnTo>
-                  <a:lnTo>
-                    <a:pt x="7090630" y="3443304"/>
-                  </a:lnTo>
-                  <a:lnTo>
-                    <a:pt x="7019007" y="3439106"/>
-                  </a:lnTo>
-                  <a:lnTo>
-                    <a:pt x="6947385" y="3434473"/>
-                  </a:lnTo>
-                  <a:lnTo>
-                    <a:pt x="6875762" y="3429358"/>
-                  </a:lnTo>
-                  <a:lnTo>
-                    <a:pt x="6804139" y="3423713"/>
-                  </a:lnTo>
-                  <a:lnTo>
-                    <a:pt x="6732517" y="3417482"/>
-                  </a:lnTo>
-                  <a:lnTo>
-                    <a:pt x="6660894" y="3410604"/>
-                  </a:lnTo>
-                  <a:lnTo>
-                    <a:pt x="6589272" y="3403012"/>
-                  </a:lnTo>
-                  <a:lnTo>
-                    <a:pt x="6517649" y="3394632"/>
-                  </a:lnTo>
-                  <a:lnTo>
-                    <a:pt x="6446027" y="3385382"/>
-                  </a:lnTo>
-                  <a:lnTo>
-                    <a:pt x="6374404" y="3375172"/>
-                  </a:lnTo>
-                  <a:lnTo>
-                    <a:pt x="6302782" y="3363903"/>
-                  </a:lnTo>
-                  <a:lnTo>
-                    <a:pt x="6231159" y="3351463"/>
-                  </a:lnTo>
-                  <a:lnTo>
-                    <a:pt x="6159537" y="3337733"/>
-                  </a:lnTo>
-                  <a:lnTo>
-                    <a:pt x="6087914" y="3322577"/>
-                  </a:lnTo>
-                  <a:lnTo>
-                    <a:pt x="6016292" y="3305848"/>
-                  </a:lnTo>
-                  <a:lnTo>
-                    <a:pt x="5944669" y="3287383"/>
-                  </a:lnTo>
-                  <a:lnTo>
-                    <a:pt x="5873047" y="3267002"/>
-                  </a:lnTo>
-                  <a:lnTo>
-                    <a:pt x="5801424" y="3244504"/>
-                  </a:lnTo>
-                  <a:lnTo>
-                    <a:pt x="5729802" y="3219672"/>
-                  </a:lnTo>
-                  <a:lnTo>
-                    <a:pt x="5658179" y="3192262"/>
-                  </a:lnTo>
-                  <a:lnTo>
-                    <a:pt x="5586557" y="3162007"/>
-                  </a:lnTo>
-                  <a:lnTo>
-                    <a:pt x="5514934" y="3128612"/>
-                  </a:lnTo>
-                  <a:lnTo>
-                    <a:pt x="5443311" y="3091750"/>
-                  </a:lnTo>
-                  <a:lnTo>
-                    <a:pt x="5371689" y="3051062"/>
-                  </a:lnTo>
-                  <a:lnTo>
-                    <a:pt x="5300066" y="3006151"/>
-                  </a:lnTo>
-                  <a:lnTo>
-                    <a:pt x="5228444" y="2956579"/>
-                  </a:lnTo>
-                  <a:lnTo>
-                    <a:pt x="5156821" y="2901861"/>
-                  </a:lnTo>
-                  <a:lnTo>
-                    <a:pt x="5085199" y="2841463"/>
-                  </a:lnTo>
-                  <a:lnTo>
-                    <a:pt x="5013576" y="2774797"/>
-                  </a:lnTo>
-                  <a:lnTo>
-                    <a:pt x="4941954" y="2701210"/>
-                  </a:lnTo>
-                  <a:lnTo>
-                    <a:pt x="4870331" y="2651041"/>
-                  </a:lnTo>
-                  <a:lnTo>
-                    <a:pt x="4798709" y="2643085"/>
-                  </a:lnTo>
-                  <a:lnTo>
-                    <a:pt x="4727086" y="2635053"/>
-                  </a:lnTo>
-                  <a:lnTo>
-                    <a:pt x="4655464" y="2626944"/>
-                  </a:lnTo>
-                  <a:lnTo>
-                    <a:pt x="4583841" y="2618758"/>
-                  </a:lnTo>
-                  <a:lnTo>
-                    <a:pt x="4512219" y="2610494"/>
-                  </a:lnTo>
-                  <a:lnTo>
-                    <a:pt x="4440596" y="2602151"/>
-                  </a:lnTo>
-                  <a:lnTo>
-                    <a:pt x="4368974" y="2593728"/>
-                  </a:lnTo>
-                  <a:lnTo>
-                    <a:pt x="4297351" y="2585224"/>
-                  </a:lnTo>
-                  <a:lnTo>
-                    <a:pt x="4225729" y="2576639"/>
-                  </a:lnTo>
-                  <a:lnTo>
-                    <a:pt x="4154106" y="2567973"/>
-                  </a:lnTo>
-                  <a:lnTo>
-                    <a:pt x="4082483" y="2559223"/>
-                  </a:lnTo>
-                  <a:lnTo>
-                    <a:pt x="4010861" y="2550390"/>
-                  </a:lnTo>
-                  <a:lnTo>
-                    <a:pt x="3939238" y="2541472"/>
-                  </a:lnTo>
-                  <a:lnTo>
-                    <a:pt x="3867616" y="2532470"/>
-                  </a:lnTo>
-                  <a:lnTo>
-                    <a:pt x="3795993" y="2523381"/>
-                  </a:lnTo>
-                  <a:lnTo>
-                    <a:pt x="3724371" y="2514205"/>
-                  </a:lnTo>
-                  <a:lnTo>
-                    <a:pt x="3652748" y="2504942"/>
-                  </a:lnTo>
-                  <a:lnTo>
-                    <a:pt x="3581126" y="2495590"/>
-                  </a:lnTo>
-                  <a:lnTo>
-                    <a:pt x="3509503" y="2486149"/>
-                  </a:lnTo>
-                  <a:lnTo>
-                    <a:pt x="3437881" y="2476618"/>
-                  </a:lnTo>
-                  <a:lnTo>
-                    <a:pt x="3366258" y="2466996"/>
-                  </a:lnTo>
-                  <a:lnTo>
-                    <a:pt x="3294636" y="2457281"/>
-                  </a:lnTo>
-                  <a:lnTo>
-                    <a:pt x="3223013" y="2447474"/>
-                  </a:lnTo>
-                  <a:lnTo>
-                    <a:pt x="3151391" y="2437574"/>
-                  </a:lnTo>
-                  <a:lnTo>
-                    <a:pt x="3079768" y="2427578"/>
-                  </a:lnTo>
-                  <a:lnTo>
-                    <a:pt x="3008146" y="2417487"/>
-                  </a:lnTo>
-                  <a:lnTo>
-                    <a:pt x="2936523" y="2407300"/>
-                  </a:lnTo>
-                  <a:lnTo>
-                    <a:pt x="2864901" y="2397015"/>
-                  </a:lnTo>
-                  <a:lnTo>
-                    <a:pt x="2793278" y="2386632"/>
-                  </a:lnTo>
-                  <a:lnTo>
-                    <a:pt x="2721655" y="2376150"/>
-                  </a:lnTo>
-                  <a:lnTo>
-                    <a:pt x="2650033" y="2365568"/>
-                  </a:lnTo>
-                  <a:lnTo>
-                    <a:pt x="2578410" y="2354885"/>
-                  </a:lnTo>
-                  <a:lnTo>
-                    <a:pt x="2506788" y="2344099"/>
-                  </a:lnTo>
-                  <a:lnTo>
-                    <a:pt x="2435165" y="2333211"/>
-                  </a:lnTo>
-                  <a:lnTo>
-                    <a:pt x="2363543" y="2322218"/>
-                  </a:lnTo>
-                  <a:lnTo>
-                    <a:pt x="2291920" y="2311121"/>
-                  </a:lnTo>
-                  <a:lnTo>
-                    <a:pt x="2220298" y="2299917"/>
-                  </a:lnTo>
-                  <a:lnTo>
-                    <a:pt x="2148675" y="2288607"/>
-                  </a:lnTo>
-                  <a:lnTo>
-                    <a:pt x="2077053" y="2277188"/>
-                  </a:lnTo>
-                  <a:lnTo>
-                    <a:pt x="2005430" y="2265660"/>
-                  </a:lnTo>
-                  <a:lnTo>
-                    <a:pt x="1933808" y="2254022"/>
-                  </a:lnTo>
-                  <a:lnTo>
-                    <a:pt x="1862185" y="2242273"/>
-                  </a:lnTo>
-                  <a:lnTo>
-                    <a:pt x="1790563" y="2230412"/>
-                  </a:lnTo>
-                  <a:lnTo>
-                    <a:pt x="1718940" y="2218437"/>
-                  </a:lnTo>
-                  <a:lnTo>
-                    <a:pt x="1647318" y="2206348"/>
-                  </a:lnTo>
-                  <a:lnTo>
-                    <a:pt x="1575695" y="2194143"/>
-                  </a:lnTo>
-                  <a:lnTo>
-                    <a:pt x="1504073" y="2181822"/>
-                  </a:lnTo>
-                  <a:lnTo>
-                    <a:pt x="1432450" y="2169383"/>
-                  </a:lnTo>
-                  <a:lnTo>
-                    <a:pt x="1360827" y="2156826"/>
-                  </a:lnTo>
-                  <a:lnTo>
-                    <a:pt x="1289205" y="2144148"/>
-                  </a:lnTo>
-                  <a:lnTo>
-                    <a:pt x="1217582" y="2131349"/>
-                  </a:lnTo>
-                  <a:lnTo>
-                    <a:pt x="1145960" y="2118428"/>
-                  </a:lnTo>
-                  <a:lnTo>
-                    <a:pt x="1074337" y="2105383"/>
-                  </a:lnTo>
-                  <a:lnTo>
-                    <a:pt x="1002715" y="2092214"/>
-                  </a:lnTo>
-                  <a:lnTo>
-                    <a:pt x="931092" y="2078919"/>
-                  </a:lnTo>
-                  <a:lnTo>
-                    <a:pt x="859470" y="2065497"/>
-                  </a:lnTo>
-                  <a:lnTo>
-                    <a:pt x="787847" y="2051947"/>
-                  </a:lnTo>
-                  <a:lnTo>
-                    <a:pt x="716225" y="2038267"/>
-                  </a:lnTo>
-                  <a:lnTo>
-                    <a:pt x="644602" y="2024456"/>
-                  </a:lnTo>
-                  <a:lnTo>
-                    <a:pt x="572980" y="2010514"/>
-                  </a:lnTo>
-                  <a:lnTo>
-                    <a:pt x="501357" y="1996438"/>
-                  </a:lnTo>
-                  <a:lnTo>
-                    <a:pt x="429735" y="1982228"/>
-                  </a:lnTo>
-                  <a:lnTo>
-                    <a:pt x="358112" y="1967882"/>
-                  </a:lnTo>
-                  <a:lnTo>
-                    <a:pt x="286490" y="1953399"/>
-                  </a:lnTo>
-                  <a:lnTo>
-                    <a:pt x="214867" y="1938778"/>
-                  </a:lnTo>
-                  <a:lnTo>
-                    <a:pt x="143245" y="1924017"/>
-                  </a:lnTo>
-                  <a:lnTo>
-                    <a:pt x="71622" y="1909115"/>
-                  </a:lnTo>
-                  <a:lnTo>
-                    <a:pt x="0" y="1894070"/>
+                    <a:pt x="3809547" y="38740"/>
+                  </a:lnTo>
+                  <a:lnTo>
+                    <a:pt x="3880094" y="340658"/>
+                  </a:lnTo>
+                  <a:lnTo>
+                    <a:pt x="3950641" y="614184"/>
+                  </a:lnTo>
+                  <a:lnTo>
+                    <a:pt x="4021188" y="861989"/>
+                  </a:lnTo>
+                  <a:lnTo>
+                    <a:pt x="4091736" y="1086491"/>
+                  </a:lnTo>
+                  <a:lnTo>
+                    <a:pt x="4162283" y="1289882"/>
+                  </a:lnTo>
+                  <a:lnTo>
+                    <a:pt x="4232830" y="1474148"/>
+                  </a:lnTo>
+                  <a:lnTo>
+                    <a:pt x="4303377" y="1641085"/>
+                  </a:lnTo>
+                  <a:lnTo>
+                    <a:pt x="4373924" y="1792325"/>
+                  </a:lnTo>
+                  <a:lnTo>
+                    <a:pt x="4444471" y="1929343"/>
+                  </a:lnTo>
+                  <a:lnTo>
+                    <a:pt x="4515019" y="2053476"/>
+                  </a:lnTo>
+                  <a:lnTo>
+                    <a:pt x="4585566" y="2165936"/>
+                  </a:lnTo>
+                  <a:lnTo>
+                    <a:pt x="4656113" y="2267821"/>
+                  </a:lnTo>
+                  <a:lnTo>
+                    <a:pt x="4726660" y="2360125"/>
+                  </a:lnTo>
+                  <a:lnTo>
+                    <a:pt x="4797207" y="2443749"/>
+                  </a:lnTo>
+                  <a:lnTo>
+                    <a:pt x="4867754" y="2480065"/>
+                  </a:lnTo>
+                  <a:lnTo>
+                    <a:pt x="4938302" y="2487346"/>
+                  </a:lnTo>
+                  <a:lnTo>
+                    <a:pt x="5008849" y="2494558"/>
+                  </a:lnTo>
+                  <a:lnTo>
+                    <a:pt x="5079396" y="2501702"/>
+                  </a:lnTo>
+                  <a:lnTo>
+                    <a:pt x="5149943" y="2508778"/>
+                  </a:lnTo>
+                  <a:lnTo>
+                    <a:pt x="5220490" y="2515787"/>
+                  </a:lnTo>
+                  <a:lnTo>
+                    <a:pt x="5291037" y="2522730"/>
+                  </a:lnTo>
+                  <a:lnTo>
+                    <a:pt x="5361585" y="2529607"/>
+                  </a:lnTo>
+                  <a:lnTo>
+                    <a:pt x="5432132" y="2536419"/>
+                  </a:lnTo>
+                  <a:lnTo>
+                    <a:pt x="5502679" y="2543167"/>
+                  </a:lnTo>
+                  <a:lnTo>
+                    <a:pt x="5573226" y="2549851"/>
+                  </a:lnTo>
+                  <a:lnTo>
+                    <a:pt x="5643773" y="2556471"/>
+                  </a:lnTo>
+                  <a:lnTo>
+                    <a:pt x="5714320" y="2563029"/>
+                  </a:lnTo>
+                  <a:lnTo>
+                    <a:pt x="5784868" y="2569525"/>
+                  </a:lnTo>
+                  <a:lnTo>
+                    <a:pt x="5855415" y="2575959"/>
+                  </a:lnTo>
+                  <a:lnTo>
+                    <a:pt x="5925962" y="2582333"/>
+                  </a:lnTo>
+                  <a:lnTo>
+                    <a:pt x="5996509" y="2588646"/>
+                  </a:lnTo>
+                  <a:lnTo>
+                    <a:pt x="6067056" y="2594899"/>
+                  </a:lnTo>
+                  <a:lnTo>
+                    <a:pt x="6137604" y="2601093"/>
+                  </a:lnTo>
+                  <a:lnTo>
+                    <a:pt x="6208151" y="2607229"/>
+                  </a:lnTo>
+                  <a:lnTo>
+                    <a:pt x="6278698" y="2613306"/>
+                  </a:lnTo>
+                  <a:lnTo>
+                    <a:pt x="6349245" y="2619326"/>
+                  </a:lnTo>
+                  <a:lnTo>
+                    <a:pt x="6419792" y="2625289"/>
+                  </a:lnTo>
+                  <a:lnTo>
+                    <a:pt x="6490339" y="2631196"/>
+                  </a:lnTo>
+                  <a:lnTo>
+                    <a:pt x="6560887" y="2637046"/>
+                  </a:lnTo>
+                  <a:lnTo>
+                    <a:pt x="6631434" y="2642842"/>
+                  </a:lnTo>
+                  <a:lnTo>
+                    <a:pt x="6701981" y="2648582"/>
+                  </a:lnTo>
+                  <a:lnTo>
+                    <a:pt x="6772528" y="2654268"/>
+                  </a:lnTo>
+                  <a:lnTo>
+                    <a:pt x="6843075" y="2659900"/>
+                  </a:lnTo>
+                  <a:lnTo>
+                    <a:pt x="6913622" y="2665479"/>
+                  </a:lnTo>
+                  <a:lnTo>
+                    <a:pt x="6984170" y="2671006"/>
+                  </a:lnTo>
+                  <a:lnTo>
+                    <a:pt x="6984170" y="3211686"/>
+                  </a:lnTo>
+                  <a:lnTo>
+                    <a:pt x="6913622" y="3207770"/>
+                  </a:lnTo>
+                  <a:lnTo>
+                    <a:pt x="6843075" y="3203448"/>
+                  </a:lnTo>
+                  <a:lnTo>
+                    <a:pt x="6772528" y="3198678"/>
+                  </a:lnTo>
+                  <a:lnTo>
+                    <a:pt x="6701981" y="3193412"/>
+                  </a:lnTo>
+                  <a:lnTo>
+                    <a:pt x="6631434" y="3187600"/>
+                  </a:lnTo>
+                  <a:lnTo>
+                    <a:pt x="6560887" y="3181185"/>
+                  </a:lnTo>
+                  <a:lnTo>
+                    <a:pt x="6490339" y="3174104"/>
+                  </a:lnTo>
+                  <a:lnTo>
+                    <a:pt x="6419792" y="3166287"/>
+                  </a:lnTo>
+                  <a:lnTo>
+                    <a:pt x="6349245" y="3157660"/>
+                  </a:lnTo>
+                  <a:lnTo>
+                    <a:pt x="6278698" y="3148137"/>
+                  </a:lnTo>
+                  <a:lnTo>
+                    <a:pt x="6208151" y="3137625"/>
+                  </a:lnTo>
+                  <a:lnTo>
+                    <a:pt x="6137604" y="3126023"/>
+                  </a:lnTo>
+                  <a:lnTo>
+                    <a:pt x="6067056" y="3113216"/>
+                  </a:lnTo>
+                  <a:lnTo>
+                    <a:pt x="5996509" y="3099080"/>
+                  </a:lnTo>
+                  <a:lnTo>
+                    <a:pt x="5925962" y="3083476"/>
+                  </a:lnTo>
+                  <a:lnTo>
+                    <a:pt x="5855415" y="3066253"/>
+                  </a:lnTo>
+                  <a:lnTo>
+                    <a:pt x="5784868" y="3047242"/>
+                  </a:lnTo>
+                  <a:lnTo>
+                    <a:pt x="5714320" y="3026258"/>
+                  </a:lnTo>
+                  <a:lnTo>
+                    <a:pt x="5643773" y="3003096"/>
+                  </a:lnTo>
+                  <a:lnTo>
+                    <a:pt x="5573226" y="2977530"/>
+                  </a:lnTo>
+                  <a:lnTo>
+                    <a:pt x="5502679" y="2949310"/>
+                  </a:lnTo>
+                  <a:lnTo>
+                    <a:pt x="5432132" y="2918161"/>
+                  </a:lnTo>
+                  <a:lnTo>
+                    <a:pt x="5361585" y="2883779"/>
+                  </a:lnTo>
+                  <a:lnTo>
+                    <a:pt x="5291037" y="2845829"/>
+                  </a:lnTo>
+                  <a:lnTo>
+                    <a:pt x="5220490" y="2803939"/>
+                  </a:lnTo>
+                  <a:lnTo>
+                    <a:pt x="5149943" y="2757701"/>
+                  </a:lnTo>
+                  <a:lnTo>
+                    <a:pt x="5079396" y="2706663"/>
+                  </a:lnTo>
+                  <a:lnTo>
+                    <a:pt x="5008849" y="2650328"/>
+                  </a:lnTo>
+                  <a:lnTo>
+                    <a:pt x="4938302" y="2588146"/>
+                  </a:lnTo>
+                  <a:lnTo>
+                    <a:pt x="4867754" y="2519510"/>
+                  </a:lnTo>
+                  <a:lnTo>
+                    <a:pt x="4797207" y="2472715"/>
+                  </a:lnTo>
+                  <a:lnTo>
+                    <a:pt x="4726660" y="2465294"/>
+                  </a:lnTo>
+                  <a:lnTo>
+                    <a:pt x="4656113" y="2457803"/>
+                  </a:lnTo>
+                  <a:lnTo>
+                    <a:pt x="4585566" y="2450239"/>
+                  </a:lnTo>
+                  <a:lnTo>
+                    <a:pt x="4515019" y="2442604"/>
+                  </a:lnTo>
+                  <a:lnTo>
+                    <a:pt x="4444471" y="2434895"/>
+                  </a:lnTo>
+                  <a:lnTo>
+                    <a:pt x="4373924" y="2427113"/>
+                  </a:lnTo>
+                  <a:lnTo>
+                    <a:pt x="4303377" y="2419257"/>
+                  </a:lnTo>
+                  <a:lnTo>
+                    <a:pt x="4232830" y="2411326"/>
+                  </a:lnTo>
+                  <a:lnTo>
+                    <a:pt x="4162283" y="2403318"/>
+                  </a:lnTo>
+                  <a:lnTo>
+                    <a:pt x="4091736" y="2395235"/>
+                  </a:lnTo>
+                  <a:lnTo>
+                    <a:pt x="4021188" y="2387074"/>
+                  </a:lnTo>
+                  <a:lnTo>
+                    <a:pt x="3950641" y="2378835"/>
+                  </a:lnTo>
+                  <a:lnTo>
+                    <a:pt x="3880094" y="2370517"/>
+                  </a:lnTo>
+                  <a:lnTo>
+                    <a:pt x="3809547" y="2362120"/>
+                  </a:lnTo>
+                  <a:lnTo>
+                    <a:pt x="3739000" y="2353642"/>
+                  </a:lnTo>
+                  <a:lnTo>
+                    <a:pt x="3668452" y="2345084"/>
+                  </a:lnTo>
+                  <a:lnTo>
+                    <a:pt x="3597905" y="2336444"/>
+                  </a:lnTo>
+                  <a:lnTo>
+                    <a:pt x="3527358" y="2327721"/>
+                  </a:lnTo>
+                  <a:lnTo>
+                    <a:pt x="3456811" y="2318915"/>
+                  </a:lnTo>
+                  <a:lnTo>
+                    <a:pt x="3386264" y="2310025"/>
+                  </a:lnTo>
+                  <a:lnTo>
+                    <a:pt x="3315717" y="2301050"/>
+                  </a:lnTo>
+                  <a:lnTo>
+                    <a:pt x="3245169" y="2291989"/>
+                  </a:lnTo>
+                  <a:lnTo>
+                    <a:pt x="3174622" y="2282842"/>
+                  </a:lnTo>
+                  <a:lnTo>
+                    <a:pt x="3104075" y="2273607"/>
+                  </a:lnTo>
+                  <a:lnTo>
+                    <a:pt x="3033528" y="2264284"/>
+                  </a:lnTo>
+                  <a:lnTo>
+                    <a:pt x="2962981" y="2254872"/>
+                  </a:lnTo>
+                  <a:lnTo>
+                    <a:pt x="2892434" y="2245370"/>
+                  </a:lnTo>
+                  <a:lnTo>
+                    <a:pt x="2821886" y="2235777"/>
+                  </a:lnTo>
+                  <a:lnTo>
+                    <a:pt x="2751339" y="2226092"/>
+                  </a:lnTo>
+                  <a:lnTo>
+                    <a:pt x="2680792" y="2216315"/>
+                  </a:lnTo>
+                  <a:lnTo>
+                    <a:pt x="2610245" y="2206445"/>
+                  </a:lnTo>
+                  <a:lnTo>
+                    <a:pt x="2539698" y="2196480"/>
+                  </a:lnTo>
+                  <a:lnTo>
+                    <a:pt x="2469151" y="2186420"/>
+                  </a:lnTo>
+                  <a:lnTo>
+                    <a:pt x="2398603" y="2176264"/>
+                  </a:lnTo>
+                  <a:lnTo>
+                    <a:pt x="2328056" y="2166011"/>
+                  </a:lnTo>
+                  <a:lnTo>
+                    <a:pt x="2257509" y="2155660"/>
+                  </a:lnTo>
+                  <a:lnTo>
+                    <a:pt x="2186962" y="2145210"/>
+                  </a:lnTo>
+                  <a:lnTo>
+                    <a:pt x="2116415" y="2134660"/>
+                  </a:lnTo>
+                  <a:lnTo>
+                    <a:pt x="2045868" y="2124010"/>
+                  </a:lnTo>
+                  <a:lnTo>
+                    <a:pt x="1975320" y="2113257"/>
+                  </a:lnTo>
+                  <a:lnTo>
+                    <a:pt x="1904773" y="2102402"/>
+                  </a:lnTo>
+                  <a:lnTo>
+                    <a:pt x="1834226" y="2091444"/>
+                  </a:lnTo>
+                  <a:lnTo>
+                    <a:pt x="1763679" y="2080380"/>
+                  </a:lnTo>
+                  <a:lnTo>
+                    <a:pt x="1693132" y="2069211"/>
+                  </a:lnTo>
+                  <a:lnTo>
+                    <a:pt x="1622584" y="2057935"/>
+                  </a:lnTo>
+                  <a:lnTo>
+                    <a:pt x="1552037" y="2046551"/>
+                  </a:lnTo>
+                  <a:lnTo>
+                    <a:pt x="1481490" y="2035059"/>
+                  </a:lnTo>
+                  <a:lnTo>
+                    <a:pt x="1410943" y="2023457"/>
+                  </a:lnTo>
+                  <a:lnTo>
+                    <a:pt x="1340396" y="2011744"/>
+                  </a:lnTo>
+                  <a:lnTo>
+                    <a:pt x="1269849" y="1999919"/>
+                  </a:lnTo>
+                  <a:lnTo>
+                    <a:pt x="1199301" y="1987981"/>
+                  </a:lnTo>
+                  <a:lnTo>
+                    <a:pt x="1128754" y="1975929"/>
+                  </a:lnTo>
+                  <a:lnTo>
+                    <a:pt x="1058207" y="1963762"/>
+                  </a:lnTo>
+                  <a:lnTo>
+                    <a:pt x="987660" y="1951478"/>
+                  </a:lnTo>
+                  <a:lnTo>
+                    <a:pt x="917113" y="1939078"/>
+                  </a:lnTo>
+                  <a:lnTo>
+                    <a:pt x="846566" y="1926558"/>
+                  </a:lnTo>
+                  <a:lnTo>
+                    <a:pt x="776018" y="1913920"/>
+                  </a:lnTo>
+                  <a:lnTo>
+                    <a:pt x="705471" y="1901160"/>
+                  </a:lnTo>
+                  <a:lnTo>
+                    <a:pt x="634924" y="1888278"/>
+                  </a:lnTo>
+                  <a:lnTo>
+                    <a:pt x="564377" y="1875274"/>
+                  </a:lnTo>
+                  <a:lnTo>
+                    <a:pt x="493830" y="1862145"/>
+                  </a:lnTo>
+                  <a:lnTo>
+                    <a:pt x="423283" y="1848891"/>
+                  </a:lnTo>
+                  <a:lnTo>
+                    <a:pt x="352735" y="1835510"/>
+                  </a:lnTo>
+                  <a:lnTo>
+                    <a:pt x="282188" y="1822001"/>
+                  </a:lnTo>
+                  <a:lnTo>
+                    <a:pt x="211641" y="1808363"/>
+                  </a:lnTo>
+                  <a:lnTo>
+                    <a:pt x="141094" y="1794595"/>
+                  </a:lnTo>
+                  <a:lnTo>
+                    <a:pt x="70547" y="1780696"/>
+                  </a:lnTo>
+                  <a:lnTo>
+                    <a:pt x="0" y="1766663"/>
                   </a:lnTo>
                   <a:lnTo>
                     <a:pt x="0" y="0"/>
@@ -3477,153 +3477,153 @@
           </p:nvSpPr>
           <p:spPr>
             <a:xfrm>
-              <a:off x="5031339" y="2073503"/>
-              <a:ext cx="3231339" cy="2863632"/>
+              <a:off x="5066199" y="2209169"/>
+              <a:ext cx="3182823" cy="2671006"/>
             </a:xfrm>
             <a:custGeom>
               <a:avLst/>
               <a:pathLst>
-                <a:path w="3231339" h="2863632">
+                <a:path w="3182823" h="2671006">
                   <a:moveTo>
                     <a:pt x="0" y="0"/>
                   </a:moveTo>
                   <a:lnTo>
-                    <a:pt x="8326" y="41534"/>
-                  </a:lnTo>
-                  <a:lnTo>
-                    <a:pt x="79948" y="365225"/>
-                  </a:lnTo>
-                  <a:lnTo>
-                    <a:pt x="151571" y="658477"/>
-                  </a:lnTo>
-                  <a:lnTo>
-                    <a:pt x="223193" y="924153"/>
-                  </a:lnTo>
-                  <a:lnTo>
-                    <a:pt x="294816" y="1164846"/>
-                  </a:lnTo>
-                  <a:lnTo>
-                    <a:pt x="366438" y="1382905"/>
-                  </a:lnTo>
-                  <a:lnTo>
-                    <a:pt x="438061" y="1580459"/>
-                  </a:lnTo>
-                  <a:lnTo>
-                    <a:pt x="509683" y="1759436"/>
-                  </a:lnTo>
-                  <a:lnTo>
-                    <a:pt x="581306" y="1921583"/>
-                  </a:lnTo>
-                  <a:lnTo>
-                    <a:pt x="652928" y="2068482"/>
-                  </a:lnTo>
-                  <a:lnTo>
-                    <a:pt x="724551" y="2201567"/>
-                  </a:lnTo>
-                  <a:lnTo>
-                    <a:pt x="796173" y="2322138"/>
-                  </a:lnTo>
-                  <a:lnTo>
-                    <a:pt x="867796" y="2431370"/>
-                  </a:lnTo>
-                  <a:lnTo>
-                    <a:pt x="939418" y="2530331"/>
-                  </a:lnTo>
-                  <a:lnTo>
-                    <a:pt x="1011041" y="2619986"/>
-                  </a:lnTo>
-                  <a:lnTo>
-                    <a:pt x="1082664" y="2658921"/>
-                  </a:lnTo>
-                  <a:lnTo>
-                    <a:pt x="1154286" y="2666727"/>
-                  </a:lnTo>
-                  <a:lnTo>
-                    <a:pt x="1225909" y="2674459"/>
-                  </a:lnTo>
-                  <a:lnTo>
-                    <a:pt x="1297531" y="2682118"/>
-                  </a:lnTo>
-                  <a:lnTo>
-                    <a:pt x="1369154" y="2689705"/>
-                  </a:lnTo>
-                  <a:lnTo>
-                    <a:pt x="1440776" y="2697219"/>
-                  </a:lnTo>
-                  <a:lnTo>
-                    <a:pt x="1512399" y="2704663"/>
-                  </a:lnTo>
-                  <a:lnTo>
-                    <a:pt x="1584021" y="2712036"/>
-                  </a:lnTo>
-                  <a:lnTo>
-                    <a:pt x="1655644" y="2719339"/>
-                  </a:lnTo>
-                  <a:lnTo>
-                    <a:pt x="1727266" y="2726574"/>
-                  </a:lnTo>
-                  <a:lnTo>
-                    <a:pt x="1798889" y="2733739"/>
-                  </a:lnTo>
-                  <a:lnTo>
-                    <a:pt x="1870511" y="2740837"/>
-                  </a:lnTo>
-                  <a:lnTo>
-                    <a:pt x="1942134" y="2747868"/>
-                  </a:lnTo>
-                  <a:lnTo>
-                    <a:pt x="2013756" y="2754832"/>
-                  </a:lnTo>
-                  <a:lnTo>
-                    <a:pt x="2085379" y="2761731"/>
-                  </a:lnTo>
-                  <a:lnTo>
-                    <a:pt x="2157001" y="2768564"/>
-                  </a:lnTo>
-                  <a:lnTo>
-                    <a:pt x="2228624" y="2775332"/>
-                  </a:lnTo>
-                  <a:lnTo>
-                    <a:pt x="2300246" y="2782036"/>
-                  </a:lnTo>
-                  <a:lnTo>
-                    <a:pt x="2371869" y="2788677"/>
-                  </a:lnTo>
-                  <a:lnTo>
-                    <a:pt x="2443492" y="2795255"/>
-                  </a:lnTo>
-                  <a:lnTo>
-                    <a:pt x="2515114" y="2801771"/>
-                  </a:lnTo>
-                  <a:lnTo>
-                    <a:pt x="2586737" y="2808225"/>
-                  </a:lnTo>
-                  <a:lnTo>
-                    <a:pt x="2658359" y="2814618"/>
-                  </a:lnTo>
-                  <a:lnTo>
-                    <a:pt x="2729982" y="2820951"/>
-                  </a:lnTo>
-                  <a:lnTo>
-                    <a:pt x="2801604" y="2827223"/>
-                  </a:lnTo>
-                  <a:lnTo>
-                    <a:pt x="2873227" y="2833437"/>
-                  </a:lnTo>
-                  <a:lnTo>
-                    <a:pt x="2944849" y="2839591"/>
-                  </a:lnTo>
-                  <a:lnTo>
-                    <a:pt x="3016472" y="2845687"/>
-                  </a:lnTo>
-                  <a:lnTo>
-                    <a:pt x="3088094" y="2851726"/>
-                  </a:lnTo>
-                  <a:lnTo>
-                    <a:pt x="3159717" y="2857707"/>
-                  </a:lnTo>
-                  <a:lnTo>
-                    <a:pt x="3231339" y="2863632"/>
+                    <a:pt x="8201" y="38740"/>
+                  </a:lnTo>
+                  <a:lnTo>
+                    <a:pt x="78748" y="340658"/>
+                  </a:lnTo>
+                  <a:lnTo>
+                    <a:pt x="149295" y="614184"/>
+                  </a:lnTo>
+                  <a:lnTo>
+                    <a:pt x="219842" y="861989"/>
+                  </a:lnTo>
+                  <a:lnTo>
+                    <a:pt x="290389" y="1086491"/>
+                  </a:lnTo>
+                  <a:lnTo>
+                    <a:pt x="360936" y="1289882"/>
+                  </a:lnTo>
+                  <a:lnTo>
+                    <a:pt x="431484" y="1474148"/>
+                  </a:lnTo>
+                  <a:lnTo>
+                    <a:pt x="502031" y="1641085"/>
+                  </a:lnTo>
+                  <a:lnTo>
+                    <a:pt x="572578" y="1792325"/>
+                  </a:lnTo>
+                  <a:lnTo>
+                    <a:pt x="643125" y="1929343"/>
+                  </a:lnTo>
+                  <a:lnTo>
+                    <a:pt x="713672" y="2053476"/>
+                  </a:lnTo>
+                  <a:lnTo>
+                    <a:pt x="784220" y="2165936"/>
+                  </a:lnTo>
+                  <a:lnTo>
+                    <a:pt x="854767" y="2267821"/>
+                  </a:lnTo>
+                  <a:lnTo>
+                    <a:pt x="925314" y="2360125"/>
+                  </a:lnTo>
+                  <a:lnTo>
+                    <a:pt x="995861" y="2443749"/>
+                  </a:lnTo>
+                  <a:lnTo>
+                    <a:pt x="1066408" y="2480065"/>
+                  </a:lnTo>
+                  <a:lnTo>
+                    <a:pt x="1136955" y="2487346"/>
+                  </a:lnTo>
+                  <a:lnTo>
+                    <a:pt x="1207503" y="2494558"/>
+                  </a:lnTo>
+                  <a:lnTo>
+                    <a:pt x="1278050" y="2501702"/>
+                  </a:lnTo>
+                  <a:lnTo>
+                    <a:pt x="1348597" y="2508778"/>
+                  </a:lnTo>
+                  <a:lnTo>
+                    <a:pt x="1419144" y="2515787"/>
+                  </a:lnTo>
+                  <a:lnTo>
+                    <a:pt x="1489691" y="2522730"/>
+                  </a:lnTo>
+                  <a:lnTo>
+                    <a:pt x="1560238" y="2529607"/>
+                  </a:lnTo>
+                  <a:lnTo>
+                    <a:pt x="1630786" y="2536419"/>
+                  </a:lnTo>
+                  <a:lnTo>
+                    <a:pt x="1701333" y="2543167"/>
+                  </a:lnTo>
+                  <a:lnTo>
+                    <a:pt x="1771880" y="2549851"/>
+                  </a:lnTo>
+                  <a:lnTo>
+                    <a:pt x="1842427" y="2556471"/>
+                  </a:lnTo>
+                  <a:lnTo>
+                    <a:pt x="1912974" y="2563029"/>
+                  </a:lnTo>
+                  <a:lnTo>
+                    <a:pt x="1983521" y="2569525"/>
+                  </a:lnTo>
+                  <a:lnTo>
+                    <a:pt x="2054069" y="2575959"/>
+                  </a:lnTo>
+                  <a:lnTo>
+                    <a:pt x="2124616" y="2582333"/>
+                  </a:lnTo>
+                  <a:lnTo>
+                    <a:pt x="2195163" y="2588646"/>
+                  </a:lnTo>
+                  <a:lnTo>
+                    <a:pt x="2265710" y="2594899"/>
+                  </a:lnTo>
+                  <a:lnTo>
+                    <a:pt x="2336257" y="2601093"/>
+                  </a:lnTo>
+                  <a:lnTo>
+                    <a:pt x="2406804" y="2607229"/>
+                  </a:lnTo>
+                  <a:lnTo>
+                    <a:pt x="2477352" y="2613306"/>
+                  </a:lnTo>
+                  <a:lnTo>
+                    <a:pt x="2547899" y="2619326"/>
+                  </a:lnTo>
+                  <a:lnTo>
+                    <a:pt x="2618446" y="2625289"/>
+                  </a:lnTo>
+                  <a:lnTo>
+                    <a:pt x="2688993" y="2631196"/>
+                  </a:lnTo>
+                  <a:lnTo>
+                    <a:pt x="2759540" y="2637046"/>
+                  </a:lnTo>
+                  <a:lnTo>
+                    <a:pt x="2830088" y="2642842"/>
+                  </a:lnTo>
+                  <a:lnTo>
+                    <a:pt x="2900635" y="2648582"/>
+                  </a:lnTo>
+                  <a:lnTo>
+                    <a:pt x="2971182" y="2654268"/>
+                  </a:lnTo>
+                  <a:lnTo>
+                    <a:pt x="3041729" y="2659900"/>
+                  </a:lnTo>
+                  <a:lnTo>
+                    <a:pt x="3112276" y="2665479"/>
+                  </a:lnTo>
+                  <a:lnTo>
+                    <a:pt x="3182823" y="2671006"/>
                   </a:lnTo>
                 </a:path>
               </a:pathLst>
@@ -3643,309 +3643,309 @@
           </p:nvSpPr>
           <p:spPr>
             <a:xfrm>
-              <a:off x="1172049" y="3967573"/>
-              <a:ext cx="7090630" cy="1549233"/>
+              <a:off x="1264853" y="3975833"/>
+              <a:ext cx="6984170" cy="1445022"/>
             </a:xfrm>
             <a:custGeom>
               <a:avLst/>
               <a:pathLst>
-                <a:path w="7090630" h="1549233">
+                <a:path w="6984170" h="1445022">
                   <a:moveTo>
-                    <a:pt x="7090630" y="1549233"/>
+                    <a:pt x="6984170" y="1445022"/>
                   </a:moveTo>
                   <a:lnTo>
-                    <a:pt x="7019007" y="1545035"/>
-                  </a:lnTo>
-                  <a:lnTo>
-                    <a:pt x="6947385" y="1540402"/>
-                  </a:lnTo>
-                  <a:lnTo>
-                    <a:pt x="6875762" y="1535287"/>
-                  </a:lnTo>
-                  <a:lnTo>
-                    <a:pt x="6804139" y="1529642"/>
-                  </a:lnTo>
-                  <a:lnTo>
-                    <a:pt x="6732517" y="1523411"/>
-                  </a:lnTo>
-                  <a:lnTo>
-                    <a:pt x="6660894" y="1516533"/>
-                  </a:lnTo>
-                  <a:lnTo>
-                    <a:pt x="6589272" y="1508941"/>
-                  </a:lnTo>
-                  <a:lnTo>
-                    <a:pt x="6517649" y="1500561"/>
-                  </a:lnTo>
-                  <a:lnTo>
-                    <a:pt x="6446027" y="1491311"/>
-                  </a:lnTo>
-                  <a:lnTo>
-                    <a:pt x="6374404" y="1481101"/>
-                  </a:lnTo>
-                  <a:lnTo>
-                    <a:pt x="6302782" y="1469832"/>
-                  </a:lnTo>
-                  <a:lnTo>
-                    <a:pt x="6231159" y="1457392"/>
-                  </a:lnTo>
-                  <a:lnTo>
-                    <a:pt x="6159537" y="1443662"/>
-                  </a:lnTo>
-                  <a:lnTo>
-                    <a:pt x="6087914" y="1428506"/>
-                  </a:lnTo>
-                  <a:lnTo>
-                    <a:pt x="6016292" y="1411778"/>
-                  </a:lnTo>
-                  <a:lnTo>
-                    <a:pt x="5944669" y="1393312"/>
-                  </a:lnTo>
-                  <a:lnTo>
-                    <a:pt x="5873047" y="1372931"/>
-                  </a:lnTo>
-                  <a:lnTo>
-                    <a:pt x="5801424" y="1350433"/>
-                  </a:lnTo>
-                  <a:lnTo>
-                    <a:pt x="5729802" y="1325601"/>
-                  </a:lnTo>
-                  <a:lnTo>
-                    <a:pt x="5658179" y="1298191"/>
-                  </a:lnTo>
-                  <a:lnTo>
-                    <a:pt x="5586557" y="1267936"/>
-                  </a:lnTo>
-                  <a:lnTo>
-                    <a:pt x="5514934" y="1234541"/>
-                  </a:lnTo>
-                  <a:lnTo>
-                    <a:pt x="5443311" y="1197679"/>
-                  </a:lnTo>
-                  <a:lnTo>
-                    <a:pt x="5371689" y="1156991"/>
-                  </a:lnTo>
-                  <a:lnTo>
-                    <a:pt x="5300066" y="1112080"/>
-                  </a:lnTo>
-                  <a:lnTo>
-                    <a:pt x="5228444" y="1062508"/>
-                  </a:lnTo>
-                  <a:lnTo>
-                    <a:pt x="5156821" y="1007790"/>
-                  </a:lnTo>
-                  <a:lnTo>
-                    <a:pt x="5085199" y="947392"/>
-                  </a:lnTo>
-                  <a:lnTo>
-                    <a:pt x="5013576" y="880726"/>
-                  </a:lnTo>
-                  <a:lnTo>
-                    <a:pt x="4941954" y="807140"/>
-                  </a:lnTo>
-                  <a:lnTo>
-                    <a:pt x="4870331" y="756970"/>
-                  </a:lnTo>
-                  <a:lnTo>
-                    <a:pt x="4798709" y="749014"/>
-                  </a:lnTo>
-                  <a:lnTo>
-                    <a:pt x="4727086" y="740982"/>
-                  </a:lnTo>
-                  <a:lnTo>
-                    <a:pt x="4655464" y="732873"/>
-                  </a:lnTo>
-                  <a:lnTo>
-                    <a:pt x="4583841" y="724687"/>
-                  </a:lnTo>
-                  <a:lnTo>
-                    <a:pt x="4512219" y="716423"/>
-                  </a:lnTo>
-                  <a:lnTo>
-                    <a:pt x="4440596" y="708080"/>
-                  </a:lnTo>
-                  <a:lnTo>
-                    <a:pt x="4368974" y="699657"/>
-                  </a:lnTo>
-                  <a:lnTo>
-                    <a:pt x="4297351" y="691153"/>
-                  </a:lnTo>
-                  <a:lnTo>
-                    <a:pt x="4225729" y="682568"/>
-                  </a:lnTo>
-                  <a:lnTo>
-                    <a:pt x="4154106" y="673902"/>
-                  </a:lnTo>
-                  <a:lnTo>
-                    <a:pt x="4082483" y="665152"/>
-                  </a:lnTo>
-                  <a:lnTo>
-                    <a:pt x="4010861" y="656319"/>
-                  </a:lnTo>
-                  <a:lnTo>
-                    <a:pt x="3939238" y="647402"/>
-                  </a:lnTo>
-                  <a:lnTo>
-                    <a:pt x="3867616" y="638399"/>
-                  </a:lnTo>
-                  <a:lnTo>
-                    <a:pt x="3795993" y="629310"/>
-                  </a:lnTo>
-                  <a:lnTo>
-                    <a:pt x="3724371" y="620135"/>
-                  </a:lnTo>
-                  <a:lnTo>
-                    <a:pt x="3652748" y="610871"/>
-                  </a:lnTo>
-                  <a:lnTo>
-                    <a:pt x="3581126" y="601520"/>
-                  </a:lnTo>
-                  <a:lnTo>
-                    <a:pt x="3509503" y="592078"/>
-                  </a:lnTo>
-                  <a:lnTo>
-                    <a:pt x="3437881" y="582547"/>
-                  </a:lnTo>
-                  <a:lnTo>
-                    <a:pt x="3366258" y="572925"/>
-                  </a:lnTo>
-                  <a:lnTo>
-                    <a:pt x="3294636" y="563210"/>
-                  </a:lnTo>
-                  <a:lnTo>
-                    <a:pt x="3223013" y="553403"/>
-                  </a:lnTo>
-                  <a:lnTo>
-                    <a:pt x="3151391" y="543503"/>
-                  </a:lnTo>
-                  <a:lnTo>
-                    <a:pt x="3079768" y="533507"/>
-                  </a:lnTo>
-                  <a:lnTo>
-                    <a:pt x="3008146" y="523416"/>
-                  </a:lnTo>
-                  <a:lnTo>
-                    <a:pt x="2936523" y="513229"/>
-                  </a:lnTo>
-                  <a:lnTo>
-                    <a:pt x="2864901" y="502944"/>
-                  </a:lnTo>
-                  <a:lnTo>
-                    <a:pt x="2793278" y="492561"/>
-                  </a:lnTo>
-                  <a:lnTo>
-                    <a:pt x="2721655" y="482079"/>
-                  </a:lnTo>
-                  <a:lnTo>
-                    <a:pt x="2650033" y="471497"/>
-                  </a:lnTo>
-                  <a:lnTo>
-                    <a:pt x="2578410" y="460814"/>
-                  </a:lnTo>
-                  <a:lnTo>
-                    <a:pt x="2506788" y="450028"/>
-                  </a:lnTo>
-                  <a:lnTo>
-                    <a:pt x="2435165" y="439140"/>
-                  </a:lnTo>
-                  <a:lnTo>
-                    <a:pt x="2363543" y="428147"/>
-                  </a:lnTo>
-                  <a:lnTo>
-                    <a:pt x="2291920" y="417050"/>
-                  </a:lnTo>
-                  <a:lnTo>
-                    <a:pt x="2220298" y="405846"/>
-                  </a:lnTo>
-                  <a:lnTo>
-                    <a:pt x="2148675" y="394536"/>
-                  </a:lnTo>
-                  <a:lnTo>
-                    <a:pt x="2077053" y="383117"/>
-                  </a:lnTo>
-                  <a:lnTo>
-                    <a:pt x="2005430" y="371589"/>
-                  </a:lnTo>
-                  <a:lnTo>
-                    <a:pt x="1933808" y="359951"/>
-                  </a:lnTo>
-                  <a:lnTo>
-                    <a:pt x="1862185" y="348202"/>
-                  </a:lnTo>
-                  <a:lnTo>
-                    <a:pt x="1790563" y="336341"/>
-                  </a:lnTo>
-                  <a:lnTo>
-                    <a:pt x="1718940" y="324366"/>
-                  </a:lnTo>
-                  <a:lnTo>
-                    <a:pt x="1647318" y="312277"/>
-                  </a:lnTo>
-                  <a:lnTo>
-                    <a:pt x="1575695" y="300072"/>
-                  </a:lnTo>
-                  <a:lnTo>
-                    <a:pt x="1504073" y="287751"/>
-                  </a:lnTo>
-                  <a:lnTo>
-                    <a:pt x="1432450" y="275312"/>
-                  </a:lnTo>
-                  <a:lnTo>
-                    <a:pt x="1360827" y="262755"/>
-                  </a:lnTo>
-                  <a:lnTo>
-                    <a:pt x="1289205" y="250077"/>
-                  </a:lnTo>
-                  <a:lnTo>
-                    <a:pt x="1217582" y="237278"/>
-                  </a:lnTo>
-                  <a:lnTo>
-                    <a:pt x="1145960" y="224357"/>
-                  </a:lnTo>
-                  <a:lnTo>
-                    <a:pt x="1074337" y="211312"/>
-                  </a:lnTo>
-                  <a:lnTo>
-                    <a:pt x="1002715" y="198143"/>
-                  </a:lnTo>
-                  <a:lnTo>
-                    <a:pt x="931092" y="184848"/>
-                  </a:lnTo>
-                  <a:lnTo>
-                    <a:pt x="859470" y="171426"/>
-                  </a:lnTo>
-                  <a:lnTo>
-                    <a:pt x="787847" y="157876"/>
-                  </a:lnTo>
-                  <a:lnTo>
-                    <a:pt x="716225" y="144196"/>
-                  </a:lnTo>
-                  <a:lnTo>
-                    <a:pt x="644602" y="130385"/>
-                  </a:lnTo>
-                  <a:lnTo>
-                    <a:pt x="572980" y="116443"/>
-                  </a:lnTo>
-                  <a:lnTo>
-                    <a:pt x="501357" y="102367"/>
-                  </a:lnTo>
-                  <a:lnTo>
-                    <a:pt x="429735" y="88157"/>
-                  </a:lnTo>
-                  <a:lnTo>
-                    <a:pt x="358112" y="73811"/>
-                  </a:lnTo>
-                  <a:lnTo>
-                    <a:pt x="286490" y="59328"/>
-                  </a:lnTo>
-                  <a:lnTo>
-                    <a:pt x="214867" y="44707"/>
-                  </a:lnTo>
-                  <a:lnTo>
-                    <a:pt x="143245" y="29946"/>
-                  </a:lnTo>
-                  <a:lnTo>
-                    <a:pt x="71622" y="15044"/>
+                    <a:pt x="6913622" y="1441106"/>
+                  </a:lnTo>
+                  <a:lnTo>
+                    <a:pt x="6843075" y="1436785"/>
+                  </a:lnTo>
+                  <a:lnTo>
+                    <a:pt x="6772528" y="1432014"/>
+                  </a:lnTo>
+                  <a:lnTo>
+                    <a:pt x="6701981" y="1426749"/>
+                  </a:lnTo>
+                  <a:lnTo>
+                    <a:pt x="6631434" y="1420937"/>
+                  </a:lnTo>
+                  <a:lnTo>
+                    <a:pt x="6560887" y="1414521"/>
+                  </a:lnTo>
+                  <a:lnTo>
+                    <a:pt x="6490339" y="1407440"/>
+                  </a:lnTo>
+                  <a:lnTo>
+                    <a:pt x="6419792" y="1399624"/>
+                  </a:lnTo>
+                  <a:lnTo>
+                    <a:pt x="6349245" y="1390996"/>
+                  </a:lnTo>
+                  <a:lnTo>
+                    <a:pt x="6278698" y="1381473"/>
+                  </a:lnTo>
+                  <a:lnTo>
+                    <a:pt x="6208151" y="1370962"/>
+                  </a:lnTo>
+                  <a:lnTo>
+                    <a:pt x="6137604" y="1359359"/>
+                  </a:lnTo>
+                  <a:lnTo>
+                    <a:pt x="6067056" y="1346552"/>
+                  </a:lnTo>
+                  <a:lnTo>
+                    <a:pt x="5996509" y="1332416"/>
+                  </a:lnTo>
+                  <a:lnTo>
+                    <a:pt x="5925962" y="1316812"/>
+                  </a:lnTo>
+                  <a:lnTo>
+                    <a:pt x="5855415" y="1299589"/>
+                  </a:lnTo>
+                  <a:lnTo>
+                    <a:pt x="5784868" y="1280579"/>
+                  </a:lnTo>
+                  <a:lnTo>
+                    <a:pt x="5714320" y="1259595"/>
+                  </a:lnTo>
+                  <a:lnTo>
+                    <a:pt x="5643773" y="1236433"/>
+                  </a:lnTo>
+                  <a:lnTo>
+                    <a:pt x="5573226" y="1210866"/>
+                  </a:lnTo>
+                  <a:lnTo>
+                    <a:pt x="5502679" y="1182647"/>
+                  </a:lnTo>
+                  <a:lnTo>
+                    <a:pt x="5432132" y="1151498"/>
+                  </a:lnTo>
+                  <a:lnTo>
+                    <a:pt x="5361585" y="1117116"/>
+                  </a:lnTo>
+                  <a:lnTo>
+                    <a:pt x="5291037" y="1079165"/>
+                  </a:lnTo>
+                  <a:lnTo>
+                    <a:pt x="5220490" y="1037275"/>
+                  </a:lnTo>
+                  <a:lnTo>
+                    <a:pt x="5149943" y="991037"/>
+                  </a:lnTo>
+                  <a:lnTo>
+                    <a:pt x="5079396" y="940000"/>
+                  </a:lnTo>
+                  <a:lnTo>
+                    <a:pt x="5008849" y="883665"/>
+                  </a:lnTo>
+                  <a:lnTo>
+                    <a:pt x="4938302" y="821483"/>
+                  </a:lnTo>
+                  <a:lnTo>
+                    <a:pt x="4867754" y="752846"/>
+                  </a:lnTo>
+                  <a:lnTo>
+                    <a:pt x="4797207" y="706051"/>
+                  </a:lnTo>
+                  <a:lnTo>
+                    <a:pt x="4726660" y="698630"/>
+                  </a:lnTo>
+                  <a:lnTo>
+                    <a:pt x="4656113" y="691139"/>
+                  </a:lnTo>
+                  <a:lnTo>
+                    <a:pt x="4585566" y="683576"/>
+                  </a:lnTo>
+                  <a:lnTo>
+                    <a:pt x="4515019" y="675940"/>
+                  </a:lnTo>
+                  <a:lnTo>
+                    <a:pt x="4444471" y="668232"/>
+                  </a:lnTo>
+                  <a:lnTo>
+                    <a:pt x="4373924" y="660450"/>
+                  </a:lnTo>
+                  <a:lnTo>
+                    <a:pt x="4303377" y="652593"/>
+                  </a:lnTo>
+                  <a:lnTo>
+                    <a:pt x="4232830" y="644662"/>
+                  </a:lnTo>
+                  <a:lnTo>
+                    <a:pt x="4162283" y="636655"/>
+                  </a:lnTo>
+                  <a:lnTo>
+                    <a:pt x="4091736" y="628571"/>
+                  </a:lnTo>
+                  <a:lnTo>
+                    <a:pt x="4021188" y="620410"/>
+                  </a:lnTo>
+                  <a:lnTo>
+                    <a:pt x="3950641" y="612171"/>
+                  </a:lnTo>
+                  <a:lnTo>
+                    <a:pt x="3880094" y="603853"/>
+                  </a:lnTo>
+                  <a:lnTo>
+                    <a:pt x="3809547" y="595456"/>
+                  </a:lnTo>
+                  <a:lnTo>
+                    <a:pt x="3739000" y="586979"/>
+                  </a:lnTo>
+                  <a:lnTo>
+                    <a:pt x="3668452" y="578420"/>
+                  </a:lnTo>
+                  <a:lnTo>
+                    <a:pt x="3597905" y="569780"/>
+                  </a:lnTo>
+                  <a:lnTo>
+                    <a:pt x="3527358" y="561057"/>
+                  </a:lnTo>
+                  <a:lnTo>
+                    <a:pt x="3456811" y="552251"/>
+                  </a:lnTo>
+                  <a:lnTo>
+                    <a:pt x="3386264" y="543361"/>
+                  </a:lnTo>
+                  <a:lnTo>
+                    <a:pt x="3315717" y="534386"/>
+                  </a:lnTo>
+                  <a:lnTo>
+                    <a:pt x="3245169" y="525325"/>
+                  </a:lnTo>
+                  <a:lnTo>
+                    <a:pt x="3174622" y="516178"/>
+                  </a:lnTo>
+                  <a:lnTo>
+                    <a:pt x="3104075" y="506943"/>
+                  </a:lnTo>
+                  <a:lnTo>
+                    <a:pt x="3033528" y="497620"/>
+                  </a:lnTo>
+                  <a:lnTo>
+                    <a:pt x="2962981" y="488208"/>
+                  </a:lnTo>
+                  <a:lnTo>
+                    <a:pt x="2892434" y="478706"/>
+                  </a:lnTo>
+                  <a:lnTo>
+                    <a:pt x="2821886" y="469113"/>
+                  </a:lnTo>
+                  <a:lnTo>
+                    <a:pt x="2751339" y="459429"/>
+                  </a:lnTo>
+                  <a:lnTo>
+                    <a:pt x="2680792" y="449652"/>
+                  </a:lnTo>
+                  <a:lnTo>
+                    <a:pt x="2610245" y="439781"/>
+                  </a:lnTo>
+                  <a:lnTo>
+                    <a:pt x="2539698" y="429816"/>
+                  </a:lnTo>
+                  <a:lnTo>
+                    <a:pt x="2469151" y="419757"/>
+                  </a:lnTo>
+                  <a:lnTo>
+                    <a:pt x="2398603" y="409600"/>
+                  </a:lnTo>
+                  <a:lnTo>
+                    <a:pt x="2328056" y="399347"/>
+                  </a:lnTo>
+                  <a:lnTo>
+                    <a:pt x="2257509" y="388996"/>
+                  </a:lnTo>
+                  <a:lnTo>
+                    <a:pt x="2186962" y="378546"/>
+                  </a:lnTo>
+                  <a:lnTo>
+                    <a:pt x="2116415" y="367997"/>
+                  </a:lnTo>
+                  <a:lnTo>
+                    <a:pt x="2045868" y="357346"/>
+                  </a:lnTo>
+                  <a:lnTo>
+                    <a:pt x="1975320" y="346594"/>
+                  </a:lnTo>
+                  <a:lnTo>
+                    <a:pt x="1904773" y="335739"/>
+                  </a:lnTo>
+                  <a:lnTo>
+                    <a:pt x="1834226" y="324780"/>
+                  </a:lnTo>
+                  <a:lnTo>
+                    <a:pt x="1763679" y="313716"/>
+                  </a:lnTo>
+                  <a:lnTo>
+                    <a:pt x="1693132" y="302547"/>
+                  </a:lnTo>
+                  <a:lnTo>
+                    <a:pt x="1622584" y="291271"/>
+                  </a:lnTo>
+                  <a:lnTo>
+                    <a:pt x="1552037" y="279888"/>
+                  </a:lnTo>
+                  <a:lnTo>
+                    <a:pt x="1481490" y="268395"/>
+                  </a:lnTo>
+                  <a:lnTo>
+                    <a:pt x="1410943" y="256793"/>
+                  </a:lnTo>
+                  <a:lnTo>
+                    <a:pt x="1340396" y="245080"/>
+                  </a:lnTo>
+                  <a:lnTo>
+                    <a:pt x="1269849" y="233255"/>
+                  </a:lnTo>
+                  <a:lnTo>
+                    <a:pt x="1199301" y="221317"/>
+                  </a:lnTo>
+                  <a:lnTo>
+                    <a:pt x="1128754" y="209265"/>
+                  </a:lnTo>
+                  <a:lnTo>
+                    <a:pt x="1058207" y="197098"/>
+                  </a:lnTo>
+                  <a:lnTo>
+                    <a:pt x="987660" y="184815"/>
+                  </a:lnTo>
+                  <a:lnTo>
+                    <a:pt x="917113" y="172414"/>
+                  </a:lnTo>
+                  <a:lnTo>
+                    <a:pt x="846566" y="159895"/>
+                  </a:lnTo>
+                  <a:lnTo>
+                    <a:pt x="776018" y="147256"/>
+                  </a:lnTo>
+                  <a:lnTo>
+                    <a:pt x="705471" y="134496"/>
+                  </a:lnTo>
+                  <a:lnTo>
+                    <a:pt x="634924" y="121615"/>
+                  </a:lnTo>
+                  <a:lnTo>
+                    <a:pt x="564377" y="108610"/>
+                  </a:lnTo>
+                  <a:lnTo>
+                    <a:pt x="493830" y="95481"/>
+                  </a:lnTo>
+                  <a:lnTo>
+                    <a:pt x="423283" y="82227"/>
+                  </a:lnTo>
+                  <a:lnTo>
+                    <a:pt x="352735" y="68846"/>
+                  </a:lnTo>
+                  <a:lnTo>
+                    <a:pt x="282188" y="55337"/>
+                  </a:lnTo>
+                  <a:lnTo>
+                    <a:pt x="211641" y="41700"/>
+                  </a:lnTo>
+                  <a:lnTo>
+                    <a:pt x="141094" y="27932"/>
+                  </a:lnTo>
+                  <a:lnTo>
+                    <a:pt x="70547" y="14032"/>
                   </a:lnTo>
                   <a:lnTo>
                     <a:pt x="0" y="0"/>
@@ -3968,189 +3968,189 @@
           </p:nvSpPr>
           <p:spPr>
             <a:xfrm>
-              <a:off x="4173170" y="2073503"/>
-              <a:ext cx="4089509" cy="3325383"/>
+              <a:off x="4220915" y="2209169"/>
+              <a:ext cx="4028108" cy="3101697"/>
             </a:xfrm>
             <a:custGeom>
               <a:avLst/>
               <a:pathLst>
-                <a:path w="4089509" h="3325383">
+                <a:path w="4028108" h="3101697">
                   <a:moveTo>
                     <a:pt x="0" y="0"/>
                   </a:moveTo>
                   <a:lnTo>
-                    <a:pt x="7025" y="18904"/>
-                  </a:lnTo>
-                  <a:lnTo>
-                    <a:pt x="78647" y="201477"/>
-                  </a:lnTo>
-                  <a:lnTo>
-                    <a:pt x="150270" y="374429"/>
-                  </a:lnTo>
-                  <a:lnTo>
-                    <a:pt x="221892" y="538269"/>
-                  </a:lnTo>
-                  <a:lnTo>
-                    <a:pt x="293515" y="693475"/>
-                  </a:lnTo>
-                  <a:lnTo>
-                    <a:pt x="365137" y="840503"/>
-                  </a:lnTo>
-                  <a:lnTo>
-                    <a:pt x="436760" y="979784"/>
-                  </a:lnTo>
-                  <a:lnTo>
-                    <a:pt x="508382" y="1111725"/>
-                  </a:lnTo>
-                  <a:lnTo>
-                    <a:pt x="580005" y="1236714"/>
-                  </a:lnTo>
-                  <a:lnTo>
-                    <a:pt x="651627" y="1355117"/>
-                  </a:lnTo>
-                  <a:lnTo>
-                    <a:pt x="723250" y="1467281"/>
-                  </a:lnTo>
-                  <a:lnTo>
-                    <a:pt x="794872" y="1573535"/>
-                  </a:lnTo>
-                  <a:lnTo>
-                    <a:pt x="866495" y="1674190"/>
-                  </a:lnTo>
-                  <a:lnTo>
-                    <a:pt x="938118" y="1769541"/>
-                  </a:lnTo>
-                  <a:lnTo>
-                    <a:pt x="1009740" y="1859867"/>
-                  </a:lnTo>
-                  <a:lnTo>
-                    <a:pt x="1081363" y="1945434"/>
-                  </a:lnTo>
-                  <a:lnTo>
-                    <a:pt x="1152985" y="2026493"/>
-                  </a:lnTo>
-                  <a:lnTo>
-                    <a:pt x="1224608" y="2103280"/>
-                  </a:lnTo>
-                  <a:lnTo>
-                    <a:pt x="1296230" y="2176021"/>
-                  </a:lnTo>
-                  <a:lnTo>
-                    <a:pt x="1367853" y="2244929"/>
-                  </a:lnTo>
-                  <a:lnTo>
-                    <a:pt x="1439475" y="2310206"/>
-                  </a:lnTo>
-                  <a:lnTo>
-                    <a:pt x="1511098" y="2372043"/>
-                  </a:lnTo>
-                  <a:lnTo>
-                    <a:pt x="1582720" y="2430622"/>
-                  </a:lnTo>
-                  <a:lnTo>
-                    <a:pt x="1654343" y="2486115"/>
-                  </a:lnTo>
-                  <a:lnTo>
-                    <a:pt x="1725965" y="2538683"/>
-                  </a:lnTo>
-                  <a:lnTo>
-                    <a:pt x="1797588" y="2588481"/>
-                  </a:lnTo>
-                  <a:lnTo>
-                    <a:pt x="1869210" y="2635656"/>
-                  </a:lnTo>
-                  <a:lnTo>
-                    <a:pt x="1940833" y="2680344"/>
-                  </a:lnTo>
-                  <a:lnTo>
-                    <a:pt x="2012455" y="2722678"/>
-                  </a:lnTo>
-                  <a:lnTo>
-                    <a:pt x="2084078" y="2762781"/>
-                  </a:lnTo>
-                  <a:lnTo>
-                    <a:pt x="2155700" y="2800771"/>
-                  </a:lnTo>
-                  <a:lnTo>
-                    <a:pt x="2227323" y="2836759"/>
-                  </a:lnTo>
-                  <a:lnTo>
-                    <a:pt x="2298946" y="2870851"/>
-                  </a:lnTo>
-                  <a:lnTo>
-                    <a:pt x="2370568" y="2903146"/>
-                  </a:lnTo>
-                  <a:lnTo>
-                    <a:pt x="2442191" y="2933739"/>
-                  </a:lnTo>
-                  <a:lnTo>
-                    <a:pt x="2513813" y="2962721"/>
-                  </a:lnTo>
-                  <a:lnTo>
-                    <a:pt x="2585436" y="2990175"/>
-                  </a:lnTo>
-                  <a:lnTo>
-                    <a:pt x="2657058" y="3016183"/>
-                  </a:lnTo>
-                  <a:lnTo>
-                    <a:pt x="2728681" y="3040821"/>
-                  </a:lnTo>
-                  <a:lnTo>
-                    <a:pt x="2800303" y="3064160"/>
-                  </a:lnTo>
-                  <a:lnTo>
-                    <a:pt x="2871926" y="3086269"/>
-                  </a:lnTo>
-                  <a:lnTo>
-                    <a:pt x="2943548" y="3107213"/>
-                  </a:lnTo>
-                  <a:lnTo>
-                    <a:pt x="3015171" y="3127054"/>
-                  </a:lnTo>
-                  <a:lnTo>
-                    <a:pt x="3086793" y="3145849"/>
-                  </a:lnTo>
-                  <a:lnTo>
-                    <a:pt x="3158416" y="3163654"/>
-                  </a:lnTo>
-                  <a:lnTo>
-                    <a:pt x="3230038" y="3180521"/>
-                  </a:lnTo>
-                  <a:lnTo>
-                    <a:pt x="3301661" y="3196499"/>
-                  </a:lnTo>
-                  <a:lnTo>
-                    <a:pt x="3373283" y="3211634"/>
-                  </a:lnTo>
-                  <a:lnTo>
-                    <a:pt x="3444906" y="3225973"/>
-                  </a:lnTo>
-                  <a:lnTo>
-                    <a:pt x="3516528" y="3239556"/>
-                  </a:lnTo>
-                  <a:lnTo>
-                    <a:pt x="3588151" y="3252423"/>
-                  </a:lnTo>
-                  <a:lnTo>
-                    <a:pt x="3659774" y="3264612"/>
-                  </a:lnTo>
-                  <a:lnTo>
-                    <a:pt x="3731396" y="3276159"/>
-                  </a:lnTo>
-                  <a:lnTo>
-                    <a:pt x="3803019" y="3287097"/>
-                  </a:lnTo>
-                  <a:lnTo>
-                    <a:pt x="3874641" y="3297459"/>
-                  </a:lnTo>
-                  <a:lnTo>
-                    <a:pt x="3946264" y="3307275"/>
-                  </a:lnTo>
-                  <a:lnTo>
-                    <a:pt x="4017886" y="3316574"/>
-                  </a:lnTo>
-                  <a:lnTo>
-                    <a:pt x="4089509" y="3325383"/>
+                    <a:pt x="6919" y="17632"/>
+                  </a:lnTo>
+                  <a:lnTo>
+                    <a:pt x="77466" y="187924"/>
+                  </a:lnTo>
+                  <a:lnTo>
+                    <a:pt x="148014" y="349243"/>
+                  </a:lnTo>
+                  <a:lnTo>
+                    <a:pt x="218561" y="502061"/>
+                  </a:lnTo>
+                  <a:lnTo>
+                    <a:pt x="289108" y="646828"/>
+                  </a:lnTo>
+                  <a:lnTo>
+                    <a:pt x="359655" y="783965"/>
+                  </a:lnTo>
+                  <a:lnTo>
+                    <a:pt x="430202" y="913877"/>
+                  </a:lnTo>
+                  <a:lnTo>
+                    <a:pt x="500749" y="1036943"/>
+                  </a:lnTo>
+                  <a:lnTo>
+                    <a:pt x="571297" y="1153525"/>
+                  </a:lnTo>
+                  <a:lnTo>
+                    <a:pt x="641844" y="1263963"/>
+                  </a:lnTo>
+                  <a:lnTo>
+                    <a:pt x="712391" y="1368582"/>
+                  </a:lnTo>
+                  <a:lnTo>
+                    <a:pt x="782938" y="1467689"/>
+                  </a:lnTo>
+                  <a:lnTo>
+                    <a:pt x="853485" y="1561573"/>
+                  </a:lnTo>
+                  <a:lnTo>
+                    <a:pt x="924032" y="1650510"/>
+                  </a:lnTo>
+                  <a:lnTo>
+                    <a:pt x="994580" y="1734761"/>
+                  </a:lnTo>
+                  <a:lnTo>
+                    <a:pt x="1065127" y="1814572"/>
+                  </a:lnTo>
+                  <a:lnTo>
+                    <a:pt x="1135674" y="1890178"/>
+                  </a:lnTo>
+                  <a:lnTo>
+                    <a:pt x="1206221" y="1961800"/>
+                  </a:lnTo>
+                  <a:lnTo>
+                    <a:pt x="1276768" y="2029648"/>
+                  </a:lnTo>
+                  <a:lnTo>
+                    <a:pt x="1347315" y="2093921"/>
+                  </a:lnTo>
+                  <a:lnTo>
+                    <a:pt x="1417863" y="2154807"/>
+                  </a:lnTo>
+                  <a:lnTo>
+                    <a:pt x="1488410" y="2212485"/>
+                  </a:lnTo>
+                  <a:lnTo>
+                    <a:pt x="1558957" y="2267123"/>
+                  </a:lnTo>
+                  <a:lnTo>
+                    <a:pt x="1629504" y="2318883"/>
+                  </a:lnTo>
+                  <a:lnTo>
+                    <a:pt x="1700051" y="2367915"/>
+                  </a:lnTo>
+                  <a:lnTo>
+                    <a:pt x="1770599" y="2414364"/>
+                  </a:lnTo>
+                  <a:lnTo>
+                    <a:pt x="1841146" y="2458365"/>
+                  </a:lnTo>
+                  <a:lnTo>
+                    <a:pt x="1911693" y="2500047"/>
+                  </a:lnTo>
+                  <a:lnTo>
+                    <a:pt x="1982240" y="2539533"/>
+                  </a:lnTo>
+                  <a:lnTo>
+                    <a:pt x="2052787" y="2576939"/>
+                  </a:lnTo>
+                  <a:lnTo>
+                    <a:pt x="2123334" y="2612373"/>
+                  </a:lnTo>
+                  <a:lnTo>
+                    <a:pt x="2193882" y="2645940"/>
+                  </a:lnTo>
+                  <a:lnTo>
+                    <a:pt x="2264429" y="2677739"/>
+                  </a:lnTo>
+                  <a:lnTo>
+                    <a:pt x="2334976" y="2707862"/>
+                  </a:lnTo>
+                  <a:lnTo>
+                    <a:pt x="2405523" y="2736398"/>
+                  </a:lnTo>
+                  <a:lnTo>
+                    <a:pt x="2476070" y="2763430"/>
+                  </a:lnTo>
+                  <a:lnTo>
+                    <a:pt x="2546617" y="2789037"/>
+                  </a:lnTo>
+                  <a:lnTo>
+                    <a:pt x="2617165" y="2813296"/>
+                  </a:lnTo>
+                  <a:lnTo>
+                    <a:pt x="2687712" y="2836276"/>
+                  </a:lnTo>
+                  <a:lnTo>
+                    <a:pt x="2758259" y="2858045"/>
+                  </a:lnTo>
+                  <a:lnTo>
+                    <a:pt x="2828806" y="2878667"/>
+                  </a:lnTo>
+                  <a:lnTo>
+                    <a:pt x="2899353" y="2898202"/>
+                  </a:lnTo>
+                  <a:lnTo>
+                    <a:pt x="2969900" y="2916708"/>
+                  </a:lnTo>
+                  <a:lnTo>
+                    <a:pt x="3040448" y="2934239"/>
+                  </a:lnTo>
+                  <a:lnTo>
+                    <a:pt x="3110995" y="2950847"/>
+                  </a:lnTo>
+                  <a:lnTo>
+                    <a:pt x="3181542" y="2966579"/>
+                  </a:lnTo>
+                  <a:lnTo>
+                    <a:pt x="3252089" y="2981482"/>
+                  </a:lnTo>
+                  <a:lnTo>
+                    <a:pt x="3322636" y="2995600"/>
+                  </a:lnTo>
+                  <a:lnTo>
+                    <a:pt x="3393183" y="3008974"/>
+                  </a:lnTo>
+                  <a:lnTo>
+                    <a:pt x="3463731" y="3021643"/>
+                  </a:lnTo>
+                  <a:lnTo>
+                    <a:pt x="3534278" y="3033644"/>
+                  </a:lnTo>
+                  <a:lnTo>
+                    <a:pt x="3604825" y="3045014"/>
+                  </a:lnTo>
+                  <a:lnTo>
+                    <a:pt x="3675372" y="3055784"/>
+                  </a:lnTo>
+                  <a:lnTo>
+                    <a:pt x="3745919" y="3065986"/>
+                  </a:lnTo>
+                  <a:lnTo>
+                    <a:pt x="3816467" y="3075651"/>
+                  </a:lnTo>
+                  <a:lnTo>
+                    <a:pt x="3887014" y="3084807"/>
+                  </a:lnTo>
+                  <a:lnTo>
+                    <a:pt x="3957561" y="3093480"/>
+                  </a:lnTo>
+                  <a:lnTo>
+                    <a:pt x="4028108" y="3101697"/>
                   </a:lnTo>
                 </a:path>
               </a:pathLst>
@@ -4179,21 +4179,21 @@
           </p:nvSpPr>
           <p:spPr>
             <a:xfrm>
-              <a:off x="817517" y="4727786"/>
-              <a:ext cx="7799693" cy="0"/>
+              <a:off x="915645" y="4684908"/>
+              <a:ext cx="7682587" cy="0"/>
             </a:xfrm>
             <a:custGeom>
               <a:avLst/>
               <a:pathLst>
-                <a:path w="7799693" h="0">
+                <a:path w="7682587" h="0">
                   <a:moveTo>
                     <a:pt x="0" y="0"/>
                   </a:moveTo>
                   <a:lnTo>
-                    <a:pt x="7799693" y="0"/>
-                  </a:lnTo>
-                  <a:lnTo>
-                    <a:pt x="7799693" y="0"/>
+                    <a:pt x="7682587" y="0"/>
+                  </a:lnTo>
+                  <a:lnTo>
+                    <a:pt x="7682587" y="0"/>
                   </a:lnTo>
                 </a:path>
               </a:pathLst>
@@ -4222,15 +4222,15 @@
           </p:nvSpPr>
           <p:spPr>
             <a:xfrm>
-              <a:off x="6071765" y="2073503"/>
-              <a:ext cx="0" cy="3649639"/>
+              <a:off x="6091004" y="2209169"/>
+              <a:ext cx="0" cy="3404141"/>
             </a:xfrm>
             <a:custGeom>
               <a:avLst/>
               <a:pathLst>
-                <a:path w="0" h="3649639">
+                <a:path w="0" h="3404141">
                   <a:moveTo>
-                    <a:pt x="0" y="3649639"/>
+                    <a:pt x="0" y="3404141"/>
                   </a:moveTo>
                   <a:lnTo>
                     <a:pt x="0" y="0"/>
@@ -4265,15 +4265,15 @@
           </p:nvSpPr>
           <p:spPr>
             <a:xfrm>
-              <a:off x="5051213" y="2073503"/>
-              <a:ext cx="0" cy="3649639"/>
+              <a:off x="5085775" y="2209169"/>
+              <a:ext cx="0" cy="3404141"/>
             </a:xfrm>
             <a:custGeom>
               <a:avLst/>
               <a:pathLst>
-                <a:path w="0" h="3649639">
+                <a:path w="0" h="3404141">
                   <a:moveTo>
-                    <a:pt x="0" y="3649639"/>
+                    <a:pt x="0" y="3404141"/>
                   </a:moveTo>
                   <a:lnTo>
                     <a:pt x="0" y="0"/>
@@ -4308,15 +4308,15 @@
           </p:nvSpPr>
           <p:spPr>
             <a:xfrm>
-              <a:off x="6733531" y="2073503"/>
-              <a:ext cx="0" cy="3649639"/>
+              <a:off x="6742834" y="2209169"/>
+              <a:ext cx="0" cy="3404141"/>
             </a:xfrm>
             <a:custGeom>
               <a:avLst/>
               <a:pathLst>
-                <a:path w="0" h="3649639">
+                <a:path w="0" h="3404141">
                   <a:moveTo>
-                    <a:pt x="0" y="3649639"/>
+                    <a:pt x="0" y="3404141"/>
                   </a:moveTo>
                   <a:lnTo>
                     <a:pt x="0" y="0"/>
@@ -4351,8 +4351,8 @@
           </p:nvSpPr>
           <p:spPr>
             <a:xfrm>
-              <a:off x="692708" y="5517199"/>
-              <a:ext cx="62179" cy="80101"/>
+              <a:off x="756929" y="5407599"/>
+              <a:ext cx="79004" cy="101955"/>
             </a:xfrm>
             <a:prstGeom prst="rect">
               <a:avLst/>
@@ -4365,7 +4365,7 @@
             <a:p>
               <a:pPr algn="l" marL="0" marR="0" indent="0">
                 <a:lnSpc>
-                  <a:spcPts val="880"/>
+                  <a:spcPts val="1120"/>
                 </a:lnSpc>
                 <a:spcBef>
                   <a:spcPts val="0"/>
@@ -4375,7 +4375,7 @@
                 </a:spcAft>
               </a:pPr>
               <a:r>
-                <a:rPr sz="880">
+                <a:rPr sz="1120">
                   <a:solidFill>
                     <a:srgbClr val="4D4D4D">
                       <a:alpha val="100000"/>
@@ -4397,8 +4397,8 @@
           </p:nvSpPr>
           <p:spPr>
             <a:xfrm>
-              <a:off x="692708" y="4687735"/>
-              <a:ext cx="62179" cy="80101"/>
+              <a:off x="756929" y="4633931"/>
+              <a:ext cx="79004" cy="101955"/>
             </a:xfrm>
             <a:prstGeom prst="rect">
               <a:avLst/>
@@ -4411,7 +4411,7 @@
             <a:p>
               <a:pPr algn="l" marL="0" marR="0" indent="0">
                 <a:lnSpc>
-                  <a:spcPts val="880"/>
+                  <a:spcPts val="1120"/>
                 </a:lnSpc>
                 <a:spcBef>
                   <a:spcPts val="0"/>
@@ -4421,7 +4421,7 @@
                 </a:spcAft>
               </a:pPr>
               <a:r>
-                <a:rPr sz="880">
+                <a:rPr sz="1120">
                   <a:solidFill>
                     <a:srgbClr val="4D4D4D">
                       <a:alpha val="100000"/>
@@ -4443,8 +4443,8 @@
           </p:nvSpPr>
           <p:spPr>
             <a:xfrm>
-              <a:off x="692708" y="3858272"/>
-              <a:ext cx="62179" cy="80101"/>
+              <a:off x="756929" y="3860262"/>
+              <a:ext cx="79004" cy="101955"/>
             </a:xfrm>
             <a:prstGeom prst="rect">
               <a:avLst/>
@@ -4457,7 +4457,7 @@
             <a:p>
               <a:pPr algn="l" marL="0" marR="0" indent="0">
                 <a:lnSpc>
-                  <a:spcPts val="880"/>
+                  <a:spcPts val="1120"/>
                 </a:lnSpc>
                 <a:spcBef>
                   <a:spcPts val="0"/>
@@ -4467,7 +4467,7 @@
                 </a:spcAft>
               </a:pPr>
               <a:r>
-                <a:rPr sz="880">
+                <a:rPr sz="1120">
                   <a:solidFill>
                     <a:srgbClr val="4D4D4D">
                       <a:alpha val="100000"/>
@@ -4489,8 +4489,8 @@
           </p:nvSpPr>
           <p:spPr>
             <a:xfrm>
-              <a:off x="692708" y="3028808"/>
-              <a:ext cx="62179" cy="80101"/>
+              <a:off x="756929" y="3086593"/>
+              <a:ext cx="79004" cy="101955"/>
             </a:xfrm>
             <a:prstGeom prst="rect">
               <a:avLst/>
@@ -4503,7 +4503,7 @@
             <a:p>
               <a:pPr algn="l" marL="0" marR="0" indent="0">
                 <a:lnSpc>
-                  <a:spcPts val="880"/>
+                  <a:spcPts val="1120"/>
                 </a:lnSpc>
                 <a:spcBef>
                   <a:spcPts val="0"/>
@@ -4513,7 +4513,7 @@
                 </a:spcAft>
               </a:pPr>
               <a:r>
-                <a:rPr sz="880">
+                <a:rPr sz="1120">
                   <a:solidFill>
                     <a:srgbClr val="4D4D4D">
                       <a:alpha val="100000"/>
@@ -4535,8 +4535,8 @@
           </p:nvSpPr>
           <p:spPr>
             <a:xfrm>
-              <a:off x="692708" y="2199345"/>
-              <a:ext cx="62179" cy="80101"/>
+              <a:off x="756929" y="2312925"/>
+              <a:ext cx="79004" cy="101955"/>
             </a:xfrm>
             <a:prstGeom prst="rect">
               <a:avLst/>
@@ -4549,7 +4549,7 @@
             <a:p>
               <a:pPr algn="l" marL="0" marR="0" indent="0">
                 <a:lnSpc>
-                  <a:spcPts val="880"/>
+                  <a:spcPts val="1120"/>
                 </a:lnSpc>
                 <a:spcBef>
                   <a:spcPts val="0"/>
@@ -4559,7 +4559,7 @@
                 </a:spcAft>
               </a:pPr>
               <a:r>
-                <a:rPr sz="880">
+                <a:rPr sz="1120">
                   <a:solidFill>
                     <a:srgbClr val="4D4D4D">
                       <a:alpha val="100000"/>
@@ -4581,8 +4581,8 @@
           </p:nvSpPr>
           <p:spPr>
             <a:xfrm>
-              <a:off x="2331636" y="5785772"/>
-              <a:ext cx="161574" cy="80101"/>
+              <a:off x="2383963" y="5693022"/>
+              <a:ext cx="205282" cy="101955"/>
             </a:xfrm>
             <a:prstGeom prst="rect">
               <a:avLst/>
@@ -4595,7 +4595,7 @@
             <a:p>
               <a:pPr algn="l" marL="0" marR="0" indent="0">
                 <a:lnSpc>
-                  <a:spcPts val="880"/>
+                  <a:spcPts val="1120"/>
                 </a:lnSpc>
                 <a:spcBef>
                   <a:spcPts val="0"/>
@@ -4605,7 +4605,7 @@
                 </a:spcAft>
               </a:pPr>
               <a:r>
-                <a:rPr sz="880">
+                <a:rPr sz="1120">
                   <a:solidFill>
                     <a:srgbClr val="4D4D4D">
                       <a:alpha val="100000"/>
@@ -4627,8 +4627,8 @@
           </p:nvSpPr>
           <p:spPr>
             <a:xfrm>
-              <a:off x="4181509" y="5785772"/>
-              <a:ext cx="161574" cy="80101"/>
+              <a:off x="4206062" y="5693022"/>
+              <a:ext cx="205282" cy="101955"/>
             </a:xfrm>
             <a:prstGeom prst="rect">
               <a:avLst/>
@@ -4641,7 +4641,7 @@
             <a:p>
               <a:pPr algn="l" marL="0" marR="0" indent="0">
                 <a:lnSpc>
-                  <a:spcPts val="880"/>
+                  <a:spcPts val="1120"/>
                 </a:lnSpc>
                 <a:spcBef>
                   <a:spcPts val="0"/>
@@ -4651,7 +4651,7 @@
                 </a:spcAft>
               </a:pPr>
               <a:r>
-                <a:rPr sz="880">
+                <a:rPr sz="1120">
                   <a:solidFill>
                     <a:srgbClr val="4D4D4D">
                       <a:alpha val="100000"/>
@@ -4673,8 +4673,8 @@
           </p:nvSpPr>
           <p:spPr>
             <a:xfrm>
-              <a:off x="6081080" y="5785772"/>
-              <a:ext cx="62179" cy="80101"/>
+              <a:off x="6091300" y="5693022"/>
+              <a:ext cx="79004" cy="101955"/>
             </a:xfrm>
             <a:prstGeom prst="rect">
               <a:avLst/>
@@ -4687,7 +4687,7 @@
             <a:p>
               <a:pPr algn="l" marL="0" marR="0" indent="0">
                 <a:lnSpc>
-                  <a:spcPts val="880"/>
+                  <a:spcPts val="1120"/>
                 </a:lnSpc>
                 <a:spcBef>
                   <a:spcPts val="0"/>
@@ -4697,7 +4697,7 @@
                 </a:spcAft>
               </a:pPr>
               <a:r>
-                <a:rPr sz="880">
+                <a:rPr sz="1120">
                   <a:solidFill>
                     <a:srgbClr val="4D4D4D">
                       <a:alpha val="100000"/>
@@ -4719,8 +4719,8 @@
           </p:nvSpPr>
           <p:spPr>
             <a:xfrm>
-              <a:off x="7899863" y="5785772"/>
-              <a:ext cx="124358" cy="80101"/>
+              <a:off x="7873896" y="5693022"/>
+              <a:ext cx="158008" cy="101955"/>
             </a:xfrm>
             <a:prstGeom prst="rect">
               <a:avLst/>
@@ -4733,7 +4733,7 @@
             <a:p>
               <a:pPr algn="l" marL="0" marR="0" indent="0">
                 <a:lnSpc>
-                  <a:spcPts val="880"/>
+                  <a:spcPts val="1120"/>
                 </a:lnSpc>
                 <a:spcBef>
                   <a:spcPts val="0"/>
@@ -4743,7 +4743,7 @@
                 </a:spcAft>
               </a:pPr>
               <a:r>
-                <a:rPr sz="880">
+                <a:rPr sz="1120">
                   <a:solidFill>
                     <a:srgbClr val="4D4D4D">
                       <a:alpha val="100000"/>
@@ -4765,8 +4765,8 @@
           </p:nvSpPr>
           <p:spPr>
             <a:xfrm>
-              <a:off x="3832408" y="5925448"/>
-              <a:ext cx="1769912" cy="100218"/>
+              <a:off x="3630809" y="5870717"/>
+              <a:ext cx="2252258" cy="127558"/>
             </a:xfrm>
             <a:prstGeom prst="rect">
               <a:avLst/>
@@ -4779,7 +4779,7 @@
             <a:p>
               <a:pPr algn="l" marL="0" marR="0" indent="0">
                 <a:lnSpc>
-                  <a:spcPts val="1100"/>
+                  <a:spcPts val="1400"/>
                 </a:lnSpc>
                 <a:spcBef>
                   <a:spcPts val="0"/>
@@ -4789,7 +4789,7 @@
                 </a:spcAft>
               </a:pPr>
               <a:r>
-                <a:rPr sz="1100">
+                <a:rPr sz="1400">
                   <a:solidFill>
                     <a:srgbClr val="000000">
                       <a:alpha val="100000"/>
@@ -4811,8 +4811,8 @@
           </p:nvSpPr>
           <p:spPr>
             <a:xfrm rot="-5400000">
-              <a:off x="68446" y="3848213"/>
-              <a:ext cx="1016904" cy="100218"/>
+              <a:off x="-37527" y="3847460"/>
+              <a:ext cx="1294150" cy="127558"/>
             </a:xfrm>
             <a:prstGeom prst="rect">
               <a:avLst/>
@@ -4825,7 +4825,7 @@
             <a:p>
               <a:pPr algn="l" marL="0" marR="0" indent="0">
                 <a:lnSpc>
-                  <a:spcPts val="1100"/>
+                  <a:spcPts val="1400"/>
                 </a:lnSpc>
                 <a:spcBef>
                   <a:spcPts val="0"/>
@@ -4835,7 +4835,7 @@
                 </a:spcAft>
               </a:pPr>
               <a:r>
-                <a:rPr sz="1100">
+                <a:rPr sz="1400">
                   <a:solidFill>
                     <a:srgbClr val="000000">
                       <a:alpha val="100000"/>
@@ -4857,8 +4857,8 @@
           </p:nvSpPr>
           <p:spPr>
             <a:xfrm>
-              <a:off x="817517" y="1896563"/>
-              <a:ext cx="5413065" cy="82021"/>
+              <a:off x="915645" y="1977589"/>
+              <a:ext cx="7220102" cy="109362"/>
             </a:xfrm>
             <a:prstGeom prst="rect">
               <a:avLst/>
@@ -4871,7 +4871,7 @@
             <a:p>
               <a:pPr algn="l" marL="0" marR="0" indent="0">
                 <a:lnSpc>
-                  <a:spcPts val="900"/>
+                  <a:spcPts val="1200"/>
                 </a:lnSpc>
                 <a:spcBef>
                   <a:spcPts val="0"/>
@@ -4881,7 +4881,7 @@
                 </a:spcAft>
               </a:pPr>
               <a:r>
-                <a:rPr sz="900">
+                <a:rPr sz="1200">
                   <a:solidFill>
                     <a:srgbClr val="404040">
                       <a:alpha val="100000"/>
@@ -4903,8 +4903,8 @@
           </p:nvSpPr>
           <p:spPr>
             <a:xfrm>
-              <a:off x="817517" y="1669789"/>
-              <a:ext cx="3054278" cy="120152"/>
+              <a:off x="915645" y="1688767"/>
+              <a:ext cx="3888211" cy="153070"/>
             </a:xfrm>
             <a:prstGeom prst="rect">
               <a:avLst/>
@@ -4917,7 +4917,7 @@
             <a:p>
               <a:pPr algn="l" marL="0" marR="0" indent="0">
                 <a:lnSpc>
-                  <a:spcPts val="1320"/>
+                  <a:spcPts val="1680"/>
                 </a:lnSpc>
                 <a:spcBef>
                   <a:spcPts val="0"/>
@@ -4927,7 +4927,7 @@
                 </a:spcAft>
               </a:pPr>
               <a:r>
-                <a:rPr sz="1320">
+                <a:rPr sz="1680">
                   <a:solidFill>
                     <a:srgbClr val="000000">
                       <a:alpha val="100000"/>
